--- a/カードデザイン/20260313_デザイン案-返礼品_re広報課_fix伊藤.pptx
+++ b/カードデザイン/20260313_デザイン案-返礼品_re広報課_fix伊藤.pptx
@@ -5,13 +5,20 @@
     <p:sldMasterId id="2147483672" r:id="rId1"/>
   </p:sldMasterIdLst>
   <p:notesMasterIdLst>
-    <p:notesMasterId r:id="rId6"/>
+    <p:notesMasterId r:id="rId13"/>
   </p:notesMasterIdLst>
   <p:sldIdLst>
     <p:sldId id="281" r:id="rId2"/>
     <p:sldId id="282" r:id="rId3"/>
     <p:sldId id="283" r:id="rId4"/>
-    <p:sldId id="284" r:id="rId5"/>
+    <p:sldId id="291" r:id="rId5"/>
+    <p:sldId id="284" r:id="rId6"/>
+    <p:sldId id="290" r:id="rId7"/>
+    <p:sldId id="285" r:id="rId8"/>
+    <p:sldId id="287" r:id="rId9"/>
+    <p:sldId id="289" r:id="rId10"/>
+    <p:sldId id="288" r:id="rId11"/>
+    <p:sldId id="286" r:id="rId12"/>
   </p:sldIdLst>
   <p:sldSz cx="3095625" cy="1944688"/>
   <p:notesSz cx="6807200" cy="9939338"/>
@@ -211,7 +218,7 @@
           <a:p>
             <a:fld id="{DFB49DE1-FB4B-4CFB-9A42-CC282F575BDD}" type="datetimeFigureOut">
               <a:rPr kumimoji="1" lang="ja-JP" altLang="en-US" smtClean="0"/>
-              <a:t>2026/3/13</a:t>
+              <a:t>2026/3/17</a:t>
             </a:fld>
             <a:endParaRPr kumimoji="1" lang="ja-JP" altLang="en-US"/>
           </a:p>
@@ -641,7 +648,7 @@
           <a:p>
             <a:fld id="{EDC943AC-2B44-49B1-8BF7-A9628131A8B9}" type="datetimeFigureOut">
               <a:rPr kumimoji="1" lang="ja-JP" altLang="en-US" smtClean="0"/>
-              <a:t>2026/3/13</a:t>
+              <a:t>2026/3/17</a:t>
             </a:fld>
             <a:endParaRPr kumimoji="1" lang="ja-JP" altLang="en-US"/>
           </a:p>
@@ -843,7 +850,7 @@
           <a:p>
             <a:fld id="{EDC943AC-2B44-49B1-8BF7-A9628131A8B9}" type="datetimeFigureOut">
               <a:rPr kumimoji="1" lang="ja-JP" altLang="en-US" smtClean="0"/>
-              <a:t>2026/3/13</a:t>
+              <a:t>2026/3/17</a:t>
             </a:fld>
             <a:endParaRPr kumimoji="1" lang="ja-JP" altLang="en-US"/>
           </a:p>
@@ -1055,7 +1062,7 @@
           <a:p>
             <a:fld id="{EDC943AC-2B44-49B1-8BF7-A9628131A8B9}" type="datetimeFigureOut">
               <a:rPr kumimoji="1" lang="ja-JP" altLang="en-US" smtClean="0"/>
-              <a:t>2026/3/13</a:t>
+              <a:t>2026/3/17</a:t>
             </a:fld>
             <a:endParaRPr kumimoji="1" lang="ja-JP" altLang="en-US"/>
           </a:p>
@@ -1257,7 +1264,7 @@
           <a:p>
             <a:fld id="{EDC943AC-2B44-49B1-8BF7-A9628131A8B9}" type="datetimeFigureOut">
               <a:rPr kumimoji="1" lang="ja-JP" altLang="en-US" smtClean="0"/>
-              <a:t>2026/3/13</a:t>
+              <a:t>2026/3/17</a:t>
             </a:fld>
             <a:endParaRPr kumimoji="1" lang="ja-JP" altLang="en-US"/>
           </a:p>
@@ -1503,7 +1510,7 @@
           <a:p>
             <a:fld id="{EDC943AC-2B44-49B1-8BF7-A9628131A8B9}" type="datetimeFigureOut">
               <a:rPr kumimoji="1" lang="ja-JP" altLang="en-US" smtClean="0"/>
-              <a:t>2026/3/13</a:t>
+              <a:t>2026/3/17</a:t>
             </a:fld>
             <a:endParaRPr kumimoji="1" lang="ja-JP" altLang="en-US"/>
           </a:p>
@@ -1799,7 +1806,7 @@
           <a:p>
             <a:fld id="{EDC943AC-2B44-49B1-8BF7-A9628131A8B9}" type="datetimeFigureOut">
               <a:rPr kumimoji="1" lang="ja-JP" altLang="en-US" smtClean="0"/>
-              <a:t>2026/3/13</a:t>
+              <a:t>2026/3/17</a:t>
             </a:fld>
             <a:endParaRPr kumimoji="1" lang="ja-JP" altLang="en-US"/>
           </a:p>
@@ -2230,7 +2237,7 @@
           <a:p>
             <a:fld id="{EDC943AC-2B44-49B1-8BF7-A9628131A8B9}" type="datetimeFigureOut">
               <a:rPr kumimoji="1" lang="ja-JP" altLang="en-US" smtClean="0"/>
-              <a:t>2026/3/13</a:t>
+              <a:t>2026/3/17</a:t>
             </a:fld>
             <a:endParaRPr kumimoji="1" lang="ja-JP" altLang="en-US"/>
           </a:p>
@@ -2348,7 +2355,7 @@
           <a:p>
             <a:fld id="{EDC943AC-2B44-49B1-8BF7-A9628131A8B9}" type="datetimeFigureOut">
               <a:rPr kumimoji="1" lang="ja-JP" altLang="en-US" smtClean="0"/>
-              <a:t>2026/3/13</a:t>
+              <a:t>2026/3/17</a:t>
             </a:fld>
             <a:endParaRPr kumimoji="1" lang="ja-JP" altLang="en-US"/>
           </a:p>
@@ -2443,7 +2450,7 @@
           <a:p>
             <a:fld id="{EDC943AC-2B44-49B1-8BF7-A9628131A8B9}" type="datetimeFigureOut">
               <a:rPr kumimoji="1" lang="ja-JP" altLang="en-US" smtClean="0"/>
-              <a:t>2026/3/13</a:t>
+              <a:t>2026/3/17</a:t>
             </a:fld>
             <a:endParaRPr kumimoji="1" lang="ja-JP" altLang="en-US"/>
           </a:p>
@@ -2752,7 +2759,7 @@
           <a:p>
             <a:fld id="{EDC943AC-2B44-49B1-8BF7-A9628131A8B9}" type="datetimeFigureOut">
               <a:rPr kumimoji="1" lang="ja-JP" altLang="en-US" smtClean="0"/>
-              <a:t>2026/3/13</a:t>
+              <a:t>2026/3/17</a:t>
             </a:fld>
             <a:endParaRPr kumimoji="1" lang="ja-JP" altLang="en-US"/>
           </a:p>
@@ -3009,7 +3016,7 @@
           <a:p>
             <a:fld id="{EDC943AC-2B44-49B1-8BF7-A9628131A8B9}" type="datetimeFigureOut">
               <a:rPr kumimoji="1" lang="ja-JP" altLang="en-US" smtClean="0"/>
-              <a:t>2026/3/13</a:t>
+              <a:t>2026/3/17</a:t>
             </a:fld>
             <a:endParaRPr kumimoji="1" lang="ja-JP" altLang="en-US"/>
           </a:p>
@@ -3254,7 +3261,7 @@
           <a:p>
             <a:fld id="{EDC943AC-2B44-49B1-8BF7-A9628131A8B9}" type="datetimeFigureOut">
               <a:rPr kumimoji="1" lang="ja-JP" altLang="en-US" smtClean="0"/>
-              <a:t>2026/3/13</a:t>
+              <a:t>2026/3/17</a:t>
             </a:fld>
             <a:endParaRPr kumimoji="1" lang="ja-JP" altLang="en-US"/>
           </a:p>
@@ -4293,6 +4300,1528 @@
     <p:extLst>
       <p:ext uri="{BB962C8B-B14F-4D97-AF65-F5344CB8AC3E}">
         <p14:creationId xmlns:p14="http://schemas.microsoft.com/office/powerpoint/2010/main" val="1838074004"/>
+      </p:ext>
+    </p:extLst>
+  </p:cSld>
+  <p:clrMapOvr>
+    <a:masterClrMapping/>
+  </p:clrMapOvr>
+</p:sld>
+</file>
+
+<file path=ppt/slides/slide10.xml><?xml version="1.0" encoding="utf-8"?>
+<p:sld xmlns:a="http://schemas.openxmlformats.org/drawingml/2006/main" xmlns:r="http://schemas.openxmlformats.org/officeDocument/2006/relationships" xmlns:p="http://schemas.openxmlformats.org/presentationml/2006/main">
+  <p:cSld>
+    <p:spTree>
+      <p:nvGrpSpPr>
+        <p:cNvPr id="1" name="">
+          <a:extLst>
+            <a:ext uri="{FF2B5EF4-FFF2-40B4-BE49-F238E27FC236}">
+              <a16:creationId xmlns:a16="http://schemas.microsoft.com/office/drawing/2014/main" id="{E69A653B-04E0-E2E2-25A0-D91C109664F0}"/>
+            </a:ext>
+          </a:extLst>
+        </p:cNvPr>
+        <p:cNvGrpSpPr/>
+        <p:nvPr/>
+      </p:nvGrpSpPr>
+      <p:grpSpPr>
+        <a:xfrm>
+          <a:off x="0" y="0"/>
+          <a:ext cx="0" cy="0"/>
+          <a:chOff x="0" y="0"/>
+          <a:chExt cx="0" cy="0"/>
+        </a:xfrm>
+      </p:grpSpPr>
+      <p:grpSp>
+        <p:nvGrpSpPr>
+          <p:cNvPr id="8" name="グループ化 7">
+            <a:extLst>
+              <a:ext uri="{FF2B5EF4-FFF2-40B4-BE49-F238E27FC236}">
+                <a16:creationId xmlns:a16="http://schemas.microsoft.com/office/drawing/2014/main" id="{75937EED-8216-2D35-E244-F79703AAD8D4}"/>
+              </a:ext>
+            </a:extLst>
+          </p:cNvPr>
+          <p:cNvGrpSpPr/>
+          <p:nvPr/>
+        </p:nvGrpSpPr>
+        <p:grpSpPr>
+          <a:xfrm>
+            <a:off x="-2" y="-1"/>
+            <a:ext cx="3095626" cy="1944689"/>
+            <a:chOff x="-2" y="-1"/>
+            <a:chExt cx="3095626" cy="1944689"/>
+          </a:xfrm>
+        </p:grpSpPr>
+        <p:sp>
+          <p:nvSpPr>
+            <p:cNvPr id="2" name="四角形: 角を丸くする 1">
+              <a:extLst>
+                <a:ext uri="{FF2B5EF4-FFF2-40B4-BE49-F238E27FC236}">
+                  <a16:creationId xmlns:a16="http://schemas.microsoft.com/office/drawing/2014/main" id="{29295FC5-B88E-A30E-96FF-E07E8E88C2EC}"/>
+                </a:ext>
+              </a:extLst>
+            </p:cNvPr>
+            <p:cNvSpPr/>
+            <p:nvPr/>
+          </p:nvSpPr>
+          <p:spPr>
+            <a:xfrm>
+              <a:off x="-2" y="-1"/>
+              <a:ext cx="3095625" cy="1944687"/>
+            </a:xfrm>
+            <a:prstGeom prst="roundRect">
+              <a:avLst>
+                <a:gd name="adj" fmla="val 0"/>
+              </a:avLst>
+            </a:prstGeom>
+            <a:solidFill>
+              <a:schemeClr val="bg1"/>
+            </a:solidFill>
+            <a:ln>
+              <a:noFill/>
+            </a:ln>
+          </p:spPr>
+          <p:style>
+            <a:lnRef idx="2">
+              <a:schemeClr val="accent1">
+                <a:shade val="15000"/>
+              </a:schemeClr>
+            </a:lnRef>
+            <a:fillRef idx="1">
+              <a:schemeClr val="accent1"/>
+            </a:fillRef>
+            <a:effectRef idx="0">
+              <a:schemeClr val="accent1"/>
+            </a:effectRef>
+            <a:fontRef idx="minor">
+              <a:schemeClr val="lt1"/>
+            </a:fontRef>
+          </p:style>
+          <p:txBody>
+            <a:bodyPr lIns="0" tIns="0" rIns="0" bIns="0" rtlCol="0" anchor="ctr"/>
+            <a:lstStyle/>
+            <a:p>
+              <a:pPr algn="ctr"/>
+              <a:endParaRPr kumimoji="1" lang="ja-JP" altLang="en-US" sz="600" dirty="0">
+                <a:solidFill>
+                  <a:schemeClr val="tx1"/>
+                </a:solidFill>
+                <a:latin typeface="UD デジタル 教科書体 NP-R" panose="020B0400000000000000" pitchFamily="18" charset="-128"/>
+                <a:ea typeface="UD デジタル 教科書体 NP-R" panose="020B0400000000000000" pitchFamily="18" charset="-128"/>
+              </a:endParaRPr>
+            </a:p>
+          </p:txBody>
+        </p:sp>
+        <p:sp>
+          <p:nvSpPr>
+            <p:cNvPr id="5" name="四角形: 角を丸くする 4">
+              <a:extLst>
+                <a:ext uri="{FF2B5EF4-FFF2-40B4-BE49-F238E27FC236}">
+                  <a16:creationId xmlns:a16="http://schemas.microsoft.com/office/drawing/2014/main" id="{781F82F9-04CA-AAAF-7FEC-D7A406151DBF}"/>
+                </a:ext>
+              </a:extLst>
+            </p:cNvPr>
+            <p:cNvSpPr/>
+            <p:nvPr/>
+          </p:nvSpPr>
+          <p:spPr>
+            <a:xfrm>
+              <a:off x="-1" y="5074"/>
+              <a:ext cx="3095625" cy="1939614"/>
+            </a:xfrm>
+            <a:prstGeom prst="roundRect">
+              <a:avLst>
+                <a:gd name="adj" fmla="val 13559"/>
+              </a:avLst>
+            </a:prstGeom>
+            <a:noFill/>
+            <a:ln w="6350">
+              <a:noFill/>
+            </a:ln>
+            <a:effectLst/>
+          </p:spPr>
+          <p:style>
+            <a:lnRef idx="2">
+              <a:schemeClr val="accent1">
+                <a:shade val="15000"/>
+              </a:schemeClr>
+            </a:lnRef>
+            <a:fillRef idx="1">
+              <a:schemeClr val="accent1"/>
+            </a:fillRef>
+            <a:effectRef idx="0">
+              <a:schemeClr val="accent1"/>
+            </a:effectRef>
+            <a:fontRef idx="minor">
+              <a:schemeClr val="lt1"/>
+            </a:fontRef>
+          </p:style>
+          <p:txBody>
+            <a:bodyPr wrap="square" lIns="72000" tIns="36000" rIns="72000" bIns="0" rtlCol="0" anchor="b">
+              <a:noAutofit/>
+            </a:bodyPr>
+            <a:lstStyle/>
+            <a:p>
+              <a:pPr algn="ctr"/>
+              <a:endParaRPr kumimoji="1" lang="ja-JP" altLang="en-US" sz="600" dirty="0">
+                <a:solidFill>
+                  <a:schemeClr val="tx1"/>
+                </a:solidFill>
+                <a:latin typeface="UD デジタル 教科書体 NP-R" panose="02020400000000000000" pitchFamily="18" charset="-128"/>
+                <a:ea typeface="UD デジタル 教科書体 NP-R" panose="02020400000000000000" pitchFamily="18" charset="-128"/>
+              </a:endParaRPr>
+            </a:p>
+          </p:txBody>
+        </p:sp>
+        <p:grpSp>
+          <p:nvGrpSpPr>
+            <p:cNvPr id="3" name="グループ化 2">
+              <a:extLst>
+                <a:ext uri="{FF2B5EF4-FFF2-40B4-BE49-F238E27FC236}">
+                  <a16:creationId xmlns:a16="http://schemas.microsoft.com/office/drawing/2014/main" id="{0D7B60A6-089C-23DB-282C-7C6F57DD7190}"/>
+                </a:ext>
+              </a:extLst>
+            </p:cNvPr>
+            <p:cNvGrpSpPr/>
+            <p:nvPr/>
+          </p:nvGrpSpPr>
+          <p:grpSpPr>
+            <a:xfrm>
+              <a:off x="26424" y="35311"/>
+              <a:ext cx="1781026" cy="1777008"/>
+              <a:chOff x="4761" y="0"/>
+              <a:chExt cx="1944000" cy="1944687"/>
+            </a:xfrm>
+          </p:grpSpPr>
+          <p:sp>
+            <p:nvSpPr>
+              <p:cNvPr id="7" name="四角形: 角を丸くする 6">
+                <a:extLst>
+                  <a:ext uri="{FF2B5EF4-FFF2-40B4-BE49-F238E27FC236}">
+                    <a16:creationId xmlns:a16="http://schemas.microsoft.com/office/drawing/2014/main" id="{5AB4B0D6-F7D7-3C35-8FD8-7158D01CDD1F}"/>
+                  </a:ext>
+                </a:extLst>
+              </p:cNvPr>
+              <p:cNvSpPr/>
+              <p:nvPr/>
+            </p:nvSpPr>
+            <p:spPr>
+              <a:xfrm>
+                <a:off x="4761" y="0"/>
+                <a:ext cx="1944000" cy="1944687"/>
+              </a:xfrm>
+              <a:prstGeom prst="roundRect">
+                <a:avLst>
+                  <a:gd name="adj" fmla="val 8828"/>
+                </a:avLst>
+              </a:prstGeom>
+              <a:blipFill>
+                <a:blip r:embed="rId2"/>
+                <a:stretch>
+                  <a:fillRect/>
+                </a:stretch>
+              </a:blipFill>
+              <a:ln w="171450">
+                <a:noFill/>
+              </a:ln>
+              <a:effectLst>
+                <a:glow>
+                  <a:schemeClr val="bg1"/>
+                </a:glow>
+                <a:outerShdw dist="12700" sx="1000" sy="1000" algn="ctr" rotWithShape="0">
+                  <a:srgbClr val="000000"/>
+                </a:outerShdw>
+                <a:softEdge rad="127000"/>
+              </a:effectLst>
+            </p:spPr>
+            <p:style>
+              <a:lnRef idx="2">
+                <a:schemeClr val="accent1">
+                  <a:shade val="15000"/>
+                </a:schemeClr>
+              </a:lnRef>
+              <a:fillRef idx="1">
+                <a:schemeClr val="accent1"/>
+              </a:fillRef>
+              <a:effectRef idx="0">
+                <a:schemeClr val="accent1"/>
+              </a:effectRef>
+              <a:fontRef idx="minor">
+                <a:schemeClr val="lt1"/>
+              </a:fontRef>
+            </p:style>
+            <p:txBody>
+              <a:bodyPr rtlCol="0" anchor="ctr"/>
+              <a:lstStyle/>
+              <a:p>
+                <a:pPr algn="ctr"/>
+                <a:endParaRPr lang="ja-JP" altLang="en-US"/>
+              </a:p>
+            </p:txBody>
+          </p:sp>
+          <p:grpSp>
+            <p:nvGrpSpPr>
+              <p:cNvPr id="22" name="グループ化 21">
+                <a:extLst>
+                  <a:ext uri="{FF2B5EF4-FFF2-40B4-BE49-F238E27FC236}">
+                    <a16:creationId xmlns:a16="http://schemas.microsoft.com/office/drawing/2014/main" id="{55C2F41B-6201-0327-290A-E2352348E99D}"/>
+                  </a:ext>
+                </a:extLst>
+              </p:cNvPr>
+              <p:cNvGrpSpPr/>
+              <p:nvPr/>
+            </p:nvGrpSpPr>
+            <p:grpSpPr>
+              <a:xfrm>
+                <a:off x="311866" y="138682"/>
+                <a:ext cx="1329789" cy="1662236"/>
+                <a:chOff x="324896" y="199586"/>
+                <a:chExt cx="1294896" cy="1618620"/>
+              </a:xfrm>
+            </p:grpSpPr>
+            <p:sp>
+              <p:nvSpPr>
+                <p:cNvPr id="14" name="四角形: 角を丸くする 13">
+                  <a:extLst>
+                    <a:ext uri="{FF2B5EF4-FFF2-40B4-BE49-F238E27FC236}">
+                      <a16:creationId xmlns:a16="http://schemas.microsoft.com/office/drawing/2014/main" id="{6937C94E-8C3A-1B86-1AC9-EF0C823F80F7}"/>
+                    </a:ext>
+                  </a:extLst>
+                </p:cNvPr>
+                <p:cNvSpPr/>
+                <p:nvPr/>
+              </p:nvSpPr>
+              <p:spPr>
+                <a:xfrm>
+                  <a:off x="324896" y="199586"/>
+                  <a:ext cx="1294896" cy="1618620"/>
+                </a:xfrm>
+                <a:prstGeom prst="roundRect">
+                  <a:avLst>
+                    <a:gd name="adj" fmla="val 17073"/>
+                  </a:avLst>
+                </a:prstGeom>
+                <a:blipFill>
+                  <a:blip r:embed="rId3"/>
+                  <a:stretch>
+                    <a:fillRect/>
+                  </a:stretch>
+                </a:blipFill>
+                <a:ln>
+                  <a:noFill/>
+                </a:ln>
+              </p:spPr>
+              <p:style>
+                <a:lnRef idx="2">
+                  <a:schemeClr val="accent1">
+                    <a:shade val="15000"/>
+                  </a:schemeClr>
+                </a:lnRef>
+                <a:fillRef idx="1">
+                  <a:schemeClr val="accent1"/>
+                </a:fillRef>
+                <a:effectRef idx="0">
+                  <a:schemeClr val="accent1"/>
+                </a:effectRef>
+                <a:fontRef idx="minor">
+                  <a:schemeClr val="lt1"/>
+                </a:fontRef>
+              </p:style>
+              <p:txBody>
+                <a:bodyPr rtlCol="0" anchor="ctr"/>
+                <a:lstStyle/>
+                <a:p>
+                  <a:pPr algn="ctr"/>
+                  <a:endParaRPr kumimoji="1" lang="ja-JP" altLang="en-US"/>
+                </a:p>
+              </p:txBody>
+            </p:sp>
+            <p:pic>
+              <p:nvPicPr>
+                <p:cNvPr id="21" name="図 20" descr="ロゴ が含まれている画像&#10;&#10;AI 生成コンテンツは誤りを含む可能性があります。">
+                  <a:extLst>
+                    <a:ext uri="{FF2B5EF4-FFF2-40B4-BE49-F238E27FC236}">
+                      <a16:creationId xmlns:a16="http://schemas.microsoft.com/office/drawing/2014/main" id="{ED048F53-DB9A-AA12-85FD-5623AD2FBF2F}"/>
+                    </a:ext>
+                  </a:extLst>
+                </p:cNvPr>
+                <p:cNvPicPr>
+                  <a:picLocks noChangeAspect="1"/>
+                </p:cNvPicPr>
+                <p:nvPr/>
+              </p:nvPicPr>
+              <p:blipFill>
+                <a:blip r:embed="rId4">
+                  <a:extLst>
+                    <a:ext uri="{28A0092B-C50C-407E-A947-70E740481C1C}">
+                      <a14:useLocalDpi xmlns:a14="http://schemas.microsoft.com/office/drawing/2010/main" val="0"/>
+                    </a:ext>
+                  </a:extLst>
+                </a:blip>
+                <a:srcRect l="2225" t="9650" r="4370" b="12728"/>
+                <a:stretch>
+                  <a:fillRect/>
+                </a:stretch>
+              </p:blipFill>
+              <p:spPr>
+                <a:xfrm>
+                  <a:off x="471089" y="268171"/>
+                  <a:ext cx="1002507" cy="282809"/>
+                </a:xfrm>
+                <a:prstGeom prst="rect">
+                  <a:avLst/>
+                </a:prstGeom>
+              </p:spPr>
+            </p:pic>
+          </p:grpSp>
+        </p:grpSp>
+        <p:sp>
+          <p:nvSpPr>
+            <p:cNvPr id="31" name="四角形: 角を丸くする 30">
+              <a:extLst>
+                <a:ext uri="{FF2B5EF4-FFF2-40B4-BE49-F238E27FC236}">
+                  <a16:creationId xmlns:a16="http://schemas.microsoft.com/office/drawing/2014/main" id="{FFD932E7-5FA1-E6CC-02DE-65AFCC94697E}"/>
+                </a:ext>
+              </a:extLst>
+            </p:cNvPr>
+            <p:cNvSpPr/>
+            <p:nvPr/>
+          </p:nvSpPr>
+          <p:spPr>
+            <a:xfrm>
+              <a:off x="1844455" y="255162"/>
+              <a:ext cx="1153343" cy="214457"/>
+            </a:xfrm>
+            <a:prstGeom prst="roundRect">
+              <a:avLst>
+                <a:gd name="adj" fmla="val 6665"/>
+              </a:avLst>
+            </a:prstGeom>
+            <a:noFill/>
+            <a:ln>
+              <a:noFill/>
+            </a:ln>
+          </p:spPr>
+          <p:style>
+            <a:lnRef idx="2">
+              <a:schemeClr val="accent1">
+                <a:shade val="15000"/>
+              </a:schemeClr>
+            </a:lnRef>
+            <a:fillRef idx="1">
+              <a:schemeClr val="accent1"/>
+            </a:fillRef>
+            <a:effectRef idx="0">
+              <a:schemeClr val="accent1"/>
+            </a:effectRef>
+            <a:fontRef idx="minor">
+              <a:schemeClr val="lt1"/>
+            </a:fontRef>
+          </p:style>
+          <p:txBody>
+            <a:bodyPr lIns="0" tIns="0" rIns="0" bIns="0" rtlCol="0" anchor="ctr"/>
+            <a:lstStyle/>
+            <a:p>
+              <a:pPr algn="ctr"/>
+              <a:r>
+                <a:rPr kumimoji="1" lang="zh-TW" altLang="en-US" dirty="0">
+                  <a:solidFill>
+                    <a:schemeClr val="tx1"/>
+                  </a:solidFill>
+                  <a:latin typeface="UD デジタル 教科書体 NP-R" panose="02020400000000000000" pitchFamily="18" charset="-128"/>
+                  <a:ea typeface="UD デジタル 教科書体 NP-R" panose="02020400000000000000" pitchFamily="18" charset="-128"/>
+                </a:rPr>
+                <a:t>「学長煎餅」</a:t>
+              </a:r>
+              <a:endParaRPr kumimoji="1" lang="ja-JP" altLang="en-US" sz="800" dirty="0">
+                <a:solidFill>
+                  <a:schemeClr val="tx1"/>
+                </a:solidFill>
+                <a:latin typeface="UD デジタル 教科書体 NP-R" panose="02020400000000000000" pitchFamily="18" charset="-128"/>
+                <a:ea typeface="UD デジタル 教科書体 NP-R" panose="02020400000000000000" pitchFamily="18" charset="-128"/>
+              </a:endParaRPr>
+            </a:p>
+          </p:txBody>
+        </p:sp>
+        <p:sp>
+          <p:nvSpPr>
+            <p:cNvPr id="4" name="四角形: 角を丸くする 3">
+              <a:extLst>
+                <a:ext uri="{FF2B5EF4-FFF2-40B4-BE49-F238E27FC236}">
+                  <a16:creationId xmlns:a16="http://schemas.microsoft.com/office/drawing/2014/main" id="{81E24E20-B759-14A1-6BCC-26F5C435E652}"/>
+                </a:ext>
+              </a:extLst>
+            </p:cNvPr>
+            <p:cNvSpPr/>
+            <p:nvPr/>
+          </p:nvSpPr>
+          <p:spPr>
+            <a:xfrm>
+              <a:off x="215106" y="1793322"/>
+              <a:ext cx="2654348" cy="120703"/>
+            </a:xfrm>
+            <a:prstGeom prst="roundRect">
+              <a:avLst>
+                <a:gd name="adj" fmla="val 6665"/>
+              </a:avLst>
+            </a:prstGeom>
+            <a:noFill/>
+            <a:ln>
+              <a:noFill/>
+            </a:ln>
+          </p:spPr>
+          <p:style>
+            <a:lnRef idx="2">
+              <a:schemeClr val="accent1">
+                <a:shade val="15000"/>
+              </a:schemeClr>
+            </a:lnRef>
+            <a:fillRef idx="1">
+              <a:schemeClr val="accent1"/>
+            </a:fillRef>
+            <a:effectRef idx="0">
+              <a:schemeClr val="accent1"/>
+            </a:effectRef>
+            <a:fontRef idx="minor">
+              <a:schemeClr val="lt1"/>
+            </a:fontRef>
+          </p:style>
+          <p:txBody>
+            <a:bodyPr lIns="0" tIns="0" rIns="0" bIns="0" rtlCol="0" anchor="ctr"/>
+            <a:lstStyle/>
+            <a:p>
+              <a:r>
+                <a:rPr kumimoji="1" lang="ja-JP" altLang="en-US" sz="600" dirty="0">
+                  <a:solidFill>
+                    <a:schemeClr val="tx1"/>
+                  </a:solidFill>
+                  <a:latin typeface="UD デジタル 教科書体 NP-R" panose="020B0400000000000000" pitchFamily="18" charset="-128"/>
+                  <a:ea typeface="UD デジタル 教科書体 NP-R" panose="020B0400000000000000" pitchFamily="18" charset="-128"/>
+                </a:rPr>
+                <a:t>とけない、われない、かさばらない！　カードで送る新習慣＠名刺代わりに</a:t>
+              </a:r>
+            </a:p>
+          </p:txBody>
+        </p:sp>
+        <p:sp>
+          <p:nvSpPr>
+            <p:cNvPr id="10" name="四角形: 角を丸くする 9">
+              <a:extLst>
+                <a:ext uri="{FF2B5EF4-FFF2-40B4-BE49-F238E27FC236}">
+                  <a16:creationId xmlns:a16="http://schemas.microsoft.com/office/drawing/2014/main" id="{E32BD934-0570-9CA3-F870-78B4B3E713CB}"/>
+                </a:ext>
+              </a:extLst>
+            </p:cNvPr>
+            <p:cNvSpPr/>
+            <p:nvPr/>
+          </p:nvSpPr>
+          <p:spPr>
+            <a:xfrm>
+              <a:off x="1927110" y="71103"/>
+              <a:ext cx="988031" cy="181522"/>
+            </a:xfrm>
+            <a:prstGeom prst="roundRect">
+              <a:avLst>
+                <a:gd name="adj" fmla="val 6665"/>
+              </a:avLst>
+            </a:prstGeom>
+            <a:noFill/>
+            <a:ln>
+              <a:noFill/>
+            </a:ln>
+          </p:spPr>
+          <p:style>
+            <a:lnRef idx="2">
+              <a:schemeClr val="accent1">
+                <a:shade val="15000"/>
+              </a:schemeClr>
+            </a:lnRef>
+            <a:fillRef idx="1">
+              <a:schemeClr val="accent1"/>
+            </a:fillRef>
+            <a:effectRef idx="0">
+              <a:schemeClr val="accent1"/>
+            </a:effectRef>
+            <a:fontRef idx="minor">
+              <a:schemeClr val="lt1"/>
+            </a:fontRef>
+          </p:style>
+          <p:txBody>
+            <a:bodyPr lIns="0" tIns="0" rIns="0" bIns="0" rtlCol="0" anchor="ctr"/>
+            <a:lstStyle/>
+            <a:p>
+              <a:pPr algn="ctr"/>
+              <a:r>
+                <a:rPr kumimoji="1" lang="ja-JP" altLang="en-US" sz="800" dirty="0">
+                  <a:solidFill>
+                    <a:schemeClr val="tx1"/>
+                  </a:solidFill>
+                  <a:latin typeface="UD デジタル 教科書体 NP-R" panose="02020400000000000000" pitchFamily="18" charset="-128"/>
+                  <a:ea typeface="UD デジタル 教科書体 NP-R" panose="02020400000000000000" pitchFamily="18" charset="-128"/>
+                </a:rPr>
+                <a:t>感謝</a:t>
+              </a:r>
+              <a:endParaRPr kumimoji="1" lang="en-US" altLang="ja-JP" sz="800" dirty="0">
+                <a:solidFill>
+                  <a:schemeClr val="tx1"/>
+                </a:solidFill>
+                <a:latin typeface="UD デジタル 教科書体 NP-R" panose="02020400000000000000" pitchFamily="18" charset="-128"/>
+                <a:ea typeface="UD デジタル 教科書体 NP-R" panose="02020400000000000000" pitchFamily="18" charset="-128"/>
+              </a:endParaRPr>
+            </a:p>
+          </p:txBody>
+        </p:sp>
+      </p:grpSp>
+      <p:grpSp>
+        <p:nvGrpSpPr>
+          <p:cNvPr id="12" name="グループ化 11">
+            <a:extLst>
+              <a:ext uri="{FF2B5EF4-FFF2-40B4-BE49-F238E27FC236}">
+                <a16:creationId xmlns:a16="http://schemas.microsoft.com/office/drawing/2014/main" id="{7F807BEB-5CDE-CD97-F08C-9157BBFA48B9}"/>
+              </a:ext>
+            </a:extLst>
+          </p:cNvPr>
+          <p:cNvGrpSpPr/>
+          <p:nvPr/>
+        </p:nvGrpSpPr>
+        <p:grpSpPr>
+          <a:xfrm>
+            <a:off x="1807449" y="499856"/>
+            <a:ext cx="1240551" cy="1240551"/>
+            <a:chOff x="1007265" y="2577396"/>
+            <a:chExt cx="962823" cy="928507"/>
+          </a:xfrm>
+        </p:grpSpPr>
+        <p:sp>
+          <p:nvSpPr>
+            <p:cNvPr id="13" name="四角形: 角を丸くする 12">
+              <a:extLst>
+                <a:ext uri="{FF2B5EF4-FFF2-40B4-BE49-F238E27FC236}">
+                  <a16:creationId xmlns:a16="http://schemas.microsoft.com/office/drawing/2014/main" id="{2D1E4182-C881-D271-4D40-1D0A68A9F26F}"/>
+                </a:ext>
+              </a:extLst>
+            </p:cNvPr>
+            <p:cNvSpPr/>
+            <p:nvPr/>
+          </p:nvSpPr>
+          <p:spPr>
+            <a:xfrm>
+              <a:off x="1007265" y="2577396"/>
+              <a:ext cx="962823" cy="928507"/>
+            </a:xfrm>
+            <a:prstGeom prst="roundRect">
+              <a:avLst>
+                <a:gd name="adj" fmla="val 6665"/>
+              </a:avLst>
+            </a:prstGeom>
+            <a:solidFill>
+              <a:schemeClr val="bg1"/>
+            </a:solidFill>
+            <a:ln>
+              <a:noFill/>
+            </a:ln>
+          </p:spPr>
+          <p:style>
+            <a:lnRef idx="2">
+              <a:schemeClr val="accent1">
+                <a:shade val="15000"/>
+              </a:schemeClr>
+            </a:lnRef>
+            <a:fillRef idx="1">
+              <a:schemeClr val="accent1"/>
+            </a:fillRef>
+            <a:effectRef idx="0">
+              <a:schemeClr val="accent1"/>
+            </a:effectRef>
+            <a:fontRef idx="minor">
+              <a:schemeClr val="lt1"/>
+            </a:fontRef>
+          </p:style>
+          <p:txBody>
+            <a:bodyPr rtlCol="0" anchor="ctr"/>
+            <a:lstStyle/>
+            <a:p>
+              <a:pPr algn="ctr"/>
+              <a:endParaRPr kumimoji="1" lang="ja-JP" altLang="en-US"/>
+            </a:p>
+          </p:txBody>
+        </p:sp>
+        <p:pic>
+          <p:nvPicPr>
+            <p:cNvPr id="15" name="図 14" descr="QR コード&#10;&#10;AI 生成コンテンツは誤りを含む可能性があります。">
+              <a:extLst>
+                <a:ext uri="{FF2B5EF4-FFF2-40B4-BE49-F238E27FC236}">
+                  <a16:creationId xmlns:a16="http://schemas.microsoft.com/office/drawing/2014/main" id="{C8A9D3CB-55FD-1575-E734-AE49B77834B8}"/>
+                </a:ext>
+              </a:extLst>
+            </p:cNvPr>
+            <p:cNvPicPr>
+              <a:picLocks noChangeAspect="1"/>
+            </p:cNvPicPr>
+            <p:nvPr/>
+          </p:nvPicPr>
+          <p:blipFill>
+            <a:blip r:embed="rId5"/>
+            <a:stretch>
+              <a:fillRect/>
+            </a:stretch>
+          </p:blipFill>
+          <p:spPr>
+            <a:xfrm>
+              <a:off x="1042659" y="2598008"/>
+              <a:ext cx="883492" cy="878787"/>
+            </a:xfrm>
+            <a:prstGeom prst="rect">
+              <a:avLst/>
+            </a:prstGeom>
+          </p:spPr>
+        </p:pic>
+      </p:grpSp>
+    </p:spTree>
+    <p:extLst>
+      <p:ext uri="{BB962C8B-B14F-4D97-AF65-F5344CB8AC3E}">
+        <p14:creationId xmlns:p14="http://schemas.microsoft.com/office/powerpoint/2010/main" val="3296453461"/>
+      </p:ext>
+    </p:extLst>
+  </p:cSld>
+  <p:clrMapOvr>
+    <a:masterClrMapping/>
+  </p:clrMapOvr>
+</p:sld>
+</file>
+
+<file path=ppt/slides/slide11.xml><?xml version="1.0" encoding="utf-8"?>
+<p:sld xmlns:a="http://schemas.openxmlformats.org/drawingml/2006/main" xmlns:r="http://schemas.openxmlformats.org/officeDocument/2006/relationships" xmlns:p="http://schemas.openxmlformats.org/presentationml/2006/main">
+  <p:cSld>
+    <p:spTree>
+      <p:nvGrpSpPr>
+        <p:cNvPr id="1" name="">
+          <a:extLst>
+            <a:ext uri="{FF2B5EF4-FFF2-40B4-BE49-F238E27FC236}">
+              <a16:creationId xmlns:a16="http://schemas.microsoft.com/office/drawing/2014/main" id="{E87ABE07-96BB-46B5-5329-85642C17A51D}"/>
+            </a:ext>
+          </a:extLst>
+        </p:cNvPr>
+        <p:cNvGrpSpPr/>
+        <p:nvPr/>
+      </p:nvGrpSpPr>
+      <p:grpSpPr>
+        <a:xfrm>
+          <a:off x="0" y="0"/>
+          <a:ext cx="0" cy="0"/>
+          <a:chOff x="0" y="0"/>
+          <a:chExt cx="0" cy="0"/>
+        </a:xfrm>
+      </p:grpSpPr>
+      <p:grpSp>
+        <p:nvGrpSpPr>
+          <p:cNvPr id="4" name="グループ化 3">
+            <a:extLst>
+              <a:ext uri="{FF2B5EF4-FFF2-40B4-BE49-F238E27FC236}">
+                <a16:creationId xmlns:a16="http://schemas.microsoft.com/office/drawing/2014/main" id="{B8EE4906-EE19-3ADC-67C3-D083481F9DBE}"/>
+              </a:ext>
+            </a:extLst>
+          </p:cNvPr>
+          <p:cNvGrpSpPr/>
+          <p:nvPr/>
+        </p:nvGrpSpPr>
+        <p:grpSpPr>
+          <a:xfrm>
+            <a:off x="-1" y="-5087"/>
+            <a:ext cx="3095625" cy="1949775"/>
+            <a:chOff x="-1" y="-5087"/>
+            <a:chExt cx="3095625" cy="1949775"/>
+          </a:xfrm>
+        </p:grpSpPr>
+        <p:sp>
+          <p:nvSpPr>
+            <p:cNvPr id="6" name="四角形: 角を丸くする 5">
+              <a:extLst>
+                <a:ext uri="{FF2B5EF4-FFF2-40B4-BE49-F238E27FC236}">
+                  <a16:creationId xmlns:a16="http://schemas.microsoft.com/office/drawing/2014/main" id="{4824347D-FA63-4DAD-69E1-52A6A7450AA4}"/>
+                </a:ext>
+              </a:extLst>
+            </p:cNvPr>
+            <p:cNvSpPr/>
+            <p:nvPr/>
+          </p:nvSpPr>
+          <p:spPr>
+            <a:xfrm>
+              <a:off x="-1" y="-5087"/>
+              <a:ext cx="3095625" cy="1949774"/>
+            </a:xfrm>
+            <a:prstGeom prst="roundRect">
+              <a:avLst>
+                <a:gd name="adj" fmla="val 0"/>
+              </a:avLst>
+            </a:prstGeom>
+            <a:solidFill>
+              <a:schemeClr val="bg1"/>
+            </a:solidFill>
+            <a:ln>
+              <a:noFill/>
+            </a:ln>
+          </p:spPr>
+          <p:style>
+            <a:lnRef idx="2">
+              <a:schemeClr val="accent1">
+                <a:shade val="15000"/>
+              </a:schemeClr>
+            </a:lnRef>
+            <a:fillRef idx="1">
+              <a:schemeClr val="accent1"/>
+            </a:fillRef>
+            <a:effectRef idx="0">
+              <a:schemeClr val="accent1"/>
+            </a:effectRef>
+            <a:fontRef idx="minor">
+              <a:schemeClr val="lt1"/>
+            </a:fontRef>
+          </p:style>
+          <p:txBody>
+            <a:bodyPr lIns="0" tIns="0" rIns="0" bIns="0" rtlCol="0" anchor="ctr"/>
+            <a:lstStyle/>
+            <a:p>
+              <a:pPr algn="ctr"/>
+              <a:endParaRPr kumimoji="1" lang="ja-JP" altLang="en-US" sz="600" dirty="0">
+                <a:solidFill>
+                  <a:schemeClr val="tx1"/>
+                </a:solidFill>
+                <a:latin typeface="UD デジタル 教科書体 NP-R" panose="020B0400000000000000" pitchFamily="18" charset="-128"/>
+                <a:ea typeface="UD デジタル 教科書体 NP-R" panose="020B0400000000000000" pitchFamily="18" charset="-128"/>
+              </a:endParaRPr>
+            </a:p>
+          </p:txBody>
+        </p:sp>
+        <p:sp>
+          <p:nvSpPr>
+            <p:cNvPr id="27" name="四角形: 角を丸くする 26">
+              <a:extLst>
+                <a:ext uri="{FF2B5EF4-FFF2-40B4-BE49-F238E27FC236}">
+                  <a16:creationId xmlns:a16="http://schemas.microsoft.com/office/drawing/2014/main" id="{8FDC3283-0260-139C-7F12-D289E62F3324}"/>
+                </a:ext>
+              </a:extLst>
+            </p:cNvPr>
+            <p:cNvSpPr/>
+            <p:nvPr/>
+          </p:nvSpPr>
+          <p:spPr>
+            <a:xfrm>
+              <a:off x="-1" y="0"/>
+              <a:ext cx="3095625" cy="1944688"/>
+            </a:xfrm>
+            <a:prstGeom prst="roundRect">
+              <a:avLst>
+                <a:gd name="adj" fmla="val 13559"/>
+              </a:avLst>
+            </a:prstGeom>
+            <a:noFill/>
+            <a:ln w="6350">
+              <a:noFill/>
+            </a:ln>
+            <a:effectLst/>
+          </p:spPr>
+          <p:style>
+            <a:lnRef idx="2">
+              <a:schemeClr val="accent1">
+                <a:shade val="15000"/>
+              </a:schemeClr>
+            </a:lnRef>
+            <a:fillRef idx="1">
+              <a:schemeClr val="accent1"/>
+            </a:fillRef>
+            <a:effectRef idx="0">
+              <a:schemeClr val="accent1"/>
+            </a:effectRef>
+            <a:fontRef idx="minor">
+              <a:schemeClr val="lt1"/>
+            </a:fontRef>
+          </p:style>
+          <p:txBody>
+            <a:bodyPr wrap="square" lIns="72000" tIns="36000" rIns="72000" bIns="0" rtlCol="0" anchor="b">
+              <a:noAutofit/>
+            </a:bodyPr>
+            <a:lstStyle/>
+            <a:p>
+              <a:pPr algn="ctr"/>
+              <a:endParaRPr kumimoji="1" lang="ja-JP" altLang="en-US" sz="600" dirty="0">
+                <a:solidFill>
+                  <a:schemeClr val="tx1"/>
+                </a:solidFill>
+                <a:latin typeface="UD デジタル 教科書体 NP-R" panose="02020400000000000000" pitchFamily="18" charset="-128"/>
+                <a:ea typeface="UD デジタル 教科書体 NP-R" panose="02020400000000000000" pitchFamily="18" charset="-128"/>
+              </a:endParaRPr>
+            </a:p>
+          </p:txBody>
+        </p:sp>
+        <p:sp>
+          <p:nvSpPr>
+            <p:cNvPr id="9" name="四角形: 角を丸くする 8">
+              <a:extLst>
+                <a:ext uri="{FF2B5EF4-FFF2-40B4-BE49-F238E27FC236}">
+                  <a16:creationId xmlns:a16="http://schemas.microsoft.com/office/drawing/2014/main" id="{AE2E32DA-A837-52C7-4FBC-051F0A494453}"/>
+                </a:ext>
+              </a:extLst>
+            </p:cNvPr>
+            <p:cNvSpPr/>
+            <p:nvPr/>
+          </p:nvSpPr>
+          <p:spPr>
+            <a:xfrm>
+              <a:off x="52384" y="86414"/>
+              <a:ext cx="2990852" cy="1165609"/>
+            </a:xfrm>
+            <a:prstGeom prst="roundRect">
+              <a:avLst>
+                <a:gd name="adj" fmla="val 14805"/>
+              </a:avLst>
+            </a:prstGeom>
+            <a:blipFill dpi="0" rotWithShape="1">
+              <a:blip r:embed="rId2"/>
+              <a:srcRect/>
+              <a:stretch>
+                <a:fillRect/>
+              </a:stretch>
+            </a:blipFill>
+            <a:ln w="171450">
+              <a:noFill/>
+            </a:ln>
+            <a:effectLst>
+              <a:glow>
+                <a:schemeClr val="bg1"/>
+              </a:glow>
+              <a:outerShdw dist="12700" sx="1000" sy="1000" algn="ctr" rotWithShape="0">
+                <a:srgbClr val="000000"/>
+              </a:outerShdw>
+              <a:softEdge rad="63500"/>
+            </a:effectLst>
+          </p:spPr>
+          <p:style>
+            <a:lnRef idx="2">
+              <a:schemeClr val="accent1">
+                <a:shade val="15000"/>
+              </a:schemeClr>
+            </a:lnRef>
+            <a:fillRef idx="1">
+              <a:schemeClr val="accent1"/>
+            </a:fillRef>
+            <a:effectRef idx="0">
+              <a:schemeClr val="accent1"/>
+            </a:effectRef>
+            <a:fontRef idx="minor">
+              <a:schemeClr val="lt1"/>
+            </a:fontRef>
+          </p:style>
+          <p:txBody>
+            <a:bodyPr rtlCol="0" anchor="ctr"/>
+            <a:lstStyle/>
+            <a:p>
+              <a:pPr algn="ctr"/>
+              <a:endParaRPr lang="ja-JP" altLang="en-US"/>
+            </a:p>
+          </p:txBody>
+        </p:sp>
+        <p:sp>
+          <p:nvSpPr>
+            <p:cNvPr id="16" name="四角形: 角を丸くする 15">
+              <a:extLst>
+                <a:ext uri="{FF2B5EF4-FFF2-40B4-BE49-F238E27FC236}">
+                  <a16:creationId xmlns:a16="http://schemas.microsoft.com/office/drawing/2014/main" id="{1F2278CB-99A3-A410-B698-68E2913638A7}"/>
+                </a:ext>
+              </a:extLst>
+            </p:cNvPr>
+            <p:cNvSpPr/>
+            <p:nvPr/>
+          </p:nvSpPr>
+          <p:spPr>
+            <a:xfrm>
+              <a:off x="234235" y="250086"/>
+              <a:ext cx="2627152" cy="843154"/>
+            </a:xfrm>
+            <a:prstGeom prst="roundRect">
+              <a:avLst>
+                <a:gd name="adj" fmla="val 13559"/>
+              </a:avLst>
+            </a:prstGeom>
+            <a:solidFill>
+              <a:schemeClr val="bg1"/>
+            </a:solidFill>
+            <a:ln w="6350">
+              <a:noFill/>
+            </a:ln>
+            <a:effectLst/>
+          </p:spPr>
+          <p:style>
+            <a:lnRef idx="2">
+              <a:schemeClr val="accent1">
+                <a:shade val="15000"/>
+              </a:schemeClr>
+            </a:lnRef>
+            <a:fillRef idx="1">
+              <a:schemeClr val="accent1"/>
+            </a:fillRef>
+            <a:effectRef idx="0">
+              <a:schemeClr val="accent1"/>
+            </a:effectRef>
+            <a:fontRef idx="minor">
+              <a:schemeClr val="lt1"/>
+            </a:fontRef>
+          </p:style>
+          <p:txBody>
+            <a:bodyPr wrap="square" lIns="72000" tIns="36000" rIns="72000" bIns="0" rtlCol="0" anchor="b">
+              <a:noAutofit/>
+            </a:bodyPr>
+            <a:lstStyle/>
+            <a:p>
+              <a:pPr algn="ctr"/>
+              <a:r>
+                <a:rPr kumimoji="1" lang="ja-JP" altLang="en-US" sz="500" dirty="0">
+                  <a:solidFill>
+                    <a:schemeClr val="tx1"/>
+                  </a:solidFill>
+                  <a:latin typeface="UD デジタル 教科書体 NP-R" panose="02020400000000000000" pitchFamily="18" charset="-128"/>
+                  <a:ea typeface="UD デジタル 教科書体 NP-R" panose="02020400000000000000" pitchFamily="18" charset="-128"/>
+                </a:rPr>
+                <a:t>本カードを破損・紛失された場合、または使用期限を過ぎた場合は、返礼品を</a:t>
+              </a:r>
+              <a:endParaRPr kumimoji="1" lang="en-US" altLang="ja-JP" sz="500" dirty="0">
+                <a:solidFill>
+                  <a:schemeClr val="tx1"/>
+                </a:solidFill>
+                <a:latin typeface="UD デジタル 教科書体 NP-R" panose="02020400000000000000" pitchFamily="18" charset="-128"/>
+                <a:ea typeface="UD デジタル 教科書体 NP-R" panose="02020400000000000000" pitchFamily="18" charset="-128"/>
+              </a:endParaRPr>
+            </a:p>
+            <a:p>
+              <a:pPr algn="ctr"/>
+              <a:r>
+                <a:rPr kumimoji="1" lang="ja-JP" altLang="en-US" sz="500" dirty="0">
+                  <a:solidFill>
+                    <a:schemeClr val="tx1"/>
+                  </a:solidFill>
+                  <a:latin typeface="UD デジタル 教科書体 NP-R" panose="02020400000000000000" pitchFamily="18" charset="-128"/>
+                  <a:ea typeface="UD デジタル 教科書体 NP-R" panose="02020400000000000000" pitchFamily="18" charset="-128"/>
+                </a:rPr>
+                <a:t>  ご提供できかねますので、あらかじめご了承くださいますようお願いいたします。</a:t>
+              </a:r>
+            </a:p>
+          </p:txBody>
+        </p:sp>
+        <p:sp>
+          <p:nvSpPr>
+            <p:cNvPr id="5" name="四角形: 角を丸くする 4">
+              <a:extLst>
+                <a:ext uri="{FF2B5EF4-FFF2-40B4-BE49-F238E27FC236}">
+                  <a16:creationId xmlns:a16="http://schemas.microsoft.com/office/drawing/2014/main" id="{50CC87DF-8168-7E73-1A6D-9BE074DF9F62}"/>
+                </a:ext>
+              </a:extLst>
+            </p:cNvPr>
+            <p:cNvSpPr/>
+            <p:nvPr/>
+          </p:nvSpPr>
+          <p:spPr>
+            <a:xfrm>
+              <a:off x="299236" y="559911"/>
+              <a:ext cx="564212" cy="211760"/>
+            </a:xfrm>
+            <a:prstGeom prst="roundRect">
+              <a:avLst>
+                <a:gd name="adj" fmla="val 6665"/>
+              </a:avLst>
+            </a:prstGeom>
+            <a:solidFill>
+              <a:schemeClr val="bg1"/>
+            </a:solidFill>
+            <a:ln>
+              <a:noFill/>
+            </a:ln>
+          </p:spPr>
+          <p:style>
+            <a:lnRef idx="2">
+              <a:schemeClr val="accent1">
+                <a:shade val="15000"/>
+              </a:schemeClr>
+            </a:lnRef>
+            <a:fillRef idx="1">
+              <a:schemeClr val="accent1"/>
+            </a:fillRef>
+            <a:effectRef idx="0">
+              <a:schemeClr val="accent1"/>
+            </a:effectRef>
+            <a:fontRef idx="minor">
+              <a:schemeClr val="lt1"/>
+            </a:fontRef>
+          </p:style>
+          <p:txBody>
+            <a:bodyPr lIns="0" tIns="0" rIns="0" bIns="0" rtlCol="0" anchor="ctr"/>
+            <a:lstStyle/>
+            <a:p>
+              <a:pPr algn="ctr"/>
+              <a:r>
+                <a:rPr kumimoji="1" lang="en-US" altLang="ja-JP" sz="800" dirty="0">
+                  <a:solidFill>
+                    <a:schemeClr val="tx1"/>
+                  </a:solidFill>
+                  <a:latin typeface="UD デジタル 教科書体 NP-R" panose="02020400000000000000" pitchFamily="18" charset="-128"/>
+                  <a:ea typeface="UD デジタル 教科書体 NP-R" panose="02020400000000000000" pitchFamily="18" charset="-128"/>
+                </a:rPr>
+                <a:t>PINCODE</a:t>
+              </a:r>
+            </a:p>
+          </p:txBody>
+        </p:sp>
+        <p:sp>
+          <p:nvSpPr>
+            <p:cNvPr id="18" name="四角形: 角を丸くする 17">
+              <a:extLst>
+                <a:ext uri="{FF2B5EF4-FFF2-40B4-BE49-F238E27FC236}">
+                  <a16:creationId xmlns:a16="http://schemas.microsoft.com/office/drawing/2014/main" id="{BC002E06-35BD-AC33-692A-B0B83574D53F}"/>
+                </a:ext>
+              </a:extLst>
+            </p:cNvPr>
+            <p:cNvSpPr/>
+            <p:nvPr/>
+          </p:nvSpPr>
+          <p:spPr>
+            <a:xfrm>
+              <a:off x="216692" y="1346585"/>
+              <a:ext cx="2662238" cy="302565"/>
+            </a:xfrm>
+            <a:prstGeom prst="roundRect">
+              <a:avLst>
+                <a:gd name="adj" fmla="val 17073"/>
+              </a:avLst>
+            </a:prstGeom>
+            <a:noFill/>
+            <a:ln w="6350">
+              <a:solidFill>
+                <a:schemeClr val="tx1"/>
+              </a:solidFill>
+            </a:ln>
+            <a:effectLst/>
+          </p:spPr>
+          <p:style>
+            <a:lnRef idx="2">
+              <a:schemeClr val="accent1">
+                <a:shade val="15000"/>
+              </a:schemeClr>
+            </a:lnRef>
+            <a:fillRef idx="1">
+              <a:schemeClr val="accent1"/>
+            </a:fillRef>
+            <a:effectRef idx="0">
+              <a:schemeClr val="accent1"/>
+            </a:effectRef>
+            <a:fontRef idx="minor">
+              <a:schemeClr val="lt1"/>
+            </a:fontRef>
+          </p:style>
+          <p:txBody>
+            <a:bodyPr rtlCol="0" anchor="ctr"/>
+            <a:lstStyle/>
+            <a:p>
+              <a:pPr algn="ctr"/>
+              <a:r>
+                <a:rPr kumimoji="1" lang="en-US" altLang="ja-JP" sz="600" dirty="0">
+                  <a:solidFill>
+                    <a:schemeClr val="tx1"/>
+                  </a:solidFill>
+                  <a:latin typeface="UD デジタル 教科書体 NP-R" panose="02020400000000000000" pitchFamily="18" charset="-128"/>
+                  <a:ea typeface="UD デジタル 教科書体 NP-R" panose="02020400000000000000" pitchFamily="18" charset="-128"/>
+                </a:rPr>
+                <a:t>[</a:t>
+              </a:r>
+              <a:r>
+                <a:rPr kumimoji="1" lang="ja-JP" altLang="en-US" sz="600" dirty="0">
+                  <a:solidFill>
+                    <a:schemeClr val="tx1"/>
+                  </a:solidFill>
+                  <a:latin typeface="UD デジタル 教科書体 NP-R" panose="02020400000000000000" pitchFamily="18" charset="-128"/>
+                  <a:ea typeface="UD デジタル 教科書体 NP-R" panose="02020400000000000000" pitchFamily="18" charset="-128"/>
+                </a:rPr>
+                <a:t>返礼品に関するお問い合わせ</a:t>
+              </a:r>
+              <a:r>
+                <a:rPr kumimoji="1" lang="en-US" altLang="ja-JP" sz="600" dirty="0">
+                  <a:solidFill>
+                    <a:schemeClr val="tx1"/>
+                  </a:solidFill>
+                  <a:latin typeface="UD デジタル 教科書体 NP-R" panose="02020400000000000000" pitchFamily="18" charset="-128"/>
+                  <a:ea typeface="UD デジタル 教科書体 NP-R" panose="02020400000000000000" pitchFamily="18" charset="-128"/>
+                </a:rPr>
+                <a:t>]</a:t>
+              </a:r>
+            </a:p>
+            <a:p>
+              <a:pPr algn="ctr"/>
+              <a:r>
+                <a:rPr kumimoji="1" lang="ja-JP" altLang="en-US" sz="600" dirty="0">
+                  <a:solidFill>
+                    <a:schemeClr val="tx1"/>
+                  </a:solidFill>
+                  <a:latin typeface="UD デジタル 教科書体 NP-R" panose="02020400000000000000" pitchFamily="18" charset="-128"/>
+                  <a:ea typeface="UD デジタル 教科書体 NP-R" panose="02020400000000000000" pitchFamily="18" charset="-128"/>
+                </a:rPr>
+                <a:t>秋田大学総務企画部広報課</a:t>
+              </a:r>
+            </a:p>
+            <a:p>
+              <a:pPr algn="ctr"/>
+              <a:r>
+                <a:rPr kumimoji="1" lang="ja-JP" altLang="en-US" sz="600" dirty="0">
+                  <a:solidFill>
+                    <a:schemeClr val="tx1"/>
+                  </a:solidFill>
+                  <a:latin typeface="UD デジタル 教科書体 NP-R" panose="02020400000000000000" pitchFamily="18" charset="-128"/>
+                  <a:ea typeface="UD デジタル 教科書体 NP-R" panose="02020400000000000000" pitchFamily="18" charset="-128"/>
+                </a:rPr>
+                <a:t>電話：</a:t>
+              </a:r>
+              <a:r>
+                <a:rPr kumimoji="1" lang="en-US" altLang="ja-JP" sz="600" dirty="0">
+                  <a:solidFill>
+                    <a:schemeClr val="tx1"/>
+                  </a:solidFill>
+                  <a:latin typeface="UD デジタル 教科書体 NP-R" panose="02020400000000000000" pitchFamily="18" charset="-128"/>
+                  <a:ea typeface="UD デジタル 教科書体 NP-R" panose="02020400000000000000" pitchFamily="18" charset="-128"/>
+                </a:rPr>
+                <a:t>018-889-3266</a:t>
+              </a:r>
+              <a:r>
+                <a:rPr kumimoji="1" lang="ja-JP" altLang="en-US" sz="600" dirty="0">
+                  <a:solidFill>
+                    <a:schemeClr val="tx1"/>
+                  </a:solidFill>
+                  <a:latin typeface="UD デジタル 教科書体 NP-R" panose="02020400000000000000" pitchFamily="18" charset="-128"/>
+                  <a:ea typeface="UD デジタル 教科書体 NP-R" panose="02020400000000000000" pitchFamily="18" charset="-128"/>
+                </a:rPr>
+                <a:t>　</a:t>
+              </a:r>
+              <a:r>
+                <a:rPr kumimoji="1" lang="en-US" altLang="ja-JP" sz="600" dirty="0">
+                  <a:solidFill>
+                    <a:schemeClr val="tx1"/>
+                  </a:solidFill>
+                  <a:latin typeface="UD デジタル 教科書体 NP-R" panose="02020400000000000000" pitchFamily="18" charset="-128"/>
+                  <a:ea typeface="UD デジタル 教科書体 NP-R" panose="02020400000000000000" pitchFamily="18" charset="-128"/>
+                </a:rPr>
+                <a:t>e-mail</a:t>
+              </a:r>
+              <a:r>
+                <a:rPr kumimoji="1" lang="ja-JP" altLang="en-US" sz="600" dirty="0">
+                  <a:solidFill>
+                    <a:schemeClr val="tx1"/>
+                  </a:solidFill>
+                  <a:latin typeface="UD デジタル 教科書体 NP-R" panose="02020400000000000000" pitchFamily="18" charset="-128"/>
+                  <a:ea typeface="UD デジタル 教科書体 NP-R" panose="02020400000000000000" pitchFamily="18" charset="-128"/>
+                </a:rPr>
+                <a:t>：</a:t>
+              </a:r>
+              <a:r>
+                <a:rPr kumimoji="1" lang="en-US" altLang="ja-JP" sz="600" dirty="0">
+                  <a:solidFill>
+                    <a:schemeClr val="tx1"/>
+                  </a:solidFill>
+                  <a:latin typeface="UD デジタル 教科書体 NP-R" panose="02020400000000000000" pitchFamily="18" charset="-128"/>
+                  <a:ea typeface="UD デジタル 教科書体 NP-R" panose="02020400000000000000" pitchFamily="18" charset="-128"/>
+                </a:rPr>
+                <a:t>kikin@jimu.akita-u.ac.jp</a:t>
+              </a:r>
+            </a:p>
+          </p:txBody>
+        </p:sp>
+        <p:sp>
+          <p:nvSpPr>
+            <p:cNvPr id="19" name="四角形: 角を丸くする 18">
+              <a:extLst>
+                <a:ext uri="{FF2B5EF4-FFF2-40B4-BE49-F238E27FC236}">
+                  <a16:creationId xmlns:a16="http://schemas.microsoft.com/office/drawing/2014/main" id="{DF1DF99B-5038-92A9-68F9-B77E53F25226}"/>
+                </a:ext>
+              </a:extLst>
+            </p:cNvPr>
+            <p:cNvSpPr/>
+            <p:nvPr/>
+          </p:nvSpPr>
+          <p:spPr>
+            <a:xfrm>
+              <a:off x="264474" y="1746083"/>
+              <a:ext cx="2720550" cy="131546"/>
+            </a:xfrm>
+            <a:prstGeom prst="roundRect">
+              <a:avLst>
+                <a:gd name="adj" fmla="val 17073"/>
+              </a:avLst>
+            </a:prstGeom>
+            <a:noFill/>
+            <a:ln w="6350">
+              <a:noFill/>
+            </a:ln>
+            <a:effectLst/>
+          </p:spPr>
+          <p:style>
+            <a:lnRef idx="2">
+              <a:schemeClr val="accent1">
+                <a:shade val="15000"/>
+              </a:schemeClr>
+            </a:lnRef>
+            <a:fillRef idx="1">
+              <a:schemeClr val="accent1"/>
+            </a:fillRef>
+            <a:effectRef idx="0">
+              <a:schemeClr val="accent1"/>
+            </a:effectRef>
+            <a:fontRef idx="minor">
+              <a:schemeClr val="lt1"/>
+            </a:fontRef>
+          </p:style>
+          <p:txBody>
+            <a:bodyPr rtlCol="0" anchor="ctr"/>
+            <a:lstStyle/>
+            <a:p>
+              <a:pPr algn="ctr"/>
+              <a:r>
+                <a:rPr kumimoji="1" lang="ja-JP" altLang="en-US" sz="600" dirty="0">
+                  <a:solidFill>
+                    <a:schemeClr val="tx1"/>
+                  </a:solidFill>
+                  <a:latin typeface="UD デジタル 教科書体 NP-R" panose="02020400000000000000" pitchFamily="18" charset="-128"/>
+                  <a:ea typeface="UD デジタル 教科書体 NP-R" panose="02020400000000000000" pitchFamily="18" charset="-128"/>
+                </a:rPr>
+                <a:t>「名刺代わりに」は、秋田大学発ベンチャー、</a:t>
+              </a:r>
+              <a:r>
+                <a:rPr kumimoji="1" lang="en-US" altLang="ja-JP" sz="600" dirty="0">
+                  <a:solidFill>
+                    <a:schemeClr val="tx1"/>
+                  </a:solidFill>
+                  <a:latin typeface="UD デジタル 教科書体 NP-R" panose="02020400000000000000" pitchFamily="18" charset="-128"/>
+                  <a:ea typeface="UD デジタル 教科書体 NP-R" panose="02020400000000000000" pitchFamily="18" charset="-128"/>
+                </a:rPr>
+                <a:t>AUIC</a:t>
+              </a:r>
+              <a:r>
+                <a:rPr kumimoji="1" lang="ja-JP" altLang="en-US" sz="600" dirty="0">
+                  <a:solidFill>
+                    <a:schemeClr val="tx1"/>
+                  </a:solidFill>
+                  <a:latin typeface="UD デジタル 教科書体 NP-R" panose="02020400000000000000" pitchFamily="18" charset="-128"/>
+                  <a:ea typeface="UD デジタル 教科書体 NP-R" panose="02020400000000000000" pitchFamily="18" charset="-128"/>
+                </a:rPr>
+                <a:t>が提供しています。</a:t>
+              </a:r>
+              <a:endParaRPr kumimoji="1" lang="en-US" altLang="ja-JP" sz="600" dirty="0">
+                <a:solidFill>
+                  <a:schemeClr val="tx1"/>
+                </a:solidFill>
+                <a:latin typeface="UD デジタル 教科書体 NP-R" panose="02020400000000000000" pitchFamily="18" charset="-128"/>
+                <a:ea typeface="UD デジタル 教科書体 NP-R" panose="02020400000000000000" pitchFamily="18" charset="-128"/>
+              </a:endParaRPr>
+            </a:p>
+          </p:txBody>
+        </p:sp>
+        <p:sp>
+          <p:nvSpPr>
+            <p:cNvPr id="25" name="四角形: 角を丸くする 24">
+              <a:extLst>
+                <a:ext uri="{FF2B5EF4-FFF2-40B4-BE49-F238E27FC236}">
+                  <a16:creationId xmlns:a16="http://schemas.microsoft.com/office/drawing/2014/main" id="{65BEC49D-DECB-15AB-FFEC-BB4B065BE6DF}"/>
+                </a:ext>
+              </a:extLst>
+            </p:cNvPr>
+            <p:cNvSpPr/>
+            <p:nvPr/>
+          </p:nvSpPr>
+          <p:spPr>
+            <a:xfrm>
+              <a:off x="187535" y="287429"/>
+              <a:ext cx="2720550" cy="164630"/>
+            </a:xfrm>
+            <a:prstGeom prst="roundRect">
+              <a:avLst>
+                <a:gd name="adj" fmla="val 17073"/>
+              </a:avLst>
+            </a:prstGeom>
+            <a:noFill/>
+            <a:ln w="6350">
+              <a:noFill/>
+            </a:ln>
+            <a:effectLst/>
+          </p:spPr>
+          <p:style>
+            <a:lnRef idx="2">
+              <a:schemeClr val="accent1">
+                <a:shade val="15000"/>
+              </a:schemeClr>
+            </a:lnRef>
+            <a:fillRef idx="1">
+              <a:schemeClr val="accent1"/>
+            </a:fillRef>
+            <a:effectRef idx="0">
+              <a:schemeClr val="accent1"/>
+            </a:effectRef>
+            <a:fontRef idx="minor">
+              <a:schemeClr val="lt1"/>
+            </a:fontRef>
+          </p:style>
+          <p:txBody>
+            <a:bodyPr rtlCol="0" anchor="ctr"/>
+            <a:lstStyle/>
+            <a:p>
+              <a:pPr algn="ctr"/>
+              <a:r>
+                <a:rPr kumimoji="1" lang="ja-JP" altLang="en-US" sz="600" dirty="0">
+                  <a:solidFill>
+                    <a:schemeClr val="tx1"/>
+                  </a:solidFill>
+                  <a:latin typeface="UD デジタル 教科書体 NP-R" panose="02020400000000000000" pitchFamily="18" charset="-128"/>
+                  <a:ea typeface="UD デジタル 教科書体 NP-R" panose="02020400000000000000" pitchFamily="18" charset="-128"/>
+                </a:rPr>
+                <a:t>［使用期限：</a:t>
+              </a:r>
+              <a:r>
+                <a:rPr kumimoji="1" lang="en-US" altLang="ja-JP" sz="600" dirty="0">
+                  <a:solidFill>
+                    <a:schemeClr val="tx1"/>
+                  </a:solidFill>
+                  <a:latin typeface="UD デジタル 教科書体 NP-R" panose="02020400000000000000" pitchFamily="18" charset="-128"/>
+                  <a:ea typeface="UD デジタル 教科書体 NP-R" panose="02020400000000000000" pitchFamily="18" charset="-128"/>
+                </a:rPr>
+                <a:t>2026</a:t>
+              </a:r>
+              <a:r>
+                <a:rPr kumimoji="1" lang="ja-JP" altLang="en-US" sz="600" dirty="0">
+                  <a:solidFill>
+                    <a:schemeClr val="tx1"/>
+                  </a:solidFill>
+                  <a:latin typeface="UD デジタル 教科書体 NP-R" panose="02020400000000000000" pitchFamily="18" charset="-128"/>
+                  <a:ea typeface="UD デジタル 教科書体 NP-R" panose="02020400000000000000" pitchFamily="18" charset="-128"/>
+                </a:rPr>
+                <a:t> 年 </a:t>
+              </a:r>
+              <a:r>
+                <a:rPr kumimoji="1" lang="en-US" altLang="ja-JP" sz="600" dirty="0">
+                  <a:solidFill>
+                    <a:schemeClr val="tx1"/>
+                  </a:solidFill>
+                  <a:latin typeface="UD デジタル 教科書体 NP-R" panose="02020400000000000000" pitchFamily="18" charset="-128"/>
+                  <a:ea typeface="UD デジタル 教科書体 NP-R" panose="02020400000000000000" pitchFamily="18" charset="-128"/>
+                </a:rPr>
+                <a:t>9</a:t>
+              </a:r>
+              <a:r>
+                <a:rPr kumimoji="1" lang="ja-JP" altLang="en-US" sz="600" dirty="0">
+                  <a:solidFill>
+                    <a:schemeClr val="tx1"/>
+                  </a:solidFill>
+                  <a:latin typeface="UD デジタル 教科書体 NP-R" panose="02020400000000000000" pitchFamily="18" charset="-128"/>
+                  <a:ea typeface="UD デジタル 教科書体 NP-R" panose="02020400000000000000" pitchFamily="18" charset="-128"/>
+                </a:rPr>
+                <a:t> 月 </a:t>
+              </a:r>
+              <a:r>
+                <a:rPr kumimoji="1" lang="en-US" altLang="ja-JP" sz="600" dirty="0">
+                  <a:solidFill>
+                    <a:schemeClr val="tx1"/>
+                  </a:solidFill>
+                  <a:latin typeface="UD デジタル 教科書体 NP-R" panose="02020400000000000000" pitchFamily="18" charset="-128"/>
+                  <a:ea typeface="UD デジタル 教科書体 NP-R" panose="02020400000000000000" pitchFamily="18" charset="-128"/>
+                </a:rPr>
+                <a:t>30</a:t>
+              </a:r>
+              <a:r>
+                <a:rPr kumimoji="1" lang="ja-JP" altLang="en-US" sz="600" dirty="0">
+                  <a:solidFill>
+                    <a:schemeClr val="tx1"/>
+                  </a:solidFill>
+                  <a:latin typeface="UD デジタル 教科書体 NP-R" panose="02020400000000000000" pitchFamily="18" charset="-128"/>
+                  <a:ea typeface="UD デジタル 教科書体 NP-R" panose="02020400000000000000" pitchFamily="18" charset="-128"/>
+                </a:rPr>
+                <a:t> 日 </a:t>
+              </a:r>
+              <a:r>
+                <a:rPr kumimoji="1" lang="en-US" altLang="ja-JP" sz="600" dirty="0">
+                  <a:solidFill>
+                    <a:schemeClr val="tx1"/>
+                  </a:solidFill>
+                  <a:latin typeface="UD デジタル 教科書体 NP-R" panose="02020400000000000000" pitchFamily="18" charset="-128"/>
+                  <a:ea typeface="UD デジタル 教科書体 NP-R" panose="02020400000000000000" pitchFamily="18" charset="-128"/>
+                </a:rPr>
+                <a:t>23</a:t>
+              </a:r>
+              <a:r>
+                <a:rPr kumimoji="1" lang="ja-JP" altLang="en-US" sz="600" dirty="0">
+                  <a:solidFill>
+                    <a:schemeClr val="tx1"/>
+                  </a:solidFill>
+                  <a:latin typeface="UD デジタル 教科書体 NP-R" panose="02020400000000000000" pitchFamily="18" charset="-128"/>
+                  <a:ea typeface="UD デジタル 教科書体 NP-R" panose="02020400000000000000" pitchFamily="18" charset="-128"/>
+                </a:rPr>
+                <a:t>：</a:t>
+              </a:r>
+              <a:r>
+                <a:rPr kumimoji="1" lang="en-US" altLang="ja-JP" sz="600" dirty="0">
+                  <a:solidFill>
+                    <a:schemeClr val="tx1"/>
+                  </a:solidFill>
+                  <a:latin typeface="UD デジタル 教科書体 NP-R" panose="02020400000000000000" pitchFamily="18" charset="-128"/>
+                  <a:ea typeface="UD デジタル 教科書体 NP-R" panose="02020400000000000000" pitchFamily="18" charset="-128"/>
+                </a:rPr>
+                <a:t>59</a:t>
+              </a:r>
+              <a:r>
+                <a:rPr kumimoji="1" lang="ja-JP" altLang="en-US" sz="600" dirty="0">
+                  <a:solidFill>
+                    <a:schemeClr val="tx1"/>
+                  </a:solidFill>
+                  <a:latin typeface="UD デジタル 教科書体 NP-R" panose="02020400000000000000" pitchFamily="18" charset="-128"/>
+                  <a:ea typeface="UD デジタル 教科書体 NP-R" panose="02020400000000000000" pitchFamily="18" charset="-128"/>
+                </a:rPr>
+                <a:t>まで］</a:t>
+              </a:r>
+            </a:p>
+          </p:txBody>
+        </p:sp>
+        <p:pic>
+          <p:nvPicPr>
+            <p:cNvPr id="3" name="図 2">
+              <a:extLst>
+                <a:ext uri="{FF2B5EF4-FFF2-40B4-BE49-F238E27FC236}">
+                  <a16:creationId xmlns:a16="http://schemas.microsoft.com/office/drawing/2014/main" id="{BB4488A3-6763-30EF-524B-DC459B52E292}"/>
+                </a:ext>
+              </a:extLst>
+            </p:cNvPr>
+            <p:cNvPicPr>
+              <a:picLocks noChangeAspect="1"/>
+            </p:cNvPicPr>
+            <p:nvPr/>
+          </p:nvPicPr>
+          <p:blipFill>
+            <a:blip r:embed="rId3">
+              <a:extLst>
+                <a:ext uri="{28A0092B-C50C-407E-A947-70E740481C1C}">
+                  <a14:useLocalDpi xmlns:a14="http://schemas.microsoft.com/office/drawing/2010/main" val="0"/>
+                </a:ext>
+              </a:extLst>
+            </a:blip>
+            <a:stretch>
+              <a:fillRect/>
+            </a:stretch>
+          </p:blipFill>
+          <p:spPr>
+            <a:xfrm>
+              <a:off x="267649" y="1749035"/>
+              <a:ext cx="111515" cy="111515"/>
+            </a:xfrm>
+            <a:prstGeom prst="rect">
+              <a:avLst/>
+            </a:prstGeom>
+          </p:spPr>
+        </p:pic>
+      </p:grpSp>
+    </p:spTree>
+    <p:extLst>
+      <p:ext uri="{BB962C8B-B14F-4D97-AF65-F5344CB8AC3E}">
+        <p14:creationId xmlns:p14="http://schemas.microsoft.com/office/powerpoint/2010/main" val="4162823527"/>
       </p:ext>
     </p:extLst>
   </p:cSld>
@@ -5769,6 +7298,514 @@
 </file>
 
 <file path=ppt/slides/slide4.xml><?xml version="1.0" encoding="utf-8"?>
+<p:sld xmlns:a="http://schemas.openxmlformats.org/drawingml/2006/main" xmlns:r="http://schemas.openxmlformats.org/officeDocument/2006/relationships" xmlns:p="http://schemas.openxmlformats.org/presentationml/2006/main">
+  <p:cSld>
+    <p:spTree>
+      <p:nvGrpSpPr>
+        <p:cNvPr id="1" name="">
+          <a:extLst>
+            <a:ext uri="{FF2B5EF4-FFF2-40B4-BE49-F238E27FC236}">
+              <a16:creationId xmlns:a16="http://schemas.microsoft.com/office/drawing/2014/main" id="{5C5B5512-A93A-6B0A-EE8B-B56E0F433497}"/>
+            </a:ext>
+          </a:extLst>
+        </p:cNvPr>
+        <p:cNvGrpSpPr/>
+        <p:nvPr/>
+      </p:nvGrpSpPr>
+      <p:grpSpPr>
+        <a:xfrm>
+          <a:off x="0" y="0"/>
+          <a:ext cx="0" cy="0"/>
+          <a:chOff x="0" y="0"/>
+          <a:chExt cx="0" cy="0"/>
+        </a:xfrm>
+      </p:grpSpPr>
+      <p:grpSp>
+        <p:nvGrpSpPr>
+          <p:cNvPr id="8" name="グループ化 7">
+            <a:extLst>
+              <a:ext uri="{FF2B5EF4-FFF2-40B4-BE49-F238E27FC236}">
+                <a16:creationId xmlns:a16="http://schemas.microsoft.com/office/drawing/2014/main" id="{ADF00FFF-5672-D4A7-D620-7CE98888221C}"/>
+              </a:ext>
+            </a:extLst>
+          </p:cNvPr>
+          <p:cNvGrpSpPr/>
+          <p:nvPr/>
+        </p:nvGrpSpPr>
+        <p:grpSpPr>
+          <a:xfrm>
+            <a:off x="-2" y="-1"/>
+            <a:ext cx="3095626" cy="1944689"/>
+            <a:chOff x="-2" y="-1"/>
+            <a:chExt cx="3095626" cy="1944689"/>
+          </a:xfrm>
+        </p:grpSpPr>
+        <p:sp>
+          <p:nvSpPr>
+            <p:cNvPr id="2" name="四角形: 角を丸くする 1">
+              <a:extLst>
+                <a:ext uri="{FF2B5EF4-FFF2-40B4-BE49-F238E27FC236}">
+                  <a16:creationId xmlns:a16="http://schemas.microsoft.com/office/drawing/2014/main" id="{877936A4-1A8C-BB39-81CA-EEB8495154E2}"/>
+                </a:ext>
+              </a:extLst>
+            </p:cNvPr>
+            <p:cNvSpPr/>
+            <p:nvPr/>
+          </p:nvSpPr>
+          <p:spPr>
+            <a:xfrm>
+              <a:off x="-2" y="-1"/>
+              <a:ext cx="3095625" cy="1944687"/>
+            </a:xfrm>
+            <a:prstGeom prst="roundRect">
+              <a:avLst>
+                <a:gd name="adj" fmla="val 0"/>
+              </a:avLst>
+            </a:prstGeom>
+            <a:solidFill>
+              <a:schemeClr val="bg1"/>
+            </a:solidFill>
+            <a:ln>
+              <a:noFill/>
+            </a:ln>
+          </p:spPr>
+          <p:style>
+            <a:lnRef idx="2">
+              <a:schemeClr val="accent1">
+                <a:shade val="15000"/>
+              </a:schemeClr>
+            </a:lnRef>
+            <a:fillRef idx="1">
+              <a:schemeClr val="accent1"/>
+            </a:fillRef>
+            <a:effectRef idx="0">
+              <a:schemeClr val="accent1"/>
+            </a:effectRef>
+            <a:fontRef idx="minor">
+              <a:schemeClr val="lt1"/>
+            </a:fontRef>
+          </p:style>
+          <p:txBody>
+            <a:bodyPr lIns="0" tIns="0" rIns="0" bIns="0" rtlCol="0" anchor="ctr"/>
+            <a:lstStyle/>
+            <a:p>
+              <a:pPr algn="ctr"/>
+              <a:endParaRPr kumimoji="1" lang="ja-JP" altLang="en-US" sz="600" dirty="0">
+                <a:solidFill>
+                  <a:schemeClr val="tx1"/>
+                </a:solidFill>
+                <a:latin typeface="UD デジタル 教科書体 NP-R" panose="020B0400000000000000" pitchFamily="18" charset="-128"/>
+                <a:ea typeface="UD デジタル 教科書体 NP-R" panose="020B0400000000000000" pitchFamily="18" charset="-128"/>
+              </a:endParaRPr>
+            </a:p>
+          </p:txBody>
+        </p:sp>
+        <p:sp>
+          <p:nvSpPr>
+            <p:cNvPr id="5" name="四角形: 角を丸くする 4">
+              <a:extLst>
+                <a:ext uri="{FF2B5EF4-FFF2-40B4-BE49-F238E27FC236}">
+                  <a16:creationId xmlns:a16="http://schemas.microsoft.com/office/drawing/2014/main" id="{72E56F5D-4736-8892-9F2C-FD45ACB90B4E}"/>
+                </a:ext>
+              </a:extLst>
+            </p:cNvPr>
+            <p:cNvSpPr/>
+            <p:nvPr/>
+          </p:nvSpPr>
+          <p:spPr>
+            <a:xfrm>
+              <a:off x="-1" y="5074"/>
+              <a:ext cx="3095625" cy="1939614"/>
+            </a:xfrm>
+            <a:prstGeom prst="roundRect">
+              <a:avLst>
+                <a:gd name="adj" fmla="val 13559"/>
+              </a:avLst>
+            </a:prstGeom>
+            <a:noFill/>
+            <a:ln w="6350">
+              <a:noFill/>
+            </a:ln>
+            <a:effectLst/>
+          </p:spPr>
+          <p:style>
+            <a:lnRef idx="2">
+              <a:schemeClr val="accent1">
+                <a:shade val="15000"/>
+              </a:schemeClr>
+            </a:lnRef>
+            <a:fillRef idx="1">
+              <a:schemeClr val="accent1"/>
+            </a:fillRef>
+            <a:effectRef idx="0">
+              <a:schemeClr val="accent1"/>
+            </a:effectRef>
+            <a:fontRef idx="minor">
+              <a:schemeClr val="lt1"/>
+            </a:fontRef>
+          </p:style>
+          <p:txBody>
+            <a:bodyPr wrap="square" lIns="72000" tIns="36000" rIns="72000" bIns="0" rtlCol="0" anchor="b">
+              <a:noAutofit/>
+            </a:bodyPr>
+            <a:lstStyle/>
+            <a:p>
+              <a:pPr algn="ctr"/>
+              <a:endParaRPr kumimoji="1" lang="ja-JP" altLang="en-US" sz="600" dirty="0">
+                <a:solidFill>
+                  <a:schemeClr val="tx1"/>
+                </a:solidFill>
+                <a:latin typeface="UD デジタル 教科書体 NP-R" panose="02020400000000000000" pitchFamily="18" charset="-128"/>
+                <a:ea typeface="UD デジタル 教科書体 NP-R" panose="02020400000000000000" pitchFamily="18" charset="-128"/>
+              </a:endParaRPr>
+            </a:p>
+          </p:txBody>
+        </p:sp>
+        <p:grpSp>
+          <p:nvGrpSpPr>
+            <p:cNvPr id="3" name="グループ化 2">
+              <a:extLst>
+                <a:ext uri="{FF2B5EF4-FFF2-40B4-BE49-F238E27FC236}">
+                  <a16:creationId xmlns:a16="http://schemas.microsoft.com/office/drawing/2014/main" id="{B76D47E6-5009-D327-0A66-FE2FA6E462DB}"/>
+                </a:ext>
+              </a:extLst>
+            </p:cNvPr>
+            <p:cNvGrpSpPr/>
+            <p:nvPr/>
+          </p:nvGrpSpPr>
+          <p:grpSpPr>
+            <a:xfrm>
+              <a:off x="26424" y="35311"/>
+              <a:ext cx="1781026" cy="1777008"/>
+              <a:chOff x="4761" y="0"/>
+              <a:chExt cx="1944000" cy="1944687"/>
+            </a:xfrm>
+          </p:grpSpPr>
+          <p:sp>
+            <p:nvSpPr>
+              <p:cNvPr id="7" name="四角形: 角を丸くする 6">
+                <a:extLst>
+                  <a:ext uri="{FF2B5EF4-FFF2-40B4-BE49-F238E27FC236}">
+                    <a16:creationId xmlns:a16="http://schemas.microsoft.com/office/drawing/2014/main" id="{495F4327-D759-E9F8-ECE5-8BFDEE1172AD}"/>
+                  </a:ext>
+                </a:extLst>
+              </p:cNvPr>
+              <p:cNvSpPr/>
+              <p:nvPr/>
+            </p:nvSpPr>
+            <p:spPr>
+              <a:xfrm>
+                <a:off x="4761" y="0"/>
+                <a:ext cx="1944000" cy="1944687"/>
+              </a:xfrm>
+              <a:prstGeom prst="roundRect">
+                <a:avLst>
+                  <a:gd name="adj" fmla="val 8828"/>
+                </a:avLst>
+              </a:prstGeom>
+              <a:blipFill>
+                <a:blip r:embed="rId2"/>
+                <a:stretch>
+                  <a:fillRect/>
+                </a:stretch>
+              </a:blipFill>
+              <a:ln w="171450">
+                <a:noFill/>
+              </a:ln>
+              <a:effectLst>
+                <a:glow>
+                  <a:schemeClr val="bg1"/>
+                </a:glow>
+                <a:outerShdw dist="12700" sx="1000" sy="1000" algn="ctr" rotWithShape="0">
+                  <a:srgbClr val="000000"/>
+                </a:outerShdw>
+                <a:softEdge rad="127000"/>
+              </a:effectLst>
+            </p:spPr>
+            <p:style>
+              <a:lnRef idx="2">
+                <a:schemeClr val="accent1">
+                  <a:shade val="15000"/>
+                </a:schemeClr>
+              </a:lnRef>
+              <a:fillRef idx="1">
+                <a:schemeClr val="accent1"/>
+              </a:fillRef>
+              <a:effectRef idx="0">
+                <a:schemeClr val="accent1"/>
+              </a:effectRef>
+              <a:fontRef idx="minor">
+                <a:schemeClr val="lt1"/>
+              </a:fontRef>
+            </p:style>
+            <p:txBody>
+              <a:bodyPr rtlCol="0" anchor="ctr"/>
+              <a:lstStyle/>
+              <a:p>
+                <a:pPr algn="ctr"/>
+                <a:endParaRPr lang="ja-JP" altLang="en-US"/>
+              </a:p>
+            </p:txBody>
+          </p:sp>
+          <p:grpSp>
+            <p:nvGrpSpPr>
+              <p:cNvPr id="22" name="グループ化 21">
+                <a:extLst>
+                  <a:ext uri="{FF2B5EF4-FFF2-40B4-BE49-F238E27FC236}">
+                    <a16:creationId xmlns:a16="http://schemas.microsoft.com/office/drawing/2014/main" id="{7B78C10D-215F-9FBA-C926-D463E81B77A8}"/>
+                  </a:ext>
+                </a:extLst>
+              </p:cNvPr>
+              <p:cNvGrpSpPr/>
+              <p:nvPr/>
+            </p:nvGrpSpPr>
+            <p:grpSpPr>
+              <a:xfrm>
+                <a:off x="311866" y="138682"/>
+                <a:ext cx="1329789" cy="1662236"/>
+                <a:chOff x="324896" y="199586"/>
+                <a:chExt cx="1294896" cy="1618620"/>
+              </a:xfrm>
+            </p:grpSpPr>
+            <p:sp>
+              <p:nvSpPr>
+                <p:cNvPr id="14" name="四角形: 角を丸くする 13">
+                  <a:extLst>
+                    <a:ext uri="{FF2B5EF4-FFF2-40B4-BE49-F238E27FC236}">
+                      <a16:creationId xmlns:a16="http://schemas.microsoft.com/office/drawing/2014/main" id="{7BE49C65-35FB-CCB8-3EF8-A7682257E5D4}"/>
+                    </a:ext>
+                  </a:extLst>
+                </p:cNvPr>
+                <p:cNvSpPr/>
+                <p:nvPr/>
+              </p:nvSpPr>
+              <p:spPr>
+                <a:xfrm>
+                  <a:off x="324896" y="199586"/>
+                  <a:ext cx="1294896" cy="1618620"/>
+                </a:xfrm>
+                <a:prstGeom prst="roundRect">
+                  <a:avLst>
+                    <a:gd name="adj" fmla="val 17073"/>
+                  </a:avLst>
+                </a:prstGeom>
+                <a:blipFill>
+                  <a:blip r:embed="rId3"/>
+                  <a:stretch>
+                    <a:fillRect/>
+                  </a:stretch>
+                </a:blipFill>
+                <a:ln>
+                  <a:noFill/>
+                </a:ln>
+              </p:spPr>
+              <p:style>
+                <a:lnRef idx="2">
+                  <a:schemeClr val="accent1">
+                    <a:shade val="15000"/>
+                  </a:schemeClr>
+                </a:lnRef>
+                <a:fillRef idx="1">
+                  <a:schemeClr val="accent1"/>
+                </a:fillRef>
+                <a:effectRef idx="0">
+                  <a:schemeClr val="accent1"/>
+                </a:effectRef>
+                <a:fontRef idx="minor">
+                  <a:schemeClr val="lt1"/>
+                </a:fontRef>
+              </p:style>
+              <p:txBody>
+                <a:bodyPr rtlCol="0" anchor="ctr"/>
+                <a:lstStyle/>
+                <a:p>
+                  <a:pPr algn="ctr"/>
+                  <a:endParaRPr kumimoji="1" lang="ja-JP" altLang="en-US"/>
+                </a:p>
+              </p:txBody>
+            </p:sp>
+            <p:pic>
+              <p:nvPicPr>
+                <p:cNvPr id="21" name="図 20" descr="ロゴ が含まれている画像&#10;&#10;AI 生成コンテンツは誤りを含む可能性があります。">
+                  <a:extLst>
+                    <a:ext uri="{FF2B5EF4-FFF2-40B4-BE49-F238E27FC236}">
+                      <a16:creationId xmlns:a16="http://schemas.microsoft.com/office/drawing/2014/main" id="{BF4EF96B-A979-DBDB-838B-690F07AFC21C}"/>
+                    </a:ext>
+                  </a:extLst>
+                </p:cNvPr>
+                <p:cNvPicPr>
+                  <a:picLocks noChangeAspect="1"/>
+                </p:cNvPicPr>
+                <p:nvPr/>
+              </p:nvPicPr>
+              <p:blipFill>
+                <a:blip r:embed="rId4">
+                  <a:extLst>
+                    <a:ext uri="{28A0092B-C50C-407E-A947-70E740481C1C}">
+                      <a14:useLocalDpi xmlns:a14="http://schemas.microsoft.com/office/drawing/2010/main" val="0"/>
+                    </a:ext>
+                  </a:extLst>
+                </a:blip>
+                <a:srcRect l="2225" t="9650" r="4370" b="12728"/>
+                <a:stretch>
+                  <a:fillRect/>
+                </a:stretch>
+              </p:blipFill>
+              <p:spPr>
+                <a:xfrm>
+                  <a:off x="471089" y="268171"/>
+                  <a:ext cx="1002507" cy="282809"/>
+                </a:xfrm>
+                <a:prstGeom prst="rect">
+                  <a:avLst/>
+                </a:prstGeom>
+              </p:spPr>
+            </p:pic>
+          </p:grpSp>
+        </p:grpSp>
+        <p:sp>
+          <p:nvSpPr>
+            <p:cNvPr id="31" name="四角形: 角を丸くする 30">
+              <a:extLst>
+                <a:ext uri="{FF2B5EF4-FFF2-40B4-BE49-F238E27FC236}">
+                  <a16:creationId xmlns:a16="http://schemas.microsoft.com/office/drawing/2014/main" id="{8AE70B54-09DF-0940-4AD7-13021B06A3DA}"/>
+                </a:ext>
+              </a:extLst>
+            </p:cNvPr>
+            <p:cNvSpPr/>
+            <p:nvPr/>
+          </p:nvSpPr>
+          <p:spPr>
+            <a:xfrm>
+              <a:off x="1859247" y="88439"/>
+              <a:ext cx="1153343" cy="438956"/>
+            </a:xfrm>
+            <a:prstGeom prst="roundRect">
+              <a:avLst>
+                <a:gd name="adj" fmla="val 6665"/>
+              </a:avLst>
+            </a:prstGeom>
+            <a:noFill/>
+            <a:ln>
+              <a:noFill/>
+            </a:ln>
+          </p:spPr>
+          <p:style>
+            <a:lnRef idx="2">
+              <a:schemeClr val="accent1">
+                <a:shade val="15000"/>
+              </a:schemeClr>
+            </a:lnRef>
+            <a:fillRef idx="1">
+              <a:schemeClr val="accent1"/>
+            </a:fillRef>
+            <a:effectRef idx="0">
+              <a:schemeClr val="accent1"/>
+            </a:effectRef>
+            <a:fontRef idx="minor">
+              <a:schemeClr val="lt1"/>
+            </a:fontRef>
+          </p:style>
+          <p:txBody>
+            <a:bodyPr lIns="0" tIns="0" rIns="0" bIns="0" rtlCol="0" anchor="ctr"/>
+            <a:lstStyle/>
+            <a:p>
+              <a:pPr algn="ctr"/>
+              <a:r>
+                <a:rPr kumimoji="1" lang="ja-JP" altLang="en-US" sz="1600" dirty="0">
+                  <a:solidFill>
+                    <a:schemeClr val="tx1"/>
+                  </a:solidFill>
+                  <a:latin typeface="UD デジタル 教科書体 NP-R" panose="02020400000000000000" pitchFamily="18" charset="-128"/>
+                  <a:ea typeface="UD デジタル 教科書体 NP-R" panose="02020400000000000000" pitchFamily="18" charset="-128"/>
+                </a:rPr>
+                <a:t>ありがとう</a:t>
+              </a:r>
+              <a:endParaRPr kumimoji="1" lang="ja-JP" altLang="en-US" sz="700" dirty="0">
+                <a:solidFill>
+                  <a:schemeClr val="tx1"/>
+                </a:solidFill>
+                <a:latin typeface="UD デジタル 教科書体 NP-R" panose="02020400000000000000" pitchFamily="18" charset="-128"/>
+                <a:ea typeface="UD デジタル 教科書体 NP-R" panose="02020400000000000000" pitchFamily="18" charset="-128"/>
+              </a:endParaRPr>
+            </a:p>
+          </p:txBody>
+        </p:sp>
+        <p:sp>
+          <p:nvSpPr>
+            <p:cNvPr id="4" name="四角形: 角を丸くする 3">
+              <a:extLst>
+                <a:ext uri="{FF2B5EF4-FFF2-40B4-BE49-F238E27FC236}">
+                  <a16:creationId xmlns:a16="http://schemas.microsoft.com/office/drawing/2014/main" id="{857DE5B7-BD2A-0FE2-72E4-3593114B38A0}"/>
+                </a:ext>
+              </a:extLst>
+            </p:cNvPr>
+            <p:cNvSpPr/>
+            <p:nvPr/>
+          </p:nvSpPr>
+          <p:spPr>
+            <a:xfrm>
+              <a:off x="215106" y="1793322"/>
+              <a:ext cx="2654348" cy="120703"/>
+            </a:xfrm>
+            <a:prstGeom prst="roundRect">
+              <a:avLst>
+                <a:gd name="adj" fmla="val 6665"/>
+              </a:avLst>
+            </a:prstGeom>
+            <a:noFill/>
+            <a:ln>
+              <a:noFill/>
+            </a:ln>
+          </p:spPr>
+          <p:style>
+            <a:lnRef idx="2">
+              <a:schemeClr val="accent1">
+                <a:shade val="15000"/>
+              </a:schemeClr>
+            </a:lnRef>
+            <a:fillRef idx="1">
+              <a:schemeClr val="accent1"/>
+            </a:fillRef>
+            <a:effectRef idx="0">
+              <a:schemeClr val="accent1"/>
+            </a:effectRef>
+            <a:fontRef idx="minor">
+              <a:schemeClr val="lt1"/>
+            </a:fontRef>
+          </p:style>
+          <p:txBody>
+            <a:bodyPr lIns="0" tIns="0" rIns="0" bIns="0" rtlCol="0" anchor="ctr"/>
+            <a:lstStyle/>
+            <a:p>
+              <a:r>
+                <a:rPr kumimoji="1" lang="ja-JP" altLang="en-US" sz="600" dirty="0">
+                  <a:solidFill>
+                    <a:schemeClr val="tx1"/>
+                  </a:solidFill>
+                  <a:latin typeface="UD デジタル 教科書体 NP-R" panose="020B0400000000000000" pitchFamily="18" charset="-128"/>
+                  <a:ea typeface="UD デジタル 教科書体 NP-R" panose="020B0400000000000000" pitchFamily="18" charset="-128"/>
+                </a:rPr>
+                <a:t>とけない、われない、かさばらない！　カードで送る新習慣＠名刺代わりに</a:t>
+              </a:r>
+            </a:p>
+          </p:txBody>
+        </p:sp>
+      </p:grpSp>
+    </p:spTree>
+    <p:extLst>
+      <p:ext uri="{BB962C8B-B14F-4D97-AF65-F5344CB8AC3E}">
+        <p14:creationId xmlns:p14="http://schemas.microsoft.com/office/powerpoint/2010/main" val="2671339504"/>
+      </p:ext>
+    </p:extLst>
+  </p:cSld>
+  <p:clrMapOvr>
+    <a:masterClrMapping/>
+  </p:clrMapOvr>
+</p:sld>
+</file>
+
+<file path=ppt/slides/slide5.xml><?xml version="1.0" encoding="utf-8"?>
 <p:sld xmlns:a="http://schemas.openxmlformats.org/drawingml/2006/main" xmlns:r="http://schemas.openxmlformats.org/officeDocument/2006/relationships" xmlns:p="http://schemas.openxmlformats.org/presentationml/2006/main">
   <p:cSld>
     <p:spTree>
@@ -6609,6 +8646,2594 @@
 </p:sld>
 </file>
 
+<file path=ppt/slides/slide6.xml><?xml version="1.0" encoding="utf-8"?>
+<p:sld xmlns:a="http://schemas.openxmlformats.org/drawingml/2006/main" xmlns:r="http://schemas.openxmlformats.org/officeDocument/2006/relationships" xmlns:p="http://schemas.openxmlformats.org/presentationml/2006/main">
+  <p:cSld>
+    <p:spTree>
+      <p:nvGrpSpPr>
+        <p:cNvPr id="1" name="">
+          <a:extLst>
+            <a:ext uri="{FF2B5EF4-FFF2-40B4-BE49-F238E27FC236}">
+              <a16:creationId xmlns:a16="http://schemas.microsoft.com/office/drawing/2014/main" id="{18FA1459-17D9-85D9-9278-7F69276F6FBF}"/>
+            </a:ext>
+          </a:extLst>
+        </p:cNvPr>
+        <p:cNvGrpSpPr/>
+        <p:nvPr/>
+      </p:nvGrpSpPr>
+      <p:grpSpPr>
+        <a:xfrm>
+          <a:off x="0" y="0"/>
+          <a:ext cx="0" cy="0"/>
+          <a:chOff x="0" y="0"/>
+          <a:chExt cx="0" cy="0"/>
+        </a:xfrm>
+      </p:grpSpPr>
+      <p:grpSp>
+        <p:nvGrpSpPr>
+          <p:cNvPr id="8" name="グループ化 7">
+            <a:extLst>
+              <a:ext uri="{FF2B5EF4-FFF2-40B4-BE49-F238E27FC236}">
+                <a16:creationId xmlns:a16="http://schemas.microsoft.com/office/drawing/2014/main" id="{93236DDD-285A-1337-CF8D-1B35141A82E0}"/>
+              </a:ext>
+            </a:extLst>
+          </p:cNvPr>
+          <p:cNvGrpSpPr/>
+          <p:nvPr/>
+        </p:nvGrpSpPr>
+        <p:grpSpPr>
+          <a:xfrm>
+            <a:off x="-2" y="-1"/>
+            <a:ext cx="3095626" cy="1944689"/>
+            <a:chOff x="-2" y="-1"/>
+            <a:chExt cx="3095626" cy="1944689"/>
+          </a:xfrm>
+        </p:grpSpPr>
+        <p:sp>
+          <p:nvSpPr>
+            <p:cNvPr id="2" name="四角形: 角を丸くする 1">
+              <a:extLst>
+                <a:ext uri="{FF2B5EF4-FFF2-40B4-BE49-F238E27FC236}">
+                  <a16:creationId xmlns:a16="http://schemas.microsoft.com/office/drawing/2014/main" id="{58EFEBD6-CB78-C46E-D547-18068F67CDF9}"/>
+                </a:ext>
+              </a:extLst>
+            </p:cNvPr>
+            <p:cNvSpPr/>
+            <p:nvPr/>
+          </p:nvSpPr>
+          <p:spPr>
+            <a:xfrm>
+              <a:off x="-2" y="-1"/>
+              <a:ext cx="3095625" cy="1944687"/>
+            </a:xfrm>
+            <a:prstGeom prst="roundRect">
+              <a:avLst>
+                <a:gd name="adj" fmla="val 0"/>
+              </a:avLst>
+            </a:prstGeom>
+            <a:solidFill>
+              <a:schemeClr val="bg1"/>
+            </a:solidFill>
+            <a:ln>
+              <a:noFill/>
+            </a:ln>
+          </p:spPr>
+          <p:style>
+            <a:lnRef idx="2">
+              <a:schemeClr val="accent1">
+                <a:shade val="15000"/>
+              </a:schemeClr>
+            </a:lnRef>
+            <a:fillRef idx="1">
+              <a:schemeClr val="accent1"/>
+            </a:fillRef>
+            <a:effectRef idx="0">
+              <a:schemeClr val="accent1"/>
+            </a:effectRef>
+            <a:fontRef idx="minor">
+              <a:schemeClr val="lt1"/>
+            </a:fontRef>
+          </p:style>
+          <p:txBody>
+            <a:bodyPr lIns="0" tIns="0" rIns="0" bIns="0" rtlCol="0" anchor="ctr"/>
+            <a:lstStyle/>
+            <a:p>
+              <a:pPr algn="ctr"/>
+              <a:endParaRPr kumimoji="1" lang="ja-JP" altLang="en-US" sz="600" dirty="0">
+                <a:solidFill>
+                  <a:schemeClr val="tx1"/>
+                </a:solidFill>
+                <a:latin typeface="UD デジタル 教科書体 NP-R" panose="020B0400000000000000" pitchFamily="18" charset="-128"/>
+                <a:ea typeface="UD デジタル 教科書体 NP-R" panose="020B0400000000000000" pitchFamily="18" charset="-128"/>
+              </a:endParaRPr>
+            </a:p>
+          </p:txBody>
+        </p:sp>
+        <p:sp>
+          <p:nvSpPr>
+            <p:cNvPr id="5" name="四角形: 角を丸くする 4">
+              <a:extLst>
+                <a:ext uri="{FF2B5EF4-FFF2-40B4-BE49-F238E27FC236}">
+                  <a16:creationId xmlns:a16="http://schemas.microsoft.com/office/drawing/2014/main" id="{23002933-6584-07DD-D17A-48B027D6B5B6}"/>
+                </a:ext>
+              </a:extLst>
+            </p:cNvPr>
+            <p:cNvSpPr/>
+            <p:nvPr/>
+          </p:nvSpPr>
+          <p:spPr>
+            <a:xfrm>
+              <a:off x="-1" y="5074"/>
+              <a:ext cx="3095625" cy="1939614"/>
+            </a:xfrm>
+            <a:prstGeom prst="roundRect">
+              <a:avLst>
+                <a:gd name="adj" fmla="val 13559"/>
+              </a:avLst>
+            </a:prstGeom>
+            <a:noFill/>
+            <a:ln w="6350">
+              <a:noFill/>
+            </a:ln>
+            <a:effectLst/>
+          </p:spPr>
+          <p:style>
+            <a:lnRef idx="2">
+              <a:schemeClr val="accent1">
+                <a:shade val="15000"/>
+              </a:schemeClr>
+            </a:lnRef>
+            <a:fillRef idx="1">
+              <a:schemeClr val="accent1"/>
+            </a:fillRef>
+            <a:effectRef idx="0">
+              <a:schemeClr val="accent1"/>
+            </a:effectRef>
+            <a:fontRef idx="minor">
+              <a:schemeClr val="lt1"/>
+            </a:fontRef>
+          </p:style>
+          <p:txBody>
+            <a:bodyPr wrap="square" lIns="72000" tIns="36000" rIns="72000" bIns="0" rtlCol="0" anchor="b">
+              <a:noAutofit/>
+            </a:bodyPr>
+            <a:lstStyle/>
+            <a:p>
+              <a:pPr algn="ctr"/>
+              <a:endParaRPr kumimoji="1" lang="ja-JP" altLang="en-US" sz="600" dirty="0">
+                <a:solidFill>
+                  <a:schemeClr val="tx1"/>
+                </a:solidFill>
+                <a:latin typeface="UD デジタル 教科書体 NP-R" panose="02020400000000000000" pitchFamily="18" charset="-128"/>
+                <a:ea typeface="UD デジタル 教科書体 NP-R" panose="02020400000000000000" pitchFamily="18" charset="-128"/>
+              </a:endParaRPr>
+            </a:p>
+          </p:txBody>
+        </p:sp>
+        <p:grpSp>
+          <p:nvGrpSpPr>
+            <p:cNvPr id="3" name="グループ化 2">
+              <a:extLst>
+                <a:ext uri="{FF2B5EF4-FFF2-40B4-BE49-F238E27FC236}">
+                  <a16:creationId xmlns:a16="http://schemas.microsoft.com/office/drawing/2014/main" id="{292F21E3-0AE7-575E-331A-5B71902D0775}"/>
+                </a:ext>
+              </a:extLst>
+            </p:cNvPr>
+            <p:cNvGrpSpPr/>
+            <p:nvPr/>
+          </p:nvGrpSpPr>
+          <p:grpSpPr>
+            <a:xfrm>
+              <a:off x="26424" y="35311"/>
+              <a:ext cx="1781026" cy="1777008"/>
+              <a:chOff x="4761" y="0"/>
+              <a:chExt cx="1944000" cy="1944687"/>
+            </a:xfrm>
+          </p:grpSpPr>
+          <p:sp>
+            <p:nvSpPr>
+              <p:cNvPr id="7" name="四角形: 角を丸くする 6">
+                <a:extLst>
+                  <a:ext uri="{FF2B5EF4-FFF2-40B4-BE49-F238E27FC236}">
+                    <a16:creationId xmlns:a16="http://schemas.microsoft.com/office/drawing/2014/main" id="{1A6958F3-3E64-8F85-88E2-F63319564325}"/>
+                  </a:ext>
+                </a:extLst>
+              </p:cNvPr>
+              <p:cNvSpPr/>
+              <p:nvPr/>
+            </p:nvSpPr>
+            <p:spPr>
+              <a:xfrm>
+                <a:off x="4761" y="0"/>
+                <a:ext cx="1944000" cy="1944687"/>
+              </a:xfrm>
+              <a:prstGeom prst="roundRect">
+                <a:avLst>
+                  <a:gd name="adj" fmla="val 8828"/>
+                </a:avLst>
+              </a:prstGeom>
+              <a:blipFill>
+                <a:blip r:embed="rId2"/>
+                <a:stretch>
+                  <a:fillRect/>
+                </a:stretch>
+              </a:blipFill>
+              <a:ln w="171450">
+                <a:noFill/>
+              </a:ln>
+              <a:effectLst>
+                <a:glow>
+                  <a:schemeClr val="bg1"/>
+                </a:glow>
+                <a:outerShdw dist="12700" sx="1000" sy="1000" algn="ctr" rotWithShape="0">
+                  <a:srgbClr val="000000"/>
+                </a:outerShdw>
+                <a:softEdge rad="127000"/>
+              </a:effectLst>
+            </p:spPr>
+            <p:style>
+              <a:lnRef idx="2">
+                <a:schemeClr val="accent1">
+                  <a:shade val="15000"/>
+                </a:schemeClr>
+              </a:lnRef>
+              <a:fillRef idx="1">
+                <a:schemeClr val="accent1"/>
+              </a:fillRef>
+              <a:effectRef idx="0">
+                <a:schemeClr val="accent1"/>
+              </a:effectRef>
+              <a:fontRef idx="minor">
+                <a:schemeClr val="lt1"/>
+              </a:fontRef>
+            </p:style>
+            <p:txBody>
+              <a:bodyPr rtlCol="0" anchor="ctr"/>
+              <a:lstStyle/>
+              <a:p>
+                <a:pPr algn="ctr"/>
+                <a:endParaRPr lang="ja-JP" altLang="en-US"/>
+              </a:p>
+            </p:txBody>
+          </p:sp>
+          <p:grpSp>
+            <p:nvGrpSpPr>
+              <p:cNvPr id="22" name="グループ化 21">
+                <a:extLst>
+                  <a:ext uri="{FF2B5EF4-FFF2-40B4-BE49-F238E27FC236}">
+                    <a16:creationId xmlns:a16="http://schemas.microsoft.com/office/drawing/2014/main" id="{25B6132A-78E9-23AB-107E-2F21900B8BB3}"/>
+                  </a:ext>
+                </a:extLst>
+              </p:cNvPr>
+              <p:cNvGrpSpPr/>
+              <p:nvPr/>
+            </p:nvGrpSpPr>
+            <p:grpSpPr>
+              <a:xfrm>
+                <a:off x="311866" y="138682"/>
+                <a:ext cx="1329789" cy="1662236"/>
+                <a:chOff x="324896" y="199586"/>
+                <a:chExt cx="1294896" cy="1618620"/>
+              </a:xfrm>
+            </p:grpSpPr>
+            <p:sp>
+              <p:nvSpPr>
+                <p:cNvPr id="14" name="四角形: 角を丸くする 13">
+                  <a:extLst>
+                    <a:ext uri="{FF2B5EF4-FFF2-40B4-BE49-F238E27FC236}">
+                      <a16:creationId xmlns:a16="http://schemas.microsoft.com/office/drawing/2014/main" id="{6B83ABC1-2149-DA8C-5293-DA08407BBBF0}"/>
+                    </a:ext>
+                  </a:extLst>
+                </p:cNvPr>
+                <p:cNvSpPr/>
+                <p:nvPr/>
+              </p:nvSpPr>
+              <p:spPr>
+                <a:xfrm>
+                  <a:off x="324896" y="199586"/>
+                  <a:ext cx="1294896" cy="1618620"/>
+                </a:xfrm>
+                <a:prstGeom prst="roundRect">
+                  <a:avLst>
+                    <a:gd name="adj" fmla="val 17073"/>
+                  </a:avLst>
+                </a:prstGeom>
+                <a:blipFill>
+                  <a:blip r:embed="rId3"/>
+                  <a:stretch>
+                    <a:fillRect/>
+                  </a:stretch>
+                </a:blipFill>
+                <a:ln>
+                  <a:noFill/>
+                </a:ln>
+              </p:spPr>
+              <p:style>
+                <a:lnRef idx="2">
+                  <a:schemeClr val="accent1">
+                    <a:shade val="15000"/>
+                  </a:schemeClr>
+                </a:lnRef>
+                <a:fillRef idx="1">
+                  <a:schemeClr val="accent1"/>
+                </a:fillRef>
+                <a:effectRef idx="0">
+                  <a:schemeClr val="accent1"/>
+                </a:effectRef>
+                <a:fontRef idx="minor">
+                  <a:schemeClr val="lt1"/>
+                </a:fontRef>
+              </p:style>
+              <p:txBody>
+                <a:bodyPr rtlCol="0" anchor="ctr"/>
+                <a:lstStyle/>
+                <a:p>
+                  <a:pPr algn="ctr"/>
+                  <a:endParaRPr kumimoji="1" lang="ja-JP" altLang="en-US"/>
+                </a:p>
+              </p:txBody>
+            </p:sp>
+            <p:pic>
+              <p:nvPicPr>
+                <p:cNvPr id="21" name="図 20" descr="ロゴ が含まれている画像&#10;&#10;AI 生成コンテンツは誤りを含む可能性があります。">
+                  <a:extLst>
+                    <a:ext uri="{FF2B5EF4-FFF2-40B4-BE49-F238E27FC236}">
+                      <a16:creationId xmlns:a16="http://schemas.microsoft.com/office/drawing/2014/main" id="{051305E7-5892-6A37-5A5C-78FEFA779A5B}"/>
+                    </a:ext>
+                  </a:extLst>
+                </p:cNvPr>
+                <p:cNvPicPr>
+                  <a:picLocks noChangeAspect="1"/>
+                </p:cNvPicPr>
+                <p:nvPr/>
+              </p:nvPicPr>
+              <p:blipFill>
+                <a:blip r:embed="rId4">
+                  <a:extLst>
+                    <a:ext uri="{28A0092B-C50C-407E-A947-70E740481C1C}">
+                      <a14:useLocalDpi xmlns:a14="http://schemas.microsoft.com/office/drawing/2010/main" val="0"/>
+                    </a:ext>
+                  </a:extLst>
+                </a:blip>
+                <a:srcRect l="2225" t="9650" r="4370" b="12728"/>
+                <a:stretch>
+                  <a:fillRect/>
+                </a:stretch>
+              </p:blipFill>
+              <p:spPr>
+                <a:xfrm>
+                  <a:off x="471089" y="268171"/>
+                  <a:ext cx="1002507" cy="282809"/>
+                </a:xfrm>
+                <a:prstGeom prst="rect">
+                  <a:avLst/>
+                </a:prstGeom>
+              </p:spPr>
+            </p:pic>
+          </p:grpSp>
+        </p:grpSp>
+        <p:sp>
+          <p:nvSpPr>
+            <p:cNvPr id="31" name="四角形: 角を丸くする 30">
+              <a:extLst>
+                <a:ext uri="{FF2B5EF4-FFF2-40B4-BE49-F238E27FC236}">
+                  <a16:creationId xmlns:a16="http://schemas.microsoft.com/office/drawing/2014/main" id="{165E1AFD-9F6E-3535-B2B8-A2758099B7D3}"/>
+                </a:ext>
+              </a:extLst>
+            </p:cNvPr>
+            <p:cNvSpPr/>
+            <p:nvPr/>
+          </p:nvSpPr>
+          <p:spPr>
+            <a:xfrm>
+              <a:off x="1859247" y="88439"/>
+              <a:ext cx="1153343" cy="438956"/>
+            </a:xfrm>
+            <a:prstGeom prst="roundRect">
+              <a:avLst>
+                <a:gd name="adj" fmla="val 6665"/>
+              </a:avLst>
+            </a:prstGeom>
+            <a:noFill/>
+            <a:ln>
+              <a:noFill/>
+            </a:ln>
+          </p:spPr>
+          <p:style>
+            <a:lnRef idx="2">
+              <a:schemeClr val="accent1">
+                <a:shade val="15000"/>
+              </a:schemeClr>
+            </a:lnRef>
+            <a:fillRef idx="1">
+              <a:schemeClr val="accent1"/>
+            </a:fillRef>
+            <a:effectRef idx="0">
+              <a:schemeClr val="accent1"/>
+            </a:effectRef>
+            <a:fontRef idx="minor">
+              <a:schemeClr val="lt1"/>
+            </a:fontRef>
+          </p:style>
+          <p:txBody>
+            <a:bodyPr lIns="0" tIns="0" rIns="0" bIns="0" rtlCol="0" anchor="ctr"/>
+            <a:lstStyle/>
+            <a:p>
+              <a:pPr algn="ctr"/>
+              <a:r>
+                <a:rPr kumimoji="1" lang="ja-JP" altLang="en-US" sz="1600" dirty="0">
+                  <a:solidFill>
+                    <a:schemeClr val="tx1"/>
+                  </a:solidFill>
+                  <a:latin typeface="UD デジタル 教科書体 NP-R" panose="02020400000000000000" pitchFamily="18" charset="-128"/>
+                  <a:ea typeface="UD デジタル 教科書体 NP-R" panose="02020400000000000000" pitchFamily="18" charset="-128"/>
+                </a:rPr>
+                <a:t>ありがとう</a:t>
+              </a:r>
+              <a:endParaRPr kumimoji="1" lang="ja-JP" altLang="en-US" sz="700" dirty="0">
+                <a:solidFill>
+                  <a:schemeClr val="tx1"/>
+                </a:solidFill>
+                <a:latin typeface="UD デジタル 教科書体 NP-R" panose="02020400000000000000" pitchFamily="18" charset="-128"/>
+                <a:ea typeface="UD デジタル 教科書体 NP-R" panose="02020400000000000000" pitchFamily="18" charset="-128"/>
+              </a:endParaRPr>
+            </a:p>
+          </p:txBody>
+        </p:sp>
+        <p:sp>
+          <p:nvSpPr>
+            <p:cNvPr id="4" name="四角形: 角を丸くする 3">
+              <a:extLst>
+                <a:ext uri="{FF2B5EF4-FFF2-40B4-BE49-F238E27FC236}">
+                  <a16:creationId xmlns:a16="http://schemas.microsoft.com/office/drawing/2014/main" id="{658DCB69-62DE-182A-0575-23354A778B21}"/>
+                </a:ext>
+              </a:extLst>
+            </p:cNvPr>
+            <p:cNvSpPr/>
+            <p:nvPr/>
+          </p:nvSpPr>
+          <p:spPr>
+            <a:xfrm>
+              <a:off x="215106" y="1793322"/>
+              <a:ext cx="2654348" cy="120703"/>
+            </a:xfrm>
+            <a:prstGeom prst="roundRect">
+              <a:avLst>
+                <a:gd name="adj" fmla="val 6665"/>
+              </a:avLst>
+            </a:prstGeom>
+            <a:noFill/>
+            <a:ln>
+              <a:noFill/>
+            </a:ln>
+          </p:spPr>
+          <p:style>
+            <a:lnRef idx="2">
+              <a:schemeClr val="accent1">
+                <a:shade val="15000"/>
+              </a:schemeClr>
+            </a:lnRef>
+            <a:fillRef idx="1">
+              <a:schemeClr val="accent1"/>
+            </a:fillRef>
+            <a:effectRef idx="0">
+              <a:schemeClr val="accent1"/>
+            </a:effectRef>
+            <a:fontRef idx="minor">
+              <a:schemeClr val="lt1"/>
+            </a:fontRef>
+          </p:style>
+          <p:txBody>
+            <a:bodyPr lIns="0" tIns="0" rIns="0" bIns="0" rtlCol="0" anchor="ctr"/>
+            <a:lstStyle/>
+            <a:p>
+              <a:r>
+                <a:rPr kumimoji="1" lang="ja-JP" altLang="en-US" sz="600" dirty="0">
+                  <a:solidFill>
+                    <a:schemeClr val="tx1"/>
+                  </a:solidFill>
+                  <a:latin typeface="UD デジタル 教科書体 NP-R" panose="020B0400000000000000" pitchFamily="18" charset="-128"/>
+                  <a:ea typeface="UD デジタル 教科書体 NP-R" panose="020B0400000000000000" pitchFamily="18" charset="-128"/>
+                </a:rPr>
+                <a:t>とけない、われない、かさばらない！　カードで送る新習慣＠名刺代わりに</a:t>
+              </a:r>
+            </a:p>
+          </p:txBody>
+        </p:sp>
+      </p:grpSp>
+      <p:grpSp>
+        <p:nvGrpSpPr>
+          <p:cNvPr id="6" name="グループ化 5">
+            <a:extLst>
+              <a:ext uri="{FF2B5EF4-FFF2-40B4-BE49-F238E27FC236}">
+                <a16:creationId xmlns:a16="http://schemas.microsoft.com/office/drawing/2014/main" id="{B044A483-B940-EF71-8BB6-BCC42A5FB92A}"/>
+              </a:ext>
+            </a:extLst>
+          </p:cNvPr>
+          <p:cNvGrpSpPr/>
+          <p:nvPr/>
+        </p:nvGrpSpPr>
+        <p:grpSpPr>
+          <a:xfrm>
+            <a:off x="1828650" y="499856"/>
+            <a:ext cx="1240551" cy="1240551"/>
+            <a:chOff x="1007265" y="2577396"/>
+            <a:chExt cx="962823" cy="928507"/>
+          </a:xfrm>
+        </p:grpSpPr>
+        <p:sp>
+          <p:nvSpPr>
+            <p:cNvPr id="9" name="四角形: 角を丸くする 8">
+              <a:extLst>
+                <a:ext uri="{FF2B5EF4-FFF2-40B4-BE49-F238E27FC236}">
+                  <a16:creationId xmlns:a16="http://schemas.microsoft.com/office/drawing/2014/main" id="{520481E7-F3C9-B492-8922-8DCE34C93C2E}"/>
+                </a:ext>
+              </a:extLst>
+            </p:cNvPr>
+            <p:cNvSpPr/>
+            <p:nvPr/>
+          </p:nvSpPr>
+          <p:spPr>
+            <a:xfrm>
+              <a:off x="1007265" y="2577396"/>
+              <a:ext cx="962823" cy="928507"/>
+            </a:xfrm>
+            <a:prstGeom prst="roundRect">
+              <a:avLst>
+                <a:gd name="adj" fmla="val 6665"/>
+              </a:avLst>
+            </a:prstGeom>
+            <a:solidFill>
+              <a:schemeClr val="bg1"/>
+            </a:solidFill>
+            <a:ln>
+              <a:noFill/>
+            </a:ln>
+          </p:spPr>
+          <p:style>
+            <a:lnRef idx="2">
+              <a:schemeClr val="accent1">
+                <a:shade val="15000"/>
+              </a:schemeClr>
+            </a:lnRef>
+            <a:fillRef idx="1">
+              <a:schemeClr val="accent1"/>
+            </a:fillRef>
+            <a:effectRef idx="0">
+              <a:schemeClr val="accent1"/>
+            </a:effectRef>
+            <a:fontRef idx="minor">
+              <a:schemeClr val="lt1"/>
+            </a:fontRef>
+          </p:style>
+          <p:txBody>
+            <a:bodyPr rtlCol="0" anchor="ctr"/>
+            <a:lstStyle/>
+            <a:p>
+              <a:pPr algn="ctr"/>
+              <a:endParaRPr kumimoji="1" lang="ja-JP" altLang="en-US"/>
+            </a:p>
+          </p:txBody>
+        </p:sp>
+        <p:pic>
+          <p:nvPicPr>
+            <p:cNvPr id="11" name="図 10" descr="QR コード&#10;&#10;AI 生成コンテンツは誤りを含む可能性があります。">
+              <a:extLst>
+                <a:ext uri="{FF2B5EF4-FFF2-40B4-BE49-F238E27FC236}">
+                  <a16:creationId xmlns:a16="http://schemas.microsoft.com/office/drawing/2014/main" id="{859F6665-21AD-1841-2A0A-1AA3B00F35E0}"/>
+                </a:ext>
+              </a:extLst>
+            </p:cNvPr>
+            <p:cNvPicPr>
+              <a:picLocks noChangeAspect="1"/>
+            </p:cNvPicPr>
+            <p:nvPr/>
+          </p:nvPicPr>
+          <p:blipFill>
+            <a:blip r:embed="rId5"/>
+            <a:stretch>
+              <a:fillRect/>
+            </a:stretch>
+          </p:blipFill>
+          <p:spPr>
+            <a:xfrm>
+              <a:off x="1042659" y="2598008"/>
+              <a:ext cx="883492" cy="878787"/>
+            </a:xfrm>
+            <a:prstGeom prst="rect">
+              <a:avLst/>
+            </a:prstGeom>
+          </p:spPr>
+        </p:pic>
+      </p:grpSp>
+    </p:spTree>
+    <p:extLst>
+      <p:ext uri="{BB962C8B-B14F-4D97-AF65-F5344CB8AC3E}">
+        <p14:creationId xmlns:p14="http://schemas.microsoft.com/office/powerpoint/2010/main" val="350676158"/>
+      </p:ext>
+    </p:extLst>
+  </p:cSld>
+  <p:clrMapOvr>
+    <a:masterClrMapping/>
+  </p:clrMapOvr>
+</p:sld>
+</file>
+
+<file path=ppt/slides/slide7.xml><?xml version="1.0" encoding="utf-8"?>
+<p:sld xmlns:a="http://schemas.openxmlformats.org/drawingml/2006/main" xmlns:r="http://schemas.openxmlformats.org/officeDocument/2006/relationships" xmlns:p="http://schemas.openxmlformats.org/presentationml/2006/main">
+  <p:cSld>
+    <p:spTree>
+      <p:nvGrpSpPr>
+        <p:cNvPr id="1" name="">
+          <a:extLst>
+            <a:ext uri="{FF2B5EF4-FFF2-40B4-BE49-F238E27FC236}">
+              <a16:creationId xmlns:a16="http://schemas.microsoft.com/office/drawing/2014/main" id="{6791C294-36D8-96D5-EF00-B0FECC7C5DA8}"/>
+            </a:ext>
+          </a:extLst>
+        </p:cNvPr>
+        <p:cNvGrpSpPr/>
+        <p:nvPr/>
+      </p:nvGrpSpPr>
+      <p:grpSpPr>
+        <a:xfrm>
+          <a:off x="0" y="0"/>
+          <a:ext cx="0" cy="0"/>
+          <a:chOff x="0" y="0"/>
+          <a:chExt cx="0" cy="0"/>
+        </a:xfrm>
+      </p:grpSpPr>
+      <p:grpSp>
+        <p:nvGrpSpPr>
+          <p:cNvPr id="8" name="グループ化 7">
+            <a:extLst>
+              <a:ext uri="{FF2B5EF4-FFF2-40B4-BE49-F238E27FC236}">
+                <a16:creationId xmlns:a16="http://schemas.microsoft.com/office/drawing/2014/main" id="{713A7771-48AF-D4CF-F408-74217F1D4303}"/>
+              </a:ext>
+            </a:extLst>
+          </p:cNvPr>
+          <p:cNvGrpSpPr/>
+          <p:nvPr/>
+        </p:nvGrpSpPr>
+        <p:grpSpPr>
+          <a:xfrm>
+            <a:off x="-2" y="-1"/>
+            <a:ext cx="3095626" cy="1944689"/>
+            <a:chOff x="-2" y="-1"/>
+            <a:chExt cx="3095626" cy="1944689"/>
+          </a:xfrm>
+        </p:grpSpPr>
+        <p:sp>
+          <p:nvSpPr>
+            <p:cNvPr id="2" name="四角形: 角を丸くする 1">
+              <a:extLst>
+                <a:ext uri="{FF2B5EF4-FFF2-40B4-BE49-F238E27FC236}">
+                  <a16:creationId xmlns:a16="http://schemas.microsoft.com/office/drawing/2014/main" id="{8D7AA57F-EDA0-928A-F927-8D51F6170562}"/>
+                </a:ext>
+              </a:extLst>
+            </p:cNvPr>
+            <p:cNvSpPr/>
+            <p:nvPr/>
+          </p:nvSpPr>
+          <p:spPr>
+            <a:xfrm>
+              <a:off x="-2" y="-1"/>
+              <a:ext cx="3095625" cy="1944687"/>
+            </a:xfrm>
+            <a:prstGeom prst="roundRect">
+              <a:avLst>
+                <a:gd name="adj" fmla="val 0"/>
+              </a:avLst>
+            </a:prstGeom>
+            <a:solidFill>
+              <a:schemeClr val="bg1"/>
+            </a:solidFill>
+            <a:ln>
+              <a:noFill/>
+            </a:ln>
+          </p:spPr>
+          <p:style>
+            <a:lnRef idx="2">
+              <a:schemeClr val="accent1">
+                <a:shade val="15000"/>
+              </a:schemeClr>
+            </a:lnRef>
+            <a:fillRef idx="1">
+              <a:schemeClr val="accent1"/>
+            </a:fillRef>
+            <a:effectRef idx="0">
+              <a:schemeClr val="accent1"/>
+            </a:effectRef>
+            <a:fontRef idx="minor">
+              <a:schemeClr val="lt1"/>
+            </a:fontRef>
+          </p:style>
+          <p:txBody>
+            <a:bodyPr lIns="0" tIns="0" rIns="0" bIns="0" rtlCol="0" anchor="ctr"/>
+            <a:lstStyle/>
+            <a:p>
+              <a:pPr algn="ctr"/>
+              <a:endParaRPr kumimoji="1" lang="ja-JP" altLang="en-US" sz="600" dirty="0">
+                <a:solidFill>
+                  <a:schemeClr val="tx1"/>
+                </a:solidFill>
+                <a:latin typeface="UD デジタル 教科書体 NP-R" panose="020B0400000000000000" pitchFamily="18" charset="-128"/>
+                <a:ea typeface="UD デジタル 教科書体 NP-R" panose="020B0400000000000000" pitchFamily="18" charset="-128"/>
+              </a:endParaRPr>
+            </a:p>
+          </p:txBody>
+        </p:sp>
+        <p:sp>
+          <p:nvSpPr>
+            <p:cNvPr id="5" name="四角形: 角を丸くする 4">
+              <a:extLst>
+                <a:ext uri="{FF2B5EF4-FFF2-40B4-BE49-F238E27FC236}">
+                  <a16:creationId xmlns:a16="http://schemas.microsoft.com/office/drawing/2014/main" id="{83B8F8C6-C104-F831-71FB-6689FEB4541B}"/>
+                </a:ext>
+              </a:extLst>
+            </p:cNvPr>
+            <p:cNvSpPr/>
+            <p:nvPr/>
+          </p:nvSpPr>
+          <p:spPr>
+            <a:xfrm>
+              <a:off x="-1" y="5074"/>
+              <a:ext cx="3095625" cy="1939614"/>
+            </a:xfrm>
+            <a:prstGeom prst="roundRect">
+              <a:avLst>
+                <a:gd name="adj" fmla="val 13559"/>
+              </a:avLst>
+            </a:prstGeom>
+            <a:noFill/>
+            <a:ln w="6350">
+              <a:noFill/>
+            </a:ln>
+            <a:effectLst/>
+          </p:spPr>
+          <p:style>
+            <a:lnRef idx="2">
+              <a:schemeClr val="accent1">
+                <a:shade val="15000"/>
+              </a:schemeClr>
+            </a:lnRef>
+            <a:fillRef idx="1">
+              <a:schemeClr val="accent1"/>
+            </a:fillRef>
+            <a:effectRef idx="0">
+              <a:schemeClr val="accent1"/>
+            </a:effectRef>
+            <a:fontRef idx="minor">
+              <a:schemeClr val="lt1"/>
+            </a:fontRef>
+          </p:style>
+          <p:txBody>
+            <a:bodyPr wrap="square" lIns="72000" tIns="36000" rIns="72000" bIns="0" rtlCol="0" anchor="b">
+              <a:noAutofit/>
+            </a:bodyPr>
+            <a:lstStyle/>
+            <a:p>
+              <a:pPr algn="ctr"/>
+              <a:endParaRPr kumimoji="1" lang="ja-JP" altLang="en-US" sz="600" dirty="0">
+                <a:solidFill>
+                  <a:schemeClr val="tx1"/>
+                </a:solidFill>
+                <a:latin typeface="UD デジタル 教科書体 NP-R" panose="02020400000000000000" pitchFamily="18" charset="-128"/>
+                <a:ea typeface="UD デジタル 教科書体 NP-R" panose="02020400000000000000" pitchFamily="18" charset="-128"/>
+              </a:endParaRPr>
+            </a:p>
+          </p:txBody>
+        </p:sp>
+        <p:grpSp>
+          <p:nvGrpSpPr>
+            <p:cNvPr id="3" name="グループ化 2">
+              <a:extLst>
+                <a:ext uri="{FF2B5EF4-FFF2-40B4-BE49-F238E27FC236}">
+                  <a16:creationId xmlns:a16="http://schemas.microsoft.com/office/drawing/2014/main" id="{D7DCB010-EA13-6191-11C9-BE0A535F7C28}"/>
+                </a:ext>
+              </a:extLst>
+            </p:cNvPr>
+            <p:cNvGrpSpPr/>
+            <p:nvPr/>
+          </p:nvGrpSpPr>
+          <p:grpSpPr>
+            <a:xfrm>
+              <a:off x="26424" y="35311"/>
+              <a:ext cx="1781026" cy="1777008"/>
+              <a:chOff x="4761" y="0"/>
+              <a:chExt cx="1944000" cy="1944687"/>
+            </a:xfrm>
+          </p:grpSpPr>
+          <p:sp>
+            <p:nvSpPr>
+              <p:cNvPr id="7" name="四角形: 角を丸くする 6">
+                <a:extLst>
+                  <a:ext uri="{FF2B5EF4-FFF2-40B4-BE49-F238E27FC236}">
+                    <a16:creationId xmlns:a16="http://schemas.microsoft.com/office/drawing/2014/main" id="{E836896D-5EC4-773B-DAC8-1AEE9EC5FFFB}"/>
+                  </a:ext>
+                </a:extLst>
+              </p:cNvPr>
+              <p:cNvSpPr/>
+              <p:nvPr/>
+            </p:nvSpPr>
+            <p:spPr>
+              <a:xfrm>
+                <a:off x="4761" y="0"/>
+                <a:ext cx="1944000" cy="1944687"/>
+              </a:xfrm>
+              <a:prstGeom prst="roundRect">
+                <a:avLst>
+                  <a:gd name="adj" fmla="val 8828"/>
+                </a:avLst>
+              </a:prstGeom>
+              <a:blipFill>
+                <a:blip r:embed="rId2"/>
+                <a:stretch>
+                  <a:fillRect/>
+                </a:stretch>
+              </a:blipFill>
+              <a:ln w="171450">
+                <a:noFill/>
+              </a:ln>
+              <a:effectLst>
+                <a:glow>
+                  <a:schemeClr val="bg1"/>
+                </a:glow>
+                <a:outerShdw dist="12700" sx="1000" sy="1000" algn="ctr" rotWithShape="0">
+                  <a:srgbClr val="000000"/>
+                </a:outerShdw>
+                <a:softEdge rad="127000"/>
+              </a:effectLst>
+            </p:spPr>
+            <p:style>
+              <a:lnRef idx="2">
+                <a:schemeClr val="accent1">
+                  <a:shade val="15000"/>
+                </a:schemeClr>
+              </a:lnRef>
+              <a:fillRef idx="1">
+                <a:schemeClr val="accent1"/>
+              </a:fillRef>
+              <a:effectRef idx="0">
+                <a:schemeClr val="accent1"/>
+              </a:effectRef>
+              <a:fontRef idx="minor">
+                <a:schemeClr val="lt1"/>
+              </a:fontRef>
+            </p:style>
+            <p:txBody>
+              <a:bodyPr rtlCol="0" anchor="ctr"/>
+              <a:lstStyle/>
+              <a:p>
+                <a:pPr algn="ctr"/>
+                <a:endParaRPr lang="ja-JP" altLang="en-US"/>
+              </a:p>
+            </p:txBody>
+          </p:sp>
+          <p:grpSp>
+            <p:nvGrpSpPr>
+              <p:cNvPr id="22" name="グループ化 21">
+                <a:extLst>
+                  <a:ext uri="{FF2B5EF4-FFF2-40B4-BE49-F238E27FC236}">
+                    <a16:creationId xmlns:a16="http://schemas.microsoft.com/office/drawing/2014/main" id="{ED3E3F31-AAD3-8763-7C83-D77BE356FB5C}"/>
+                  </a:ext>
+                </a:extLst>
+              </p:cNvPr>
+              <p:cNvGrpSpPr/>
+              <p:nvPr/>
+            </p:nvGrpSpPr>
+            <p:grpSpPr>
+              <a:xfrm>
+                <a:off x="311866" y="138682"/>
+                <a:ext cx="1329789" cy="1662236"/>
+                <a:chOff x="324896" y="199586"/>
+                <a:chExt cx="1294896" cy="1618620"/>
+              </a:xfrm>
+            </p:grpSpPr>
+            <p:sp>
+              <p:nvSpPr>
+                <p:cNvPr id="14" name="四角形: 角を丸くする 13">
+                  <a:extLst>
+                    <a:ext uri="{FF2B5EF4-FFF2-40B4-BE49-F238E27FC236}">
+                      <a16:creationId xmlns:a16="http://schemas.microsoft.com/office/drawing/2014/main" id="{C59B615F-96E3-C9BE-BFC7-B6F84C20A8A3}"/>
+                    </a:ext>
+                  </a:extLst>
+                </p:cNvPr>
+                <p:cNvSpPr/>
+                <p:nvPr/>
+              </p:nvSpPr>
+              <p:spPr>
+                <a:xfrm>
+                  <a:off x="324896" y="199586"/>
+                  <a:ext cx="1294896" cy="1618620"/>
+                </a:xfrm>
+                <a:prstGeom prst="roundRect">
+                  <a:avLst>
+                    <a:gd name="adj" fmla="val 17073"/>
+                  </a:avLst>
+                </a:prstGeom>
+                <a:blipFill>
+                  <a:blip r:embed="rId3"/>
+                  <a:stretch>
+                    <a:fillRect/>
+                  </a:stretch>
+                </a:blipFill>
+                <a:ln>
+                  <a:noFill/>
+                </a:ln>
+              </p:spPr>
+              <p:style>
+                <a:lnRef idx="2">
+                  <a:schemeClr val="accent1">
+                    <a:shade val="15000"/>
+                  </a:schemeClr>
+                </a:lnRef>
+                <a:fillRef idx="1">
+                  <a:schemeClr val="accent1"/>
+                </a:fillRef>
+                <a:effectRef idx="0">
+                  <a:schemeClr val="accent1"/>
+                </a:effectRef>
+                <a:fontRef idx="minor">
+                  <a:schemeClr val="lt1"/>
+                </a:fontRef>
+              </p:style>
+              <p:txBody>
+                <a:bodyPr rtlCol="0" anchor="ctr"/>
+                <a:lstStyle/>
+                <a:p>
+                  <a:pPr algn="ctr"/>
+                  <a:endParaRPr kumimoji="1" lang="ja-JP" altLang="en-US"/>
+                </a:p>
+              </p:txBody>
+            </p:sp>
+            <p:pic>
+              <p:nvPicPr>
+                <p:cNvPr id="21" name="図 20" descr="ロゴ が含まれている画像&#10;&#10;AI 生成コンテンツは誤りを含む可能性があります。">
+                  <a:extLst>
+                    <a:ext uri="{FF2B5EF4-FFF2-40B4-BE49-F238E27FC236}">
+                      <a16:creationId xmlns:a16="http://schemas.microsoft.com/office/drawing/2014/main" id="{63A67A38-8515-7C66-BC06-C4E869EB86CA}"/>
+                    </a:ext>
+                  </a:extLst>
+                </p:cNvPr>
+                <p:cNvPicPr>
+                  <a:picLocks noChangeAspect="1"/>
+                </p:cNvPicPr>
+                <p:nvPr/>
+              </p:nvPicPr>
+              <p:blipFill>
+                <a:blip r:embed="rId4">
+                  <a:extLst>
+                    <a:ext uri="{28A0092B-C50C-407E-A947-70E740481C1C}">
+                      <a14:useLocalDpi xmlns:a14="http://schemas.microsoft.com/office/drawing/2010/main" val="0"/>
+                    </a:ext>
+                  </a:extLst>
+                </a:blip>
+                <a:srcRect l="2225" t="9650" r="4370" b="12728"/>
+                <a:stretch>
+                  <a:fillRect/>
+                </a:stretch>
+              </p:blipFill>
+              <p:spPr>
+                <a:xfrm>
+                  <a:off x="471089" y="268171"/>
+                  <a:ext cx="1002507" cy="282809"/>
+                </a:xfrm>
+                <a:prstGeom prst="rect">
+                  <a:avLst/>
+                </a:prstGeom>
+              </p:spPr>
+            </p:pic>
+          </p:grpSp>
+        </p:grpSp>
+        <p:sp>
+          <p:nvSpPr>
+            <p:cNvPr id="31" name="四角形: 角を丸くする 30">
+              <a:extLst>
+                <a:ext uri="{FF2B5EF4-FFF2-40B4-BE49-F238E27FC236}">
+                  <a16:creationId xmlns:a16="http://schemas.microsoft.com/office/drawing/2014/main" id="{29F37AD2-F6D2-7086-D58C-2C0F66AC2968}"/>
+                </a:ext>
+              </a:extLst>
+            </p:cNvPr>
+            <p:cNvSpPr/>
+            <p:nvPr/>
+          </p:nvSpPr>
+          <p:spPr>
+            <a:xfrm>
+              <a:off x="1859247" y="74670"/>
+              <a:ext cx="1153343" cy="438956"/>
+            </a:xfrm>
+            <a:prstGeom prst="roundRect">
+              <a:avLst>
+                <a:gd name="adj" fmla="val 6665"/>
+              </a:avLst>
+            </a:prstGeom>
+            <a:noFill/>
+            <a:ln>
+              <a:noFill/>
+            </a:ln>
+          </p:spPr>
+          <p:style>
+            <a:lnRef idx="2">
+              <a:schemeClr val="accent1">
+                <a:shade val="15000"/>
+              </a:schemeClr>
+            </a:lnRef>
+            <a:fillRef idx="1">
+              <a:schemeClr val="accent1"/>
+            </a:fillRef>
+            <a:effectRef idx="0">
+              <a:schemeClr val="accent1"/>
+            </a:effectRef>
+            <a:fontRef idx="minor">
+              <a:schemeClr val="lt1"/>
+            </a:fontRef>
+          </p:style>
+          <p:txBody>
+            <a:bodyPr lIns="0" tIns="0" rIns="0" bIns="0" rtlCol="0" anchor="ctr"/>
+            <a:lstStyle/>
+            <a:p>
+              <a:pPr algn="ctr"/>
+              <a:r>
+                <a:rPr kumimoji="1" lang="ja-JP" altLang="en-US" sz="2800" dirty="0">
+                  <a:solidFill>
+                    <a:schemeClr val="tx1"/>
+                  </a:solidFill>
+                  <a:latin typeface="UD デジタル 教科書体 NP-R" panose="02020400000000000000" pitchFamily="18" charset="-128"/>
+                  <a:ea typeface="UD デジタル 教科書体 NP-R" panose="02020400000000000000" pitchFamily="18" charset="-128"/>
+                </a:rPr>
+                <a:t>感謝</a:t>
+              </a:r>
+              <a:endParaRPr kumimoji="1" lang="ja-JP" altLang="en-US" sz="1050" dirty="0">
+                <a:solidFill>
+                  <a:schemeClr val="tx1"/>
+                </a:solidFill>
+                <a:latin typeface="UD デジタル 教科書体 NP-R" panose="02020400000000000000" pitchFamily="18" charset="-128"/>
+                <a:ea typeface="UD デジタル 教科書体 NP-R" panose="02020400000000000000" pitchFamily="18" charset="-128"/>
+              </a:endParaRPr>
+            </a:p>
+          </p:txBody>
+        </p:sp>
+        <p:sp>
+          <p:nvSpPr>
+            <p:cNvPr id="4" name="四角形: 角を丸くする 3">
+              <a:extLst>
+                <a:ext uri="{FF2B5EF4-FFF2-40B4-BE49-F238E27FC236}">
+                  <a16:creationId xmlns:a16="http://schemas.microsoft.com/office/drawing/2014/main" id="{855FEFFB-F560-2519-119F-C1952CE9FF96}"/>
+                </a:ext>
+              </a:extLst>
+            </p:cNvPr>
+            <p:cNvSpPr/>
+            <p:nvPr/>
+          </p:nvSpPr>
+          <p:spPr>
+            <a:xfrm>
+              <a:off x="215106" y="1793322"/>
+              <a:ext cx="2654348" cy="120703"/>
+            </a:xfrm>
+            <a:prstGeom prst="roundRect">
+              <a:avLst>
+                <a:gd name="adj" fmla="val 6665"/>
+              </a:avLst>
+            </a:prstGeom>
+            <a:noFill/>
+            <a:ln>
+              <a:noFill/>
+            </a:ln>
+          </p:spPr>
+          <p:style>
+            <a:lnRef idx="2">
+              <a:schemeClr val="accent1">
+                <a:shade val="15000"/>
+              </a:schemeClr>
+            </a:lnRef>
+            <a:fillRef idx="1">
+              <a:schemeClr val="accent1"/>
+            </a:fillRef>
+            <a:effectRef idx="0">
+              <a:schemeClr val="accent1"/>
+            </a:effectRef>
+            <a:fontRef idx="minor">
+              <a:schemeClr val="lt1"/>
+            </a:fontRef>
+          </p:style>
+          <p:txBody>
+            <a:bodyPr lIns="0" tIns="0" rIns="0" bIns="0" rtlCol="0" anchor="ctr"/>
+            <a:lstStyle/>
+            <a:p>
+              <a:r>
+                <a:rPr kumimoji="1" lang="ja-JP" altLang="en-US" sz="600" dirty="0">
+                  <a:solidFill>
+                    <a:schemeClr val="tx1"/>
+                  </a:solidFill>
+                  <a:latin typeface="UD デジタル 教科書体 NP-R" panose="020B0400000000000000" pitchFamily="18" charset="-128"/>
+                  <a:ea typeface="UD デジタル 教科書体 NP-R" panose="020B0400000000000000" pitchFamily="18" charset="-128"/>
+                </a:rPr>
+                <a:t>とけない、われない、かさばらない！　カードで送る新習慣＠名刺代わりに</a:t>
+              </a:r>
+            </a:p>
+          </p:txBody>
+        </p:sp>
+      </p:grpSp>
+      <p:grpSp>
+        <p:nvGrpSpPr>
+          <p:cNvPr id="6" name="グループ化 5">
+            <a:extLst>
+              <a:ext uri="{FF2B5EF4-FFF2-40B4-BE49-F238E27FC236}">
+                <a16:creationId xmlns:a16="http://schemas.microsoft.com/office/drawing/2014/main" id="{F937E0FD-E446-6E33-CB7F-8A482BDB80B9}"/>
+              </a:ext>
+            </a:extLst>
+          </p:cNvPr>
+          <p:cNvGrpSpPr/>
+          <p:nvPr/>
+        </p:nvGrpSpPr>
+        <p:grpSpPr>
+          <a:xfrm>
+            <a:off x="1828650" y="499856"/>
+            <a:ext cx="1240551" cy="1240551"/>
+            <a:chOff x="1007265" y="2577396"/>
+            <a:chExt cx="962823" cy="928507"/>
+          </a:xfrm>
+        </p:grpSpPr>
+        <p:sp>
+          <p:nvSpPr>
+            <p:cNvPr id="9" name="四角形: 角を丸くする 8">
+              <a:extLst>
+                <a:ext uri="{FF2B5EF4-FFF2-40B4-BE49-F238E27FC236}">
+                  <a16:creationId xmlns:a16="http://schemas.microsoft.com/office/drawing/2014/main" id="{50908E15-4816-4F1D-1613-3A3FCC8102FE}"/>
+                </a:ext>
+              </a:extLst>
+            </p:cNvPr>
+            <p:cNvSpPr/>
+            <p:nvPr/>
+          </p:nvSpPr>
+          <p:spPr>
+            <a:xfrm>
+              <a:off x="1007265" y="2577396"/>
+              <a:ext cx="962823" cy="928507"/>
+            </a:xfrm>
+            <a:prstGeom prst="roundRect">
+              <a:avLst>
+                <a:gd name="adj" fmla="val 6665"/>
+              </a:avLst>
+            </a:prstGeom>
+            <a:solidFill>
+              <a:schemeClr val="bg1"/>
+            </a:solidFill>
+            <a:ln>
+              <a:noFill/>
+            </a:ln>
+          </p:spPr>
+          <p:style>
+            <a:lnRef idx="2">
+              <a:schemeClr val="accent1">
+                <a:shade val="15000"/>
+              </a:schemeClr>
+            </a:lnRef>
+            <a:fillRef idx="1">
+              <a:schemeClr val="accent1"/>
+            </a:fillRef>
+            <a:effectRef idx="0">
+              <a:schemeClr val="accent1"/>
+            </a:effectRef>
+            <a:fontRef idx="minor">
+              <a:schemeClr val="lt1"/>
+            </a:fontRef>
+          </p:style>
+          <p:txBody>
+            <a:bodyPr rtlCol="0" anchor="ctr"/>
+            <a:lstStyle/>
+            <a:p>
+              <a:pPr algn="ctr"/>
+              <a:endParaRPr kumimoji="1" lang="ja-JP" altLang="en-US"/>
+            </a:p>
+          </p:txBody>
+        </p:sp>
+        <p:pic>
+          <p:nvPicPr>
+            <p:cNvPr id="11" name="図 10" descr="QR コード&#10;&#10;AI 生成コンテンツは誤りを含む可能性があります。">
+              <a:extLst>
+                <a:ext uri="{FF2B5EF4-FFF2-40B4-BE49-F238E27FC236}">
+                  <a16:creationId xmlns:a16="http://schemas.microsoft.com/office/drawing/2014/main" id="{FBDF635C-DE33-AFEC-460A-88EEE2F5EF96}"/>
+                </a:ext>
+              </a:extLst>
+            </p:cNvPr>
+            <p:cNvPicPr>
+              <a:picLocks noChangeAspect="1"/>
+            </p:cNvPicPr>
+            <p:nvPr/>
+          </p:nvPicPr>
+          <p:blipFill>
+            <a:blip r:embed="rId5"/>
+            <a:stretch>
+              <a:fillRect/>
+            </a:stretch>
+          </p:blipFill>
+          <p:spPr>
+            <a:xfrm>
+              <a:off x="1042659" y="2598008"/>
+              <a:ext cx="883492" cy="878787"/>
+            </a:xfrm>
+            <a:prstGeom prst="rect">
+              <a:avLst/>
+            </a:prstGeom>
+          </p:spPr>
+        </p:pic>
+      </p:grpSp>
+    </p:spTree>
+    <p:extLst>
+      <p:ext uri="{BB962C8B-B14F-4D97-AF65-F5344CB8AC3E}">
+        <p14:creationId xmlns:p14="http://schemas.microsoft.com/office/powerpoint/2010/main" val="641041021"/>
+      </p:ext>
+    </p:extLst>
+  </p:cSld>
+  <p:clrMapOvr>
+    <a:masterClrMapping/>
+  </p:clrMapOvr>
+</p:sld>
+</file>
+
+<file path=ppt/slides/slide8.xml><?xml version="1.0" encoding="utf-8"?>
+<p:sld xmlns:a="http://schemas.openxmlformats.org/drawingml/2006/main" xmlns:r="http://schemas.openxmlformats.org/officeDocument/2006/relationships" xmlns:p="http://schemas.openxmlformats.org/presentationml/2006/main">
+  <p:cSld>
+    <p:spTree>
+      <p:nvGrpSpPr>
+        <p:cNvPr id="1" name="">
+          <a:extLst>
+            <a:ext uri="{FF2B5EF4-FFF2-40B4-BE49-F238E27FC236}">
+              <a16:creationId xmlns:a16="http://schemas.microsoft.com/office/drawing/2014/main" id="{C058BECA-F1D9-A4C3-D825-4CB4EF26ADAD}"/>
+            </a:ext>
+          </a:extLst>
+        </p:cNvPr>
+        <p:cNvGrpSpPr/>
+        <p:nvPr/>
+      </p:nvGrpSpPr>
+      <p:grpSpPr>
+        <a:xfrm>
+          <a:off x="0" y="0"/>
+          <a:ext cx="0" cy="0"/>
+          <a:chOff x="0" y="0"/>
+          <a:chExt cx="0" cy="0"/>
+        </a:xfrm>
+      </p:grpSpPr>
+      <p:grpSp>
+        <p:nvGrpSpPr>
+          <p:cNvPr id="8" name="グループ化 7">
+            <a:extLst>
+              <a:ext uri="{FF2B5EF4-FFF2-40B4-BE49-F238E27FC236}">
+                <a16:creationId xmlns:a16="http://schemas.microsoft.com/office/drawing/2014/main" id="{132AD60A-0486-CBF9-DC84-07978EBB6145}"/>
+              </a:ext>
+            </a:extLst>
+          </p:cNvPr>
+          <p:cNvGrpSpPr/>
+          <p:nvPr/>
+        </p:nvGrpSpPr>
+        <p:grpSpPr>
+          <a:xfrm>
+            <a:off x="-2" y="-1"/>
+            <a:ext cx="3095626" cy="1944689"/>
+            <a:chOff x="-2" y="-1"/>
+            <a:chExt cx="3095626" cy="1944689"/>
+          </a:xfrm>
+        </p:grpSpPr>
+        <p:sp>
+          <p:nvSpPr>
+            <p:cNvPr id="2" name="四角形: 角を丸くする 1">
+              <a:extLst>
+                <a:ext uri="{FF2B5EF4-FFF2-40B4-BE49-F238E27FC236}">
+                  <a16:creationId xmlns:a16="http://schemas.microsoft.com/office/drawing/2014/main" id="{86E80F87-8D3F-7349-9C55-F6B30B15F863}"/>
+                </a:ext>
+              </a:extLst>
+            </p:cNvPr>
+            <p:cNvSpPr/>
+            <p:nvPr/>
+          </p:nvSpPr>
+          <p:spPr>
+            <a:xfrm>
+              <a:off x="-2" y="-1"/>
+              <a:ext cx="3095625" cy="1944687"/>
+            </a:xfrm>
+            <a:prstGeom prst="roundRect">
+              <a:avLst>
+                <a:gd name="adj" fmla="val 0"/>
+              </a:avLst>
+            </a:prstGeom>
+            <a:solidFill>
+              <a:schemeClr val="bg1"/>
+            </a:solidFill>
+            <a:ln>
+              <a:noFill/>
+            </a:ln>
+          </p:spPr>
+          <p:style>
+            <a:lnRef idx="2">
+              <a:schemeClr val="accent1">
+                <a:shade val="15000"/>
+              </a:schemeClr>
+            </a:lnRef>
+            <a:fillRef idx="1">
+              <a:schemeClr val="accent1"/>
+            </a:fillRef>
+            <a:effectRef idx="0">
+              <a:schemeClr val="accent1"/>
+            </a:effectRef>
+            <a:fontRef idx="minor">
+              <a:schemeClr val="lt1"/>
+            </a:fontRef>
+          </p:style>
+          <p:txBody>
+            <a:bodyPr lIns="0" tIns="0" rIns="0" bIns="0" rtlCol="0" anchor="ctr"/>
+            <a:lstStyle/>
+            <a:p>
+              <a:pPr algn="ctr"/>
+              <a:endParaRPr kumimoji="1" lang="ja-JP" altLang="en-US" sz="600" dirty="0">
+                <a:solidFill>
+                  <a:schemeClr val="tx1"/>
+                </a:solidFill>
+                <a:latin typeface="UD デジタル 教科書体 NP-R" panose="020B0400000000000000" pitchFamily="18" charset="-128"/>
+                <a:ea typeface="UD デジタル 教科書体 NP-R" panose="020B0400000000000000" pitchFamily="18" charset="-128"/>
+              </a:endParaRPr>
+            </a:p>
+          </p:txBody>
+        </p:sp>
+        <p:sp>
+          <p:nvSpPr>
+            <p:cNvPr id="5" name="四角形: 角を丸くする 4">
+              <a:extLst>
+                <a:ext uri="{FF2B5EF4-FFF2-40B4-BE49-F238E27FC236}">
+                  <a16:creationId xmlns:a16="http://schemas.microsoft.com/office/drawing/2014/main" id="{7488DA70-6D55-3740-5B20-32F0AD260014}"/>
+                </a:ext>
+              </a:extLst>
+            </p:cNvPr>
+            <p:cNvSpPr/>
+            <p:nvPr/>
+          </p:nvSpPr>
+          <p:spPr>
+            <a:xfrm>
+              <a:off x="-1" y="5074"/>
+              <a:ext cx="3095625" cy="1939614"/>
+            </a:xfrm>
+            <a:prstGeom prst="roundRect">
+              <a:avLst>
+                <a:gd name="adj" fmla="val 13559"/>
+              </a:avLst>
+            </a:prstGeom>
+            <a:noFill/>
+            <a:ln w="6350">
+              <a:noFill/>
+            </a:ln>
+            <a:effectLst/>
+          </p:spPr>
+          <p:style>
+            <a:lnRef idx="2">
+              <a:schemeClr val="accent1">
+                <a:shade val="15000"/>
+              </a:schemeClr>
+            </a:lnRef>
+            <a:fillRef idx="1">
+              <a:schemeClr val="accent1"/>
+            </a:fillRef>
+            <a:effectRef idx="0">
+              <a:schemeClr val="accent1"/>
+            </a:effectRef>
+            <a:fontRef idx="minor">
+              <a:schemeClr val="lt1"/>
+            </a:fontRef>
+          </p:style>
+          <p:txBody>
+            <a:bodyPr wrap="square" lIns="72000" tIns="36000" rIns="72000" bIns="0" rtlCol="0" anchor="b">
+              <a:noAutofit/>
+            </a:bodyPr>
+            <a:lstStyle/>
+            <a:p>
+              <a:pPr algn="ctr"/>
+              <a:endParaRPr kumimoji="1" lang="ja-JP" altLang="en-US" sz="600" dirty="0">
+                <a:solidFill>
+                  <a:schemeClr val="tx1"/>
+                </a:solidFill>
+                <a:latin typeface="UD デジタル 教科書体 NP-R" panose="02020400000000000000" pitchFamily="18" charset="-128"/>
+                <a:ea typeface="UD デジタル 教科書体 NP-R" panose="02020400000000000000" pitchFamily="18" charset="-128"/>
+              </a:endParaRPr>
+            </a:p>
+          </p:txBody>
+        </p:sp>
+        <p:grpSp>
+          <p:nvGrpSpPr>
+            <p:cNvPr id="3" name="グループ化 2">
+              <a:extLst>
+                <a:ext uri="{FF2B5EF4-FFF2-40B4-BE49-F238E27FC236}">
+                  <a16:creationId xmlns:a16="http://schemas.microsoft.com/office/drawing/2014/main" id="{DC3A6E0B-A833-1312-B900-DF5850C21154}"/>
+                </a:ext>
+              </a:extLst>
+            </p:cNvPr>
+            <p:cNvGrpSpPr/>
+            <p:nvPr/>
+          </p:nvGrpSpPr>
+          <p:grpSpPr>
+            <a:xfrm>
+              <a:off x="26424" y="35311"/>
+              <a:ext cx="1781026" cy="1777008"/>
+              <a:chOff x="4761" y="0"/>
+              <a:chExt cx="1944000" cy="1944687"/>
+            </a:xfrm>
+          </p:grpSpPr>
+          <p:sp>
+            <p:nvSpPr>
+              <p:cNvPr id="7" name="四角形: 角を丸くする 6">
+                <a:extLst>
+                  <a:ext uri="{FF2B5EF4-FFF2-40B4-BE49-F238E27FC236}">
+                    <a16:creationId xmlns:a16="http://schemas.microsoft.com/office/drawing/2014/main" id="{AC7521C1-F32E-6081-DE16-294E77792B09}"/>
+                  </a:ext>
+                </a:extLst>
+              </p:cNvPr>
+              <p:cNvSpPr/>
+              <p:nvPr/>
+            </p:nvSpPr>
+            <p:spPr>
+              <a:xfrm>
+                <a:off x="4761" y="0"/>
+                <a:ext cx="1944000" cy="1944687"/>
+              </a:xfrm>
+              <a:prstGeom prst="roundRect">
+                <a:avLst>
+                  <a:gd name="adj" fmla="val 8828"/>
+                </a:avLst>
+              </a:prstGeom>
+              <a:blipFill>
+                <a:blip r:embed="rId2"/>
+                <a:stretch>
+                  <a:fillRect/>
+                </a:stretch>
+              </a:blipFill>
+              <a:ln w="171450">
+                <a:noFill/>
+              </a:ln>
+              <a:effectLst>
+                <a:glow>
+                  <a:schemeClr val="bg1"/>
+                </a:glow>
+                <a:outerShdw dist="12700" sx="1000" sy="1000" algn="ctr" rotWithShape="0">
+                  <a:srgbClr val="000000"/>
+                </a:outerShdw>
+                <a:softEdge rad="127000"/>
+              </a:effectLst>
+            </p:spPr>
+            <p:style>
+              <a:lnRef idx="2">
+                <a:schemeClr val="accent1">
+                  <a:shade val="15000"/>
+                </a:schemeClr>
+              </a:lnRef>
+              <a:fillRef idx="1">
+                <a:schemeClr val="accent1"/>
+              </a:fillRef>
+              <a:effectRef idx="0">
+                <a:schemeClr val="accent1"/>
+              </a:effectRef>
+              <a:fontRef idx="minor">
+                <a:schemeClr val="lt1"/>
+              </a:fontRef>
+            </p:style>
+            <p:txBody>
+              <a:bodyPr rtlCol="0" anchor="ctr"/>
+              <a:lstStyle/>
+              <a:p>
+                <a:pPr algn="ctr"/>
+                <a:endParaRPr lang="ja-JP" altLang="en-US"/>
+              </a:p>
+            </p:txBody>
+          </p:sp>
+          <p:grpSp>
+            <p:nvGrpSpPr>
+              <p:cNvPr id="22" name="グループ化 21">
+                <a:extLst>
+                  <a:ext uri="{FF2B5EF4-FFF2-40B4-BE49-F238E27FC236}">
+                    <a16:creationId xmlns:a16="http://schemas.microsoft.com/office/drawing/2014/main" id="{CF3034ED-8E6E-719F-3C7A-E0111D5E9298}"/>
+                  </a:ext>
+                </a:extLst>
+              </p:cNvPr>
+              <p:cNvGrpSpPr/>
+              <p:nvPr/>
+            </p:nvGrpSpPr>
+            <p:grpSpPr>
+              <a:xfrm>
+                <a:off x="311866" y="138682"/>
+                <a:ext cx="1329789" cy="1662236"/>
+                <a:chOff x="324896" y="199586"/>
+                <a:chExt cx="1294896" cy="1618620"/>
+              </a:xfrm>
+            </p:grpSpPr>
+            <p:sp>
+              <p:nvSpPr>
+                <p:cNvPr id="14" name="四角形: 角を丸くする 13">
+                  <a:extLst>
+                    <a:ext uri="{FF2B5EF4-FFF2-40B4-BE49-F238E27FC236}">
+                      <a16:creationId xmlns:a16="http://schemas.microsoft.com/office/drawing/2014/main" id="{EAE31886-DB15-713D-990B-8561D3C57136}"/>
+                    </a:ext>
+                  </a:extLst>
+                </p:cNvPr>
+                <p:cNvSpPr/>
+                <p:nvPr/>
+              </p:nvSpPr>
+              <p:spPr>
+                <a:xfrm>
+                  <a:off x="324896" y="199586"/>
+                  <a:ext cx="1294896" cy="1618620"/>
+                </a:xfrm>
+                <a:prstGeom prst="roundRect">
+                  <a:avLst>
+                    <a:gd name="adj" fmla="val 17073"/>
+                  </a:avLst>
+                </a:prstGeom>
+                <a:blipFill>
+                  <a:blip r:embed="rId3"/>
+                  <a:stretch>
+                    <a:fillRect/>
+                  </a:stretch>
+                </a:blipFill>
+                <a:ln>
+                  <a:noFill/>
+                </a:ln>
+              </p:spPr>
+              <p:style>
+                <a:lnRef idx="2">
+                  <a:schemeClr val="accent1">
+                    <a:shade val="15000"/>
+                  </a:schemeClr>
+                </a:lnRef>
+                <a:fillRef idx="1">
+                  <a:schemeClr val="accent1"/>
+                </a:fillRef>
+                <a:effectRef idx="0">
+                  <a:schemeClr val="accent1"/>
+                </a:effectRef>
+                <a:fontRef idx="minor">
+                  <a:schemeClr val="lt1"/>
+                </a:fontRef>
+              </p:style>
+              <p:txBody>
+                <a:bodyPr rtlCol="0" anchor="ctr"/>
+                <a:lstStyle/>
+                <a:p>
+                  <a:pPr algn="ctr"/>
+                  <a:endParaRPr kumimoji="1" lang="ja-JP" altLang="en-US"/>
+                </a:p>
+              </p:txBody>
+            </p:sp>
+            <p:pic>
+              <p:nvPicPr>
+                <p:cNvPr id="21" name="図 20" descr="ロゴ が含まれている画像&#10;&#10;AI 生成コンテンツは誤りを含む可能性があります。">
+                  <a:extLst>
+                    <a:ext uri="{FF2B5EF4-FFF2-40B4-BE49-F238E27FC236}">
+                      <a16:creationId xmlns:a16="http://schemas.microsoft.com/office/drawing/2014/main" id="{6D2DA936-0E6F-A593-B2D6-AACA1DB6D4F2}"/>
+                    </a:ext>
+                  </a:extLst>
+                </p:cNvPr>
+                <p:cNvPicPr>
+                  <a:picLocks noChangeAspect="1"/>
+                </p:cNvPicPr>
+                <p:nvPr/>
+              </p:nvPicPr>
+              <p:blipFill>
+                <a:blip r:embed="rId4">
+                  <a:extLst>
+                    <a:ext uri="{28A0092B-C50C-407E-A947-70E740481C1C}">
+                      <a14:useLocalDpi xmlns:a14="http://schemas.microsoft.com/office/drawing/2010/main" val="0"/>
+                    </a:ext>
+                  </a:extLst>
+                </a:blip>
+                <a:srcRect l="2225" t="9650" r="4370" b="12728"/>
+                <a:stretch>
+                  <a:fillRect/>
+                </a:stretch>
+              </p:blipFill>
+              <p:spPr>
+                <a:xfrm>
+                  <a:off x="471089" y="268171"/>
+                  <a:ext cx="1002507" cy="282809"/>
+                </a:xfrm>
+                <a:prstGeom prst="rect">
+                  <a:avLst/>
+                </a:prstGeom>
+              </p:spPr>
+            </p:pic>
+          </p:grpSp>
+        </p:grpSp>
+        <p:sp>
+          <p:nvSpPr>
+            <p:cNvPr id="31" name="四角形: 角を丸くする 30">
+              <a:extLst>
+                <a:ext uri="{FF2B5EF4-FFF2-40B4-BE49-F238E27FC236}">
+                  <a16:creationId xmlns:a16="http://schemas.microsoft.com/office/drawing/2014/main" id="{5F0BBB50-CD20-B7C3-95B5-5065AC632B9F}"/>
+                </a:ext>
+              </a:extLst>
+            </p:cNvPr>
+            <p:cNvSpPr/>
+            <p:nvPr/>
+          </p:nvSpPr>
+          <p:spPr>
+            <a:xfrm>
+              <a:off x="1844455" y="255162"/>
+              <a:ext cx="1153343" cy="214457"/>
+            </a:xfrm>
+            <a:prstGeom prst="roundRect">
+              <a:avLst>
+                <a:gd name="adj" fmla="val 6665"/>
+              </a:avLst>
+            </a:prstGeom>
+            <a:noFill/>
+            <a:ln>
+              <a:noFill/>
+            </a:ln>
+          </p:spPr>
+          <p:style>
+            <a:lnRef idx="2">
+              <a:schemeClr val="accent1">
+                <a:shade val="15000"/>
+              </a:schemeClr>
+            </a:lnRef>
+            <a:fillRef idx="1">
+              <a:schemeClr val="accent1"/>
+            </a:fillRef>
+            <a:effectRef idx="0">
+              <a:schemeClr val="accent1"/>
+            </a:effectRef>
+            <a:fontRef idx="minor">
+              <a:schemeClr val="lt1"/>
+            </a:fontRef>
+          </p:style>
+          <p:txBody>
+            <a:bodyPr lIns="0" tIns="0" rIns="0" bIns="0" rtlCol="0" anchor="ctr"/>
+            <a:lstStyle/>
+            <a:p>
+              <a:pPr algn="ctr"/>
+              <a:r>
+                <a:rPr kumimoji="1" lang="zh-TW" altLang="en-US" dirty="0">
+                  <a:solidFill>
+                    <a:schemeClr val="tx1"/>
+                  </a:solidFill>
+                  <a:latin typeface="UD デジタル 教科書体 NP-R" panose="02020400000000000000" pitchFamily="18" charset="-128"/>
+                  <a:ea typeface="UD デジタル 教科書体 NP-R" panose="02020400000000000000" pitchFamily="18" charset="-128"/>
+                </a:rPr>
+                <a:t>「学長煎餅」</a:t>
+              </a:r>
+              <a:endParaRPr kumimoji="1" lang="ja-JP" altLang="en-US" sz="800" dirty="0">
+                <a:solidFill>
+                  <a:schemeClr val="tx1"/>
+                </a:solidFill>
+                <a:latin typeface="UD デジタル 教科書体 NP-R" panose="02020400000000000000" pitchFamily="18" charset="-128"/>
+                <a:ea typeface="UD デジタル 教科書体 NP-R" panose="02020400000000000000" pitchFamily="18" charset="-128"/>
+              </a:endParaRPr>
+            </a:p>
+          </p:txBody>
+        </p:sp>
+        <p:sp>
+          <p:nvSpPr>
+            <p:cNvPr id="4" name="四角形: 角を丸くする 3">
+              <a:extLst>
+                <a:ext uri="{FF2B5EF4-FFF2-40B4-BE49-F238E27FC236}">
+                  <a16:creationId xmlns:a16="http://schemas.microsoft.com/office/drawing/2014/main" id="{72530542-B345-3932-EE45-6B72BA7CF745}"/>
+                </a:ext>
+              </a:extLst>
+            </p:cNvPr>
+            <p:cNvSpPr/>
+            <p:nvPr/>
+          </p:nvSpPr>
+          <p:spPr>
+            <a:xfrm>
+              <a:off x="215106" y="1793322"/>
+              <a:ext cx="2654348" cy="120703"/>
+            </a:xfrm>
+            <a:prstGeom prst="roundRect">
+              <a:avLst>
+                <a:gd name="adj" fmla="val 6665"/>
+              </a:avLst>
+            </a:prstGeom>
+            <a:noFill/>
+            <a:ln>
+              <a:noFill/>
+            </a:ln>
+          </p:spPr>
+          <p:style>
+            <a:lnRef idx="2">
+              <a:schemeClr val="accent1">
+                <a:shade val="15000"/>
+              </a:schemeClr>
+            </a:lnRef>
+            <a:fillRef idx="1">
+              <a:schemeClr val="accent1"/>
+            </a:fillRef>
+            <a:effectRef idx="0">
+              <a:schemeClr val="accent1"/>
+            </a:effectRef>
+            <a:fontRef idx="minor">
+              <a:schemeClr val="lt1"/>
+            </a:fontRef>
+          </p:style>
+          <p:txBody>
+            <a:bodyPr lIns="0" tIns="0" rIns="0" bIns="0" rtlCol="0" anchor="ctr"/>
+            <a:lstStyle/>
+            <a:p>
+              <a:r>
+                <a:rPr kumimoji="1" lang="ja-JP" altLang="en-US" sz="600" dirty="0">
+                  <a:solidFill>
+                    <a:schemeClr val="tx1"/>
+                  </a:solidFill>
+                  <a:latin typeface="UD デジタル 教科書体 NP-R" panose="020B0400000000000000" pitchFamily="18" charset="-128"/>
+                  <a:ea typeface="UD デジタル 教科書体 NP-R" panose="020B0400000000000000" pitchFamily="18" charset="-128"/>
+                </a:rPr>
+                <a:t>とけない、われない、かさばらない！　カードで送る新習慣＠名刺代わりに</a:t>
+              </a:r>
+            </a:p>
+          </p:txBody>
+        </p:sp>
+        <p:sp>
+          <p:nvSpPr>
+            <p:cNvPr id="10" name="四角形: 角を丸くする 9">
+              <a:extLst>
+                <a:ext uri="{FF2B5EF4-FFF2-40B4-BE49-F238E27FC236}">
+                  <a16:creationId xmlns:a16="http://schemas.microsoft.com/office/drawing/2014/main" id="{36F016FF-019E-D392-9D11-2A8F1D16BFDB}"/>
+                </a:ext>
+              </a:extLst>
+            </p:cNvPr>
+            <p:cNvSpPr/>
+            <p:nvPr/>
+          </p:nvSpPr>
+          <p:spPr>
+            <a:xfrm>
+              <a:off x="1927110" y="71103"/>
+              <a:ext cx="988031" cy="181522"/>
+            </a:xfrm>
+            <a:prstGeom prst="roundRect">
+              <a:avLst>
+                <a:gd name="adj" fmla="val 6665"/>
+              </a:avLst>
+            </a:prstGeom>
+            <a:noFill/>
+            <a:ln>
+              <a:noFill/>
+            </a:ln>
+          </p:spPr>
+          <p:style>
+            <a:lnRef idx="2">
+              <a:schemeClr val="accent1">
+                <a:shade val="15000"/>
+              </a:schemeClr>
+            </a:lnRef>
+            <a:fillRef idx="1">
+              <a:schemeClr val="accent1"/>
+            </a:fillRef>
+            <a:effectRef idx="0">
+              <a:schemeClr val="accent1"/>
+            </a:effectRef>
+            <a:fontRef idx="minor">
+              <a:schemeClr val="lt1"/>
+            </a:fontRef>
+          </p:style>
+          <p:txBody>
+            <a:bodyPr lIns="0" tIns="0" rIns="0" bIns="0" rtlCol="0" anchor="ctr"/>
+            <a:lstStyle/>
+            <a:p>
+              <a:pPr algn="ctr"/>
+              <a:r>
+                <a:rPr kumimoji="1" lang="ja-JP" altLang="en-US" sz="800" dirty="0">
+                  <a:solidFill>
+                    <a:schemeClr val="tx1"/>
+                  </a:solidFill>
+                  <a:latin typeface="UD デジタル 教科書体 NP-R" panose="02020400000000000000" pitchFamily="18" charset="-128"/>
+                  <a:ea typeface="UD デジタル 教科書体 NP-R" panose="02020400000000000000" pitchFamily="18" charset="-128"/>
+                </a:rPr>
+                <a:t>感謝</a:t>
+              </a:r>
+              <a:endParaRPr kumimoji="1" lang="en-US" altLang="ja-JP" sz="800" dirty="0">
+                <a:solidFill>
+                  <a:schemeClr val="tx1"/>
+                </a:solidFill>
+                <a:latin typeface="UD デジタル 教科書体 NP-R" panose="02020400000000000000" pitchFamily="18" charset="-128"/>
+                <a:ea typeface="UD デジタル 教科書体 NP-R" panose="02020400000000000000" pitchFamily="18" charset="-128"/>
+              </a:endParaRPr>
+            </a:p>
+          </p:txBody>
+        </p:sp>
+      </p:grpSp>
+      <p:grpSp>
+        <p:nvGrpSpPr>
+          <p:cNvPr id="12" name="グループ化 11">
+            <a:extLst>
+              <a:ext uri="{FF2B5EF4-FFF2-40B4-BE49-F238E27FC236}">
+                <a16:creationId xmlns:a16="http://schemas.microsoft.com/office/drawing/2014/main" id="{96738D94-E14F-632B-FE56-9A97C1BBFF98}"/>
+              </a:ext>
+            </a:extLst>
+          </p:cNvPr>
+          <p:cNvGrpSpPr/>
+          <p:nvPr/>
+        </p:nvGrpSpPr>
+        <p:grpSpPr>
+          <a:xfrm>
+            <a:off x="1807449" y="499856"/>
+            <a:ext cx="1240551" cy="1240551"/>
+            <a:chOff x="1007265" y="2577396"/>
+            <a:chExt cx="962823" cy="928507"/>
+          </a:xfrm>
+        </p:grpSpPr>
+        <p:sp>
+          <p:nvSpPr>
+            <p:cNvPr id="13" name="四角形: 角を丸くする 12">
+              <a:extLst>
+                <a:ext uri="{FF2B5EF4-FFF2-40B4-BE49-F238E27FC236}">
+                  <a16:creationId xmlns:a16="http://schemas.microsoft.com/office/drawing/2014/main" id="{97B789E8-8F75-E26E-D7EA-795307D39E72}"/>
+                </a:ext>
+              </a:extLst>
+            </p:cNvPr>
+            <p:cNvSpPr/>
+            <p:nvPr/>
+          </p:nvSpPr>
+          <p:spPr>
+            <a:xfrm>
+              <a:off x="1007265" y="2577396"/>
+              <a:ext cx="962823" cy="928507"/>
+            </a:xfrm>
+            <a:prstGeom prst="roundRect">
+              <a:avLst>
+                <a:gd name="adj" fmla="val 6665"/>
+              </a:avLst>
+            </a:prstGeom>
+            <a:solidFill>
+              <a:schemeClr val="bg1"/>
+            </a:solidFill>
+            <a:ln>
+              <a:noFill/>
+            </a:ln>
+          </p:spPr>
+          <p:style>
+            <a:lnRef idx="2">
+              <a:schemeClr val="accent1">
+                <a:shade val="15000"/>
+              </a:schemeClr>
+            </a:lnRef>
+            <a:fillRef idx="1">
+              <a:schemeClr val="accent1"/>
+            </a:fillRef>
+            <a:effectRef idx="0">
+              <a:schemeClr val="accent1"/>
+            </a:effectRef>
+            <a:fontRef idx="minor">
+              <a:schemeClr val="lt1"/>
+            </a:fontRef>
+          </p:style>
+          <p:txBody>
+            <a:bodyPr rtlCol="0" anchor="ctr"/>
+            <a:lstStyle/>
+            <a:p>
+              <a:pPr algn="ctr"/>
+              <a:endParaRPr kumimoji="1" lang="ja-JP" altLang="en-US"/>
+            </a:p>
+          </p:txBody>
+        </p:sp>
+        <p:pic>
+          <p:nvPicPr>
+            <p:cNvPr id="15" name="図 14" descr="QR コード&#10;&#10;AI 生成コンテンツは誤りを含む可能性があります。">
+              <a:extLst>
+                <a:ext uri="{FF2B5EF4-FFF2-40B4-BE49-F238E27FC236}">
+                  <a16:creationId xmlns:a16="http://schemas.microsoft.com/office/drawing/2014/main" id="{B7E8663F-01B1-7900-E7E1-B1BCA8C0257E}"/>
+                </a:ext>
+              </a:extLst>
+            </p:cNvPr>
+            <p:cNvPicPr>
+              <a:picLocks noChangeAspect="1"/>
+            </p:cNvPicPr>
+            <p:nvPr/>
+          </p:nvPicPr>
+          <p:blipFill>
+            <a:blip r:embed="rId5"/>
+            <a:stretch>
+              <a:fillRect/>
+            </a:stretch>
+          </p:blipFill>
+          <p:spPr>
+            <a:xfrm>
+              <a:off x="1042659" y="2598008"/>
+              <a:ext cx="883492" cy="878787"/>
+            </a:xfrm>
+            <a:prstGeom prst="rect">
+              <a:avLst/>
+            </a:prstGeom>
+          </p:spPr>
+        </p:pic>
+      </p:grpSp>
+    </p:spTree>
+    <p:extLst>
+      <p:ext uri="{BB962C8B-B14F-4D97-AF65-F5344CB8AC3E}">
+        <p14:creationId xmlns:p14="http://schemas.microsoft.com/office/powerpoint/2010/main" val="3731756000"/>
+      </p:ext>
+    </p:extLst>
+  </p:cSld>
+  <p:clrMapOvr>
+    <a:masterClrMapping/>
+  </p:clrMapOvr>
+</p:sld>
+</file>
+
+<file path=ppt/slides/slide9.xml><?xml version="1.0" encoding="utf-8"?>
+<p:sld xmlns:a="http://schemas.openxmlformats.org/drawingml/2006/main" xmlns:r="http://schemas.openxmlformats.org/officeDocument/2006/relationships" xmlns:p="http://schemas.openxmlformats.org/presentationml/2006/main">
+  <p:cSld>
+    <p:spTree>
+      <p:nvGrpSpPr>
+        <p:cNvPr id="1" name="">
+          <a:extLst>
+            <a:ext uri="{FF2B5EF4-FFF2-40B4-BE49-F238E27FC236}">
+              <a16:creationId xmlns:a16="http://schemas.microsoft.com/office/drawing/2014/main" id="{48D32B67-2104-CC64-72AB-009C219D795A}"/>
+            </a:ext>
+          </a:extLst>
+        </p:cNvPr>
+        <p:cNvGrpSpPr/>
+        <p:nvPr/>
+      </p:nvGrpSpPr>
+      <p:grpSpPr>
+        <a:xfrm>
+          <a:off x="0" y="0"/>
+          <a:ext cx="0" cy="0"/>
+          <a:chOff x="0" y="0"/>
+          <a:chExt cx="0" cy="0"/>
+        </a:xfrm>
+      </p:grpSpPr>
+      <p:grpSp>
+        <p:nvGrpSpPr>
+          <p:cNvPr id="8" name="グループ化 7">
+            <a:extLst>
+              <a:ext uri="{FF2B5EF4-FFF2-40B4-BE49-F238E27FC236}">
+                <a16:creationId xmlns:a16="http://schemas.microsoft.com/office/drawing/2014/main" id="{E584D19E-A33E-1AE0-40C5-71F555C91F12}"/>
+              </a:ext>
+            </a:extLst>
+          </p:cNvPr>
+          <p:cNvGrpSpPr/>
+          <p:nvPr/>
+        </p:nvGrpSpPr>
+        <p:grpSpPr>
+          <a:xfrm>
+            <a:off x="-2" y="-1"/>
+            <a:ext cx="3095626" cy="1944689"/>
+            <a:chOff x="-2" y="-1"/>
+            <a:chExt cx="3095626" cy="1944689"/>
+          </a:xfrm>
+        </p:grpSpPr>
+        <p:sp>
+          <p:nvSpPr>
+            <p:cNvPr id="2" name="四角形: 角を丸くする 1">
+              <a:extLst>
+                <a:ext uri="{FF2B5EF4-FFF2-40B4-BE49-F238E27FC236}">
+                  <a16:creationId xmlns:a16="http://schemas.microsoft.com/office/drawing/2014/main" id="{C4394BD5-4065-C5AE-FDE1-C7D7A1D2311D}"/>
+                </a:ext>
+              </a:extLst>
+            </p:cNvPr>
+            <p:cNvSpPr/>
+            <p:nvPr/>
+          </p:nvSpPr>
+          <p:spPr>
+            <a:xfrm>
+              <a:off x="-2" y="-1"/>
+              <a:ext cx="3095625" cy="1944687"/>
+            </a:xfrm>
+            <a:prstGeom prst="roundRect">
+              <a:avLst>
+                <a:gd name="adj" fmla="val 0"/>
+              </a:avLst>
+            </a:prstGeom>
+            <a:solidFill>
+              <a:schemeClr val="bg1"/>
+            </a:solidFill>
+            <a:ln>
+              <a:noFill/>
+            </a:ln>
+          </p:spPr>
+          <p:style>
+            <a:lnRef idx="2">
+              <a:schemeClr val="accent1">
+                <a:shade val="15000"/>
+              </a:schemeClr>
+            </a:lnRef>
+            <a:fillRef idx="1">
+              <a:schemeClr val="accent1"/>
+            </a:fillRef>
+            <a:effectRef idx="0">
+              <a:schemeClr val="accent1"/>
+            </a:effectRef>
+            <a:fontRef idx="minor">
+              <a:schemeClr val="lt1"/>
+            </a:fontRef>
+          </p:style>
+          <p:txBody>
+            <a:bodyPr lIns="0" tIns="0" rIns="0" bIns="0" rtlCol="0" anchor="ctr"/>
+            <a:lstStyle/>
+            <a:p>
+              <a:pPr algn="ctr"/>
+              <a:endParaRPr kumimoji="1" lang="ja-JP" altLang="en-US" sz="600" dirty="0">
+                <a:solidFill>
+                  <a:schemeClr val="tx1"/>
+                </a:solidFill>
+                <a:latin typeface="UD デジタル 教科書体 NP-R" panose="020B0400000000000000" pitchFamily="18" charset="-128"/>
+                <a:ea typeface="UD デジタル 教科書体 NP-R" panose="020B0400000000000000" pitchFamily="18" charset="-128"/>
+              </a:endParaRPr>
+            </a:p>
+          </p:txBody>
+        </p:sp>
+        <p:sp>
+          <p:nvSpPr>
+            <p:cNvPr id="5" name="四角形: 角を丸くする 4">
+              <a:extLst>
+                <a:ext uri="{FF2B5EF4-FFF2-40B4-BE49-F238E27FC236}">
+                  <a16:creationId xmlns:a16="http://schemas.microsoft.com/office/drawing/2014/main" id="{C773B568-B3D6-FAF7-4278-03B65AA83324}"/>
+                </a:ext>
+              </a:extLst>
+            </p:cNvPr>
+            <p:cNvSpPr/>
+            <p:nvPr/>
+          </p:nvSpPr>
+          <p:spPr>
+            <a:xfrm>
+              <a:off x="-1" y="5074"/>
+              <a:ext cx="3095625" cy="1939614"/>
+            </a:xfrm>
+            <a:prstGeom prst="roundRect">
+              <a:avLst>
+                <a:gd name="adj" fmla="val 13559"/>
+              </a:avLst>
+            </a:prstGeom>
+            <a:noFill/>
+            <a:ln w="6350">
+              <a:noFill/>
+            </a:ln>
+            <a:effectLst/>
+          </p:spPr>
+          <p:style>
+            <a:lnRef idx="2">
+              <a:schemeClr val="accent1">
+                <a:shade val="15000"/>
+              </a:schemeClr>
+            </a:lnRef>
+            <a:fillRef idx="1">
+              <a:schemeClr val="accent1"/>
+            </a:fillRef>
+            <a:effectRef idx="0">
+              <a:schemeClr val="accent1"/>
+            </a:effectRef>
+            <a:fontRef idx="minor">
+              <a:schemeClr val="lt1"/>
+            </a:fontRef>
+          </p:style>
+          <p:txBody>
+            <a:bodyPr wrap="square" lIns="72000" tIns="36000" rIns="72000" bIns="0" rtlCol="0" anchor="b">
+              <a:noAutofit/>
+            </a:bodyPr>
+            <a:lstStyle/>
+            <a:p>
+              <a:pPr algn="ctr"/>
+              <a:endParaRPr kumimoji="1" lang="ja-JP" altLang="en-US" sz="600" dirty="0">
+                <a:solidFill>
+                  <a:schemeClr val="tx1"/>
+                </a:solidFill>
+                <a:latin typeface="UD デジタル 教科書体 NP-R" panose="02020400000000000000" pitchFamily="18" charset="-128"/>
+                <a:ea typeface="UD デジタル 教科書体 NP-R" panose="02020400000000000000" pitchFamily="18" charset="-128"/>
+              </a:endParaRPr>
+            </a:p>
+          </p:txBody>
+        </p:sp>
+        <p:grpSp>
+          <p:nvGrpSpPr>
+            <p:cNvPr id="3" name="グループ化 2">
+              <a:extLst>
+                <a:ext uri="{FF2B5EF4-FFF2-40B4-BE49-F238E27FC236}">
+                  <a16:creationId xmlns:a16="http://schemas.microsoft.com/office/drawing/2014/main" id="{8F57D301-21E5-5B8B-1793-663A0E25C55C}"/>
+                </a:ext>
+              </a:extLst>
+            </p:cNvPr>
+            <p:cNvGrpSpPr/>
+            <p:nvPr/>
+          </p:nvGrpSpPr>
+          <p:grpSpPr>
+            <a:xfrm>
+              <a:off x="26424" y="35311"/>
+              <a:ext cx="1781026" cy="1777008"/>
+              <a:chOff x="4761" y="0"/>
+              <a:chExt cx="1944000" cy="1944687"/>
+            </a:xfrm>
+          </p:grpSpPr>
+          <p:sp>
+            <p:nvSpPr>
+              <p:cNvPr id="7" name="四角形: 角を丸くする 6">
+                <a:extLst>
+                  <a:ext uri="{FF2B5EF4-FFF2-40B4-BE49-F238E27FC236}">
+                    <a16:creationId xmlns:a16="http://schemas.microsoft.com/office/drawing/2014/main" id="{A356266D-B8E0-24F8-A58A-17BEA7001497}"/>
+                  </a:ext>
+                </a:extLst>
+              </p:cNvPr>
+              <p:cNvSpPr/>
+              <p:nvPr/>
+            </p:nvSpPr>
+            <p:spPr>
+              <a:xfrm>
+                <a:off x="4761" y="0"/>
+                <a:ext cx="1944000" cy="1944687"/>
+              </a:xfrm>
+              <a:prstGeom prst="roundRect">
+                <a:avLst>
+                  <a:gd name="adj" fmla="val 8828"/>
+                </a:avLst>
+              </a:prstGeom>
+              <a:blipFill>
+                <a:blip r:embed="rId2"/>
+                <a:stretch>
+                  <a:fillRect/>
+                </a:stretch>
+              </a:blipFill>
+              <a:ln w="171450">
+                <a:noFill/>
+              </a:ln>
+              <a:effectLst>
+                <a:glow>
+                  <a:schemeClr val="bg1"/>
+                </a:glow>
+                <a:outerShdw dist="12700" sx="1000" sy="1000" algn="ctr" rotWithShape="0">
+                  <a:srgbClr val="000000"/>
+                </a:outerShdw>
+                <a:softEdge rad="127000"/>
+              </a:effectLst>
+            </p:spPr>
+            <p:style>
+              <a:lnRef idx="2">
+                <a:schemeClr val="accent1">
+                  <a:shade val="15000"/>
+                </a:schemeClr>
+              </a:lnRef>
+              <a:fillRef idx="1">
+                <a:schemeClr val="accent1"/>
+              </a:fillRef>
+              <a:effectRef idx="0">
+                <a:schemeClr val="accent1"/>
+              </a:effectRef>
+              <a:fontRef idx="minor">
+                <a:schemeClr val="lt1"/>
+              </a:fontRef>
+            </p:style>
+            <p:txBody>
+              <a:bodyPr rtlCol="0" anchor="ctr"/>
+              <a:lstStyle/>
+              <a:p>
+                <a:pPr algn="ctr"/>
+                <a:endParaRPr lang="ja-JP" altLang="en-US"/>
+              </a:p>
+            </p:txBody>
+          </p:sp>
+          <p:grpSp>
+            <p:nvGrpSpPr>
+              <p:cNvPr id="22" name="グループ化 21">
+                <a:extLst>
+                  <a:ext uri="{FF2B5EF4-FFF2-40B4-BE49-F238E27FC236}">
+                    <a16:creationId xmlns:a16="http://schemas.microsoft.com/office/drawing/2014/main" id="{4432C75C-BC64-373F-4D11-ADDFA62EC4C7}"/>
+                  </a:ext>
+                </a:extLst>
+              </p:cNvPr>
+              <p:cNvGrpSpPr/>
+              <p:nvPr/>
+            </p:nvGrpSpPr>
+            <p:grpSpPr>
+              <a:xfrm>
+                <a:off x="311866" y="138682"/>
+                <a:ext cx="1329789" cy="1662236"/>
+                <a:chOff x="324896" y="199586"/>
+                <a:chExt cx="1294896" cy="1618620"/>
+              </a:xfrm>
+            </p:grpSpPr>
+            <p:sp>
+              <p:nvSpPr>
+                <p:cNvPr id="14" name="四角形: 角を丸くする 13">
+                  <a:extLst>
+                    <a:ext uri="{FF2B5EF4-FFF2-40B4-BE49-F238E27FC236}">
+                      <a16:creationId xmlns:a16="http://schemas.microsoft.com/office/drawing/2014/main" id="{882CCC63-3482-E9D7-914E-7C5251392B33}"/>
+                    </a:ext>
+                  </a:extLst>
+                </p:cNvPr>
+                <p:cNvSpPr/>
+                <p:nvPr/>
+              </p:nvSpPr>
+              <p:spPr>
+                <a:xfrm>
+                  <a:off x="324896" y="199586"/>
+                  <a:ext cx="1294896" cy="1618620"/>
+                </a:xfrm>
+                <a:prstGeom prst="roundRect">
+                  <a:avLst>
+                    <a:gd name="adj" fmla="val 17073"/>
+                  </a:avLst>
+                </a:prstGeom>
+                <a:blipFill>
+                  <a:blip r:embed="rId3"/>
+                  <a:stretch>
+                    <a:fillRect/>
+                  </a:stretch>
+                </a:blipFill>
+                <a:ln>
+                  <a:noFill/>
+                </a:ln>
+              </p:spPr>
+              <p:style>
+                <a:lnRef idx="2">
+                  <a:schemeClr val="accent1">
+                    <a:shade val="15000"/>
+                  </a:schemeClr>
+                </a:lnRef>
+                <a:fillRef idx="1">
+                  <a:schemeClr val="accent1"/>
+                </a:fillRef>
+                <a:effectRef idx="0">
+                  <a:schemeClr val="accent1"/>
+                </a:effectRef>
+                <a:fontRef idx="minor">
+                  <a:schemeClr val="lt1"/>
+                </a:fontRef>
+              </p:style>
+              <p:txBody>
+                <a:bodyPr rtlCol="0" anchor="ctr"/>
+                <a:lstStyle/>
+                <a:p>
+                  <a:pPr algn="ctr"/>
+                  <a:endParaRPr kumimoji="1" lang="ja-JP" altLang="en-US"/>
+                </a:p>
+              </p:txBody>
+            </p:sp>
+            <p:pic>
+              <p:nvPicPr>
+                <p:cNvPr id="21" name="図 20" descr="ロゴ が含まれている画像&#10;&#10;AI 生成コンテンツは誤りを含む可能性があります。">
+                  <a:extLst>
+                    <a:ext uri="{FF2B5EF4-FFF2-40B4-BE49-F238E27FC236}">
+                      <a16:creationId xmlns:a16="http://schemas.microsoft.com/office/drawing/2014/main" id="{B796058B-89F0-9799-1E85-0E33B69AE4CD}"/>
+                    </a:ext>
+                  </a:extLst>
+                </p:cNvPr>
+                <p:cNvPicPr>
+                  <a:picLocks noChangeAspect="1"/>
+                </p:cNvPicPr>
+                <p:nvPr/>
+              </p:nvPicPr>
+              <p:blipFill>
+                <a:blip r:embed="rId4">
+                  <a:extLst>
+                    <a:ext uri="{28A0092B-C50C-407E-A947-70E740481C1C}">
+                      <a14:useLocalDpi xmlns:a14="http://schemas.microsoft.com/office/drawing/2010/main" val="0"/>
+                    </a:ext>
+                  </a:extLst>
+                </a:blip>
+                <a:srcRect l="2225" t="9650" r="4370" b="12728"/>
+                <a:stretch>
+                  <a:fillRect/>
+                </a:stretch>
+              </p:blipFill>
+              <p:spPr>
+                <a:xfrm>
+                  <a:off x="471089" y="268171"/>
+                  <a:ext cx="1002507" cy="282809"/>
+                </a:xfrm>
+                <a:prstGeom prst="rect">
+                  <a:avLst/>
+                </a:prstGeom>
+              </p:spPr>
+            </p:pic>
+          </p:grpSp>
+        </p:grpSp>
+        <p:sp>
+          <p:nvSpPr>
+            <p:cNvPr id="31" name="四角形: 角を丸くする 30">
+              <a:extLst>
+                <a:ext uri="{FF2B5EF4-FFF2-40B4-BE49-F238E27FC236}">
+                  <a16:creationId xmlns:a16="http://schemas.microsoft.com/office/drawing/2014/main" id="{8C970144-9609-3024-3E60-C1066BBC7D64}"/>
+                </a:ext>
+              </a:extLst>
+            </p:cNvPr>
+            <p:cNvSpPr/>
+            <p:nvPr/>
+          </p:nvSpPr>
+          <p:spPr>
+            <a:xfrm>
+              <a:off x="1844455" y="255162"/>
+              <a:ext cx="1153343" cy="214457"/>
+            </a:xfrm>
+            <a:prstGeom prst="roundRect">
+              <a:avLst>
+                <a:gd name="adj" fmla="val 6665"/>
+              </a:avLst>
+            </a:prstGeom>
+            <a:noFill/>
+            <a:ln>
+              <a:noFill/>
+            </a:ln>
+          </p:spPr>
+          <p:style>
+            <a:lnRef idx="2">
+              <a:schemeClr val="accent1">
+                <a:shade val="15000"/>
+              </a:schemeClr>
+            </a:lnRef>
+            <a:fillRef idx="1">
+              <a:schemeClr val="accent1"/>
+            </a:fillRef>
+            <a:effectRef idx="0">
+              <a:schemeClr val="accent1"/>
+            </a:effectRef>
+            <a:fontRef idx="minor">
+              <a:schemeClr val="lt1"/>
+            </a:fontRef>
+          </p:style>
+          <p:txBody>
+            <a:bodyPr lIns="0" tIns="0" rIns="0" bIns="0" rtlCol="0" anchor="ctr"/>
+            <a:lstStyle/>
+            <a:p>
+              <a:pPr algn="ctr"/>
+              <a:r>
+                <a:rPr kumimoji="1" lang="ja-JP" altLang="en-US" dirty="0">
+                  <a:solidFill>
+                    <a:schemeClr val="tx1"/>
+                  </a:solidFill>
+                  <a:latin typeface="UD デジタル 教科書体 NP-R" panose="02020400000000000000" pitchFamily="18" charset="-128"/>
+                  <a:ea typeface="UD デジタル 教科書体 NP-R" panose="02020400000000000000" pitchFamily="18" charset="-128"/>
+                </a:rPr>
+                <a:t>ありがとう</a:t>
+              </a:r>
+              <a:endParaRPr kumimoji="1" lang="ja-JP" altLang="en-US" sz="800" dirty="0">
+                <a:solidFill>
+                  <a:schemeClr val="tx1"/>
+                </a:solidFill>
+                <a:latin typeface="UD デジタル 教科書体 NP-R" panose="02020400000000000000" pitchFamily="18" charset="-128"/>
+                <a:ea typeface="UD デジタル 教科書体 NP-R" panose="02020400000000000000" pitchFamily="18" charset="-128"/>
+              </a:endParaRPr>
+            </a:p>
+          </p:txBody>
+        </p:sp>
+        <p:sp>
+          <p:nvSpPr>
+            <p:cNvPr id="4" name="四角形: 角を丸くする 3">
+              <a:extLst>
+                <a:ext uri="{FF2B5EF4-FFF2-40B4-BE49-F238E27FC236}">
+                  <a16:creationId xmlns:a16="http://schemas.microsoft.com/office/drawing/2014/main" id="{FEC586F6-793A-4C54-DA10-3B4A26BF0719}"/>
+                </a:ext>
+              </a:extLst>
+            </p:cNvPr>
+            <p:cNvSpPr/>
+            <p:nvPr/>
+          </p:nvSpPr>
+          <p:spPr>
+            <a:xfrm>
+              <a:off x="215106" y="1793322"/>
+              <a:ext cx="2654348" cy="120703"/>
+            </a:xfrm>
+            <a:prstGeom prst="roundRect">
+              <a:avLst>
+                <a:gd name="adj" fmla="val 6665"/>
+              </a:avLst>
+            </a:prstGeom>
+            <a:noFill/>
+            <a:ln>
+              <a:noFill/>
+            </a:ln>
+          </p:spPr>
+          <p:style>
+            <a:lnRef idx="2">
+              <a:schemeClr val="accent1">
+                <a:shade val="15000"/>
+              </a:schemeClr>
+            </a:lnRef>
+            <a:fillRef idx="1">
+              <a:schemeClr val="accent1"/>
+            </a:fillRef>
+            <a:effectRef idx="0">
+              <a:schemeClr val="accent1"/>
+            </a:effectRef>
+            <a:fontRef idx="minor">
+              <a:schemeClr val="lt1"/>
+            </a:fontRef>
+          </p:style>
+          <p:txBody>
+            <a:bodyPr lIns="0" tIns="0" rIns="0" bIns="0" rtlCol="0" anchor="ctr"/>
+            <a:lstStyle/>
+            <a:p>
+              <a:r>
+                <a:rPr kumimoji="1" lang="ja-JP" altLang="en-US" sz="600" dirty="0">
+                  <a:solidFill>
+                    <a:schemeClr val="tx1"/>
+                  </a:solidFill>
+                  <a:latin typeface="UD デジタル 教科書体 NP-R" panose="020B0400000000000000" pitchFamily="18" charset="-128"/>
+                  <a:ea typeface="UD デジタル 教科書体 NP-R" panose="020B0400000000000000" pitchFamily="18" charset="-128"/>
+                </a:rPr>
+                <a:t>とけない、われない、かさばらない！　カードで送る新習慣＠名刺代わりに</a:t>
+              </a:r>
+            </a:p>
+          </p:txBody>
+        </p:sp>
+        <p:sp>
+          <p:nvSpPr>
+            <p:cNvPr id="10" name="四角形: 角を丸くする 9">
+              <a:extLst>
+                <a:ext uri="{FF2B5EF4-FFF2-40B4-BE49-F238E27FC236}">
+                  <a16:creationId xmlns:a16="http://schemas.microsoft.com/office/drawing/2014/main" id="{EFD014A6-A756-149E-E1CF-B1652474A8DD}"/>
+                </a:ext>
+              </a:extLst>
+            </p:cNvPr>
+            <p:cNvSpPr/>
+            <p:nvPr/>
+          </p:nvSpPr>
+          <p:spPr>
+            <a:xfrm>
+              <a:off x="1927110" y="71103"/>
+              <a:ext cx="988031" cy="181522"/>
+            </a:xfrm>
+            <a:prstGeom prst="roundRect">
+              <a:avLst>
+                <a:gd name="adj" fmla="val 6665"/>
+              </a:avLst>
+            </a:prstGeom>
+            <a:noFill/>
+            <a:ln>
+              <a:noFill/>
+            </a:ln>
+          </p:spPr>
+          <p:style>
+            <a:lnRef idx="2">
+              <a:schemeClr val="accent1">
+                <a:shade val="15000"/>
+              </a:schemeClr>
+            </a:lnRef>
+            <a:fillRef idx="1">
+              <a:schemeClr val="accent1"/>
+            </a:fillRef>
+            <a:effectRef idx="0">
+              <a:schemeClr val="accent1"/>
+            </a:effectRef>
+            <a:fontRef idx="minor">
+              <a:schemeClr val="lt1"/>
+            </a:fontRef>
+          </p:style>
+          <p:txBody>
+            <a:bodyPr lIns="0" tIns="0" rIns="0" bIns="0" rtlCol="0" anchor="ctr"/>
+            <a:lstStyle/>
+            <a:p>
+              <a:pPr algn="ctr"/>
+              <a:r>
+                <a:rPr kumimoji="1" lang="ja-JP" altLang="en-US" sz="800" dirty="0">
+                  <a:solidFill>
+                    <a:schemeClr val="tx1"/>
+                  </a:solidFill>
+                  <a:latin typeface="UD デジタル 教科書体 NP-R" panose="02020400000000000000" pitchFamily="18" charset="-128"/>
+                  <a:ea typeface="UD デジタル 教科書体 NP-R" panose="02020400000000000000" pitchFamily="18" charset="-128"/>
+                </a:rPr>
+                <a:t>秋田大学</a:t>
+              </a:r>
+              <a:endParaRPr kumimoji="1" lang="en-US" altLang="ja-JP" sz="800" dirty="0">
+                <a:solidFill>
+                  <a:schemeClr val="tx1"/>
+                </a:solidFill>
+                <a:latin typeface="UD デジタル 教科書体 NP-R" panose="02020400000000000000" pitchFamily="18" charset="-128"/>
+                <a:ea typeface="UD デジタル 教科書体 NP-R" panose="02020400000000000000" pitchFamily="18" charset="-128"/>
+              </a:endParaRPr>
+            </a:p>
+          </p:txBody>
+        </p:sp>
+      </p:grpSp>
+      <p:grpSp>
+        <p:nvGrpSpPr>
+          <p:cNvPr id="12" name="グループ化 11">
+            <a:extLst>
+              <a:ext uri="{FF2B5EF4-FFF2-40B4-BE49-F238E27FC236}">
+                <a16:creationId xmlns:a16="http://schemas.microsoft.com/office/drawing/2014/main" id="{9C509106-D2CD-8961-4B07-A4C723F46777}"/>
+              </a:ext>
+            </a:extLst>
+          </p:cNvPr>
+          <p:cNvGrpSpPr/>
+          <p:nvPr/>
+        </p:nvGrpSpPr>
+        <p:grpSpPr>
+          <a:xfrm>
+            <a:off x="1807449" y="499856"/>
+            <a:ext cx="1240551" cy="1240551"/>
+            <a:chOff x="1007265" y="2577396"/>
+            <a:chExt cx="962823" cy="928507"/>
+          </a:xfrm>
+        </p:grpSpPr>
+        <p:sp>
+          <p:nvSpPr>
+            <p:cNvPr id="13" name="四角形: 角を丸くする 12">
+              <a:extLst>
+                <a:ext uri="{FF2B5EF4-FFF2-40B4-BE49-F238E27FC236}">
+                  <a16:creationId xmlns:a16="http://schemas.microsoft.com/office/drawing/2014/main" id="{C4A5E4F1-7C7C-6FA2-8A74-53EEB19C1658}"/>
+                </a:ext>
+              </a:extLst>
+            </p:cNvPr>
+            <p:cNvSpPr/>
+            <p:nvPr/>
+          </p:nvSpPr>
+          <p:spPr>
+            <a:xfrm>
+              <a:off x="1007265" y="2577396"/>
+              <a:ext cx="962823" cy="928507"/>
+            </a:xfrm>
+            <a:prstGeom prst="roundRect">
+              <a:avLst>
+                <a:gd name="adj" fmla="val 6665"/>
+              </a:avLst>
+            </a:prstGeom>
+            <a:solidFill>
+              <a:schemeClr val="bg1"/>
+            </a:solidFill>
+            <a:ln>
+              <a:noFill/>
+            </a:ln>
+          </p:spPr>
+          <p:style>
+            <a:lnRef idx="2">
+              <a:schemeClr val="accent1">
+                <a:shade val="15000"/>
+              </a:schemeClr>
+            </a:lnRef>
+            <a:fillRef idx="1">
+              <a:schemeClr val="accent1"/>
+            </a:fillRef>
+            <a:effectRef idx="0">
+              <a:schemeClr val="accent1"/>
+            </a:effectRef>
+            <a:fontRef idx="minor">
+              <a:schemeClr val="lt1"/>
+            </a:fontRef>
+          </p:style>
+          <p:txBody>
+            <a:bodyPr rtlCol="0" anchor="ctr"/>
+            <a:lstStyle/>
+            <a:p>
+              <a:pPr algn="ctr"/>
+              <a:endParaRPr kumimoji="1" lang="ja-JP" altLang="en-US"/>
+            </a:p>
+          </p:txBody>
+        </p:sp>
+        <p:pic>
+          <p:nvPicPr>
+            <p:cNvPr id="15" name="図 14" descr="QR コード&#10;&#10;AI 生成コンテンツは誤りを含む可能性があります。">
+              <a:extLst>
+                <a:ext uri="{FF2B5EF4-FFF2-40B4-BE49-F238E27FC236}">
+                  <a16:creationId xmlns:a16="http://schemas.microsoft.com/office/drawing/2014/main" id="{D7E6DFBA-8BD9-FD59-E499-1D11269B7EA2}"/>
+                </a:ext>
+              </a:extLst>
+            </p:cNvPr>
+            <p:cNvPicPr>
+              <a:picLocks noChangeAspect="1"/>
+            </p:cNvPicPr>
+            <p:nvPr/>
+          </p:nvPicPr>
+          <p:blipFill>
+            <a:blip r:embed="rId5"/>
+            <a:stretch>
+              <a:fillRect/>
+            </a:stretch>
+          </p:blipFill>
+          <p:spPr>
+            <a:xfrm>
+              <a:off x="1042659" y="2598008"/>
+              <a:ext cx="883492" cy="878787"/>
+            </a:xfrm>
+            <a:prstGeom prst="rect">
+              <a:avLst/>
+            </a:prstGeom>
+          </p:spPr>
+        </p:pic>
+      </p:grpSp>
+    </p:spTree>
+    <p:extLst>
+      <p:ext uri="{BB962C8B-B14F-4D97-AF65-F5344CB8AC3E}">
+        <p14:creationId xmlns:p14="http://schemas.microsoft.com/office/powerpoint/2010/main" val="171924987"/>
+      </p:ext>
+    </p:extLst>
+  </p:cSld>
+  <p:clrMapOvr>
+    <a:masterClrMapping/>
+  </p:clrMapOvr>
+</p:sld>
+</file>
+
 <file path=ppt/theme/theme1.xml><?xml version="1.0" encoding="utf-8"?>
 <a:theme xmlns:a="http://schemas.openxmlformats.org/drawingml/2006/main" name="Office テーマ">
   <a:themeElements>

--- a/カードデザイン/20260313_デザイン案-返礼品_re広報課_fix伊藤.pptx
+++ b/カードデザイン/20260313_デザイン案-返礼品_re広報課_fix伊藤.pptx
@@ -11,17 +11,17 @@
     <p:sldId id="281" r:id="rId2"/>
     <p:sldId id="282" r:id="rId3"/>
     <p:sldId id="283" r:id="rId4"/>
-    <p:sldId id="291" r:id="rId5"/>
-    <p:sldId id="284" r:id="rId6"/>
-    <p:sldId id="290" r:id="rId7"/>
-    <p:sldId id="285" r:id="rId8"/>
-    <p:sldId id="287" r:id="rId9"/>
-    <p:sldId id="289" r:id="rId10"/>
-    <p:sldId id="288" r:id="rId11"/>
-    <p:sldId id="286" r:id="rId12"/>
+    <p:sldId id="284" r:id="rId5"/>
+    <p:sldId id="291" r:id="rId6"/>
+    <p:sldId id="286" r:id="rId7"/>
+    <p:sldId id="290" r:id="rId8"/>
+    <p:sldId id="285" r:id="rId9"/>
+    <p:sldId id="287" r:id="rId10"/>
+    <p:sldId id="289" r:id="rId11"/>
+    <p:sldId id="288" r:id="rId12"/>
   </p:sldIdLst>
   <p:sldSz cx="3095625" cy="1944688"/>
-  <p:notesSz cx="6807200" cy="9939338"/>
+  <p:notesSz cx="6735763" cy="9866313"/>
   <p:defaultTextStyle>
     <a:defPPr>
       <a:defRPr lang="en-US"/>
@@ -171,14 +171,14 @@
         <p:spPr>
           <a:xfrm>
             <a:off x="3" y="3"/>
-            <a:ext cx="2950100" cy="497754"/>
+            <a:ext cx="2919141" cy="494097"/>
           </a:xfrm>
           <a:prstGeom prst="rect">
             <a:avLst/>
           </a:prstGeom>
         </p:spPr>
         <p:txBody>
-          <a:bodyPr vert="horz" lIns="90569" tIns="45285" rIns="90569" bIns="45285" rtlCol="0"/>
+          <a:bodyPr vert="horz" lIns="89781" tIns="44891" rIns="89781" bIns="44891" rtlCol="0"/>
           <a:lstStyle>
             <a:lvl1pPr algn="l">
               <a:defRPr sz="1200"/>
@@ -201,15 +201,15 @@
         </p:nvSpPr>
         <p:spPr>
           <a:xfrm>
-            <a:off x="3855534" y="3"/>
-            <a:ext cx="2950100" cy="497754"/>
+            <a:off x="3815073" y="3"/>
+            <a:ext cx="2919141" cy="494097"/>
           </a:xfrm>
           <a:prstGeom prst="rect">
             <a:avLst/>
           </a:prstGeom>
         </p:spPr>
         <p:txBody>
-          <a:bodyPr vert="horz" lIns="90569" tIns="45285" rIns="90569" bIns="45285" rtlCol="0"/>
+          <a:bodyPr vert="horz" lIns="89781" tIns="44891" rIns="89781" bIns="44891" rtlCol="0"/>
           <a:lstStyle>
             <a:lvl1pPr algn="r">
               <a:defRPr sz="1200"/>
@@ -218,7 +218,7 @@
           <a:p>
             <a:fld id="{DFB49DE1-FB4B-4CFB-9A42-CC282F575BDD}" type="datetimeFigureOut">
               <a:rPr kumimoji="1" lang="ja-JP" altLang="en-US" smtClean="0"/>
-              <a:t>2026/3/17</a:t>
+              <a:t>2026/3/18</a:t>
             </a:fld>
             <a:endParaRPr kumimoji="1" lang="ja-JP" altLang="en-US"/>
           </a:p>
@@ -236,8 +236,8 @@
         </p:nvSpPr>
         <p:spPr>
           <a:xfrm>
-            <a:off x="735013" y="1243013"/>
-            <a:ext cx="5337175" cy="3352800"/>
+            <a:off x="719138" y="1233488"/>
+            <a:ext cx="5297487" cy="3328987"/>
           </a:xfrm>
           <a:prstGeom prst="rect">
             <a:avLst/>
@@ -250,7 +250,7 @@
           </a:ln>
         </p:spPr>
         <p:txBody>
-          <a:bodyPr vert="horz" lIns="90569" tIns="45285" rIns="90569" bIns="45285" rtlCol="0" anchor="ctr"/>
+          <a:bodyPr vert="horz" lIns="89781" tIns="44891" rIns="89781" bIns="44891" rtlCol="0" anchor="ctr"/>
           <a:lstStyle/>
           <a:p>
             <a:endParaRPr lang="ja-JP" altLang="en-US"/>
@@ -269,15 +269,15 @@
         </p:nvSpPr>
         <p:spPr>
           <a:xfrm>
-            <a:off x="681037" y="4783799"/>
-            <a:ext cx="5445132" cy="3912728"/>
+            <a:off x="673890" y="4748652"/>
+            <a:ext cx="5387989" cy="3883981"/>
           </a:xfrm>
           <a:prstGeom prst="rect">
             <a:avLst/>
           </a:prstGeom>
         </p:spPr>
         <p:txBody>
-          <a:bodyPr vert="horz" lIns="90569" tIns="45285" rIns="90569" bIns="45285" rtlCol="0"/>
+          <a:bodyPr vert="horz" lIns="89781" tIns="44891" rIns="89781" bIns="44891" rtlCol="0"/>
           <a:lstStyle/>
           <a:p>
             <a:pPr lvl="0"/>
@@ -360,15 +360,15 @@
         </p:nvSpPr>
         <p:spPr>
           <a:xfrm>
-            <a:off x="3" y="9441587"/>
-            <a:ext cx="2950100" cy="497754"/>
+            <a:off x="3" y="9372219"/>
+            <a:ext cx="2919141" cy="494097"/>
           </a:xfrm>
           <a:prstGeom prst="rect">
             <a:avLst/>
           </a:prstGeom>
         </p:spPr>
         <p:txBody>
-          <a:bodyPr vert="horz" lIns="90569" tIns="45285" rIns="90569" bIns="45285" rtlCol="0" anchor="b"/>
+          <a:bodyPr vert="horz" lIns="89781" tIns="44891" rIns="89781" bIns="44891" rtlCol="0" anchor="b"/>
           <a:lstStyle>
             <a:lvl1pPr algn="l">
               <a:defRPr sz="1200"/>
@@ -391,15 +391,15 @@
         </p:nvSpPr>
         <p:spPr>
           <a:xfrm>
-            <a:off x="3855534" y="9441587"/>
-            <a:ext cx="2950100" cy="497754"/>
+            <a:off x="3815073" y="9372219"/>
+            <a:ext cx="2919141" cy="494097"/>
           </a:xfrm>
           <a:prstGeom prst="rect">
             <a:avLst/>
           </a:prstGeom>
         </p:spPr>
         <p:txBody>
-          <a:bodyPr vert="horz" lIns="90569" tIns="45285" rIns="90569" bIns="45285" rtlCol="0" anchor="b"/>
+          <a:bodyPr vert="horz" lIns="89781" tIns="44891" rIns="89781" bIns="44891" rtlCol="0" anchor="b"/>
           <a:lstStyle>
             <a:lvl1pPr algn="r">
               <a:defRPr sz="1200"/>
@@ -648,7 +648,7 @@
           <a:p>
             <a:fld id="{EDC943AC-2B44-49B1-8BF7-A9628131A8B9}" type="datetimeFigureOut">
               <a:rPr kumimoji="1" lang="ja-JP" altLang="en-US" smtClean="0"/>
-              <a:t>2026/3/17</a:t>
+              <a:t>2026/3/18</a:t>
             </a:fld>
             <a:endParaRPr kumimoji="1" lang="ja-JP" altLang="en-US"/>
           </a:p>
@@ -850,7 +850,7 @@
           <a:p>
             <a:fld id="{EDC943AC-2B44-49B1-8BF7-A9628131A8B9}" type="datetimeFigureOut">
               <a:rPr kumimoji="1" lang="ja-JP" altLang="en-US" smtClean="0"/>
-              <a:t>2026/3/17</a:t>
+              <a:t>2026/3/18</a:t>
             </a:fld>
             <a:endParaRPr kumimoji="1" lang="ja-JP" altLang="en-US"/>
           </a:p>
@@ -1062,7 +1062,7 @@
           <a:p>
             <a:fld id="{EDC943AC-2B44-49B1-8BF7-A9628131A8B9}" type="datetimeFigureOut">
               <a:rPr kumimoji="1" lang="ja-JP" altLang="en-US" smtClean="0"/>
-              <a:t>2026/3/17</a:t>
+              <a:t>2026/3/18</a:t>
             </a:fld>
             <a:endParaRPr kumimoji="1" lang="ja-JP" altLang="en-US"/>
           </a:p>
@@ -1264,7 +1264,7 @@
           <a:p>
             <a:fld id="{EDC943AC-2B44-49B1-8BF7-A9628131A8B9}" type="datetimeFigureOut">
               <a:rPr kumimoji="1" lang="ja-JP" altLang="en-US" smtClean="0"/>
-              <a:t>2026/3/17</a:t>
+              <a:t>2026/3/18</a:t>
             </a:fld>
             <a:endParaRPr kumimoji="1" lang="ja-JP" altLang="en-US"/>
           </a:p>
@@ -1510,7 +1510,7 @@
           <a:p>
             <a:fld id="{EDC943AC-2B44-49B1-8BF7-A9628131A8B9}" type="datetimeFigureOut">
               <a:rPr kumimoji="1" lang="ja-JP" altLang="en-US" smtClean="0"/>
-              <a:t>2026/3/17</a:t>
+              <a:t>2026/3/18</a:t>
             </a:fld>
             <a:endParaRPr kumimoji="1" lang="ja-JP" altLang="en-US"/>
           </a:p>
@@ -1806,7 +1806,7 @@
           <a:p>
             <a:fld id="{EDC943AC-2B44-49B1-8BF7-A9628131A8B9}" type="datetimeFigureOut">
               <a:rPr kumimoji="1" lang="ja-JP" altLang="en-US" smtClean="0"/>
-              <a:t>2026/3/17</a:t>
+              <a:t>2026/3/18</a:t>
             </a:fld>
             <a:endParaRPr kumimoji="1" lang="ja-JP" altLang="en-US"/>
           </a:p>
@@ -2237,7 +2237,7 @@
           <a:p>
             <a:fld id="{EDC943AC-2B44-49B1-8BF7-A9628131A8B9}" type="datetimeFigureOut">
               <a:rPr kumimoji="1" lang="ja-JP" altLang="en-US" smtClean="0"/>
-              <a:t>2026/3/17</a:t>
+              <a:t>2026/3/18</a:t>
             </a:fld>
             <a:endParaRPr kumimoji="1" lang="ja-JP" altLang="en-US"/>
           </a:p>
@@ -2355,7 +2355,7 @@
           <a:p>
             <a:fld id="{EDC943AC-2B44-49B1-8BF7-A9628131A8B9}" type="datetimeFigureOut">
               <a:rPr kumimoji="1" lang="ja-JP" altLang="en-US" smtClean="0"/>
-              <a:t>2026/3/17</a:t>
+              <a:t>2026/3/18</a:t>
             </a:fld>
             <a:endParaRPr kumimoji="1" lang="ja-JP" altLang="en-US"/>
           </a:p>
@@ -2450,7 +2450,7 @@
           <a:p>
             <a:fld id="{EDC943AC-2B44-49B1-8BF7-A9628131A8B9}" type="datetimeFigureOut">
               <a:rPr kumimoji="1" lang="ja-JP" altLang="en-US" smtClean="0"/>
-              <a:t>2026/3/17</a:t>
+              <a:t>2026/3/18</a:t>
             </a:fld>
             <a:endParaRPr kumimoji="1" lang="ja-JP" altLang="en-US"/>
           </a:p>
@@ -2759,7 +2759,7 @@
           <a:p>
             <a:fld id="{EDC943AC-2B44-49B1-8BF7-A9628131A8B9}" type="datetimeFigureOut">
               <a:rPr kumimoji="1" lang="ja-JP" altLang="en-US" smtClean="0"/>
-              <a:t>2026/3/17</a:t>
+              <a:t>2026/3/18</a:t>
             </a:fld>
             <a:endParaRPr kumimoji="1" lang="ja-JP" altLang="en-US"/>
           </a:p>
@@ -3016,7 +3016,7 @@
           <a:p>
             <a:fld id="{EDC943AC-2B44-49B1-8BF7-A9628131A8B9}" type="datetimeFigureOut">
               <a:rPr kumimoji="1" lang="ja-JP" altLang="en-US" smtClean="0"/>
-              <a:t>2026/3/17</a:t>
+              <a:t>2026/3/18</a:t>
             </a:fld>
             <a:endParaRPr kumimoji="1" lang="ja-JP" altLang="en-US"/>
           </a:p>
@@ -3261,7 +3261,7 @@
           <a:p>
             <a:fld id="{EDC943AC-2B44-49B1-8BF7-A9628131A8B9}" type="datetimeFigureOut">
               <a:rPr kumimoji="1" lang="ja-JP" altLang="en-US" smtClean="0"/>
-              <a:t>2026/3/17</a:t>
+              <a:t>2026/3/18</a:t>
             </a:fld>
             <a:endParaRPr kumimoji="1" lang="ja-JP" altLang="en-US"/>
           </a:p>
@@ -4310,6 +4310,687 @@
 </file>
 
 <file path=ppt/slides/slide10.xml><?xml version="1.0" encoding="utf-8"?>
+<p:sld xmlns:a="http://schemas.openxmlformats.org/drawingml/2006/main" xmlns:r="http://schemas.openxmlformats.org/officeDocument/2006/relationships" xmlns:p="http://schemas.openxmlformats.org/presentationml/2006/main">
+  <p:cSld>
+    <p:spTree>
+      <p:nvGrpSpPr>
+        <p:cNvPr id="1" name="">
+          <a:extLst>
+            <a:ext uri="{FF2B5EF4-FFF2-40B4-BE49-F238E27FC236}">
+              <a16:creationId xmlns:a16="http://schemas.microsoft.com/office/drawing/2014/main" id="{48D32B67-2104-CC64-72AB-009C219D795A}"/>
+            </a:ext>
+          </a:extLst>
+        </p:cNvPr>
+        <p:cNvGrpSpPr/>
+        <p:nvPr/>
+      </p:nvGrpSpPr>
+      <p:grpSpPr>
+        <a:xfrm>
+          <a:off x="0" y="0"/>
+          <a:ext cx="0" cy="0"/>
+          <a:chOff x="0" y="0"/>
+          <a:chExt cx="0" cy="0"/>
+        </a:xfrm>
+      </p:grpSpPr>
+      <p:grpSp>
+        <p:nvGrpSpPr>
+          <p:cNvPr id="8" name="グループ化 7">
+            <a:extLst>
+              <a:ext uri="{FF2B5EF4-FFF2-40B4-BE49-F238E27FC236}">
+                <a16:creationId xmlns:a16="http://schemas.microsoft.com/office/drawing/2014/main" id="{E584D19E-A33E-1AE0-40C5-71F555C91F12}"/>
+              </a:ext>
+            </a:extLst>
+          </p:cNvPr>
+          <p:cNvGrpSpPr/>
+          <p:nvPr/>
+        </p:nvGrpSpPr>
+        <p:grpSpPr>
+          <a:xfrm>
+            <a:off x="-2" y="-1"/>
+            <a:ext cx="3095626" cy="1944689"/>
+            <a:chOff x="-2" y="-1"/>
+            <a:chExt cx="3095626" cy="1944689"/>
+          </a:xfrm>
+        </p:grpSpPr>
+        <p:sp>
+          <p:nvSpPr>
+            <p:cNvPr id="2" name="四角形: 角を丸くする 1">
+              <a:extLst>
+                <a:ext uri="{FF2B5EF4-FFF2-40B4-BE49-F238E27FC236}">
+                  <a16:creationId xmlns:a16="http://schemas.microsoft.com/office/drawing/2014/main" id="{C4394BD5-4065-C5AE-FDE1-C7D7A1D2311D}"/>
+                </a:ext>
+              </a:extLst>
+            </p:cNvPr>
+            <p:cNvSpPr/>
+            <p:nvPr/>
+          </p:nvSpPr>
+          <p:spPr>
+            <a:xfrm>
+              <a:off x="-2" y="-1"/>
+              <a:ext cx="3095625" cy="1944687"/>
+            </a:xfrm>
+            <a:prstGeom prst="roundRect">
+              <a:avLst>
+                <a:gd name="adj" fmla="val 0"/>
+              </a:avLst>
+            </a:prstGeom>
+            <a:solidFill>
+              <a:schemeClr val="bg1"/>
+            </a:solidFill>
+            <a:ln>
+              <a:noFill/>
+            </a:ln>
+          </p:spPr>
+          <p:style>
+            <a:lnRef idx="2">
+              <a:schemeClr val="accent1">
+                <a:shade val="15000"/>
+              </a:schemeClr>
+            </a:lnRef>
+            <a:fillRef idx="1">
+              <a:schemeClr val="accent1"/>
+            </a:fillRef>
+            <a:effectRef idx="0">
+              <a:schemeClr val="accent1"/>
+            </a:effectRef>
+            <a:fontRef idx="minor">
+              <a:schemeClr val="lt1"/>
+            </a:fontRef>
+          </p:style>
+          <p:txBody>
+            <a:bodyPr lIns="0" tIns="0" rIns="0" bIns="0" rtlCol="0" anchor="ctr"/>
+            <a:lstStyle/>
+            <a:p>
+              <a:pPr algn="ctr"/>
+              <a:endParaRPr kumimoji="1" lang="ja-JP" altLang="en-US" sz="600" dirty="0">
+                <a:solidFill>
+                  <a:schemeClr val="tx1"/>
+                </a:solidFill>
+                <a:latin typeface="UD デジタル 教科書体 NP-R" panose="020B0400000000000000" pitchFamily="18" charset="-128"/>
+                <a:ea typeface="UD デジタル 教科書体 NP-R" panose="020B0400000000000000" pitchFamily="18" charset="-128"/>
+              </a:endParaRPr>
+            </a:p>
+          </p:txBody>
+        </p:sp>
+        <p:sp>
+          <p:nvSpPr>
+            <p:cNvPr id="5" name="四角形: 角を丸くする 4">
+              <a:extLst>
+                <a:ext uri="{FF2B5EF4-FFF2-40B4-BE49-F238E27FC236}">
+                  <a16:creationId xmlns:a16="http://schemas.microsoft.com/office/drawing/2014/main" id="{C773B568-B3D6-FAF7-4278-03B65AA83324}"/>
+                </a:ext>
+              </a:extLst>
+            </p:cNvPr>
+            <p:cNvSpPr/>
+            <p:nvPr/>
+          </p:nvSpPr>
+          <p:spPr>
+            <a:xfrm>
+              <a:off x="-1" y="5074"/>
+              <a:ext cx="3095625" cy="1939614"/>
+            </a:xfrm>
+            <a:prstGeom prst="roundRect">
+              <a:avLst>
+                <a:gd name="adj" fmla="val 13559"/>
+              </a:avLst>
+            </a:prstGeom>
+            <a:noFill/>
+            <a:ln w="6350">
+              <a:noFill/>
+            </a:ln>
+            <a:effectLst/>
+          </p:spPr>
+          <p:style>
+            <a:lnRef idx="2">
+              <a:schemeClr val="accent1">
+                <a:shade val="15000"/>
+              </a:schemeClr>
+            </a:lnRef>
+            <a:fillRef idx="1">
+              <a:schemeClr val="accent1"/>
+            </a:fillRef>
+            <a:effectRef idx="0">
+              <a:schemeClr val="accent1"/>
+            </a:effectRef>
+            <a:fontRef idx="minor">
+              <a:schemeClr val="lt1"/>
+            </a:fontRef>
+          </p:style>
+          <p:txBody>
+            <a:bodyPr wrap="square" lIns="72000" tIns="36000" rIns="72000" bIns="0" rtlCol="0" anchor="b">
+              <a:noAutofit/>
+            </a:bodyPr>
+            <a:lstStyle/>
+            <a:p>
+              <a:pPr algn="ctr"/>
+              <a:endParaRPr kumimoji="1" lang="ja-JP" altLang="en-US" sz="600" dirty="0">
+                <a:solidFill>
+                  <a:schemeClr val="tx1"/>
+                </a:solidFill>
+                <a:latin typeface="UD デジタル 教科書体 NP-R" panose="02020400000000000000" pitchFamily="18" charset="-128"/>
+                <a:ea typeface="UD デジタル 教科書体 NP-R" panose="02020400000000000000" pitchFamily="18" charset="-128"/>
+              </a:endParaRPr>
+            </a:p>
+          </p:txBody>
+        </p:sp>
+        <p:grpSp>
+          <p:nvGrpSpPr>
+            <p:cNvPr id="3" name="グループ化 2">
+              <a:extLst>
+                <a:ext uri="{FF2B5EF4-FFF2-40B4-BE49-F238E27FC236}">
+                  <a16:creationId xmlns:a16="http://schemas.microsoft.com/office/drawing/2014/main" id="{8F57D301-21E5-5B8B-1793-663A0E25C55C}"/>
+                </a:ext>
+              </a:extLst>
+            </p:cNvPr>
+            <p:cNvGrpSpPr/>
+            <p:nvPr/>
+          </p:nvGrpSpPr>
+          <p:grpSpPr>
+            <a:xfrm>
+              <a:off x="26424" y="35311"/>
+              <a:ext cx="1781026" cy="1777008"/>
+              <a:chOff x="4761" y="0"/>
+              <a:chExt cx="1944000" cy="1944687"/>
+            </a:xfrm>
+          </p:grpSpPr>
+          <p:sp>
+            <p:nvSpPr>
+              <p:cNvPr id="7" name="四角形: 角を丸くする 6">
+                <a:extLst>
+                  <a:ext uri="{FF2B5EF4-FFF2-40B4-BE49-F238E27FC236}">
+                    <a16:creationId xmlns:a16="http://schemas.microsoft.com/office/drawing/2014/main" id="{A356266D-B8E0-24F8-A58A-17BEA7001497}"/>
+                  </a:ext>
+                </a:extLst>
+              </p:cNvPr>
+              <p:cNvSpPr/>
+              <p:nvPr/>
+            </p:nvSpPr>
+            <p:spPr>
+              <a:xfrm>
+                <a:off x="4761" y="0"/>
+                <a:ext cx="1944000" cy="1944687"/>
+              </a:xfrm>
+              <a:prstGeom prst="roundRect">
+                <a:avLst>
+                  <a:gd name="adj" fmla="val 8828"/>
+                </a:avLst>
+              </a:prstGeom>
+              <a:blipFill>
+                <a:blip r:embed="rId2"/>
+                <a:stretch>
+                  <a:fillRect/>
+                </a:stretch>
+              </a:blipFill>
+              <a:ln w="171450">
+                <a:noFill/>
+              </a:ln>
+              <a:effectLst>
+                <a:glow>
+                  <a:schemeClr val="bg1"/>
+                </a:glow>
+                <a:outerShdw dist="12700" sx="1000" sy="1000" algn="ctr" rotWithShape="0">
+                  <a:srgbClr val="000000"/>
+                </a:outerShdw>
+                <a:softEdge rad="127000"/>
+              </a:effectLst>
+            </p:spPr>
+            <p:style>
+              <a:lnRef idx="2">
+                <a:schemeClr val="accent1">
+                  <a:shade val="15000"/>
+                </a:schemeClr>
+              </a:lnRef>
+              <a:fillRef idx="1">
+                <a:schemeClr val="accent1"/>
+              </a:fillRef>
+              <a:effectRef idx="0">
+                <a:schemeClr val="accent1"/>
+              </a:effectRef>
+              <a:fontRef idx="minor">
+                <a:schemeClr val="lt1"/>
+              </a:fontRef>
+            </p:style>
+            <p:txBody>
+              <a:bodyPr rtlCol="0" anchor="ctr"/>
+              <a:lstStyle/>
+              <a:p>
+                <a:pPr algn="ctr"/>
+                <a:endParaRPr lang="ja-JP" altLang="en-US"/>
+              </a:p>
+            </p:txBody>
+          </p:sp>
+          <p:grpSp>
+            <p:nvGrpSpPr>
+              <p:cNvPr id="22" name="グループ化 21">
+                <a:extLst>
+                  <a:ext uri="{FF2B5EF4-FFF2-40B4-BE49-F238E27FC236}">
+                    <a16:creationId xmlns:a16="http://schemas.microsoft.com/office/drawing/2014/main" id="{4432C75C-BC64-373F-4D11-ADDFA62EC4C7}"/>
+                  </a:ext>
+                </a:extLst>
+              </p:cNvPr>
+              <p:cNvGrpSpPr/>
+              <p:nvPr/>
+            </p:nvGrpSpPr>
+            <p:grpSpPr>
+              <a:xfrm>
+                <a:off x="311866" y="138682"/>
+                <a:ext cx="1329789" cy="1662236"/>
+                <a:chOff x="324896" y="199586"/>
+                <a:chExt cx="1294896" cy="1618620"/>
+              </a:xfrm>
+            </p:grpSpPr>
+            <p:sp>
+              <p:nvSpPr>
+                <p:cNvPr id="14" name="四角形: 角を丸くする 13">
+                  <a:extLst>
+                    <a:ext uri="{FF2B5EF4-FFF2-40B4-BE49-F238E27FC236}">
+                      <a16:creationId xmlns:a16="http://schemas.microsoft.com/office/drawing/2014/main" id="{882CCC63-3482-E9D7-914E-7C5251392B33}"/>
+                    </a:ext>
+                  </a:extLst>
+                </p:cNvPr>
+                <p:cNvSpPr/>
+                <p:nvPr/>
+              </p:nvSpPr>
+              <p:spPr>
+                <a:xfrm>
+                  <a:off x="324896" y="199586"/>
+                  <a:ext cx="1294896" cy="1618620"/>
+                </a:xfrm>
+                <a:prstGeom prst="roundRect">
+                  <a:avLst>
+                    <a:gd name="adj" fmla="val 17073"/>
+                  </a:avLst>
+                </a:prstGeom>
+                <a:blipFill>
+                  <a:blip r:embed="rId3"/>
+                  <a:stretch>
+                    <a:fillRect/>
+                  </a:stretch>
+                </a:blipFill>
+                <a:ln>
+                  <a:noFill/>
+                </a:ln>
+              </p:spPr>
+              <p:style>
+                <a:lnRef idx="2">
+                  <a:schemeClr val="accent1">
+                    <a:shade val="15000"/>
+                  </a:schemeClr>
+                </a:lnRef>
+                <a:fillRef idx="1">
+                  <a:schemeClr val="accent1"/>
+                </a:fillRef>
+                <a:effectRef idx="0">
+                  <a:schemeClr val="accent1"/>
+                </a:effectRef>
+                <a:fontRef idx="minor">
+                  <a:schemeClr val="lt1"/>
+                </a:fontRef>
+              </p:style>
+              <p:txBody>
+                <a:bodyPr rtlCol="0" anchor="ctr"/>
+                <a:lstStyle/>
+                <a:p>
+                  <a:pPr algn="ctr"/>
+                  <a:endParaRPr kumimoji="1" lang="ja-JP" altLang="en-US"/>
+                </a:p>
+              </p:txBody>
+            </p:sp>
+            <p:pic>
+              <p:nvPicPr>
+                <p:cNvPr id="21" name="図 20" descr="ロゴ が含まれている画像&#10;&#10;AI 生成コンテンツは誤りを含む可能性があります。">
+                  <a:extLst>
+                    <a:ext uri="{FF2B5EF4-FFF2-40B4-BE49-F238E27FC236}">
+                      <a16:creationId xmlns:a16="http://schemas.microsoft.com/office/drawing/2014/main" id="{B796058B-89F0-9799-1E85-0E33B69AE4CD}"/>
+                    </a:ext>
+                  </a:extLst>
+                </p:cNvPr>
+                <p:cNvPicPr>
+                  <a:picLocks noChangeAspect="1"/>
+                </p:cNvPicPr>
+                <p:nvPr/>
+              </p:nvPicPr>
+              <p:blipFill>
+                <a:blip r:embed="rId4">
+                  <a:extLst>
+                    <a:ext uri="{28A0092B-C50C-407E-A947-70E740481C1C}">
+                      <a14:useLocalDpi xmlns:a14="http://schemas.microsoft.com/office/drawing/2010/main" val="0"/>
+                    </a:ext>
+                  </a:extLst>
+                </a:blip>
+                <a:srcRect l="2225" t="9650" r="4370" b="12728"/>
+                <a:stretch>
+                  <a:fillRect/>
+                </a:stretch>
+              </p:blipFill>
+              <p:spPr>
+                <a:xfrm>
+                  <a:off x="471089" y="268171"/>
+                  <a:ext cx="1002507" cy="282809"/>
+                </a:xfrm>
+                <a:prstGeom prst="rect">
+                  <a:avLst/>
+                </a:prstGeom>
+              </p:spPr>
+            </p:pic>
+          </p:grpSp>
+        </p:grpSp>
+        <p:sp>
+          <p:nvSpPr>
+            <p:cNvPr id="31" name="四角形: 角を丸くする 30">
+              <a:extLst>
+                <a:ext uri="{FF2B5EF4-FFF2-40B4-BE49-F238E27FC236}">
+                  <a16:creationId xmlns:a16="http://schemas.microsoft.com/office/drawing/2014/main" id="{8C970144-9609-3024-3E60-C1066BBC7D64}"/>
+                </a:ext>
+              </a:extLst>
+            </p:cNvPr>
+            <p:cNvSpPr/>
+            <p:nvPr/>
+          </p:nvSpPr>
+          <p:spPr>
+            <a:xfrm>
+              <a:off x="1844455" y="255162"/>
+              <a:ext cx="1153343" cy="214457"/>
+            </a:xfrm>
+            <a:prstGeom prst="roundRect">
+              <a:avLst>
+                <a:gd name="adj" fmla="val 6665"/>
+              </a:avLst>
+            </a:prstGeom>
+            <a:noFill/>
+            <a:ln>
+              <a:noFill/>
+            </a:ln>
+          </p:spPr>
+          <p:style>
+            <a:lnRef idx="2">
+              <a:schemeClr val="accent1">
+                <a:shade val="15000"/>
+              </a:schemeClr>
+            </a:lnRef>
+            <a:fillRef idx="1">
+              <a:schemeClr val="accent1"/>
+            </a:fillRef>
+            <a:effectRef idx="0">
+              <a:schemeClr val="accent1"/>
+            </a:effectRef>
+            <a:fontRef idx="minor">
+              <a:schemeClr val="lt1"/>
+            </a:fontRef>
+          </p:style>
+          <p:txBody>
+            <a:bodyPr lIns="0" tIns="0" rIns="0" bIns="0" rtlCol="0" anchor="ctr"/>
+            <a:lstStyle/>
+            <a:p>
+              <a:pPr algn="ctr"/>
+              <a:r>
+                <a:rPr kumimoji="1" lang="ja-JP" altLang="en-US" dirty="0">
+                  <a:solidFill>
+                    <a:schemeClr val="tx1"/>
+                  </a:solidFill>
+                  <a:latin typeface="UD デジタル 教科書体 NP-R" panose="02020400000000000000" pitchFamily="18" charset="-128"/>
+                  <a:ea typeface="UD デジタル 教科書体 NP-R" panose="02020400000000000000" pitchFamily="18" charset="-128"/>
+                </a:rPr>
+                <a:t>ありがとう</a:t>
+              </a:r>
+              <a:endParaRPr kumimoji="1" lang="ja-JP" altLang="en-US" sz="800" dirty="0">
+                <a:solidFill>
+                  <a:schemeClr val="tx1"/>
+                </a:solidFill>
+                <a:latin typeface="UD デジタル 教科書体 NP-R" panose="02020400000000000000" pitchFamily="18" charset="-128"/>
+                <a:ea typeface="UD デジタル 教科書体 NP-R" panose="02020400000000000000" pitchFamily="18" charset="-128"/>
+              </a:endParaRPr>
+            </a:p>
+          </p:txBody>
+        </p:sp>
+        <p:sp>
+          <p:nvSpPr>
+            <p:cNvPr id="4" name="四角形: 角を丸くする 3">
+              <a:extLst>
+                <a:ext uri="{FF2B5EF4-FFF2-40B4-BE49-F238E27FC236}">
+                  <a16:creationId xmlns:a16="http://schemas.microsoft.com/office/drawing/2014/main" id="{FEC586F6-793A-4C54-DA10-3B4A26BF0719}"/>
+                </a:ext>
+              </a:extLst>
+            </p:cNvPr>
+            <p:cNvSpPr/>
+            <p:nvPr/>
+          </p:nvSpPr>
+          <p:spPr>
+            <a:xfrm>
+              <a:off x="215106" y="1793322"/>
+              <a:ext cx="2654348" cy="120703"/>
+            </a:xfrm>
+            <a:prstGeom prst="roundRect">
+              <a:avLst>
+                <a:gd name="adj" fmla="val 6665"/>
+              </a:avLst>
+            </a:prstGeom>
+            <a:noFill/>
+            <a:ln>
+              <a:noFill/>
+            </a:ln>
+          </p:spPr>
+          <p:style>
+            <a:lnRef idx="2">
+              <a:schemeClr val="accent1">
+                <a:shade val="15000"/>
+              </a:schemeClr>
+            </a:lnRef>
+            <a:fillRef idx="1">
+              <a:schemeClr val="accent1"/>
+            </a:fillRef>
+            <a:effectRef idx="0">
+              <a:schemeClr val="accent1"/>
+            </a:effectRef>
+            <a:fontRef idx="minor">
+              <a:schemeClr val="lt1"/>
+            </a:fontRef>
+          </p:style>
+          <p:txBody>
+            <a:bodyPr lIns="0" tIns="0" rIns="0" bIns="0" rtlCol="0" anchor="ctr"/>
+            <a:lstStyle/>
+            <a:p>
+              <a:r>
+                <a:rPr kumimoji="1" lang="ja-JP" altLang="en-US" sz="600" dirty="0">
+                  <a:solidFill>
+                    <a:schemeClr val="tx1"/>
+                  </a:solidFill>
+                  <a:latin typeface="UD デジタル 教科書体 NP-R" panose="020B0400000000000000" pitchFamily="18" charset="-128"/>
+                  <a:ea typeface="UD デジタル 教科書体 NP-R" panose="020B0400000000000000" pitchFamily="18" charset="-128"/>
+                </a:rPr>
+                <a:t>とけない、われない、かさばらない！　カードで送る新習慣＠名刺代わりに</a:t>
+              </a:r>
+            </a:p>
+          </p:txBody>
+        </p:sp>
+        <p:sp>
+          <p:nvSpPr>
+            <p:cNvPr id="10" name="四角形: 角を丸くする 9">
+              <a:extLst>
+                <a:ext uri="{FF2B5EF4-FFF2-40B4-BE49-F238E27FC236}">
+                  <a16:creationId xmlns:a16="http://schemas.microsoft.com/office/drawing/2014/main" id="{EFD014A6-A756-149E-E1CF-B1652474A8DD}"/>
+                </a:ext>
+              </a:extLst>
+            </p:cNvPr>
+            <p:cNvSpPr/>
+            <p:nvPr/>
+          </p:nvSpPr>
+          <p:spPr>
+            <a:xfrm>
+              <a:off x="1927110" y="71103"/>
+              <a:ext cx="988031" cy="181522"/>
+            </a:xfrm>
+            <a:prstGeom prst="roundRect">
+              <a:avLst>
+                <a:gd name="adj" fmla="val 6665"/>
+              </a:avLst>
+            </a:prstGeom>
+            <a:noFill/>
+            <a:ln>
+              <a:noFill/>
+            </a:ln>
+          </p:spPr>
+          <p:style>
+            <a:lnRef idx="2">
+              <a:schemeClr val="accent1">
+                <a:shade val="15000"/>
+              </a:schemeClr>
+            </a:lnRef>
+            <a:fillRef idx="1">
+              <a:schemeClr val="accent1"/>
+            </a:fillRef>
+            <a:effectRef idx="0">
+              <a:schemeClr val="accent1"/>
+            </a:effectRef>
+            <a:fontRef idx="minor">
+              <a:schemeClr val="lt1"/>
+            </a:fontRef>
+          </p:style>
+          <p:txBody>
+            <a:bodyPr lIns="0" tIns="0" rIns="0" bIns="0" rtlCol="0" anchor="ctr"/>
+            <a:lstStyle/>
+            <a:p>
+              <a:pPr algn="ctr"/>
+              <a:r>
+                <a:rPr kumimoji="1" lang="ja-JP" altLang="en-US" sz="800" dirty="0">
+                  <a:solidFill>
+                    <a:schemeClr val="tx1"/>
+                  </a:solidFill>
+                  <a:latin typeface="UD デジタル 教科書体 NP-R" panose="02020400000000000000" pitchFamily="18" charset="-128"/>
+                  <a:ea typeface="UD デジタル 教科書体 NP-R" panose="02020400000000000000" pitchFamily="18" charset="-128"/>
+                </a:rPr>
+                <a:t>秋田大学</a:t>
+              </a:r>
+              <a:endParaRPr kumimoji="1" lang="en-US" altLang="ja-JP" sz="800" dirty="0">
+                <a:solidFill>
+                  <a:schemeClr val="tx1"/>
+                </a:solidFill>
+                <a:latin typeface="UD デジタル 教科書体 NP-R" panose="02020400000000000000" pitchFamily="18" charset="-128"/>
+                <a:ea typeface="UD デジタル 教科書体 NP-R" panose="02020400000000000000" pitchFamily="18" charset="-128"/>
+              </a:endParaRPr>
+            </a:p>
+          </p:txBody>
+        </p:sp>
+      </p:grpSp>
+      <p:grpSp>
+        <p:nvGrpSpPr>
+          <p:cNvPr id="12" name="グループ化 11">
+            <a:extLst>
+              <a:ext uri="{FF2B5EF4-FFF2-40B4-BE49-F238E27FC236}">
+                <a16:creationId xmlns:a16="http://schemas.microsoft.com/office/drawing/2014/main" id="{9C509106-D2CD-8961-4B07-A4C723F46777}"/>
+              </a:ext>
+            </a:extLst>
+          </p:cNvPr>
+          <p:cNvGrpSpPr/>
+          <p:nvPr/>
+        </p:nvGrpSpPr>
+        <p:grpSpPr>
+          <a:xfrm>
+            <a:off x="1807449" y="499856"/>
+            <a:ext cx="1240551" cy="1240551"/>
+            <a:chOff x="1007265" y="2577396"/>
+            <a:chExt cx="962823" cy="928507"/>
+          </a:xfrm>
+        </p:grpSpPr>
+        <p:sp>
+          <p:nvSpPr>
+            <p:cNvPr id="13" name="四角形: 角を丸くする 12">
+              <a:extLst>
+                <a:ext uri="{FF2B5EF4-FFF2-40B4-BE49-F238E27FC236}">
+                  <a16:creationId xmlns:a16="http://schemas.microsoft.com/office/drawing/2014/main" id="{C4A5E4F1-7C7C-6FA2-8A74-53EEB19C1658}"/>
+                </a:ext>
+              </a:extLst>
+            </p:cNvPr>
+            <p:cNvSpPr/>
+            <p:nvPr/>
+          </p:nvSpPr>
+          <p:spPr>
+            <a:xfrm>
+              <a:off x="1007265" y="2577396"/>
+              <a:ext cx="962823" cy="928507"/>
+            </a:xfrm>
+            <a:prstGeom prst="roundRect">
+              <a:avLst>
+                <a:gd name="adj" fmla="val 6665"/>
+              </a:avLst>
+            </a:prstGeom>
+            <a:solidFill>
+              <a:schemeClr val="bg1"/>
+            </a:solidFill>
+            <a:ln>
+              <a:noFill/>
+            </a:ln>
+          </p:spPr>
+          <p:style>
+            <a:lnRef idx="2">
+              <a:schemeClr val="accent1">
+                <a:shade val="15000"/>
+              </a:schemeClr>
+            </a:lnRef>
+            <a:fillRef idx="1">
+              <a:schemeClr val="accent1"/>
+            </a:fillRef>
+            <a:effectRef idx="0">
+              <a:schemeClr val="accent1"/>
+            </a:effectRef>
+            <a:fontRef idx="minor">
+              <a:schemeClr val="lt1"/>
+            </a:fontRef>
+          </p:style>
+          <p:txBody>
+            <a:bodyPr rtlCol="0" anchor="ctr"/>
+            <a:lstStyle/>
+            <a:p>
+              <a:pPr algn="ctr"/>
+              <a:endParaRPr kumimoji="1" lang="ja-JP" altLang="en-US"/>
+            </a:p>
+          </p:txBody>
+        </p:sp>
+        <p:pic>
+          <p:nvPicPr>
+            <p:cNvPr id="15" name="図 14" descr="QR コード&#10;&#10;AI 生成コンテンツは誤りを含む可能性があります。">
+              <a:extLst>
+                <a:ext uri="{FF2B5EF4-FFF2-40B4-BE49-F238E27FC236}">
+                  <a16:creationId xmlns:a16="http://schemas.microsoft.com/office/drawing/2014/main" id="{D7E6DFBA-8BD9-FD59-E499-1D11269B7EA2}"/>
+                </a:ext>
+              </a:extLst>
+            </p:cNvPr>
+            <p:cNvPicPr>
+              <a:picLocks noChangeAspect="1"/>
+            </p:cNvPicPr>
+            <p:nvPr/>
+          </p:nvPicPr>
+          <p:blipFill>
+            <a:blip r:embed="rId5"/>
+            <a:stretch>
+              <a:fillRect/>
+            </a:stretch>
+          </p:blipFill>
+          <p:spPr>
+            <a:xfrm>
+              <a:off x="1042659" y="2598008"/>
+              <a:ext cx="883492" cy="878787"/>
+            </a:xfrm>
+            <a:prstGeom prst="rect">
+              <a:avLst/>
+            </a:prstGeom>
+          </p:spPr>
+        </p:pic>
+      </p:grpSp>
+    </p:spTree>
+    <p:extLst>
+      <p:ext uri="{BB962C8B-B14F-4D97-AF65-F5344CB8AC3E}">
+        <p14:creationId xmlns:p14="http://schemas.microsoft.com/office/powerpoint/2010/main" val="171924987"/>
+      </p:ext>
+    </p:extLst>
+  </p:cSld>
+  <p:clrMapOvr>
+    <a:masterClrMapping/>
+  </p:clrMapOvr>
+</p:sld>
+</file>
+
+<file path=ppt/slides/slide11.xml><?xml version="1.0" encoding="utf-8"?>
 <p:sld xmlns:a="http://schemas.openxmlformats.org/drawingml/2006/main" xmlns:r="http://schemas.openxmlformats.org/officeDocument/2006/relationships" xmlns:p="http://schemas.openxmlformats.org/presentationml/2006/main">
   <p:cSld>
     <p:spTree>
@@ -4990,7 +5671,2822 @@
 </p:sld>
 </file>
 
-<file path=ppt/slides/slide11.xml><?xml version="1.0" encoding="utf-8"?>
+<file path=ppt/slides/slide2.xml><?xml version="1.0" encoding="utf-8"?>
+<p:sld xmlns:a="http://schemas.openxmlformats.org/drawingml/2006/main" xmlns:r="http://schemas.openxmlformats.org/officeDocument/2006/relationships" xmlns:p="http://schemas.openxmlformats.org/presentationml/2006/main">
+  <p:cSld>
+    <p:spTree>
+      <p:nvGrpSpPr>
+        <p:cNvPr id="1" name="">
+          <a:extLst>
+            <a:ext uri="{FF2B5EF4-FFF2-40B4-BE49-F238E27FC236}">
+              <a16:creationId xmlns:a16="http://schemas.microsoft.com/office/drawing/2014/main" id="{2CBB18B7-95B3-8DEF-89E7-D8EB11A4D469}"/>
+            </a:ext>
+          </a:extLst>
+        </p:cNvPr>
+        <p:cNvGrpSpPr/>
+        <p:nvPr/>
+      </p:nvGrpSpPr>
+      <p:grpSpPr>
+        <a:xfrm>
+          <a:off x="0" y="0"/>
+          <a:ext cx="0" cy="0"/>
+          <a:chOff x="0" y="0"/>
+          <a:chExt cx="0" cy="0"/>
+        </a:xfrm>
+      </p:grpSpPr>
+      <p:sp>
+        <p:nvSpPr>
+          <p:cNvPr id="27" name="四角形: 角を丸くする 26">
+            <a:extLst>
+              <a:ext uri="{FF2B5EF4-FFF2-40B4-BE49-F238E27FC236}">
+                <a16:creationId xmlns:a16="http://schemas.microsoft.com/office/drawing/2014/main" id="{BB553E1C-93E5-7741-5BE0-21B6F34BCC2A}"/>
+              </a:ext>
+            </a:extLst>
+          </p:cNvPr>
+          <p:cNvSpPr/>
+          <p:nvPr/>
+        </p:nvSpPr>
+        <p:spPr>
+          <a:xfrm>
+            <a:off x="-1" y="0"/>
+            <a:ext cx="3095625" cy="1944688"/>
+          </a:xfrm>
+          <a:prstGeom prst="roundRect">
+            <a:avLst>
+              <a:gd name="adj" fmla="val 13559"/>
+            </a:avLst>
+          </a:prstGeom>
+          <a:solidFill>
+            <a:schemeClr val="bg1"/>
+          </a:solidFill>
+          <a:ln w="6350">
+            <a:noFill/>
+          </a:ln>
+          <a:effectLst/>
+        </p:spPr>
+        <p:style>
+          <a:lnRef idx="2">
+            <a:schemeClr val="accent1">
+              <a:shade val="15000"/>
+            </a:schemeClr>
+          </a:lnRef>
+          <a:fillRef idx="1">
+            <a:schemeClr val="accent1"/>
+          </a:fillRef>
+          <a:effectRef idx="0">
+            <a:schemeClr val="accent1"/>
+          </a:effectRef>
+          <a:fontRef idx="minor">
+            <a:schemeClr val="lt1"/>
+          </a:fontRef>
+        </p:style>
+        <p:txBody>
+          <a:bodyPr wrap="square" lIns="72000" tIns="36000" rIns="72000" bIns="0" rtlCol="0" anchor="b">
+            <a:noAutofit/>
+          </a:bodyPr>
+          <a:lstStyle/>
+          <a:p>
+            <a:pPr algn="ctr"/>
+            <a:endParaRPr kumimoji="1" lang="ja-JP" altLang="en-US" sz="600" dirty="0">
+              <a:solidFill>
+                <a:schemeClr val="tx1"/>
+              </a:solidFill>
+              <a:latin typeface="UD デジタル 教科書体 NP-R" panose="02020400000000000000" pitchFamily="18" charset="-128"/>
+              <a:ea typeface="UD デジタル 教科書体 NP-R" panose="02020400000000000000" pitchFamily="18" charset="-128"/>
+            </a:endParaRPr>
+          </a:p>
+        </p:txBody>
+      </p:sp>
+      <p:sp>
+        <p:nvSpPr>
+          <p:cNvPr id="9" name="四角形: 角を丸くする 8">
+            <a:extLst>
+              <a:ext uri="{FF2B5EF4-FFF2-40B4-BE49-F238E27FC236}">
+                <a16:creationId xmlns:a16="http://schemas.microsoft.com/office/drawing/2014/main" id="{3B01305D-13E8-D326-DFB1-2D11528469B1}"/>
+              </a:ext>
+            </a:extLst>
+          </p:cNvPr>
+          <p:cNvSpPr/>
+          <p:nvPr/>
+        </p:nvSpPr>
+        <p:spPr>
+          <a:xfrm>
+            <a:off x="52384" y="86414"/>
+            <a:ext cx="2990852" cy="1165609"/>
+          </a:xfrm>
+          <a:prstGeom prst="roundRect">
+            <a:avLst>
+              <a:gd name="adj" fmla="val 14805"/>
+            </a:avLst>
+          </a:prstGeom>
+          <a:blipFill dpi="0" rotWithShape="1">
+            <a:blip r:embed="rId2"/>
+            <a:srcRect/>
+            <a:stretch>
+              <a:fillRect/>
+            </a:stretch>
+          </a:blipFill>
+          <a:ln w="171450">
+            <a:noFill/>
+          </a:ln>
+          <a:effectLst>
+            <a:glow>
+              <a:schemeClr val="bg1"/>
+            </a:glow>
+            <a:outerShdw dist="12700" sx="1000" sy="1000" algn="ctr" rotWithShape="0">
+              <a:srgbClr val="000000"/>
+            </a:outerShdw>
+            <a:softEdge rad="63500"/>
+          </a:effectLst>
+        </p:spPr>
+        <p:style>
+          <a:lnRef idx="2">
+            <a:schemeClr val="accent1">
+              <a:shade val="15000"/>
+            </a:schemeClr>
+          </a:lnRef>
+          <a:fillRef idx="1">
+            <a:schemeClr val="accent1"/>
+          </a:fillRef>
+          <a:effectRef idx="0">
+            <a:schemeClr val="accent1"/>
+          </a:effectRef>
+          <a:fontRef idx="minor">
+            <a:schemeClr val="lt1"/>
+          </a:fontRef>
+        </p:style>
+        <p:txBody>
+          <a:bodyPr rtlCol="0" anchor="ctr"/>
+          <a:lstStyle/>
+          <a:p>
+            <a:pPr algn="ctr"/>
+            <a:endParaRPr lang="ja-JP" altLang="en-US"/>
+          </a:p>
+        </p:txBody>
+      </p:sp>
+      <p:sp>
+        <p:nvSpPr>
+          <p:cNvPr id="16" name="四角形: 角を丸くする 15">
+            <a:extLst>
+              <a:ext uri="{FF2B5EF4-FFF2-40B4-BE49-F238E27FC236}">
+                <a16:creationId xmlns:a16="http://schemas.microsoft.com/office/drawing/2014/main" id="{8EFB68EC-218E-33D2-A980-B25E6D96C685}"/>
+              </a:ext>
+            </a:extLst>
+          </p:cNvPr>
+          <p:cNvSpPr/>
+          <p:nvPr/>
+        </p:nvSpPr>
+        <p:spPr>
+          <a:xfrm>
+            <a:off x="234235" y="250086"/>
+            <a:ext cx="2627152" cy="843154"/>
+          </a:xfrm>
+          <a:prstGeom prst="roundRect">
+            <a:avLst>
+              <a:gd name="adj" fmla="val 13559"/>
+            </a:avLst>
+          </a:prstGeom>
+          <a:solidFill>
+            <a:schemeClr val="bg1"/>
+          </a:solidFill>
+          <a:ln w="6350">
+            <a:noFill/>
+          </a:ln>
+          <a:effectLst/>
+        </p:spPr>
+        <p:style>
+          <a:lnRef idx="2">
+            <a:schemeClr val="accent1">
+              <a:shade val="15000"/>
+            </a:schemeClr>
+          </a:lnRef>
+          <a:fillRef idx="1">
+            <a:schemeClr val="accent1"/>
+          </a:fillRef>
+          <a:effectRef idx="0">
+            <a:schemeClr val="accent1"/>
+          </a:effectRef>
+          <a:fontRef idx="minor">
+            <a:schemeClr val="lt1"/>
+          </a:fontRef>
+        </p:style>
+        <p:txBody>
+          <a:bodyPr wrap="square" lIns="72000" tIns="36000" rIns="72000" bIns="0" rtlCol="0" anchor="b">
+            <a:noAutofit/>
+          </a:bodyPr>
+          <a:lstStyle/>
+          <a:p>
+            <a:pPr algn="ctr"/>
+            <a:r>
+              <a:rPr kumimoji="1" lang="ja-JP" altLang="en-US" sz="500" dirty="0">
+                <a:solidFill>
+                  <a:schemeClr val="tx1"/>
+                </a:solidFill>
+                <a:latin typeface="UD デジタル 教科書体 NP-R" panose="02020400000000000000" pitchFamily="18" charset="-128"/>
+                <a:ea typeface="UD デジタル 教科書体 NP-R" panose="02020400000000000000" pitchFamily="18" charset="-128"/>
+              </a:rPr>
+              <a:t>本カードを破損・紛失された場合、または使用期限を過ぎた場合は、返礼品を</a:t>
+            </a:r>
+            <a:endParaRPr kumimoji="1" lang="en-US" altLang="ja-JP" sz="500" dirty="0">
+              <a:solidFill>
+                <a:schemeClr val="tx1"/>
+              </a:solidFill>
+              <a:latin typeface="UD デジタル 教科書体 NP-R" panose="02020400000000000000" pitchFamily="18" charset="-128"/>
+              <a:ea typeface="UD デジタル 教科書体 NP-R" panose="02020400000000000000" pitchFamily="18" charset="-128"/>
+            </a:endParaRPr>
+          </a:p>
+          <a:p>
+            <a:pPr algn="ctr"/>
+            <a:r>
+              <a:rPr kumimoji="1" lang="ja-JP" altLang="en-US" sz="500" dirty="0">
+                <a:solidFill>
+                  <a:schemeClr val="tx1"/>
+                </a:solidFill>
+                <a:latin typeface="UD デジタル 教科書体 NP-R" panose="02020400000000000000" pitchFamily="18" charset="-128"/>
+                <a:ea typeface="UD デジタル 教科書体 NP-R" panose="02020400000000000000" pitchFamily="18" charset="-128"/>
+              </a:rPr>
+              <a:t>  ご提供できかねますので、あらかじめご了承くださいますようお願いいたします。</a:t>
+            </a:r>
+          </a:p>
+        </p:txBody>
+      </p:sp>
+      <p:sp>
+        <p:nvSpPr>
+          <p:cNvPr id="5" name="四角形: 角を丸くする 4">
+            <a:extLst>
+              <a:ext uri="{FF2B5EF4-FFF2-40B4-BE49-F238E27FC236}">
+                <a16:creationId xmlns:a16="http://schemas.microsoft.com/office/drawing/2014/main" id="{13B85B00-3FFD-3C66-2B1F-65E05DF0D111}"/>
+              </a:ext>
+            </a:extLst>
+          </p:cNvPr>
+          <p:cNvSpPr/>
+          <p:nvPr/>
+        </p:nvSpPr>
+        <p:spPr>
+          <a:xfrm>
+            <a:off x="296296" y="568732"/>
+            <a:ext cx="564212" cy="211760"/>
+          </a:xfrm>
+          <a:prstGeom prst="roundRect">
+            <a:avLst>
+              <a:gd name="adj" fmla="val 6665"/>
+            </a:avLst>
+          </a:prstGeom>
+          <a:solidFill>
+            <a:schemeClr val="bg1"/>
+          </a:solidFill>
+          <a:ln>
+            <a:noFill/>
+          </a:ln>
+        </p:spPr>
+        <p:style>
+          <a:lnRef idx="2">
+            <a:schemeClr val="accent1">
+              <a:shade val="15000"/>
+            </a:schemeClr>
+          </a:lnRef>
+          <a:fillRef idx="1">
+            <a:schemeClr val="accent1"/>
+          </a:fillRef>
+          <a:effectRef idx="0">
+            <a:schemeClr val="accent1"/>
+          </a:effectRef>
+          <a:fontRef idx="minor">
+            <a:schemeClr val="lt1"/>
+          </a:fontRef>
+        </p:style>
+        <p:txBody>
+          <a:bodyPr lIns="0" tIns="0" rIns="0" bIns="0" rtlCol="0" anchor="ctr"/>
+          <a:lstStyle/>
+          <a:p>
+            <a:pPr algn="ctr"/>
+            <a:r>
+              <a:rPr kumimoji="1" lang="en-US" altLang="ja-JP" sz="800" dirty="0">
+                <a:solidFill>
+                  <a:schemeClr val="tx1"/>
+                </a:solidFill>
+                <a:latin typeface="UD デジタル 教科書体 NP-R" panose="02020400000000000000" pitchFamily="18" charset="-128"/>
+                <a:ea typeface="UD デジタル 教科書体 NP-R" panose="02020400000000000000" pitchFamily="18" charset="-128"/>
+              </a:rPr>
+              <a:t>PINCODE</a:t>
+            </a:r>
+          </a:p>
+        </p:txBody>
+      </p:sp>
+      <p:sp>
+        <p:nvSpPr>
+          <p:cNvPr id="6" name="四角形: 角を丸くする 5">
+            <a:extLst>
+              <a:ext uri="{FF2B5EF4-FFF2-40B4-BE49-F238E27FC236}">
+                <a16:creationId xmlns:a16="http://schemas.microsoft.com/office/drawing/2014/main" id="{3E8840FA-8BA6-D492-7178-88D799CD79C0}"/>
+              </a:ext>
+            </a:extLst>
+          </p:cNvPr>
+          <p:cNvSpPr/>
+          <p:nvPr/>
+        </p:nvSpPr>
+        <p:spPr>
+          <a:xfrm>
+            <a:off x="-1" y="-5087"/>
+            <a:ext cx="3095625" cy="1949774"/>
+          </a:xfrm>
+          <a:prstGeom prst="roundRect">
+            <a:avLst>
+              <a:gd name="adj" fmla="val 0"/>
+            </a:avLst>
+          </a:prstGeom>
+          <a:noFill/>
+          <a:ln>
+            <a:noFill/>
+          </a:ln>
+        </p:spPr>
+        <p:style>
+          <a:lnRef idx="2">
+            <a:schemeClr val="accent1">
+              <a:shade val="15000"/>
+            </a:schemeClr>
+          </a:lnRef>
+          <a:fillRef idx="1">
+            <a:schemeClr val="accent1"/>
+          </a:fillRef>
+          <a:effectRef idx="0">
+            <a:schemeClr val="accent1"/>
+          </a:effectRef>
+          <a:fontRef idx="minor">
+            <a:schemeClr val="lt1"/>
+          </a:fontRef>
+        </p:style>
+        <p:txBody>
+          <a:bodyPr lIns="0" tIns="0" rIns="0" bIns="0" rtlCol="0" anchor="ctr"/>
+          <a:lstStyle/>
+          <a:p>
+            <a:pPr algn="ctr"/>
+            <a:endParaRPr kumimoji="1" lang="ja-JP" altLang="en-US" sz="600" dirty="0">
+              <a:solidFill>
+                <a:schemeClr val="tx1"/>
+              </a:solidFill>
+              <a:latin typeface="UD デジタル 教科書体 NP-R" panose="020B0400000000000000" pitchFamily="18" charset="-128"/>
+              <a:ea typeface="UD デジタル 教科書体 NP-R" panose="020B0400000000000000" pitchFamily="18" charset="-128"/>
+            </a:endParaRPr>
+          </a:p>
+        </p:txBody>
+      </p:sp>
+      <p:sp>
+        <p:nvSpPr>
+          <p:cNvPr id="18" name="四角形: 角を丸くする 17">
+            <a:extLst>
+              <a:ext uri="{FF2B5EF4-FFF2-40B4-BE49-F238E27FC236}">
+                <a16:creationId xmlns:a16="http://schemas.microsoft.com/office/drawing/2014/main" id="{44B6410A-4EAF-C2B7-3C90-53653C8DE213}"/>
+              </a:ext>
+            </a:extLst>
+          </p:cNvPr>
+          <p:cNvSpPr/>
+          <p:nvPr/>
+        </p:nvSpPr>
+        <p:spPr>
+          <a:xfrm>
+            <a:off x="216692" y="1408325"/>
+            <a:ext cx="2662238" cy="302565"/>
+          </a:xfrm>
+          <a:prstGeom prst="roundRect">
+            <a:avLst>
+              <a:gd name="adj" fmla="val 17073"/>
+            </a:avLst>
+          </a:prstGeom>
+          <a:noFill/>
+          <a:ln w="6350">
+            <a:solidFill>
+              <a:schemeClr val="tx1"/>
+            </a:solidFill>
+          </a:ln>
+          <a:effectLst/>
+        </p:spPr>
+        <p:style>
+          <a:lnRef idx="2">
+            <a:schemeClr val="accent1">
+              <a:shade val="15000"/>
+            </a:schemeClr>
+          </a:lnRef>
+          <a:fillRef idx="1">
+            <a:schemeClr val="accent1"/>
+          </a:fillRef>
+          <a:effectRef idx="0">
+            <a:schemeClr val="accent1"/>
+          </a:effectRef>
+          <a:fontRef idx="minor">
+            <a:schemeClr val="lt1"/>
+          </a:fontRef>
+        </p:style>
+        <p:txBody>
+          <a:bodyPr rtlCol="0" anchor="ctr"/>
+          <a:lstStyle/>
+          <a:p>
+            <a:pPr algn="ctr"/>
+            <a:r>
+              <a:rPr kumimoji="1" lang="en-US" altLang="ja-JP" sz="600" dirty="0">
+                <a:solidFill>
+                  <a:schemeClr val="tx1"/>
+                </a:solidFill>
+                <a:latin typeface="UD デジタル 教科書体 NP-R" panose="02020400000000000000" pitchFamily="18" charset="-128"/>
+                <a:ea typeface="UD デジタル 教科書体 NP-R" panose="02020400000000000000" pitchFamily="18" charset="-128"/>
+              </a:rPr>
+              <a:t>[</a:t>
+            </a:r>
+            <a:r>
+              <a:rPr kumimoji="1" lang="ja-JP" altLang="en-US" sz="600" dirty="0">
+                <a:solidFill>
+                  <a:schemeClr val="tx1"/>
+                </a:solidFill>
+                <a:latin typeface="UD デジタル 教科書体 NP-R" panose="02020400000000000000" pitchFamily="18" charset="-128"/>
+                <a:ea typeface="UD デジタル 教科書体 NP-R" panose="02020400000000000000" pitchFamily="18" charset="-128"/>
+              </a:rPr>
+              <a:t>返礼品に関するお問い合わせ</a:t>
+            </a:r>
+            <a:r>
+              <a:rPr kumimoji="1" lang="en-US" altLang="ja-JP" sz="600" dirty="0">
+                <a:solidFill>
+                  <a:schemeClr val="tx1"/>
+                </a:solidFill>
+                <a:latin typeface="UD デジタル 教科書体 NP-R" panose="02020400000000000000" pitchFamily="18" charset="-128"/>
+                <a:ea typeface="UD デジタル 教科書体 NP-R" panose="02020400000000000000" pitchFamily="18" charset="-128"/>
+              </a:rPr>
+              <a:t>]</a:t>
+            </a:r>
+          </a:p>
+          <a:p>
+            <a:pPr algn="ctr"/>
+            <a:r>
+              <a:rPr kumimoji="1" lang="ja-JP" altLang="en-US" sz="600" dirty="0">
+                <a:solidFill>
+                  <a:schemeClr val="tx1"/>
+                </a:solidFill>
+                <a:latin typeface="UD デジタル 教科書体 NP-R" panose="02020400000000000000" pitchFamily="18" charset="-128"/>
+                <a:ea typeface="UD デジタル 教科書体 NP-R" panose="02020400000000000000" pitchFamily="18" charset="-128"/>
+              </a:rPr>
+              <a:t>秋田大学総務企画部広報課</a:t>
+            </a:r>
+          </a:p>
+          <a:p>
+            <a:pPr algn="ctr"/>
+            <a:r>
+              <a:rPr kumimoji="1" lang="ja-JP" altLang="en-US" sz="600" dirty="0">
+                <a:solidFill>
+                  <a:schemeClr val="tx1"/>
+                </a:solidFill>
+                <a:latin typeface="UD デジタル 教科書体 NP-R" panose="02020400000000000000" pitchFamily="18" charset="-128"/>
+                <a:ea typeface="UD デジタル 教科書体 NP-R" panose="02020400000000000000" pitchFamily="18" charset="-128"/>
+              </a:rPr>
+              <a:t>電話：</a:t>
+            </a:r>
+            <a:r>
+              <a:rPr kumimoji="1" lang="en-US" altLang="ja-JP" sz="600" dirty="0">
+                <a:solidFill>
+                  <a:schemeClr val="tx1"/>
+                </a:solidFill>
+                <a:latin typeface="UD デジタル 教科書体 NP-R" panose="02020400000000000000" pitchFamily="18" charset="-128"/>
+                <a:ea typeface="UD デジタル 教科書体 NP-R" panose="02020400000000000000" pitchFamily="18" charset="-128"/>
+              </a:rPr>
+              <a:t>018-889-3266</a:t>
+            </a:r>
+            <a:r>
+              <a:rPr kumimoji="1" lang="ja-JP" altLang="en-US" sz="600" dirty="0">
+                <a:solidFill>
+                  <a:schemeClr val="tx1"/>
+                </a:solidFill>
+                <a:latin typeface="UD デジタル 教科書体 NP-R" panose="02020400000000000000" pitchFamily="18" charset="-128"/>
+                <a:ea typeface="UD デジタル 教科書体 NP-R" panose="02020400000000000000" pitchFamily="18" charset="-128"/>
+              </a:rPr>
+              <a:t>　</a:t>
+            </a:r>
+            <a:r>
+              <a:rPr kumimoji="1" lang="en-US" altLang="ja-JP" sz="600" dirty="0">
+                <a:solidFill>
+                  <a:schemeClr val="tx1"/>
+                </a:solidFill>
+                <a:latin typeface="UD デジタル 教科書体 NP-R" panose="02020400000000000000" pitchFamily="18" charset="-128"/>
+                <a:ea typeface="UD デジタル 教科書体 NP-R" panose="02020400000000000000" pitchFamily="18" charset="-128"/>
+              </a:rPr>
+              <a:t>e-mail</a:t>
+            </a:r>
+            <a:r>
+              <a:rPr kumimoji="1" lang="ja-JP" altLang="en-US" sz="600" dirty="0">
+                <a:solidFill>
+                  <a:schemeClr val="tx1"/>
+                </a:solidFill>
+                <a:latin typeface="UD デジタル 教科書体 NP-R" panose="02020400000000000000" pitchFamily="18" charset="-128"/>
+                <a:ea typeface="UD デジタル 教科書体 NP-R" panose="02020400000000000000" pitchFamily="18" charset="-128"/>
+              </a:rPr>
+              <a:t>：</a:t>
+            </a:r>
+            <a:r>
+              <a:rPr kumimoji="1" lang="en-US" altLang="ja-JP" sz="600" dirty="0">
+                <a:solidFill>
+                  <a:schemeClr val="tx1"/>
+                </a:solidFill>
+                <a:latin typeface="UD デジタル 教科書体 NP-R" panose="02020400000000000000" pitchFamily="18" charset="-128"/>
+                <a:ea typeface="UD デジタル 教科書体 NP-R" panose="02020400000000000000" pitchFamily="18" charset="-128"/>
+              </a:rPr>
+              <a:t>kikin@jimu.akita-u.ac.jp</a:t>
+            </a:r>
+          </a:p>
+        </p:txBody>
+      </p:sp>
+      <p:sp>
+        <p:nvSpPr>
+          <p:cNvPr id="19" name="四角形: 角を丸くする 18">
+            <a:extLst>
+              <a:ext uri="{FF2B5EF4-FFF2-40B4-BE49-F238E27FC236}">
+                <a16:creationId xmlns:a16="http://schemas.microsoft.com/office/drawing/2014/main" id="{28CE2EAB-21EF-E1A0-BF75-9518E545E6AA}"/>
+              </a:ext>
+            </a:extLst>
+          </p:cNvPr>
+          <p:cNvSpPr/>
+          <p:nvPr/>
+        </p:nvSpPr>
+        <p:spPr>
+          <a:xfrm>
+            <a:off x="269861" y="1779606"/>
+            <a:ext cx="2720550" cy="131546"/>
+          </a:xfrm>
+          <a:prstGeom prst="roundRect">
+            <a:avLst>
+              <a:gd name="adj" fmla="val 17073"/>
+            </a:avLst>
+          </a:prstGeom>
+          <a:noFill/>
+          <a:ln w="6350">
+            <a:noFill/>
+          </a:ln>
+          <a:effectLst/>
+        </p:spPr>
+        <p:style>
+          <a:lnRef idx="2">
+            <a:schemeClr val="accent1">
+              <a:shade val="15000"/>
+            </a:schemeClr>
+          </a:lnRef>
+          <a:fillRef idx="1">
+            <a:schemeClr val="accent1"/>
+          </a:fillRef>
+          <a:effectRef idx="0">
+            <a:schemeClr val="accent1"/>
+          </a:effectRef>
+          <a:fontRef idx="minor">
+            <a:schemeClr val="lt1"/>
+          </a:fontRef>
+        </p:style>
+        <p:txBody>
+          <a:bodyPr rtlCol="0" anchor="ctr"/>
+          <a:lstStyle/>
+          <a:p>
+            <a:pPr algn="ctr"/>
+            <a:r>
+              <a:rPr kumimoji="1" lang="ja-JP" altLang="en-US" sz="600" dirty="0">
+                <a:solidFill>
+                  <a:schemeClr val="tx1"/>
+                </a:solidFill>
+                <a:latin typeface="UD デジタル 教科書体 NP-R" panose="02020400000000000000" pitchFamily="18" charset="-128"/>
+                <a:ea typeface="UD デジタル 教科書体 NP-R" panose="02020400000000000000" pitchFamily="18" charset="-128"/>
+              </a:rPr>
+              <a:t>「名刺代わりに」は、秋田大学発ベンチャー、</a:t>
+            </a:r>
+            <a:r>
+              <a:rPr kumimoji="1" lang="en-US" altLang="ja-JP" sz="600" dirty="0">
+                <a:solidFill>
+                  <a:schemeClr val="tx1"/>
+                </a:solidFill>
+                <a:latin typeface="UD デジタル 教科書体 NP-R" panose="02020400000000000000" pitchFamily="18" charset="-128"/>
+                <a:ea typeface="UD デジタル 教科書体 NP-R" panose="02020400000000000000" pitchFamily="18" charset="-128"/>
+              </a:rPr>
+              <a:t>AUIC</a:t>
+            </a:r>
+            <a:r>
+              <a:rPr kumimoji="1" lang="ja-JP" altLang="en-US" sz="600" dirty="0">
+                <a:solidFill>
+                  <a:schemeClr val="tx1"/>
+                </a:solidFill>
+                <a:latin typeface="UD デジタル 教科書体 NP-R" panose="02020400000000000000" pitchFamily="18" charset="-128"/>
+                <a:ea typeface="UD デジタル 教科書体 NP-R" panose="02020400000000000000" pitchFamily="18" charset="-128"/>
+              </a:rPr>
+              <a:t>が提供しています。</a:t>
+            </a:r>
+            <a:endParaRPr kumimoji="1" lang="en-US" altLang="ja-JP" sz="600" dirty="0">
+              <a:solidFill>
+                <a:schemeClr val="tx1"/>
+              </a:solidFill>
+              <a:latin typeface="UD デジタル 教科書体 NP-R" panose="02020400000000000000" pitchFamily="18" charset="-128"/>
+              <a:ea typeface="UD デジタル 教科書体 NP-R" panose="02020400000000000000" pitchFamily="18" charset="-128"/>
+            </a:endParaRPr>
+          </a:p>
+        </p:txBody>
+      </p:sp>
+      <p:sp>
+        <p:nvSpPr>
+          <p:cNvPr id="25" name="四角形: 角を丸くする 24">
+            <a:extLst>
+              <a:ext uri="{FF2B5EF4-FFF2-40B4-BE49-F238E27FC236}">
+                <a16:creationId xmlns:a16="http://schemas.microsoft.com/office/drawing/2014/main" id="{727A6FE6-8304-E105-F4CC-BA0CC23DCBE0}"/>
+              </a:ext>
+            </a:extLst>
+          </p:cNvPr>
+          <p:cNvSpPr/>
+          <p:nvPr/>
+        </p:nvSpPr>
+        <p:spPr>
+          <a:xfrm>
+            <a:off x="158380" y="287429"/>
+            <a:ext cx="2720550" cy="164630"/>
+          </a:xfrm>
+          <a:prstGeom prst="roundRect">
+            <a:avLst>
+              <a:gd name="adj" fmla="val 17073"/>
+            </a:avLst>
+          </a:prstGeom>
+          <a:noFill/>
+          <a:ln w="6350">
+            <a:noFill/>
+          </a:ln>
+          <a:effectLst/>
+        </p:spPr>
+        <p:style>
+          <a:lnRef idx="2">
+            <a:schemeClr val="accent1">
+              <a:shade val="15000"/>
+            </a:schemeClr>
+          </a:lnRef>
+          <a:fillRef idx="1">
+            <a:schemeClr val="accent1"/>
+          </a:fillRef>
+          <a:effectRef idx="0">
+            <a:schemeClr val="accent1"/>
+          </a:effectRef>
+          <a:fontRef idx="minor">
+            <a:schemeClr val="lt1"/>
+          </a:fontRef>
+        </p:style>
+        <p:txBody>
+          <a:bodyPr rtlCol="0" anchor="ctr"/>
+          <a:lstStyle/>
+          <a:p>
+            <a:pPr algn="ctr"/>
+            <a:r>
+              <a:rPr kumimoji="1" lang="ja-JP" altLang="en-US" sz="600" dirty="0">
+                <a:solidFill>
+                  <a:schemeClr val="tx1"/>
+                </a:solidFill>
+                <a:latin typeface="UD デジタル 教科書体 NP-R" panose="02020400000000000000" pitchFamily="18" charset="-128"/>
+                <a:ea typeface="UD デジタル 教科書体 NP-R" panose="02020400000000000000" pitchFamily="18" charset="-128"/>
+              </a:rPr>
+              <a:t>［使用期限：</a:t>
+            </a:r>
+            <a:r>
+              <a:rPr kumimoji="1" lang="en-US" altLang="ja-JP" sz="600" dirty="0">
+                <a:solidFill>
+                  <a:schemeClr val="tx1"/>
+                </a:solidFill>
+                <a:latin typeface="UD デジタル 教科書体 NP-R" panose="02020400000000000000" pitchFamily="18" charset="-128"/>
+                <a:ea typeface="UD デジタル 教科書体 NP-R" panose="02020400000000000000" pitchFamily="18" charset="-128"/>
+              </a:rPr>
+              <a:t>2026</a:t>
+            </a:r>
+            <a:r>
+              <a:rPr kumimoji="1" lang="ja-JP" altLang="en-US" sz="600" dirty="0">
+                <a:solidFill>
+                  <a:schemeClr val="tx1"/>
+                </a:solidFill>
+                <a:latin typeface="UD デジタル 教科書体 NP-R" panose="02020400000000000000" pitchFamily="18" charset="-128"/>
+                <a:ea typeface="UD デジタル 教科書体 NP-R" panose="02020400000000000000" pitchFamily="18" charset="-128"/>
+              </a:rPr>
+              <a:t> 年 </a:t>
+            </a:r>
+            <a:r>
+              <a:rPr kumimoji="1" lang="en-US" altLang="ja-JP" sz="600" dirty="0">
+                <a:solidFill>
+                  <a:schemeClr val="tx1"/>
+                </a:solidFill>
+                <a:latin typeface="UD デジタル 教科書体 NP-R" panose="02020400000000000000" pitchFamily="18" charset="-128"/>
+                <a:ea typeface="UD デジタル 教科書体 NP-R" panose="02020400000000000000" pitchFamily="18" charset="-128"/>
+              </a:rPr>
+              <a:t>9</a:t>
+            </a:r>
+            <a:r>
+              <a:rPr kumimoji="1" lang="ja-JP" altLang="en-US" sz="600" dirty="0">
+                <a:solidFill>
+                  <a:schemeClr val="tx1"/>
+                </a:solidFill>
+                <a:latin typeface="UD デジタル 教科書体 NP-R" panose="02020400000000000000" pitchFamily="18" charset="-128"/>
+                <a:ea typeface="UD デジタル 教科書体 NP-R" panose="02020400000000000000" pitchFamily="18" charset="-128"/>
+              </a:rPr>
+              <a:t> 月 </a:t>
+            </a:r>
+            <a:r>
+              <a:rPr kumimoji="1" lang="en-US" altLang="ja-JP" sz="600" dirty="0">
+                <a:solidFill>
+                  <a:schemeClr val="tx1"/>
+                </a:solidFill>
+                <a:latin typeface="UD デジタル 教科書体 NP-R" panose="02020400000000000000" pitchFamily="18" charset="-128"/>
+                <a:ea typeface="UD デジタル 教科書体 NP-R" panose="02020400000000000000" pitchFamily="18" charset="-128"/>
+              </a:rPr>
+              <a:t>30</a:t>
+            </a:r>
+            <a:r>
+              <a:rPr kumimoji="1" lang="ja-JP" altLang="en-US" sz="600" dirty="0">
+                <a:solidFill>
+                  <a:schemeClr val="tx1"/>
+                </a:solidFill>
+                <a:latin typeface="UD デジタル 教科書体 NP-R" panose="02020400000000000000" pitchFamily="18" charset="-128"/>
+                <a:ea typeface="UD デジタル 教科書体 NP-R" panose="02020400000000000000" pitchFamily="18" charset="-128"/>
+              </a:rPr>
+              <a:t> 日 </a:t>
+            </a:r>
+            <a:r>
+              <a:rPr kumimoji="1" lang="en-US" altLang="ja-JP" sz="600" dirty="0">
+                <a:solidFill>
+                  <a:schemeClr val="tx1"/>
+                </a:solidFill>
+                <a:latin typeface="UD デジタル 教科書体 NP-R" panose="02020400000000000000" pitchFamily="18" charset="-128"/>
+                <a:ea typeface="UD デジタル 教科書体 NP-R" panose="02020400000000000000" pitchFamily="18" charset="-128"/>
+              </a:rPr>
+              <a:t>23</a:t>
+            </a:r>
+            <a:r>
+              <a:rPr kumimoji="1" lang="ja-JP" altLang="en-US" sz="600" dirty="0">
+                <a:solidFill>
+                  <a:schemeClr val="tx1"/>
+                </a:solidFill>
+                <a:latin typeface="UD デジタル 教科書体 NP-R" panose="02020400000000000000" pitchFamily="18" charset="-128"/>
+                <a:ea typeface="UD デジタル 教科書体 NP-R" panose="02020400000000000000" pitchFamily="18" charset="-128"/>
+              </a:rPr>
+              <a:t>：</a:t>
+            </a:r>
+            <a:r>
+              <a:rPr kumimoji="1" lang="en-US" altLang="ja-JP" sz="600" dirty="0">
+                <a:solidFill>
+                  <a:schemeClr val="tx1"/>
+                </a:solidFill>
+                <a:latin typeface="UD デジタル 教科書体 NP-R" panose="02020400000000000000" pitchFamily="18" charset="-128"/>
+                <a:ea typeface="UD デジタル 教科書体 NP-R" panose="02020400000000000000" pitchFamily="18" charset="-128"/>
+              </a:rPr>
+              <a:t>59</a:t>
+            </a:r>
+            <a:r>
+              <a:rPr kumimoji="1" lang="ja-JP" altLang="en-US" sz="600" dirty="0">
+                <a:solidFill>
+                  <a:schemeClr val="tx1"/>
+                </a:solidFill>
+                <a:latin typeface="UD デジタル 教科書体 NP-R" panose="02020400000000000000" pitchFamily="18" charset="-128"/>
+                <a:ea typeface="UD デジタル 教科書体 NP-R" panose="02020400000000000000" pitchFamily="18" charset="-128"/>
+              </a:rPr>
+              <a:t>まで］</a:t>
+            </a:r>
+          </a:p>
+        </p:txBody>
+      </p:sp>
+      <p:sp>
+        <p:nvSpPr>
+          <p:cNvPr id="26" name="四角形: 角を丸くする 25">
+            <a:extLst>
+              <a:ext uri="{FF2B5EF4-FFF2-40B4-BE49-F238E27FC236}">
+                <a16:creationId xmlns:a16="http://schemas.microsoft.com/office/drawing/2014/main" id="{501FA509-A0BD-AC34-663F-24EDF71C7E51}"/>
+              </a:ext>
+            </a:extLst>
+          </p:cNvPr>
+          <p:cNvSpPr/>
+          <p:nvPr/>
+        </p:nvSpPr>
+        <p:spPr>
+          <a:xfrm>
+            <a:off x="1060000" y="571575"/>
+            <a:ext cx="1429461" cy="215018"/>
+          </a:xfrm>
+          <a:prstGeom prst="roundRect">
+            <a:avLst>
+              <a:gd name="adj" fmla="val 6665"/>
+            </a:avLst>
+          </a:prstGeom>
+          <a:solidFill>
+            <a:schemeClr val="bg1"/>
+          </a:solidFill>
+          <a:ln>
+            <a:noFill/>
+          </a:ln>
+        </p:spPr>
+        <p:style>
+          <a:lnRef idx="2">
+            <a:schemeClr val="accent1">
+              <a:shade val="15000"/>
+            </a:schemeClr>
+          </a:lnRef>
+          <a:fillRef idx="1">
+            <a:schemeClr val="accent1"/>
+          </a:fillRef>
+          <a:effectRef idx="0">
+            <a:schemeClr val="accent1"/>
+          </a:effectRef>
+          <a:fontRef idx="minor">
+            <a:schemeClr val="lt1"/>
+          </a:fontRef>
+        </p:style>
+        <p:txBody>
+          <a:bodyPr lIns="0" tIns="0" rIns="0" bIns="0" rtlCol="0" anchor="ctr"/>
+          <a:lstStyle/>
+          <a:p>
+            <a:pPr algn="ctr"/>
+            <a:r>
+              <a:rPr lang="en-US" altLang="ja-JP" dirty="0">
+                <a:solidFill>
+                  <a:schemeClr val="tx1"/>
+                </a:solidFill>
+                <a:latin typeface="UD デジタル 教科書体 NP-R" panose="02020400000000000000" pitchFamily="18" charset="-128"/>
+                <a:ea typeface="UD デジタル 教科書体 NP-R" panose="02020400000000000000" pitchFamily="18" charset="-128"/>
+              </a:rPr>
+              <a:t>12345678</a:t>
+            </a:r>
+            <a:endParaRPr kumimoji="1" lang="ja-JP" altLang="en-US" sz="800" dirty="0">
+              <a:solidFill>
+                <a:schemeClr val="tx1"/>
+              </a:solidFill>
+              <a:latin typeface="UD デジタル 教科書体 NP-R" panose="02020400000000000000" pitchFamily="18" charset="-128"/>
+              <a:ea typeface="UD デジタル 教科書体 NP-R" panose="02020400000000000000" pitchFamily="18" charset="-128"/>
+            </a:endParaRPr>
+          </a:p>
+        </p:txBody>
+      </p:sp>
+      <p:pic>
+        <p:nvPicPr>
+          <p:cNvPr id="3" name="図 2">
+            <a:extLst>
+              <a:ext uri="{FF2B5EF4-FFF2-40B4-BE49-F238E27FC236}">
+                <a16:creationId xmlns:a16="http://schemas.microsoft.com/office/drawing/2014/main" id="{1574CC00-E4C4-66A6-082F-C1484247BFC2}"/>
+              </a:ext>
+            </a:extLst>
+          </p:cNvPr>
+          <p:cNvPicPr>
+            <a:picLocks noChangeAspect="1"/>
+          </p:cNvPicPr>
+          <p:nvPr/>
+        </p:nvPicPr>
+        <p:blipFill>
+          <a:blip r:embed="rId3">
+            <a:extLst>
+              <a:ext uri="{28A0092B-C50C-407E-A947-70E740481C1C}">
+                <a14:useLocalDpi xmlns:a14="http://schemas.microsoft.com/office/drawing/2010/main" val="0"/>
+              </a:ext>
+            </a:extLst>
+          </a:blip>
+          <a:stretch>
+            <a:fillRect/>
+          </a:stretch>
+        </p:blipFill>
+        <p:spPr>
+          <a:xfrm>
+            <a:off x="296732" y="1793811"/>
+            <a:ext cx="97255" cy="97255"/>
+          </a:xfrm>
+          <a:prstGeom prst="rect">
+            <a:avLst/>
+          </a:prstGeom>
+        </p:spPr>
+      </p:pic>
+    </p:spTree>
+    <p:extLst>
+      <p:ext uri="{BB962C8B-B14F-4D97-AF65-F5344CB8AC3E}">
+        <p14:creationId xmlns:p14="http://schemas.microsoft.com/office/powerpoint/2010/main" val="2072779482"/>
+      </p:ext>
+    </p:extLst>
+  </p:cSld>
+  <p:clrMapOvr>
+    <a:masterClrMapping/>
+  </p:clrMapOvr>
+</p:sld>
+</file>
+
+<file path=ppt/slides/slide3.xml><?xml version="1.0" encoding="utf-8"?>
+<p:sld xmlns:a="http://schemas.openxmlformats.org/drawingml/2006/main" xmlns:r="http://schemas.openxmlformats.org/officeDocument/2006/relationships" xmlns:p="http://schemas.openxmlformats.org/presentationml/2006/main">
+  <p:cSld>
+    <p:spTree>
+      <p:nvGrpSpPr>
+        <p:cNvPr id="1" name="">
+          <a:extLst>
+            <a:ext uri="{FF2B5EF4-FFF2-40B4-BE49-F238E27FC236}">
+              <a16:creationId xmlns:a16="http://schemas.microsoft.com/office/drawing/2014/main" id="{798C7E02-1C64-E337-C6E4-2EBD0F114A38}"/>
+            </a:ext>
+          </a:extLst>
+        </p:cNvPr>
+        <p:cNvGrpSpPr/>
+        <p:nvPr/>
+      </p:nvGrpSpPr>
+      <p:grpSpPr>
+        <a:xfrm>
+          <a:off x="0" y="0"/>
+          <a:ext cx="0" cy="0"/>
+          <a:chOff x="0" y="0"/>
+          <a:chExt cx="0" cy="0"/>
+        </a:xfrm>
+      </p:grpSpPr>
+      <p:grpSp>
+        <p:nvGrpSpPr>
+          <p:cNvPr id="8" name="グループ化 7">
+            <a:extLst>
+              <a:ext uri="{FF2B5EF4-FFF2-40B4-BE49-F238E27FC236}">
+                <a16:creationId xmlns:a16="http://schemas.microsoft.com/office/drawing/2014/main" id="{BA6C0786-4367-6430-D180-D12D386B1BCB}"/>
+              </a:ext>
+            </a:extLst>
+          </p:cNvPr>
+          <p:cNvGrpSpPr/>
+          <p:nvPr/>
+        </p:nvGrpSpPr>
+        <p:grpSpPr>
+          <a:xfrm>
+            <a:off x="-2" y="-1"/>
+            <a:ext cx="3095626" cy="1944689"/>
+            <a:chOff x="-2" y="-1"/>
+            <a:chExt cx="3095626" cy="1944689"/>
+          </a:xfrm>
+        </p:grpSpPr>
+        <p:sp>
+          <p:nvSpPr>
+            <p:cNvPr id="2" name="四角形: 角を丸くする 1">
+              <a:extLst>
+                <a:ext uri="{FF2B5EF4-FFF2-40B4-BE49-F238E27FC236}">
+                  <a16:creationId xmlns:a16="http://schemas.microsoft.com/office/drawing/2014/main" id="{1D9419C8-BB72-E58B-C398-CE8E359F874D}"/>
+                </a:ext>
+              </a:extLst>
+            </p:cNvPr>
+            <p:cNvSpPr/>
+            <p:nvPr/>
+          </p:nvSpPr>
+          <p:spPr>
+            <a:xfrm>
+              <a:off x="-2" y="-1"/>
+              <a:ext cx="3095625" cy="1944687"/>
+            </a:xfrm>
+            <a:prstGeom prst="roundRect">
+              <a:avLst>
+                <a:gd name="adj" fmla="val 0"/>
+              </a:avLst>
+            </a:prstGeom>
+            <a:solidFill>
+              <a:schemeClr val="bg1"/>
+            </a:solidFill>
+            <a:ln>
+              <a:noFill/>
+            </a:ln>
+          </p:spPr>
+          <p:style>
+            <a:lnRef idx="2">
+              <a:schemeClr val="accent1">
+                <a:shade val="15000"/>
+              </a:schemeClr>
+            </a:lnRef>
+            <a:fillRef idx="1">
+              <a:schemeClr val="accent1"/>
+            </a:fillRef>
+            <a:effectRef idx="0">
+              <a:schemeClr val="accent1"/>
+            </a:effectRef>
+            <a:fontRef idx="minor">
+              <a:schemeClr val="lt1"/>
+            </a:fontRef>
+          </p:style>
+          <p:txBody>
+            <a:bodyPr lIns="0" tIns="0" rIns="0" bIns="0" rtlCol="0" anchor="ctr"/>
+            <a:lstStyle/>
+            <a:p>
+              <a:pPr algn="ctr"/>
+              <a:endParaRPr kumimoji="1" lang="ja-JP" altLang="en-US" sz="600" dirty="0">
+                <a:solidFill>
+                  <a:schemeClr val="tx1"/>
+                </a:solidFill>
+                <a:latin typeface="UD デジタル 教科書体 NP-R" panose="020B0400000000000000" pitchFamily="18" charset="-128"/>
+                <a:ea typeface="UD デジタル 教科書体 NP-R" panose="020B0400000000000000" pitchFamily="18" charset="-128"/>
+              </a:endParaRPr>
+            </a:p>
+          </p:txBody>
+        </p:sp>
+        <p:sp>
+          <p:nvSpPr>
+            <p:cNvPr id="5" name="四角形: 角を丸くする 4">
+              <a:extLst>
+                <a:ext uri="{FF2B5EF4-FFF2-40B4-BE49-F238E27FC236}">
+                  <a16:creationId xmlns:a16="http://schemas.microsoft.com/office/drawing/2014/main" id="{316C341E-C01A-7285-1C3A-F666EBE28AAC}"/>
+                </a:ext>
+              </a:extLst>
+            </p:cNvPr>
+            <p:cNvSpPr/>
+            <p:nvPr/>
+          </p:nvSpPr>
+          <p:spPr>
+            <a:xfrm>
+              <a:off x="-1" y="5074"/>
+              <a:ext cx="3095625" cy="1939614"/>
+            </a:xfrm>
+            <a:prstGeom prst="roundRect">
+              <a:avLst>
+                <a:gd name="adj" fmla="val 13559"/>
+              </a:avLst>
+            </a:prstGeom>
+            <a:noFill/>
+            <a:ln w="6350">
+              <a:noFill/>
+            </a:ln>
+            <a:effectLst/>
+          </p:spPr>
+          <p:style>
+            <a:lnRef idx="2">
+              <a:schemeClr val="accent1">
+                <a:shade val="15000"/>
+              </a:schemeClr>
+            </a:lnRef>
+            <a:fillRef idx="1">
+              <a:schemeClr val="accent1"/>
+            </a:fillRef>
+            <a:effectRef idx="0">
+              <a:schemeClr val="accent1"/>
+            </a:effectRef>
+            <a:fontRef idx="minor">
+              <a:schemeClr val="lt1"/>
+            </a:fontRef>
+          </p:style>
+          <p:txBody>
+            <a:bodyPr wrap="square" lIns="72000" tIns="36000" rIns="72000" bIns="0" rtlCol="0" anchor="b">
+              <a:noAutofit/>
+            </a:bodyPr>
+            <a:lstStyle/>
+            <a:p>
+              <a:pPr algn="ctr"/>
+              <a:endParaRPr kumimoji="1" lang="ja-JP" altLang="en-US" sz="600" dirty="0">
+                <a:solidFill>
+                  <a:schemeClr val="tx1"/>
+                </a:solidFill>
+                <a:latin typeface="UD デジタル 教科書体 NP-R" panose="02020400000000000000" pitchFamily="18" charset="-128"/>
+                <a:ea typeface="UD デジタル 教科書体 NP-R" panose="02020400000000000000" pitchFamily="18" charset="-128"/>
+              </a:endParaRPr>
+            </a:p>
+          </p:txBody>
+        </p:sp>
+        <p:grpSp>
+          <p:nvGrpSpPr>
+            <p:cNvPr id="3" name="グループ化 2">
+              <a:extLst>
+                <a:ext uri="{FF2B5EF4-FFF2-40B4-BE49-F238E27FC236}">
+                  <a16:creationId xmlns:a16="http://schemas.microsoft.com/office/drawing/2014/main" id="{0299C835-E619-0E9B-19CF-24FBAE73DDC9}"/>
+                </a:ext>
+              </a:extLst>
+            </p:cNvPr>
+            <p:cNvGrpSpPr/>
+            <p:nvPr/>
+          </p:nvGrpSpPr>
+          <p:grpSpPr>
+            <a:xfrm>
+              <a:off x="26424" y="35311"/>
+              <a:ext cx="1781026" cy="1777008"/>
+              <a:chOff x="4761" y="0"/>
+              <a:chExt cx="1944000" cy="1944687"/>
+            </a:xfrm>
+          </p:grpSpPr>
+          <p:sp>
+            <p:nvSpPr>
+              <p:cNvPr id="7" name="四角形: 角を丸くする 6">
+                <a:extLst>
+                  <a:ext uri="{FF2B5EF4-FFF2-40B4-BE49-F238E27FC236}">
+                    <a16:creationId xmlns:a16="http://schemas.microsoft.com/office/drawing/2014/main" id="{14F4DF1B-C8D8-5256-B230-71FFF4EBBC2D}"/>
+                  </a:ext>
+                </a:extLst>
+              </p:cNvPr>
+              <p:cNvSpPr/>
+              <p:nvPr/>
+            </p:nvSpPr>
+            <p:spPr>
+              <a:xfrm>
+                <a:off x="4761" y="0"/>
+                <a:ext cx="1944000" cy="1944687"/>
+              </a:xfrm>
+              <a:prstGeom prst="roundRect">
+                <a:avLst>
+                  <a:gd name="adj" fmla="val 8828"/>
+                </a:avLst>
+              </a:prstGeom>
+              <a:blipFill>
+                <a:blip r:embed="rId2"/>
+                <a:stretch>
+                  <a:fillRect/>
+                </a:stretch>
+              </a:blipFill>
+              <a:ln w="171450">
+                <a:noFill/>
+              </a:ln>
+              <a:effectLst>
+                <a:glow>
+                  <a:schemeClr val="bg1"/>
+                </a:glow>
+                <a:outerShdw dist="12700" sx="1000" sy="1000" algn="ctr" rotWithShape="0">
+                  <a:srgbClr val="000000"/>
+                </a:outerShdw>
+                <a:softEdge rad="127000"/>
+              </a:effectLst>
+            </p:spPr>
+            <p:style>
+              <a:lnRef idx="2">
+                <a:schemeClr val="accent1">
+                  <a:shade val="15000"/>
+                </a:schemeClr>
+              </a:lnRef>
+              <a:fillRef idx="1">
+                <a:schemeClr val="accent1"/>
+              </a:fillRef>
+              <a:effectRef idx="0">
+                <a:schemeClr val="accent1"/>
+              </a:effectRef>
+              <a:fontRef idx="minor">
+                <a:schemeClr val="lt1"/>
+              </a:fontRef>
+            </p:style>
+            <p:txBody>
+              <a:bodyPr rtlCol="0" anchor="ctr"/>
+              <a:lstStyle/>
+              <a:p>
+                <a:pPr algn="ctr"/>
+                <a:endParaRPr lang="ja-JP" altLang="en-US"/>
+              </a:p>
+            </p:txBody>
+          </p:sp>
+          <p:grpSp>
+            <p:nvGrpSpPr>
+              <p:cNvPr id="22" name="グループ化 21">
+                <a:extLst>
+                  <a:ext uri="{FF2B5EF4-FFF2-40B4-BE49-F238E27FC236}">
+                    <a16:creationId xmlns:a16="http://schemas.microsoft.com/office/drawing/2014/main" id="{04696F74-A331-2B37-5140-891CE89AD9A8}"/>
+                  </a:ext>
+                </a:extLst>
+              </p:cNvPr>
+              <p:cNvGrpSpPr/>
+              <p:nvPr/>
+            </p:nvGrpSpPr>
+            <p:grpSpPr>
+              <a:xfrm>
+                <a:off x="311866" y="138682"/>
+                <a:ext cx="1329789" cy="1662236"/>
+                <a:chOff x="324896" y="199586"/>
+                <a:chExt cx="1294896" cy="1618620"/>
+              </a:xfrm>
+            </p:grpSpPr>
+            <p:sp>
+              <p:nvSpPr>
+                <p:cNvPr id="14" name="四角形: 角を丸くする 13">
+                  <a:extLst>
+                    <a:ext uri="{FF2B5EF4-FFF2-40B4-BE49-F238E27FC236}">
+                      <a16:creationId xmlns:a16="http://schemas.microsoft.com/office/drawing/2014/main" id="{02CEC957-440E-84FB-7EB0-44AE3051DD0B}"/>
+                    </a:ext>
+                  </a:extLst>
+                </p:cNvPr>
+                <p:cNvSpPr/>
+                <p:nvPr/>
+              </p:nvSpPr>
+              <p:spPr>
+                <a:xfrm>
+                  <a:off x="324896" y="199586"/>
+                  <a:ext cx="1294896" cy="1618620"/>
+                </a:xfrm>
+                <a:prstGeom prst="roundRect">
+                  <a:avLst>
+                    <a:gd name="adj" fmla="val 17073"/>
+                  </a:avLst>
+                </a:prstGeom>
+                <a:blipFill>
+                  <a:blip r:embed="rId3"/>
+                  <a:stretch>
+                    <a:fillRect/>
+                  </a:stretch>
+                </a:blipFill>
+                <a:ln>
+                  <a:noFill/>
+                </a:ln>
+              </p:spPr>
+              <p:style>
+                <a:lnRef idx="2">
+                  <a:schemeClr val="accent1">
+                    <a:shade val="15000"/>
+                  </a:schemeClr>
+                </a:lnRef>
+                <a:fillRef idx="1">
+                  <a:schemeClr val="accent1"/>
+                </a:fillRef>
+                <a:effectRef idx="0">
+                  <a:schemeClr val="accent1"/>
+                </a:effectRef>
+                <a:fontRef idx="minor">
+                  <a:schemeClr val="lt1"/>
+                </a:fontRef>
+              </p:style>
+              <p:txBody>
+                <a:bodyPr rtlCol="0" anchor="ctr"/>
+                <a:lstStyle/>
+                <a:p>
+                  <a:pPr algn="ctr"/>
+                  <a:endParaRPr kumimoji="1" lang="ja-JP" altLang="en-US"/>
+                </a:p>
+              </p:txBody>
+            </p:sp>
+            <p:pic>
+              <p:nvPicPr>
+                <p:cNvPr id="21" name="図 20" descr="ロゴ が含まれている画像&#10;&#10;AI 生成コンテンツは誤りを含む可能性があります。">
+                  <a:extLst>
+                    <a:ext uri="{FF2B5EF4-FFF2-40B4-BE49-F238E27FC236}">
+                      <a16:creationId xmlns:a16="http://schemas.microsoft.com/office/drawing/2014/main" id="{5CE70F7B-CAB9-CEC5-7EC1-DB47F811DB4B}"/>
+                    </a:ext>
+                  </a:extLst>
+                </p:cNvPr>
+                <p:cNvPicPr>
+                  <a:picLocks noChangeAspect="1"/>
+                </p:cNvPicPr>
+                <p:nvPr/>
+              </p:nvPicPr>
+              <p:blipFill>
+                <a:blip r:embed="rId4">
+                  <a:extLst>
+                    <a:ext uri="{28A0092B-C50C-407E-A947-70E740481C1C}">
+                      <a14:useLocalDpi xmlns:a14="http://schemas.microsoft.com/office/drawing/2010/main" val="0"/>
+                    </a:ext>
+                  </a:extLst>
+                </a:blip>
+                <a:srcRect l="2225" t="9650" r="4370" b="12728"/>
+                <a:stretch>
+                  <a:fillRect/>
+                </a:stretch>
+              </p:blipFill>
+              <p:spPr>
+                <a:xfrm>
+                  <a:off x="471089" y="268171"/>
+                  <a:ext cx="1002507" cy="282809"/>
+                </a:xfrm>
+                <a:prstGeom prst="rect">
+                  <a:avLst/>
+                </a:prstGeom>
+              </p:spPr>
+            </p:pic>
+          </p:grpSp>
+        </p:grpSp>
+        <p:sp>
+          <p:nvSpPr>
+            <p:cNvPr id="31" name="四角形: 角を丸くする 30">
+              <a:extLst>
+                <a:ext uri="{FF2B5EF4-FFF2-40B4-BE49-F238E27FC236}">
+                  <a16:creationId xmlns:a16="http://schemas.microsoft.com/office/drawing/2014/main" id="{7AB0A86A-BA7D-4AE4-6112-6AB89727FAD0}"/>
+                </a:ext>
+              </a:extLst>
+            </p:cNvPr>
+            <p:cNvSpPr/>
+            <p:nvPr/>
+          </p:nvSpPr>
+          <p:spPr>
+            <a:xfrm>
+              <a:off x="1844455" y="255162"/>
+              <a:ext cx="1153343" cy="214457"/>
+            </a:xfrm>
+            <a:prstGeom prst="roundRect">
+              <a:avLst>
+                <a:gd name="adj" fmla="val 6665"/>
+              </a:avLst>
+            </a:prstGeom>
+            <a:noFill/>
+            <a:ln>
+              <a:noFill/>
+            </a:ln>
+          </p:spPr>
+          <p:style>
+            <a:lnRef idx="2">
+              <a:schemeClr val="accent1">
+                <a:shade val="15000"/>
+              </a:schemeClr>
+            </a:lnRef>
+            <a:fillRef idx="1">
+              <a:schemeClr val="accent1"/>
+            </a:fillRef>
+            <a:effectRef idx="0">
+              <a:schemeClr val="accent1"/>
+            </a:effectRef>
+            <a:fontRef idx="minor">
+              <a:schemeClr val="lt1"/>
+            </a:fontRef>
+          </p:style>
+          <p:txBody>
+            <a:bodyPr lIns="0" tIns="0" rIns="0" bIns="0" rtlCol="0" anchor="ctr"/>
+            <a:lstStyle/>
+            <a:p>
+              <a:pPr algn="ctr"/>
+              <a:r>
+                <a:rPr kumimoji="1" lang="zh-TW" altLang="en-US" dirty="0">
+                  <a:solidFill>
+                    <a:schemeClr val="tx1"/>
+                  </a:solidFill>
+                  <a:latin typeface="UD デジタル 教科書体 NP-R" panose="02020400000000000000" pitchFamily="18" charset="-128"/>
+                  <a:ea typeface="UD デジタル 教科書体 NP-R" panose="02020400000000000000" pitchFamily="18" charset="-128"/>
+                </a:rPr>
+                <a:t>「学長煎餅」</a:t>
+              </a:r>
+              <a:endParaRPr kumimoji="1" lang="ja-JP" altLang="en-US" sz="800" dirty="0">
+                <a:solidFill>
+                  <a:schemeClr val="tx1"/>
+                </a:solidFill>
+                <a:latin typeface="UD デジタル 教科書体 NP-R" panose="02020400000000000000" pitchFamily="18" charset="-128"/>
+                <a:ea typeface="UD デジタル 教科書体 NP-R" panose="02020400000000000000" pitchFamily="18" charset="-128"/>
+              </a:endParaRPr>
+            </a:p>
+          </p:txBody>
+        </p:sp>
+        <p:sp>
+          <p:nvSpPr>
+            <p:cNvPr id="4" name="四角形: 角を丸くする 3">
+              <a:extLst>
+                <a:ext uri="{FF2B5EF4-FFF2-40B4-BE49-F238E27FC236}">
+                  <a16:creationId xmlns:a16="http://schemas.microsoft.com/office/drawing/2014/main" id="{ABF84064-9FFE-A3EC-898C-56EEEE684D62}"/>
+                </a:ext>
+              </a:extLst>
+            </p:cNvPr>
+            <p:cNvSpPr/>
+            <p:nvPr/>
+          </p:nvSpPr>
+          <p:spPr>
+            <a:xfrm>
+              <a:off x="215106" y="1793322"/>
+              <a:ext cx="2654348" cy="120703"/>
+            </a:xfrm>
+            <a:prstGeom prst="roundRect">
+              <a:avLst>
+                <a:gd name="adj" fmla="val 6665"/>
+              </a:avLst>
+            </a:prstGeom>
+            <a:noFill/>
+            <a:ln>
+              <a:noFill/>
+            </a:ln>
+          </p:spPr>
+          <p:style>
+            <a:lnRef idx="2">
+              <a:schemeClr val="accent1">
+                <a:shade val="15000"/>
+              </a:schemeClr>
+            </a:lnRef>
+            <a:fillRef idx="1">
+              <a:schemeClr val="accent1"/>
+            </a:fillRef>
+            <a:effectRef idx="0">
+              <a:schemeClr val="accent1"/>
+            </a:effectRef>
+            <a:fontRef idx="minor">
+              <a:schemeClr val="lt1"/>
+            </a:fontRef>
+          </p:style>
+          <p:txBody>
+            <a:bodyPr lIns="0" tIns="0" rIns="0" bIns="0" rtlCol="0" anchor="ctr"/>
+            <a:lstStyle/>
+            <a:p>
+              <a:r>
+                <a:rPr kumimoji="1" lang="ja-JP" altLang="en-US" sz="600" dirty="0">
+                  <a:solidFill>
+                    <a:schemeClr val="tx1"/>
+                  </a:solidFill>
+                  <a:latin typeface="UD デジタル 教科書体 NP-R" panose="020B0400000000000000" pitchFamily="18" charset="-128"/>
+                  <a:ea typeface="UD デジタル 教科書体 NP-R" panose="020B0400000000000000" pitchFamily="18" charset="-128"/>
+                </a:rPr>
+                <a:t>とけない、われない、かさばらない！　カードで送る新習慣＠名刺代わりに</a:t>
+              </a:r>
+            </a:p>
+          </p:txBody>
+        </p:sp>
+        <p:sp>
+          <p:nvSpPr>
+            <p:cNvPr id="10" name="四角形: 角を丸くする 9">
+              <a:extLst>
+                <a:ext uri="{FF2B5EF4-FFF2-40B4-BE49-F238E27FC236}">
+                  <a16:creationId xmlns:a16="http://schemas.microsoft.com/office/drawing/2014/main" id="{7310735D-090A-8E81-988A-CAB629D05BD6}"/>
+                </a:ext>
+              </a:extLst>
+            </p:cNvPr>
+            <p:cNvSpPr/>
+            <p:nvPr/>
+          </p:nvSpPr>
+          <p:spPr>
+            <a:xfrm>
+              <a:off x="1927110" y="71103"/>
+              <a:ext cx="988031" cy="181522"/>
+            </a:xfrm>
+            <a:prstGeom prst="roundRect">
+              <a:avLst>
+                <a:gd name="adj" fmla="val 6665"/>
+              </a:avLst>
+            </a:prstGeom>
+            <a:noFill/>
+            <a:ln>
+              <a:noFill/>
+            </a:ln>
+          </p:spPr>
+          <p:style>
+            <a:lnRef idx="2">
+              <a:schemeClr val="accent1">
+                <a:shade val="15000"/>
+              </a:schemeClr>
+            </a:lnRef>
+            <a:fillRef idx="1">
+              <a:schemeClr val="accent1"/>
+            </a:fillRef>
+            <a:effectRef idx="0">
+              <a:schemeClr val="accent1"/>
+            </a:effectRef>
+            <a:fontRef idx="minor">
+              <a:schemeClr val="lt1"/>
+            </a:fontRef>
+          </p:style>
+          <p:txBody>
+            <a:bodyPr lIns="0" tIns="0" rIns="0" bIns="0" rtlCol="0" anchor="ctr"/>
+            <a:lstStyle/>
+            <a:p>
+              <a:pPr algn="ctr"/>
+              <a:r>
+                <a:rPr kumimoji="1" lang="ja-JP" altLang="en-US" sz="800" dirty="0">
+                  <a:solidFill>
+                    <a:schemeClr val="tx1"/>
+                  </a:solidFill>
+                  <a:latin typeface="UD デジタル 教科書体 NP-R" panose="02020400000000000000" pitchFamily="18" charset="-128"/>
+                  <a:ea typeface="UD デジタル 教科書体 NP-R" panose="02020400000000000000" pitchFamily="18" charset="-128"/>
+                </a:rPr>
+                <a:t>秋田大学オリジナル</a:t>
+              </a:r>
+              <a:endParaRPr kumimoji="1" lang="en-US" altLang="ja-JP" sz="800" dirty="0">
+                <a:solidFill>
+                  <a:schemeClr val="tx1"/>
+                </a:solidFill>
+                <a:latin typeface="UD デジタル 教科書体 NP-R" panose="02020400000000000000" pitchFamily="18" charset="-128"/>
+                <a:ea typeface="UD デジタル 教科書体 NP-R" panose="02020400000000000000" pitchFamily="18" charset="-128"/>
+              </a:endParaRPr>
+            </a:p>
+          </p:txBody>
+        </p:sp>
+      </p:grpSp>
+    </p:spTree>
+    <p:extLst>
+      <p:ext uri="{BB962C8B-B14F-4D97-AF65-F5344CB8AC3E}">
+        <p14:creationId xmlns:p14="http://schemas.microsoft.com/office/powerpoint/2010/main" val="919064164"/>
+      </p:ext>
+    </p:extLst>
+  </p:cSld>
+  <p:clrMapOvr>
+    <a:masterClrMapping/>
+  </p:clrMapOvr>
+</p:sld>
+</file>
+
+<file path=ppt/slides/slide4.xml><?xml version="1.0" encoding="utf-8"?>
+<p:sld xmlns:a="http://schemas.openxmlformats.org/drawingml/2006/main" xmlns:r="http://schemas.openxmlformats.org/officeDocument/2006/relationships" xmlns:p="http://schemas.openxmlformats.org/presentationml/2006/main">
+  <p:cSld>
+    <p:spTree>
+      <p:nvGrpSpPr>
+        <p:cNvPr id="1" name="">
+          <a:extLst>
+            <a:ext uri="{FF2B5EF4-FFF2-40B4-BE49-F238E27FC236}">
+              <a16:creationId xmlns:a16="http://schemas.microsoft.com/office/drawing/2014/main" id="{C0355DED-CAFD-3E98-07AB-448B244006B7}"/>
+            </a:ext>
+          </a:extLst>
+        </p:cNvPr>
+        <p:cNvGrpSpPr/>
+        <p:nvPr/>
+      </p:nvGrpSpPr>
+      <p:grpSpPr>
+        <a:xfrm>
+          <a:off x="0" y="0"/>
+          <a:ext cx="0" cy="0"/>
+          <a:chOff x="0" y="0"/>
+          <a:chExt cx="0" cy="0"/>
+        </a:xfrm>
+      </p:grpSpPr>
+      <p:grpSp>
+        <p:nvGrpSpPr>
+          <p:cNvPr id="4" name="グループ化 3">
+            <a:extLst>
+              <a:ext uri="{FF2B5EF4-FFF2-40B4-BE49-F238E27FC236}">
+                <a16:creationId xmlns:a16="http://schemas.microsoft.com/office/drawing/2014/main" id="{FDB7CA2F-1E3D-07DC-48B5-6FDB8A46CF35}"/>
+              </a:ext>
+            </a:extLst>
+          </p:cNvPr>
+          <p:cNvGrpSpPr/>
+          <p:nvPr/>
+        </p:nvGrpSpPr>
+        <p:grpSpPr>
+          <a:xfrm>
+            <a:off x="-1" y="-5087"/>
+            <a:ext cx="3095625" cy="1949775"/>
+            <a:chOff x="-1" y="-5087"/>
+            <a:chExt cx="3095625" cy="1949775"/>
+          </a:xfrm>
+        </p:grpSpPr>
+        <p:sp>
+          <p:nvSpPr>
+            <p:cNvPr id="6" name="四角形: 角を丸くする 5">
+              <a:extLst>
+                <a:ext uri="{FF2B5EF4-FFF2-40B4-BE49-F238E27FC236}">
+                  <a16:creationId xmlns:a16="http://schemas.microsoft.com/office/drawing/2014/main" id="{22EDC73F-1956-395D-55F3-2AA471C22835}"/>
+                </a:ext>
+              </a:extLst>
+            </p:cNvPr>
+            <p:cNvSpPr/>
+            <p:nvPr/>
+          </p:nvSpPr>
+          <p:spPr>
+            <a:xfrm>
+              <a:off x="-1" y="-5087"/>
+              <a:ext cx="3095625" cy="1949774"/>
+            </a:xfrm>
+            <a:prstGeom prst="roundRect">
+              <a:avLst>
+                <a:gd name="adj" fmla="val 0"/>
+              </a:avLst>
+            </a:prstGeom>
+            <a:solidFill>
+              <a:schemeClr val="bg1"/>
+            </a:solidFill>
+            <a:ln>
+              <a:noFill/>
+            </a:ln>
+          </p:spPr>
+          <p:style>
+            <a:lnRef idx="2">
+              <a:schemeClr val="accent1">
+                <a:shade val="15000"/>
+              </a:schemeClr>
+            </a:lnRef>
+            <a:fillRef idx="1">
+              <a:schemeClr val="accent1"/>
+            </a:fillRef>
+            <a:effectRef idx="0">
+              <a:schemeClr val="accent1"/>
+            </a:effectRef>
+            <a:fontRef idx="minor">
+              <a:schemeClr val="lt1"/>
+            </a:fontRef>
+          </p:style>
+          <p:txBody>
+            <a:bodyPr lIns="0" tIns="0" rIns="0" bIns="0" rtlCol="0" anchor="ctr"/>
+            <a:lstStyle/>
+            <a:p>
+              <a:pPr algn="ctr"/>
+              <a:endParaRPr kumimoji="1" lang="ja-JP" altLang="en-US" sz="600" dirty="0">
+                <a:solidFill>
+                  <a:schemeClr val="tx1"/>
+                </a:solidFill>
+                <a:latin typeface="UD デジタル 教科書体 NP-R" panose="020B0400000000000000" pitchFamily="18" charset="-128"/>
+                <a:ea typeface="UD デジタル 教科書体 NP-R" panose="020B0400000000000000" pitchFamily="18" charset="-128"/>
+              </a:endParaRPr>
+            </a:p>
+          </p:txBody>
+        </p:sp>
+        <p:sp>
+          <p:nvSpPr>
+            <p:cNvPr id="27" name="四角形: 角を丸くする 26">
+              <a:extLst>
+                <a:ext uri="{FF2B5EF4-FFF2-40B4-BE49-F238E27FC236}">
+                  <a16:creationId xmlns:a16="http://schemas.microsoft.com/office/drawing/2014/main" id="{4AF81FA0-9EF1-F3E5-8CFE-68209C71F9F5}"/>
+                </a:ext>
+              </a:extLst>
+            </p:cNvPr>
+            <p:cNvSpPr/>
+            <p:nvPr/>
+          </p:nvSpPr>
+          <p:spPr>
+            <a:xfrm>
+              <a:off x="-1" y="0"/>
+              <a:ext cx="3095625" cy="1944688"/>
+            </a:xfrm>
+            <a:prstGeom prst="roundRect">
+              <a:avLst>
+                <a:gd name="adj" fmla="val 13559"/>
+              </a:avLst>
+            </a:prstGeom>
+            <a:noFill/>
+            <a:ln w="6350">
+              <a:noFill/>
+            </a:ln>
+            <a:effectLst/>
+          </p:spPr>
+          <p:style>
+            <a:lnRef idx="2">
+              <a:schemeClr val="accent1">
+                <a:shade val="15000"/>
+              </a:schemeClr>
+            </a:lnRef>
+            <a:fillRef idx="1">
+              <a:schemeClr val="accent1"/>
+            </a:fillRef>
+            <a:effectRef idx="0">
+              <a:schemeClr val="accent1"/>
+            </a:effectRef>
+            <a:fontRef idx="minor">
+              <a:schemeClr val="lt1"/>
+            </a:fontRef>
+          </p:style>
+          <p:txBody>
+            <a:bodyPr wrap="square" lIns="72000" tIns="36000" rIns="72000" bIns="0" rtlCol="0" anchor="b">
+              <a:noAutofit/>
+            </a:bodyPr>
+            <a:lstStyle/>
+            <a:p>
+              <a:pPr algn="ctr"/>
+              <a:endParaRPr kumimoji="1" lang="ja-JP" altLang="en-US" sz="600" dirty="0">
+                <a:solidFill>
+                  <a:schemeClr val="tx1"/>
+                </a:solidFill>
+                <a:latin typeface="UD デジタル 教科書体 NP-R" panose="02020400000000000000" pitchFamily="18" charset="-128"/>
+                <a:ea typeface="UD デジタル 教科書体 NP-R" panose="02020400000000000000" pitchFamily="18" charset="-128"/>
+              </a:endParaRPr>
+            </a:p>
+          </p:txBody>
+        </p:sp>
+        <p:sp>
+          <p:nvSpPr>
+            <p:cNvPr id="9" name="四角形: 角を丸くする 8">
+              <a:extLst>
+                <a:ext uri="{FF2B5EF4-FFF2-40B4-BE49-F238E27FC236}">
+                  <a16:creationId xmlns:a16="http://schemas.microsoft.com/office/drawing/2014/main" id="{A163BE45-48CE-105B-903F-D6923EA3AC7F}"/>
+                </a:ext>
+              </a:extLst>
+            </p:cNvPr>
+            <p:cNvSpPr/>
+            <p:nvPr/>
+          </p:nvSpPr>
+          <p:spPr>
+            <a:xfrm>
+              <a:off x="52384" y="86414"/>
+              <a:ext cx="2990852" cy="1165609"/>
+            </a:xfrm>
+            <a:prstGeom prst="roundRect">
+              <a:avLst>
+                <a:gd name="adj" fmla="val 14805"/>
+              </a:avLst>
+            </a:prstGeom>
+            <a:blipFill dpi="0" rotWithShape="1">
+              <a:blip r:embed="rId2"/>
+              <a:srcRect/>
+              <a:stretch>
+                <a:fillRect/>
+              </a:stretch>
+            </a:blipFill>
+            <a:ln w="171450">
+              <a:noFill/>
+            </a:ln>
+            <a:effectLst>
+              <a:glow>
+                <a:schemeClr val="bg1"/>
+              </a:glow>
+              <a:outerShdw dist="12700" sx="1000" sy="1000" algn="ctr" rotWithShape="0">
+                <a:srgbClr val="000000"/>
+              </a:outerShdw>
+              <a:softEdge rad="63500"/>
+            </a:effectLst>
+          </p:spPr>
+          <p:style>
+            <a:lnRef idx="2">
+              <a:schemeClr val="accent1">
+                <a:shade val="15000"/>
+              </a:schemeClr>
+            </a:lnRef>
+            <a:fillRef idx="1">
+              <a:schemeClr val="accent1"/>
+            </a:fillRef>
+            <a:effectRef idx="0">
+              <a:schemeClr val="accent1"/>
+            </a:effectRef>
+            <a:fontRef idx="minor">
+              <a:schemeClr val="lt1"/>
+            </a:fontRef>
+          </p:style>
+          <p:txBody>
+            <a:bodyPr rtlCol="0" anchor="ctr"/>
+            <a:lstStyle/>
+            <a:p>
+              <a:pPr algn="ctr"/>
+              <a:endParaRPr lang="ja-JP" altLang="en-US"/>
+            </a:p>
+          </p:txBody>
+        </p:sp>
+        <p:sp>
+          <p:nvSpPr>
+            <p:cNvPr id="16" name="四角形: 角を丸くする 15">
+              <a:extLst>
+                <a:ext uri="{FF2B5EF4-FFF2-40B4-BE49-F238E27FC236}">
+                  <a16:creationId xmlns:a16="http://schemas.microsoft.com/office/drawing/2014/main" id="{C4C601C7-22A4-EC5B-C791-20C5366C1341}"/>
+                </a:ext>
+              </a:extLst>
+            </p:cNvPr>
+            <p:cNvSpPr/>
+            <p:nvPr/>
+          </p:nvSpPr>
+          <p:spPr>
+            <a:xfrm>
+              <a:off x="234235" y="250086"/>
+              <a:ext cx="2627152" cy="843154"/>
+            </a:xfrm>
+            <a:prstGeom prst="roundRect">
+              <a:avLst>
+                <a:gd name="adj" fmla="val 13559"/>
+              </a:avLst>
+            </a:prstGeom>
+            <a:solidFill>
+              <a:schemeClr val="bg1"/>
+            </a:solidFill>
+            <a:ln w="6350">
+              <a:noFill/>
+            </a:ln>
+            <a:effectLst/>
+          </p:spPr>
+          <p:style>
+            <a:lnRef idx="2">
+              <a:schemeClr val="accent1">
+                <a:shade val="15000"/>
+              </a:schemeClr>
+            </a:lnRef>
+            <a:fillRef idx="1">
+              <a:schemeClr val="accent1"/>
+            </a:fillRef>
+            <a:effectRef idx="0">
+              <a:schemeClr val="accent1"/>
+            </a:effectRef>
+            <a:fontRef idx="minor">
+              <a:schemeClr val="lt1"/>
+            </a:fontRef>
+          </p:style>
+          <p:txBody>
+            <a:bodyPr wrap="square" lIns="72000" tIns="36000" rIns="72000" bIns="0" rtlCol="0" anchor="b">
+              <a:noAutofit/>
+            </a:bodyPr>
+            <a:lstStyle/>
+            <a:p>
+              <a:pPr algn="ctr"/>
+              <a:r>
+                <a:rPr kumimoji="1" lang="ja-JP" altLang="en-US" sz="500" dirty="0">
+                  <a:solidFill>
+                    <a:schemeClr val="tx1"/>
+                  </a:solidFill>
+                  <a:latin typeface="UD デジタル 教科書体 NP-R" panose="02020400000000000000" pitchFamily="18" charset="-128"/>
+                  <a:ea typeface="UD デジタル 教科書体 NP-R" panose="02020400000000000000" pitchFamily="18" charset="-128"/>
+                </a:rPr>
+                <a:t>本カードを破損・紛失された場合、または使用期限を過ぎた場合は、返礼品を</a:t>
+              </a:r>
+              <a:endParaRPr kumimoji="1" lang="en-US" altLang="ja-JP" sz="500" dirty="0">
+                <a:solidFill>
+                  <a:schemeClr val="tx1"/>
+                </a:solidFill>
+                <a:latin typeface="UD デジタル 教科書体 NP-R" panose="02020400000000000000" pitchFamily="18" charset="-128"/>
+                <a:ea typeface="UD デジタル 教科書体 NP-R" panose="02020400000000000000" pitchFamily="18" charset="-128"/>
+              </a:endParaRPr>
+            </a:p>
+            <a:p>
+              <a:pPr algn="ctr"/>
+              <a:r>
+                <a:rPr kumimoji="1" lang="ja-JP" altLang="en-US" sz="500" dirty="0">
+                  <a:solidFill>
+                    <a:schemeClr val="tx1"/>
+                  </a:solidFill>
+                  <a:latin typeface="UD デジタル 教科書体 NP-R" panose="02020400000000000000" pitchFamily="18" charset="-128"/>
+                  <a:ea typeface="UD デジタル 教科書体 NP-R" panose="02020400000000000000" pitchFamily="18" charset="-128"/>
+                </a:rPr>
+                <a:t>  ご提供できかねますので、あらかじめご了承くださいますようお願いいたします。</a:t>
+              </a:r>
+            </a:p>
+          </p:txBody>
+        </p:sp>
+        <p:sp>
+          <p:nvSpPr>
+            <p:cNvPr id="5" name="四角形: 角を丸くする 4">
+              <a:extLst>
+                <a:ext uri="{FF2B5EF4-FFF2-40B4-BE49-F238E27FC236}">
+                  <a16:creationId xmlns:a16="http://schemas.microsoft.com/office/drawing/2014/main" id="{66BDA754-8E4B-C983-C8B8-FB4DF5267F46}"/>
+                </a:ext>
+              </a:extLst>
+            </p:cNvPr>
+            <p:cNvSpPr/>
+            <p:nvPr/>
+          </p:nvSpPr>
+          <p:spPr>
+            <a:xfrm>
+              <a:off x="299236" y="559911"/>
+              <a:ext cx="564212" cy="211760"/>
+            </a:xfrm>
+            <a:prstGeom prst="roundRect">
+              <a:avLst>
+                <a:gd name="adj" fmla="val 6665"/>
+              </a:avLst>
+            </a:prstGeom>
+            <a:solidFill>
+              <a:schemeClr val="bg1"/>
+            </a:solidFill>
+            <a:ln>
+              <a:noFill/>
+            </a:ln>
+          </p:spPr>
+          <p:style>
+            <a:lnRef idx="2">
+              <a:schemeClr val="accent1">
+                <a:shade val="15000"/>
+              </a:schemeClr>
+            </a:lnRef>
+            <a:fillRef idx="1">
+              <a:schemeClr val="accent1"/>
+            </a:fillRef>
+            <a:effectRef idx="0">
+              <a:schemeClr val="accent1"/>
+            </a:effectRef>
+            <a:fontRef idx="minor">
+              <a:schemeClr val="lt1"/>
+            </a:fontRef>
+          </p:style>
+          <p:txBody>
+            <a:bodyPr lIns="0" tIns="0" rIns="0" bIns="0" rtlCol="0" anchor="ctr"/>
+            <a:lstStyle/>
+            <a:p>
+              <a:pPr algn="ctr"/>
+              <a:r>
+                <a:rPr kumimoji="1" lang="en-US" altLang="ja-JP" sz="800" dirty="0">
+                  <a:solidFill>
+                    <a:schemeClr val="tx1"/>
+                  </a:solidFill>
+                  <a:latin typeface="UD デジタル 教科書体 NP-R" panose="02020400000000000000" pitchFamily="18" charset="-128"/>
+                  <a:ea typeface="UD デジタル 教科書体 NP-R" panose="02020400000000000000" pitchFamily="18" charset="-128"/>
+                </a:rPr>
+                <a:t>PINCODE</a:t>
+              </a:r>
+            </a:p>
+          </p:txBody>
+        </p:sp>
+        <p:sp>
+          <p:nvSpPr>
+            <p:cNvPr id="18" name="四角形: 角を丸くする 17">
+              <a:extLst>
+                <a:ext uri="{FF2B5EF4-FFF2-40B4-BE49-F238E27FC236}">
+                  <a16:creationId xmlns:a16="http://schemas.microsoft.com/office/drawing/2014/main" id="{5D1182F7-303E-2D75-32F3-E4AA5BB7ACCF}"/>
+                </a:ext>
+              </a:extLst>
+            </p:cNvPr>
+            <p:cNvSpPr/>
+            <p:nvPr/>
+          </p:nvSpPr>
+          <p:spPr>
+            <a:xfrm>
+              <a:off x="216692" y="1346585"/>
+              <a:ext cx="2662238" cy="302565"/>
+            </a:xfrm>
+            <a:prstGeom prst="roundRect">
+              <a:avLst>
+                <a:gd name="adj" fmla="val 17073"/>
+              </a:avLst>
+            </a:prstGeom>
+            <a:noFill/>
+            <a:ln w="6350">
+              <a:solidFill>
+                <a:schemeClr val="tx1"/>
+              </a:solidFill>
+            </a:ln>
+            <a:effectLst/>
+          </p:spPr>
+          <p:style>
+            <a:lnRef idx="2">
+              <a:schemeClr val="accent1">
+                <a:shade val="15000"/>
+              </a:schemeClr>
+            </a:lnRef>
+            <a:fillRef idx="1">
+              <a:schemeClr val="accent1"/>
+            </a:fillRef>
+            <a:effectRef idx="0">
+              <a:schemeClr val="accent1"/>
+            </a:effectRef>
+            <a:fontRef idx="minor">
+              <a:schemeClr val="lt1"/>
+            </a:fontRef>
+          </p:style>
+          <p:txBody>
+            <a:bodyPr rtlCol="0" anchor="ctr"/>
+            <a:lstStyle/>
+            <a:p>
+              <a:pPr algn="ctr"/>
+              <a:r>
+                <a:rPr kumimoji="1" lang="en-US" altLang="ja-JP" sz="600" dirty="0">
+                  <a:solidFill>
+                    <a:schemeClr val="tx1"/>
+                  </a:solidFill>
+                  <a:latin typeface="UD デジタル 教科書体 NP-R" panose="02020400000000000000" pitchFamily="18" charset="-128"/>
+                  <a:ea typeface="UD デジタル 教科書体 NP-R" panose="02020400000000000000" pitchFamily="18" charset="-128"/>
+                </a:rPr>
+                <a:t>[</a:t>
+              </a:r>
+              <a:r>
+                <a:rPr kumimoji="1" lang="ja-JP" altLang="en-US" sz="600" dirty="0">
+                  <a:solidFill>
+                    <a:schemeClr val="tx1"/>
+                  </a:solidFill>
+                  <a:latin typeface="UD デジタル 教科書体 NP-R" panose="02020400000000000000" pitchFamily="18" charset="-128"/>
+                  <a:ea typeface="UD デジタル 教科書体 NP-R" panose="02020400000000000000" pitchFamily="18" charset="-128"/>
+                </a:rPr>
+                <a:t>お問い合わせ</a:t>
+              </a:r>
+              <a:r>
+                <a:rPr kumimoji="1" lang="en-US" altLang="ja-JP" sz="600" dirty="0">
+                  <a:solidFill>
+                    <a:schemeClr val="tx1"/>
+                  </a:solidFill>
+                  <a:latin typeface="UD デジタル 教科書体 NP-R" panose="02020400000000000000" pitchFamily="18" charset="-128"/>
+                  <a:ea typeface="UD デジタル 教科書体 NP-R" panose="02020400000000000000" pitchFamily="18" charset="-128"/>
+                </a:rPr>
+                <a:t>]</a:t>
+              </a:r>
+            </a:p>
+            <a:p>
+              <a:pPr algn="ctr"/>
+              <a:r>
+                <a:rPr kumimoji="1" lang="ja-JP" altLang="en-US" sz="600" dirty="0">
+                  <a:solidFill>
+                    <a:schemeClr val="tx1"/>
+                  </a:solidFill>
+                  <a:latin typeface="UD デジタル 教科書体 NP-R" panose="02020400000000000000" pitchFamily="18" charset="-128"/>
+                  <a:ea typeface="UD デジタル 教科書体 NP-R" panose="02020400000000000000" pitchFamily="18" charset="-128"/>
+                </a:rPr>
+                <a:t>秋田大学総務企画部秘書課</a:t>
+              </a:r>
+            </a:p>
+            <a:p>
+              <a:pPr algn="ctr"/>
+              <a:r>
+                <a:rPr kumimoji="1" lang="ja-JP" altLang="en-US" sz="600" dirty="0">
+                  <a:solidFill>
+                    <a:schemeClr val="tx1"/>
+                  </a:solidFill>
+                  <a:latin typeface="UD デジタル 教科書体 NP-R" panose="02020400000000000000" pitchFamily="18" charset="-128"/>
+                  <a:ea typeface="UD デジタル 教科書体 NP-R" panose="02020400000000000000" pitchFamily="18" charset="-128"/>
+                </a:rPr>
+                <a:t>電話：</a:t>
+              </a:r>
+              <a:r>
+                <a:rPr kumimoji="1" lang="en-US" altLang="ja-JP" sz="600" dirty="0">
+                  <a:solidFill>
+                    <a:schemeClr val="tx1"/>
+                  </a:solidFill>
+                  <a:latin typeface="UD デジタル 教科書体 NP-R" panose="02020400000000000000" pitchFamily="18" charset="-128"/>
+                  <a:ea typeface="UD デジタル 教科書体 NP-R" panose="02020400000000000000" pitchFamily="18" charset="-128"/>
+                </a:rPr>
+                <a:t>018-889-2201</a:t>
+              </a:r>
+              <a:r>
+                <a:rPr kumimoji="1" lang="ja-JP" altLang="en-US" sz="600" dirty="0">
+                  <a:solidFill>
+                    <a:schemeClr val="tx1"/>
+                  </a:solidFill>
+                  <a:latin typeface="UD デジタル 教科書体 NP-R" panose="02020400000000000000" pitchFamily="18" charset="-128"/>
+                  <a:ea typeface="UD デジタル 教科書体 NP-R" panose="02020400000000000000" pitchFamily="18" charset="-128"/>
+                </a:rPr>
+                <a:t>　</a:t>
+              </a:r>
+              <a:r>
+                <a:rPr kumimoji="1" lang="en-US" altLang="ja-JP" sz="600" dirty="0">
+                  <a:solidFill>
+                    <a:schemeClr val="tx1"/>
+                  </a:solidFill>
+                  <a:latin typeface="UD デジタル 教科書体 NP-R" panose="02020400000000000000" pitchFamily="18" charset="-128"/>
+                  <a:ea typeface="UD デジタル 教科書体 NP-R" panose="02020400000000000000" pitchFamily="18" charset="-128"/>
+                </a:rPr>
+                <a:t>e-mail</a:t>
+              </a:r>
+              <a:r>
+                <a:rPr kumimoji="1" lang="ja-JP" altLang="en-US" sz="600" dirty="0">
+                  <a:solidFill>
+                    <a:schemeClr val="tx1"/>
+                  </a:solidFill>
+                  <a:latin typeface="UD デジタル 教科書体 NP-R" panose="02020400000000000000" pitchFamily="18" charset="-128"/>
+                  <a:ea typeface="UD デジタル 教科書体 NP-R" panose="02020400000000000000" pitchFamily="18" charset="-128"/>
+                </a:rPr>
+                <a:t>：</a:t>
+              </a:r>
+              <a:r>
+                <a:rPr kumimoji="1" lang="en-US" altLang="ja-JP" sz="600" dirty="0">
+                  <a:solidFill>
+                    <a:schemeClr val="tx1"/>
+                  </a:solidFill>
+                  <a:latin typeface="UD デジタル 教科書体 NP-R" panose="02020400000000000000" pitchFamily="18" charset="-128"/>
+                  <a:ea typeface="UD デジタル 教科書体 NP-R" panose="02020400000000000000" pitchFamily="18" charset="-128"/>
+                </a:rPr>
+                <a:t>hisho@jimu.akita-u.ac.jp</a:t>
+              </a:r>
+            </a:p>
+          </p:txBody>
+        </p:sp>
+        <p:sp>
+          <p:nvSpPr>
+            <p:cNvPr id="19" name="四角形: 角を丸くする 18">
+              <a:extLst>
+                <a:ext uri="{FF2B5EF4-FFF2-40B4-BE49-F238E27FC236}">
+                  <a16:creationId xmlns:a16="http://schemas.microsoft.com/office/drawing/2014/main" id="{9F47755B-7939-1D7F-B1DE-9EB07E6A7B1F}"/>
+                </a:ext>
+              </a:extLst>
+            </p:cNvPr>
+            <p:cNvSpPr/>
+            <p:nvPr/>
+          </p:nvSpPr>
+          <p:spPr>
+            <a:xfrm>
+              <a:off x="264474" y="1746083"/>
+              <a:ext cx="2720550" cy="131546"/>
+            </a:xfrm>
+            <a:prstGeom prst="roundRect">
+              <a:avLst>
+                <a:gd name="adj" fmla="val 17073"/>
+              </a:avLst>
+            </a:prstGeom>
+            <a:noFill/>
+            <a:ln w="6350">
+              <a:noFill/>
+            </a:ln>
+            <a:effectLst/>
+          </p:spPr>
+          <p:style>
+            <a:lnRef idx="2">
+              <a:schemeClr val="accent1">
+                <a:shade val="15000"/>
+              </a:schemeClr>
+            </a:lnRef>
+            <a:fillRef idx="1">
+              <a:schemeClr val="accent1"/>
+            </a:fillRef>
+            <a:effectRef idx="0">
+              <a:schemeClr val="accent1"/>
+            </a:effectRef>
+            <a:fontRef idx="minor">
+              <a:schemeClr val="lt1"/>
+            </a:fontRef>
+          </p:style>
+          <p:txBody>
+            <a:bodyPr rtlCol="0" anchor="ctr"/>
+            <a:lstStyle/>
+            <a:p>
+              <a:pPr algn="ctr"/>
+              <a:r>
+                <a:rPr kumimoji="1" lang="ja-JP" altLang="en-US" sz="600" dirty="0">
+                  <a:solidFill>
+                    <a:schemeClr val="tx1"/>
+                  </a:solidFill>
+                  <a:latin typeface="UD デジタル 教科書体 NP-R" panose="02020400000000000000" pitchFamily="18" charset="-128"/>
+                  <a:ea typeface="UD デジタル 教科書体 NP-R" panose="02020400000000000000" pitchFamily="18" charset="-128"/>
+                </a:rPr>
+                <a:t>「名刺代わりに」は、秋田大学発ベンチャー、</a:t>
+              </a:r>
+              <a:r>
+                <a:rPr kumimoji="1" lang="en-US" altLang="ja-JP" sz="600" dirty="0">
+                  <a:solidFill>
+                    <a:schemeClr val="tx1"/>
+                  </a:solidFill>
+                  <a:latin typeface="UD デジタル 教科書体 NP-R" panose="02020400000000000000" pitchFamily="18" charset="-128"/>
+                  <a:ea typeface="UD デジタル 教科書体 NP-R" panose="02020400000000000000" pitchFamily="18" charset="-128"/>
+                </a:rPr>
+                <a:t>AUIC</a:t>
+              </a:r>
+              <a:r>
+                <a:rPr kumimoji="1" lang="ja-JP" altLang="en-US" sz="600" dirty="0">
+                  <a:solidFill>
+                    <a:schemeClr val="tx1"/>
+                  </a:solidFill>
+                  <a:latin typeface="UD デジタル 教科書体 NP-R" panose="02020400000000000000" pitchFamily="18" charset="-128"/>
+                  <a:ea typeface="UD デジタル 教科書体 NP-R" panose="02020400000000000000" pitchFamily="18" charset="-128"/>
+                </a:rPr>
+                <a:t>が提供しています。</a:t>
+              </a:r>
+              <a:endParaRPr kumimoji="1" lang="en-US" altLang="ja-JP" sz="600" dirty="0">
+                <a:solidFill>
+                  <a:schemeClr val="tx1"/>
+                </a:solidFill>
+                <a:latin typeface="UD デジタル 教科書体 NP-R" panose="02020400000000000000" pitchFamily="18" charset="-128"/>
+                <a:ea typeface="UD デジタル 教科書体 NP-R" panose="02020400000000000000" pitchFamily="18" charset="-128"/>
+              </a:endParaRPr>
+            </a:p>
+          </p:txBody>
+        </p:sp>
+        <p:sp>
+          <p:nvSpPr>
+            <p:cNvPr id="25" name="四角形: 角を丸くする 24">
+              <a:extLst>
+                <a:ext uri="{FF2B5EF4-FFF2-40B4-BE49-F238E27FC236}">
+                  <a16:creationId xmlns:a16="http://schemas.microsoft.com/office/drawing/2014/main" id="{31545E15-01E3-2BA2-128E-1410CA07FD7B}"/>
+                </a:ext>
+              </a:extLst>
+            </p:cNvPr>
+            <p:cNvSpPr/>
+            <p:nvPr/>
+          </p:nvSpPr>
+          <p:spPr>
+            <a:xfrm>
+              <a:off x="187535" y="287429"/>
+              <a:ext cx="2720550" cy="164630"/>
+            </a:xfrm>
+            <a:prstGeom prst="roundRect">
+              <a:avLst>
+                <a:gd name="adj" fmla="val 17073"/>
+              </a:avLst>
+            </a:prstGeom>
+            <a:noFill/>
+            <a:ln w="6350">
+              <a:noFill/>
+            </a:ln>
+            <a:effectLst/>
+          </p:spPr>
+          <p:style>
+            <a:lnRef idx="2">
+              <a:schemeClr val="accent1">
+                <a:shade val="15000"/>
+              </a:schemeClr>
+            </a:lnRef>
+            <a:fillRef idx="1">
+              <a:schemeClr val="accent1"/>
+            </a:fillRef>
+            <a:effectRef idx="0">
+              <a:schemeClr val="accent1"/>
+            </a:effectRef>
+            <a:fontRef idx="minor">
+              <a:schemeClr val="lt1"/>
+            </a:fontRef>
+          </p:style>
+          <p:txBody>
+            <a:bodyPr rtlCol="0" anchor="ctr"/>
+            <a:lstStyle/>
+            <a:p>
+              <a:pPr algn="ctr"/>
+              <a:r>
+                <a:rPr kumimoji="1" lang="ja-JP" altLang="en-US" sz="600" dirty="0">
+                  <a:solidFill>
+                    <a:schemeClr val="tx1"/>
+                  </a:solidFill>
+                  <a:latin typeface="UD デジタル 教科書体 NP-R" panose="02020400000000000000" pitchFamily="18" charset="-128"/>
+                  <a:ea typeface="UD デジタル 教科書体 NP-R" panose="02020400000000000000" pitchFamily="18" charset="-128"/>
+                </a:rPr>
+                <a:t>［使用期限：</a:t>
+              </a:r>
+              <a:r>
+                <a:rPr kumimoji="1" lang="en-US" altLang="ja-JP" sz="600" dirty="0">
+                  <a:solidFill>
+                    <a:schemeClr val="tx1"/>
+                  </a:solidFill>
+                  <a:latin typeface="UD デジタル 教科書体 NP-R" panose="02020400000000000000" pitchFamily="18" charset="-128"/>
+                  <a:ea typeface="UD デジタル 教科書体 NP-R" panose="02020400000000000000" pitchFamily="18" charset="-128"/>
+                </a:rPr>
+                <a:t>2027</a:t>
+              </a:r>
+              <a:r>
+                <a:rPr kumimoji="1" lang="ja-JP" altLang="en-US" sz="600" dirty="0">
+                  <a:solidFill>
+                    <a:schemeClr val="tx1"/>
+                  </a:solidFill>
+                  <a:latin typeface="UD デジタル 教科書体 NP-R" panose="02020400000000000000" pitchFamily="18" charset="-128"/>
+                  <a:ea typeface="UD デジタル 教科書体 NP-R" panose="02020400000000000000" pitchFamily="18" charset="-128"/>
+                </a:rPr>
+                <a:t> 年 </a:t>
+              </a:r>
+              <a:r>
+                <a:rPr kumimoji="1" lang="en-US" altLang="ja-JP" sz="600" dirty="0">
+                  <a:solidFill>
+                    <a:schemeClr val="tx1"/>
+                  </a:solidFill>
+                  <a:latin typeface="UD デジタル 教科書体 NP-R" panose="02020400000000000000" pitchFamily="18" charset="-128"/>
+                  <a:ea typeface="UD デジタル 教科書体 NP-R" panose="02020400000000000000" pitchFamily="18" charset="-128"/>
+                </a:rPr>
+                <a:t>3</a:t>
+              </a:r>
+              <a:r>
+                <a:rPr kumimoji="1" lang="ja-JP" altLang="en-US" sz="600" dirty="0">
+                  <a:solidFill>
+                    <a:schemeClr val="tx1"/>
+                  </a:solidFill>
+                  <a:latin typeface="UD デジタル 教科書体 NP-R" panose="02020400000000000000" pitchFamily="18" charset="-128"/>
+                  <a:ea typeface="UD デジタル 教科書体 NP-R" panose="02020400000000000000" pitchFamily="18" charset="-128"/>
+                </a:rPr>
+                <a:t> 月 </a:t>
+              </a:r>
+              <a:r>
+                <a:rPr kumimoji="1" lang="en-US" altLang="ja-JP" sz="600" dirty="0">
+                  <a:solidFill>
+                    <a:schemeClr val="tx1"/>
+                  </a:solidFill>
+                  <a:latin typeface="UD デジタル 教科書体 NP-R" panose="02020400000000000000" pitchFamily="18" charset="-128"/>
+                  <a:ea typeface="UD デジタル 教科書体 NP-R" panose="02020400000000000000" pitchFamily="18" charset="-128"/>
+                </a:rPr>
+                <a:t>31</a:t>
+              </a:r>
+              <a:r>
+                <a:rPr kumimoji="1" lang="ja-JP" altLang="en-US" sz="600" dirty="0">
+                  <a:solidFill>
+                    <a:schemeClr val="tx1"/>
+                  </a:solidFill>
+                  <a:latin typeface="UD デジタル 教科書体 NP-R" panose="02020400000000000000" pitchFamily="18" charset="-128"/>
+                  <a:ea typeface="UD デジタル 教科書体 NP-R" panose="02020400000000000000" pitchFamily="18" charset="-128"/>
+                </a:rPr>
+                <a:t> 日 </a:t>
+              </a:r>
+              <a:r>
+                <a:rPr kumimoji="1" lang="en-US" altLang="ja-JP" sz="600" dirty="0">
+                  <a:solidFill>
+                    <a:schemeClr val="tx1"/>
+                  </a:solidFill>
+                  <a:latin typeface="UD デジタル 教科書体 NP-R" panose="02020400000000000000" pitchFamily="18" charset="-128"/>
+                  <a:ea typeface="UD デジタル 教科書体 NP-R" panose="02020400000000000000" pitchFamily="18" charset="-128"/>
+                </a:rPr>
+                <a:t>23</a:t>
+              </a:r>
+              <a:r>
+                <a:rPr kumimoji="1" lang="ja-JP" altLang="en-US" sz="600" dirty="0">
+                  <a:solidFill>
+                    <a:schemeClr val="tx1"/>
+                  </a:solidFill>
+                  <a:latin typeface="UD デジタル 教科書体 NP-R" panose="02020400000000000000" pitchFamily="18" charset="-128"/>
+                  <a:ea typeface="UD デジタル 教科書体 NP-R" panose="02020400000000000000" pitchFamily="18" charset="-128"/>
+                </a:rPr>
+                <a:t>：</a:t>
+              </a:r>
+              <a:r>
+                <a:rPr kumimoji="1" lang="en-US" altLang="ja-JP" sz="600" dirty="0">
+                  <a:solidFill>
+                    <a:schemeClr val="tx1"/>
+                  </a:solidFill>
+                  <a:latin typeface="UD デジタル 教科書体 NP-R" panose="02020400000000000000" pitchFamily="18" charset="-128"/>
+                  <a:ea typeface="UD デジタル 教科書体 NP-R" panose="02020400000000000000" pitchFamily="18" charset="-128"/>
+                </a:rPr>
+                <a:t>59</a:t>
+              </a:r>
+              <a:r>
+                <a:rPr kumimoji="1" lang="ja-JP" altLang="en-US" sz="600" dirty="0">
+                  <a:solidFill>
+                    <a:schemeClr val="tx1"/>
+                  </a:solidFill>
+                  <a:latin typeface="UD デジタル 教科書体 NP-R" panose="02020400000000000000" pitchFamily="18" charset="-128"/>
+                  <a:ea typeface="UD デジタル 教科書体 NP-R" panose="02020400000000000000" pitchFamily="18" charset="-128"/>
+                </a:rPr>
+                <a:t>まで］</a:t>
+              </a:r>
+            </a:p>
+          </p:txBody>
+        </p:sp>
+        <p:pic>
+          <p:nvPicPr>
+            <p:cNvPr id="3" name="図 2">
+              <a:extLst>
+                <a:ext uri="{FF2B5EF4-FFF2-40B4-BE49-F238E27FC236}">
+                  <a16:creationId xmlns:a16="http://schemas.microsoft.com/office/drawing/2014/main" id="{C6E09740-961F-C902-DB45-733296A0B582}"/>
+                </a:ext>
+              </a:extLst>
+            </p:cNvPr>
+            <p:cNvPicPr>
+              <a:picLocks noChangeAspect="1"/>
+            </p:cNvPicPr>
+            <p:nvPr/>
+          </p:nvPicPr>
+          <p:blipFill>
+            <a:blip r:embed="rId3">
+              <a:extLst>
+                <a:ext uri="{28A0092B-C50C-407E-A947-70E740481C1C}">
+                  <a14:useLocalDpi xmlns:a14="http://schemas.microsoft.com/office/drawing/2010/main" val="0"/>
+                </a:ext>
+              </a:extLst>
+            </a:blip>
+            <a:stretch>
+              <a:fillRect/>
+            </a:stretch>
+          </p:blipFill>
+          <p:spPr>
+            <a:xfrm>
+              <a:off x="267649" y="1749035"/>
+              <a:ext cx="111515" cy="111515"/>
+            </a:xfrm>
+            <a:prstGeom prst="rect">
+              <a:avLst/>
+            </a:prstGeom>
+          </p:spPr>
+        </p:pic>
+      </p:grpSp>
+    </p:spTree>
+    <p:extLst>
+      <p:ext uri="{BB962C8B-B14F-4D97-AF65-F5344CB8AC3E}">
+        <p14:creationId xmlns:p14="http://schemas.microsoft.com/office/powerpoint/2010/main" val="1179832683"/>
+      </p:ext>
+    </p:extLst>
+  </p:cSld>
+  <p:clrMapOvr>
+    <a:masterClrMapping/>
+  </p:clrMapOvr>
+</p:sld>
+</file>
+
+<file path=ppt/slides/slide5.xml><?xml version="1.0" encoding="utf-8"?>
+<p:sld xmlns:a="http://schemas.openxmlformats.org/drawingml/2006/main" xmlns:r="http://schemas.openxmlformats.org/officeDocument/2006/relationships" xmlns:p="http://schemas.openxmlformats.org/presentationml/2006/main">
+  <p:cSld>
+    <p:spTree>
+      <p:nvGrpSpPr>
+        <p:cNvPr id="1" name="">
+          <a:extLst>
+            <a:ext uri="{FF2B5EF4-FFF2-40B4-BE49-F238E27FC236}">
+              <a16:creationId xmlns:a16="http://schemas.microsoft.com/office/drawing/2014/main" id="{5C5B5512-A93A-6B0A-EE8B-B56E0F433497}"/>
+            </a:ext>
+          </a:extLst>
+        </p:cNvPr>
+        <p:cNvGrpSpPr/>
+        <p:nvPr/>
+      </p:nvGrpSpPr>
+      <p:grpSpPr>
+        <a:xfrm>
+          <a:off x="0" y="0"/>
+          <a:ext cx="0" cy="0"/>
+          <a:chOff x="0" y="0"/>
+          <a:chExt cx="0" cy="0"/>
+        </a:xfrm>
+      </p:grpSpPr>
+      <p:grpSp>
+        <p:nvGrpSpPr>
+          <p:cNvPr id="8" name="グループ化 7">
+            <a:extLst>
+              <a:ext uri="{FF2B5EF4-FFF2-40B4-BE49-F238E27FC236}">
+                <a16:creationId xmlns:a16="http://schemas.microsoft.com/office/drawing/2014/main" id="{ADF00FFF-5672-D4A7-D620-7CE98888221C}"/>
+              </a:ext>
+            </a:extLst>
+          </p:cNvPr>
+          <p:cNvGrpSpPr/>
+          <p:nvPr/>
+        </p:nvGrpSpPr>
+        <p:grpSpPr>
+          <a:xfrm>
+            <a:off x="-2" y="-1"/>
+            <a:ext cx="3095626" cy="1944689"/>
+            <a:chOff x="-2" y="-1"/>
+            <a:chExt cx="3095626" cy="1944689"/>
+          </a:xfrm>
+        </p:grpSpPr>
+        <p:sp>
+          <p:nvSpPr>
+            <p:cNvPr id="2" name="四角形: 角を丸くする 1">
+              <a:extLst>
+                <a:ext uri="{FF2B5EF4-FFF2-40B4-BE49-F238E27FC236}">
+                  <a16:creationId xmlns:a16="http://schemas.microsoft.com/office/drawing/2014/main" id="{877936A4-1A8C-BB39-81CA-EEB8495154E2}"/>
+                </a:ext>
+              </a:extLst>
+            </p:cNvPr>
+            <p:cNvSpPr/>
+            <p:nvPr/>
+          </p:nvSpPr>
+          <p:spPr>
+            <a:xfrm>
+              <a:off x="-2" y="-1"/>
+              <a:ext cx="3095625" cy="1944687"/>
+            </a:xfrm>
+            <a:prstGeom prst="roundRect">
+              <a:avLst>
+                <a:gd name="adj" fmla="val 0"/>
+              </a:avLst>
+            </a:prstGeom>
+            <a:solidFill>
+              <a:schemeClr val="bg1"/>
+            </a:solidFill>
+            <a:ln>
+              <a:noFill/>
+            </a:ln>
+          </p:spPr>
+          <p:style>
+            <a:lnRef idx="2">
+              <a:schemeClr val="accent1">
+                <a:shade val="15000"/>
+              </a:schemeClr>
+            </a:lnRef>
+            <a:fillRef idx="1">
+              <a:schemeClr val="accent1"/>
+            </a:fillRef>
+            <a:effectRef idx="0">
+              <a:schemeClr val="accent1"/>
+            </a:effectRef>
+            <a:fontRef idx="minor">
+              <a:schemeClr val="lt1"/>
+            </a:fontRef>
+          </p:style>
+          <p:txBody>
+            <a:bodyPr lIns="0" tIns="0" rIns="0" bIns="0" rtlCol="0" anchor="ctr"/>
+            <a:lstStyle/>
+            <a:p>
+              <a:pPr algn="ctr"/>
+              <a:endParaRPr kumimoji="1" lang="ja-JP" altLang="en-US" sz="600" dirty="0">
+                <a:solidFill>
+                  <a:schemeClr val="tx1"/>
+                </a:solidFill>
+                <a:latin typeface="UD デジタル 教科書体 NP-R" panose="020B0400000000000000" pitchFamily="18" charset="-128"/>
+                <a:ea typeface="UD デジタル 教科書体 NP-R" panose="020B0400000000000000" pitchFamily="18" charset="-128"/>
+              </a:endParaRPr>
+            </a:p>
+          </p:txBody>
+        </p:sp>
+        <p:sp>
+          <p:nvSpPr>
+            <p:cNvPr id="5" name="四角形: 角を丸くする 4">
+              <a:extLst>
+                <a:ext uri="{FF2B5EF4-FFF2-40B4-BE49-F238E27FC236}">
+                  <a16:creationId xmlns:a16="http://schemas.microsoft.com/office/drawing/2014/main" id="{72E56F5D-4736-8892-9F2C-FD45ACB90B4E}"/>
+                </a:ext>
+              </a:extLst>
+            </p:cNvPr>
+            <p:cNvSpPr/>
+            <p:nvPr/>
+          </p:nvSpPr>
+          <p:spPr>
+            <a:xfrm>
+              <a:off x="-1" y="5074"/>
+              <a:ext cx="3095625" cy="1939614"/>
+            </a:xfrm>
+            <a:prstGeom prst="roundRect">
+              <a:avLst>
+                <a:gd name="adj" fmla="val 13559"/>
+              </a:avLst>
+            </a:prstGeom>
+            <a:noFill/>
+            <a:ln w="6350">
+              <a:noFill/>
+            </a:ln>
+            <a:effectLst/>
+          </p:spPr>
+          <p:style>
+            <a:lnRef idx="2">
+              <a:schemeClr val="accent1">
+                <a:shade val="15000"/>
+              </a:schemeClr>
+            </a:lnRef>
+            <a:fillRef idx="1">
+              <a:schemeClr val="accent1"/>
+            </a:fillRef>
+            <a:effectRef idx="0">
+              <a:schemeClr val="accent1"/>
+            </a:effectRef>
+            <a:fontRef idx="minor">
+              <a:schemeClr val="lt1"/>
+            </a:fontRef>
+          </p:style>
+          <p:txBody>
+            <a:bodyPr wrap="square" lIns="72000" tIns="36000" rIns="72000" bIns="0" rtlCol="0" anchor="b">
+              <a:noAutofit/>
+            </a:bodyPr>
+            <a:lstStyle/>
+            <a:p>
+              <a:pPr algn="ctr"/>
+              <a:endParaRPr kumimoji="1" lang="ja-JP" altLang="en-US" sz="600" dirty="0">
+                <a:solidFill>
+                  <a:schemeClr val="tx1"/>
+                </a:solidFill>
+                <a:latin typeface="UD デジタル 教科書体 NP-R" panose="02020400000000000000" pitchFamily="18" charset="-128"/>
+                <a:ea typeface="UD デジタル 教科書体 NP-R" panose="02020400000000000000" pitchFamily="18" charset="-128"/>
+              </a:endParaRPr>
+            </a:p>
+          </p:txBody>
+        </p:sp>
+        <p:grpSp>
+          <p:nvGrpSpPr>
+            <p:cNvPr id="3" name="グループ化 2">
+              <a:extLst>
+                <a:ext uri="{FF2B5EF4-FFF2-40B4-BE49-F238E27FC236}">
+                  <a16:creationId xmlns:a16="http://schemas.microsoft.com/office/drawing/2014/main" id="{B76D47E6-5009-D327-0A66-FE2FA6E462DB}"/>
+                </a:ext>
+              </a:extLst>
+            </p:cNvPr>
+            <p:cNvGrpSpPr/>
+            <p:nvPr/>
+          </p:nvGrpSpPr>
+          <p:grpSpPr>
+            <a:xfrm>
+              <a:off x="26424" y="35311"/>
+              <a:ext cx="1781026" cy="1777008"/>
+              <a:chOff x="4761" y="0"/>
+              <a:chExt cx="1944000" cy="1944687"/>
+            </a:xfrm>
+          </p:grpSpPr>
+          <p:sp>
+            <p:nvSpPr>
+              <p:cNvPr id="7" name="四角形: 角を丸くする 6">
+                <a:extLst>
+                  <a:ext uri="{FF2B5EF4-FFF2-40B4-BE49-F238E27FC236}">
+                    <a16:creationId xmlns:a16="http://schemas.microsoft.com/office/drawing/2014/main" id="{495F4327-D759-E9F8-ECE5-8BFDEE1172AD}"/>
+                  </a:ext>
+                </a:extLst>
+              </p:cNvPr>
+              <p:cNvSpPr/>
+              <p:nvPr/>
+            </p:nvSpPr>
+            <p:spPr>
+              <a:xfrm>
+                <a:off x="4761" y="0"/>
+                <a:ext cx="1944000" cy="1944687"/>
+              </a:xfrm>
+              <a:prstGeom prst="roundRect">
+                <a:avLst>
+                  <a:gd name="adj" fmla="val 8828"/>
+                </a:avLst>
+              </a:prstGeom>
+              <a:blipFill>
+                <a:blip r:embed="rId2"/>
+                <a:stretch>
+                  <a:fillRect/>
+                </a:stretch>
+              </a:blipFill>
+              <a:ln w="171450">
+                <a:noFill/>
+              </a:ln>
+              <a:effectLst>
+                <a:glow>
+                  <a:schemeClr val="bg1"/>
+                </a:glow>
+                <a:outerShdw dist="12700" sx="1000" sy="1000" algn="ctr" rotWithShape="0">
+                  <a:srgbClr val="000000"/>
+                </a:outerShdw>
+                <a:softEdge rad="127000"/>
+              </a:effectLst>
+            </p:spPr>
+            <p:style>
+              <a:lnRef idx="2">
+                <a:schemeClr val="accent1">
+                  <a:shade val="15000"/>
+                </a:schemeClr>
+              </a:lnRef>
+              <a:fillRef idx="1">
+                <a:schemeClr val="accent1"/>
+              </a:fillRef>
+              <a:effectRef idx="0">
+                <a:schemeClr val="accent1"/>
+              </a:effectRef>
+              <a:fontRef idx="minor">
+                <a:schemeClr val="lt1"/>
+              </a:fontRef>
+            </p:style>
+            <p:txBody>
+              <a:bodyPr rtlCol="0" anchor="ctr"/>
+              <a:lstStyle/>
+              <a:p>
+                <a:pPr algn="ctr"/>
+                <a:endParaRPr lang="ja-JP" altLang="en-US"/>
+              </a:p>
+            </p:txBody>
+          </p:sp>
+          <p:grpSp>
+            <p:nvGrpSpPr>
+              <p:cNvPr id="22" name="グループ化 21">
+                <a:extLst>
+                  <a:ext uri="{FF2B5EF4-FFF2-40B4-BE49-F238E27FC236}">
+                    <a16:creationId xmlns:a16="http://schemas.microsoft.com/office/drawing/2014/main" id="{7B78C10D-215F-9FBA-C926-D463E81B77A8}"/>
+                  </a:ext>
+                </a:extLst>
+              </p:cNvPr>
+              <p:cNvGrpSpPr/>
+              <p:nvPr/>
+            </p:nvGrpSpPr>
+            <p:grpSpPr>
+              <a:xfrm>
+                <a:off x="311866" y="138682"/>
+                <a:ext cx="1329789" cy="1662236"/>
+                <a:chOff x="324896" y="199586"/>
+                <a:chExt cx="1294896" cy="1618620"/>
+              </a:xfrm>
+            </p:grpSpPr>
+            <p:sp>
+              <p:nvSpPr>
+                <p:cNvPr id="14" name="四角形: 角を丸くする 13">
+                  <a:extLst>
+                    <a:ext uri="{FF2B5EF4-FFF2-40B4-BE49-F238E27FC236}">
+                      <a16:creationId xmlns:a16="http://schemas.microsoft.com/office/drawing/2014/main" id="{7BE49C65-35FB-CCB8-3EF8-A7682257E5D4}"/>
+                    </a:ext>
+                  </a:extLst>
+                </p:cNvPr>
+                <p:cNvSpPr/>
+                <p:nvPr/>
+              </p:nvSpPr>
+              <p:spPr>
+                <a:xfrm>
+                  <a:off x="324896" y="199586"/>
+                  <a:ext cx="1294896" cy="1618620"/>
+                </a:xfrm>
+                <a:prstGeom prst="roundRect">
+                  <a:avLst>
+                    <a:gd name="adj" fmla="val 17073"/>
+                  </a:avLst>
+                </a:prstGeom>
+                <a:blipFill>
+                  <a:blip r:embed="rId3"/>
+                  <a:stretch>
+                    <a:fillRect/>
+                  </a:stretch>
+                </a:blipFill>
+                <a:ln>
+                  <a:noFill/>
+                </a:ln>
+              </p:spPr>
+              <p:style>
+                <a:lnRef idx="2">
+                  <a:schemeClr val="accent1">
+                    <a:shade val="15000"/>
+                  </a:schemeClr>
+                </a:lnRef>
+                <a:fillRef idx="1">
+                  <a:schemeClr val="accent1"/>
+                </a:fillRef>
+                <a:effectRef idx="0">
+                  <a:schemeClr val="accent1"/>
+                </a:effectRef>
+                <a:fontRef idx="minor">
+                  <a:schemeClr val="lt1"/>
+                </a:fontRef>
+              </p:style>
+              <p:txBody>
+                <a:bodyPr rtlCol="0" anchor="ctr"/>
+                <a:lstStyle/>
+                <a:p>
+                  <a:pPr algn="ctr"/>
+                  <a:endParaRPr kumimoji="1" lang="ja-JP" altLang="en-US"/>
+                </a:p>
+              </p:txBody>
+            </p:sp>
+            <p:pic>
+              <p:nvPicPr>
+                <p:cNvPr id="21" name="図 20" descr="ロゴ が含まれている画像&#10;&#10;AI 生成コンテンツは誤りを含む可能性があります。">
+                  <a:extLst>
+                    <a:ext uri="{FF2B5EF4-FFF2-40B4-BE49-F238E27FC236}">
+                      <a16:creationId xmlns:a16="http://schemas.microsoft.com/office/drawing/2014/main" id="{BF4EF96B-A979-DBDB-838B-690F07AFC21C}"/>
+                    </a:ext>
+                  </a:extLst>
+                </p:cNvPr>
+                <p:cNvPicPr>
+                  <a:picLocks noChangeAspect="1"/>
+                </p:cNvPicPr>
+                <p:nvPr/>
+              </p:nvPicPr>
+              <p:blipFill>
+                <a:blip r:embed="rId4">
+                  <a:extLst>
+                    <a:ext uri="{28A0092B-C50C-407E-A947-70E740481C1C}">
+                      <a14:useLocalDpi xmlns:a14="http://schemas.microsoft.com/office/drawing/2010/main" val="0"/>
+                    </a:ext>
+                  </a:extLst>
+                </a:blip>
+                <a:srcRect l="2225" t="9650" r="4370" b="12728"/>
+                <a:stretch>
+                  <a:fillRect/>
+                </a:stretch>
+              </p:blipFill>
+              <p:spPr>
+                <a:xfrm>
+                  <a:off x="471089" y="268171"/>
+                  <a:ext cx="1002507" cy="282809"/>
+                </a:xfrm>
+                <a:prstGeom prst="rect">
+                  <a:avLst/>
+                </a:prstGeom>
+              </p:spPr>
+            </p:pic>
+          </p:grpSp>
+        </p:grpSp>
+        <p:sp>
+          <p:nvSpPr>
+            <p:cNvPr id="31" name="四角形: 角を丸くする 30">
+              <a:extLst>
+                <a:ext uri="{FF2B5EF4-FFF2-40B4-BE49-F238E27FC236}">
+                  <a16:creationId xmlns:a16="http://schemas.microsoft.com/office/drawing/2014/main" id="{8AE70B54-09DF-0940-4AD7-13021B06A3DA}"/>
+                </a:ext>
+              </a:extLst>
+            </p:cNvPr>
+            <p:cNvSpPr/>
+            <p:nvPr/>
+          </p:nvSpPr>
+          <p:spPr>
+            <a:xfrm>
+              <a:off x="1859247" y="88439"/>
+              <a:ext cx="1153343" cy="438956"/>
+            </a:xfrm>
+            <a:prstGeom prst="roundRect">
+              <a:avLst>
+                <a:gd name="adj" fmla="val 6665"/>
+              </a:avLst>
+            </a:prstGeom>
+            <a:noFill/>
+            <a:ln>
+              <a:noFill/>
+            </a:ln>
+          </p:spPr>
+          <p:style>
+            <a:lnRef idx="2">
+              <a:schemeClr val="accent1">
+                <a:shade val="15000"/>
+              </a:schemeClr>
+            </a:lnRef>
+            <a:fillRef idx="1">
+              <a:schemeClr val="accent1"/>
+            </a:fillRef>
+            <a:effectRef idx="0">
+              <a:schemeClr val="accent1"/>
+            </a:effectRef>
+            <a:fontRef idx="minor">
+              <a:schemeClr val="lt1"/>
+            </a:fontRef>
+          </p:style>
+          <p:txBody>
+            <a:bodyPr lIns="0" tIns="0" rIns="0" bIns="0" rtlCol="0" anchor="ctr"/>
+            <a:lstStyle/>
+            <a:p>
+              <a:pPr algn="ctr"/>
+              <a:r>
+                <a:rPr kumimoji="1" lang="ja-JP" altLang="en-US" sz="1600" dirty="0">
+                  <a:solidFill>
+                    <a:schemeClr val="tx1"/>
+                  </a:solidFill>
+                  <a:latin typeface="UD デジタル 教科書体 NP-R" panose="02020400000000000000" pitchFamily="18" charset="-128"/>
+                  <a:ea typeface="UD デジタル 教科書体 NP-R" panose="02020400000000000000" pitchFamily="18" charset="-128"/>
+                </a:rPr>
+                <a:t>ありがとう</a:t>
+              </a:r>
+              <a:endParaRPr kumimoji="1" lang="ja-JP" altLang="en-US" sz="700" dirty="0">
+                <a:solidFill>
+                  <a:schemeClr val="tx1"/>
+                </a:solidFill>
+                <a:latin typeface="UD デジタル 教科書体 NP-R" panose="02020400000000000000" pitchFamily="18" charset="-128"/>
+                <a:ea typeface="UD デジタル 教科書体 NP-R" panose="02020400000000000000" pitchFamily="18" charset="-128"/>
+              </a:endParaRPr>
+            </a:p>
+          </p:txBody>
+        </p:sp>
+        <p:sp>
+          <p:nvSpPr>
+            <p:cNvPr id="4" name="四角形: 角を丸くする 3">
+              <a:extLst>
+                <a:ext uri="{FF2B5EF4-FFF2-40B4-BE49-F238E27FC236}">
+                  <a16:creationId xmlns:a16="http://schemas.microsoft.com/office/drawing/2014/main" id="{857DE5B7-BD2A-0FE2-72E4-3593114B38A0}"/>
+                </a:ext>
+              </a:extLst>
+            </p:cNvPr>
+            <p:cNvSpPr/>
+            <p:nvPr/>
+          </p:nvSpPr>
+          <p:spPr>
+            <a:xfrm>
+              <a:off x="215106" y="1793322"/>
+              <a:ext cx="2654348" cy="120703"/>
+            </a:xfrm>
+            <a:prstGeom prst="roundRect">
+              <a:avLst>
+                <a:gd name="adj" fmla="val 6665"/>
+              </a:avLst>
+            </a:prstGeom>
+            <a:noFill/>
+            <a:ln>
+              <a:noFill/>
+            </a:ln>
+          </p:spPr>
+          <p:style>
+            <a:lnRef idx="2">
+              <a:schemeClr val="accent1">
+                <a:shade val="15000"/>
+              </a:schemeClr>
+            </a:lnRef>
+            <a:fillRef idx="1">
+              <a:schemeClr val="accent1"/>
+            </a:fillRef>
+            <a:effectRef idx="0">
+              <a:schemeClr val="accent1"/>
+            </a:effectRef>
+            <a:fontRef idx="minor">
+              <a:schemeClr val="lt1"/>
+            </a:fontRef>
+          </p:style>
+          <p:txBody>
+            <a:bodyPr lIns="0" tIns="0" rIns="0" bIns="0" rtlCol="0" anchor="ctr"/>
+            <a:lstStyle/>
+            <a:p>
+              <a:r>
+                <a:rPr kumimoji="1" lang="ja-JP" altLang="en-US" sz="600" dirty="0">
+                  <a:solidFill>
+                    <a:schemeClr val="tx1"/>
+                  </a:solidFill>
+                  <a:latin typeface="UD デジタル 教科書体 NP-R" panose="020B0400000000000000" pitchFamily="18" charset="-128"/>
+                  <a:ea typeface="UD デジタル 教科書体 NP-R" panose="020B0400000000000000" pitchFamily="18" charset="-128"/>
+                </a:rPr>
+                <a:t>とけない、われない、かさばらない！　カードで送る新習慣＠名刺代わりに</a:t>
+              </a:r>
+            </a:p>
+          </p:txBody>
+        </p:sp>
+      </p:grpSp>
+    </p:spTree>
+    <p:extLst>
+      <p:ext uri="{BB962C8B-B14F-4D97-AF65-F5344CB8AC3E}">
+        <p14:creationId xmlns:p14="http://schemas.microsoft.com/office/powerpoint/2010/main" val="2671339504"/>
+      </p:ext>
+    </p:extLst>
+  </p:cSld>
+  <p:clrMapOvr>
+    <a:masterClrMapping/>
+  </p:clrMapOvr>
+</p:sld>
+</file>
+
+<file path=ppt/slides/slide6.xml><?xml version="1.0" encoding="utf-8"?>
 <p:sld xmlns:a="http://schemas.openxmlformats.org/drawingml/2006/main" xmlns:r="http://schemas.openxmlformats.org/officeDocument/2006/relationships" xmlns:p="http://schemas.openxmlformats.org/presentationml/2006/main">
   <p:cSld>
     <p:spTree>
@@ -5831,2822 +9327,7 @@
 </p:sld>
 </file>
 
-<file path=ppt/slides/slide2.xml><?xml version="1.0" encoding="utf-8"?>
-<p:sld xmlns:a="http://schemas.openxmlformats.org/drawingml/2006/main" xmlns:r="http://schemas.openxmlformats.org/officeDocument/2006/relationships" xmlns:p="http://schemas.openxmlformats.org/presentationml/2006/main">
-  <p:cSld>
-    <p:spTree>
-      <p:nvGrpSpPr>
-        <p:cNvPr id="1" name="">
-          <a:extLst>
-            <a:ext uri="{FF2B5EF4-FFF2-40B4-BE49-F238E27FC236}">
-              <a16:creationId xmlns:a16="http://schemas.microsoft.com/office/drawing/2014/main" id="{2CBB18B7-95B3-8DEF-89E7-D8EB11A4D469}"/>
-            </a:ext>
-          </a:extLst>
-        </p:cNvPr>
-        <p:cNvGrpSpPr/>
-        <p:nvPr/>
-      </p:nvGrpSpPr>
-      <p:grpSpPr>
-        <a:xfrm>
-          <a:off x="0" y="0"/>
-          <a:ext cx="0" cy="0"/>
-          <a:chOff x="0" y="0"/>
-          <a:chExt cx="0" cy="0"/>
-        </a:xfrm>
-      </p:grpSpPr>
-      <p:sp>
-        <p:nvSpPr>
-          <p:cNvPr id="27" name="四角形: 角を丸くする 26">
-            <a:extLst>
-              <a:ext uri="{FF2B5EF4-FFF2-40B4-BE49-F238E27FC236}">
-                <a16:creationId xmlns:a16="http://schemas.microsoft.com/office/drawing/2014/main" id="{BB553E1C-93E5-7741-5BE0-21B6F34BCC2A}"/>
-              </a:ext>
-            </a:extLst>
-          </p:cNvPr>
-          <p:cNvSpPr/>
-          <p:nvPr/>
-        </p:nvSpPr>
-        <p:spPr>
-          <a:xfrm>
-            <a:off x="-1" y="0"/>
-            <a:ext cx="3095625" cy="1944688"/>
-          </a:xfrm>
-          <a:prstGeom prst="roundRect">
-            <a:avLst>
-              <a:gd name="adj" fmla="val 13559"/>
-            </a:avLst>
-          </a:prstGeom>
-          <a:solidFill>
-            <a:schemeClr val="bg1"/>
-          </a:solidFill>
-          <a:ln w="6350">
-            <a:noFill/>
-          </a:ln>
-          <a:effectLst/>
-        </p:spPr>
-        <p:style>
-          <a:lnRef idx="2">
-            <a:schemeClr val="accent1">
-              <a:shade val="15000"/>
-            </a:schemeClr>
-          </a:lnRef>
-          <a:fillRef idx="1">
-            <a:schemeClr val="accent1"/>
-          </a:fillRef>
-          <a:effectRef idx="0">
-            <a:schemeClr val="accent1"/>
-          </a:effectRef>
-          <a:fontRef idx="minor">
-            <a:schemeClr val="lt1"/>
-          </a:fontRef>
-        </p:style>
-        <p:txBody>
-          <a:bodyPr wrap="square" lIns="72000" tIns="36000" rIns="72000" bIns="0" rtlCol="0" anchor="b">
-            <a:noAutofit/>
-          </a:bodyPr>
-          <a:lstStyle/>
-          <a:p>
-            <a:pPr algn="ctr"/>
-            <a:endParaRPr kumimoji="1" lang="ja-JP" altLang="en-US" sz="600" dirty="0">
-              <a:solidFill>
-                <a:schemeClr val="tx1"/>
-              </a:solidFill>
-              <a:latin typeface="UD デジタル 教科書体 NP-R" panose="02020400000000000000" pitchFamily="18" charset="-128"/>
-              <a:ea typeface="UD デジタル 教科書体 NP-R" panose="02020400000000000000" pitchFamily="18" charset="-128"/>
-            </a:endParaRPr>
-          </a:p>
-        </p:txBody>
-      </p:sp>
-      <p:sp>
-        <p:nvSpPr>
-          <p:cNvPr id="9" name="四角形: 角を丸くする 8">
-            <a:extLst>
-              <a:ext uri="{FF2B5EF4-FFF2-40B4-BE49-F238E27FC236}">
-                <a16:creationId xmlns:a16="http://schemas.microsoft.com/office/drawing/2014/main" id="{3B01305D-13E8-D326-DFB1-2D11528469B1}"/>
-              </a:ext>
-            </a:extLst>
-          </p:cNvPr>
-          <p:cNvSpPr/>
-          <p:nvPr/>
-        </p:nvSpPr>
-        <p:spPr>
-          <a:xfrm>
-            <a:off x="52384" y="86414"/>
-            <a:ext cx="2990852" cy="1165609"/>
-          </a:xfrm>
-          <a:prstGeom prst="roundRect">
-            <a:avLst>
-              <a:gd name="adj" fmla="val 14805"/>
-            </a:avLst>
-          </a:prstGeom>
-          <a:blipFill dpi="0" rotWithShape="1">
-            <a:blip r:embed="rId2"/>
-            <a:srcRect/>
-            <a:stretch>
-              <a:fillRect/>
-            </a:stretch>
-          </a:blipFill>
-          <a:ln w="171450">
-            <a:noFill/>
-          </a:ln>
-          <a:effectLst>
-            <a:glow>
-              <a:schemeClr val="bg1"/>
-            </a:glow>
-            <a:outerShdw dist="12700" sx="1000" sy="1000" algn="ctr" rotWithShape="0">
-              <a:srgbClr val="000000"/>
-            </a:outerShdw>
-            <a:softEdge rad="63500"/>
-          </a:effectLst>
-        </p:spPr>
-        <p:style>
-          <a:lnRef idx="2">
-            <a:schemeClr val="accent1">
-              <a:shade val="15000"/>
-            </a:schemeClr>
-          </a:lnRef>
-          <a:fillRef idx="1">
-            <a:schemeClr val="accent1"/>
-          </a:fillRef>
-          <a:effectRef idx="0">
-            <a:schemeClr val="accent1"/>
-          </a:effectRef>
-          <a:fontRef idx="minor">
-            <a:schemeClr val="lt1"/>
-          </a:fontRef>
-        </p:style>
-        <p:txBody>
-          <a:bodyPr rtlCol="0" anchor="ctr"/>
-          <a:lstStyle/>
-          <a:p>
-            <a:pPr algn="ctr"/>
-            <a:endParaRPr lang="ja-JP" altLang="en-US"/>
-          </a:p>
-        </p:txBody>
-      </p:sp>
-      <p:sp>
-        <p:nvSpPr>
-          <p:cNvPr id="16" name="四角形: 角を丸くする 15">
-            <a:extLst>
-              <a:ext uri="{FF2B5EF4-FFF2-40B4-BE49-F238E27FC236}">
-                <a16:creationId xmlns:a16="http://schemas.microsoft.com/office/drawing/2014/main" id="{8EFB68EC-218E-33D2-A980-B25E6D96C685}"/>
-              </a:ext>
-            </a:extLst>
-          </p:cNvPr>
-          <p:cNvSpPr/>
-          <p:nvPr/>
-        </p:nvSpPr>
-        <p:spPr>
-          <a:xfrm>
-            <a:off x="234235" y="250086"/>
-            <a:ext cx="2627152" cy="843154"/>
-          </a:xfrm>
-          <a:prstGeom prst="roundRect">
-            <a:avLst>
-              <a:gd name="adj" fmla="val 13559"/>
-            </a:avLst>
-          </a:prstGeom>
-          <a:solidFill>
-            <a:schemeClr val="bg1"/>
-          </a:solidFill>
-          <a:ln w="6350">
-            <a:noFill/>
-          </a:ln>
-          <a:effectLst/>
-        </p:spPr>
-        <p:style>
-          <a:lnRef idx="2">
-            <a:schemeClr val="accent1">
-              <a:shade val="15000"/>
-            </a:schemeClr>
-          </a:lnRef>
-          <a:fillRef idx="1">
-            <a:schemeClr val="accent1"/>
-          </a:fillRef>
-          <a:effectRef idx="0">
-            <a:schemeClr val="accent1"/>
-          </a:effectRef>
-          <a:fontRef idx="minor">
-            <a:schemeClr val="lt1"/>
-          </a:fontRef>
-        </p:style>
-        <p:txBody>
-          <a:bodyPr wrap="square" lIns="72000" tIns="36000" rIns="72000" bIns="0" rtlCol="0" anchor="b">
-            <a:noAutofit/>
-          </a:bodyPr>
-          <a:lstStyle/>
-          <a:p>
-            <a:pPr algn="ctr"/>
-            <a:r>
-              <a:rPr kumimoji="1" lang="ja-JP" altLang="en-US" sz="500" dirty="0">
-                <a:solidFill>
-                  <a:schemeClr val="tx1"/>
-                </a:solidFill>
-                <a:latin typeface="UD デジタル 教科書体 NP-R" panose="02020400000000000000" pitchFamily="18" charset="-128"/>
-                <a:ea typeface="UD デジタル 教科書体 NP-R" panose="02020400000000000000" pitchFamily="18" charset="-128"/>
-              </a:rPr>
-              <a:t>本カードを破損・紛失された場合、または使用期限を過ぎた場合は、返礼品を</a:t>
-            </a:r>
-            <a:endParaRPr kumimoji="1" lang="en-US" altLang="ja-JP" sz="500" dirty="0">
-              <a:solidFill>
-                <a:schemeClr val="tx1"/>
-              </a:solidFill>
-              <a:latin typeface="UD デジタル 教科書体 NP-R" panose="02020400000000000000" pitchFamily="18" charset="-128"/>
-              <a:ea typeface="UD デジタル 教科書体 NP-R" panose="02020400000000000000" pitchFamily="18" charset="-128"/>
-            </a:endParaRPr>
-          </a:p>
-          <a:p>
-            <a:pPr algn="ctr"/>
-            <a:r>
-              <a:rPr kumimoji="1" lang="ja-JP" altLang="en-US" sz="500" dirty="0">
-                <a:solidFill>
-                  <a:schemeClr val="tx1"/>
-                </a:solidFill>
-                <a:latin typeface="UD デジタル 教科書体 NP-R" panose="02020400000000000000" pitchFamily="18" charset="-128"/>
-                <a:ea typeface="UD デジタル 教科書体 NP-R" panose="02020400000000000000" pitchFamily="18" charset="-128"/>
-              </a:rPr>
-              <a:t>  ご提供できかねますので、あらかじめご了承くださいますようお願いいたします。</a:t>
-            </a:r>
-          </a:p>
-        </p:txBody>
-      </p:sp>
-      <p:sp>
-        <p:nvSpPr>
-          <p:cNvPr id="5" name="四角形: 角を丸くする 4">
-            <a:extLst>
-              <a:ext uri="{FF2B5EF4-FFF2-40B4-BE49-F238E27FC236}">
-                <a16:creationId xmlns:a16="http://schemas.microsoft.com/office/drawing/2014/main" id="{13B85B00-3FFD-3C66-2B1F-65E05DF0D111}"/>
-              </a:ext>
-            </a:extLst>
-          </p:cNvPr>
-          <p:cNvSpPr/>
-          <p:nvPr/>
-        </p:nvSpPr>
-        <p:spPr>
-          <a:xfrm>
-            <a:off x="296296" y="568732"/>
-            <a:ext cx="564212" cy="211760"/>
-          </a:xfrm>
-          <a:prstGeom prst="roundRect">
-            <a:avLst>
-              <a:gd name="adj" fmla="val 6665"/>
-            </a:avLst>
-          </a:prstGeom>
-          <a:solidFill>
-            <a:schemeClr val="bg1"/>
-          </a:solidFill>
-          <a:ln>
-            <a:noFill/>
-          </a:ln>
-        </p:spPr>
-        <p:style>
-          <a:lnRef idx="2">
-            <a:schemeClr val="accent1">
-              <a:shade val="15000"/>
-            </a:schemeClr>
-          </a:lnRef>
-          <a:fillRef idx="1">
-            <a:schemeClr val="accent1"/>
-          </a:fillRef>
-          <a:effectRef idx="0">
-            <a:schemeClr val="accent1"/>
-          </a:effectRef>
-          <a:fontRef idx="minor">
-            <a:schemeClr val="lt1"/>
-          </a:fontRef>
-        </p:style>
-        <p:txBody>
-          <a:bodyPr lIns="0" tIns="0" rIns="0" bIns="0" rtlCol="0" anchor="ctr"/>
-          <a:lstStyle/>
-          <a:p>
-            <a:pPr algn="ctr"/>
-            <a:r>
-              <a:rPr kumimoji="1" lang="en-US" altLang="ja-JP" sz="800" dirty="0">
-                <a:solidFill>
-                  <a:schemeClr val="tx1"/>
-                </a:solidFill>
-                <a:latin typeface="UD デジタル 教科書体 NP-R" panose="02020400000000000000" pitchFamily="18" charset="-128"/>
-                <a:ea typeface="UD デジタル 教科書体 NP-R" panose="02020400000000000000" pitchFamily="18" charset="-128"/>
-              </a:rPr>
-              <a:t>PINCODE</a:t>
-            </a:r>
-          </a:p>
-        </p:txBody>
-      </p:sp>
-      <p:sp>
-        <p:nvSpPr>
-          <p:cNvPr id="6" name="四角形: 角を丸くする 5">
-            <a:extLst>
-              <a:ext uri="{FF2B5EF4-FFF2-40B4-BE49-F238E27FC236}">
-                <a16:creationId xmlns:a16="http://schemas.microsoft.com/office/drawing/2014/main" id="{3E8840FA-8BA6-D492-7178-88D799CD79C0}"/>
-              </a:ext>
-            </a:extLst>
-          </p:cNvPr>
-          <p:cNvSpPr/>
-          <p:nvPr/>
-        </p:nvSpPr>
-        <p:spPr>
-          <a:xfrm>
-            <a:off x="-1" y="-5087"/>
-            <a:ext cx="3095625" cy="1949774"/>
-          </a:xfrm>
-          <a:prstGeom prst="roundRect">
-            <a:avLst>
-              <a:gd name="adj" fmla="val 0"/>
-            </a:avLst>
-          </a:prstGeom>
-          <a:noFill/>
-          <a:ln>
-            <a:noFill/>
-          </a:ln>
-        </p:spPr>
-        <p:style>
-          <a:lnRef idx="2">
-            <a:schemeClr val="accent1">
-              <a:shade val="15000"/>
-            </a:schemeClr>
-          </a:lnRef>
-          <a:fillRef idx="1">
-            <a:schemeClr val="accent1"/>
-          </a:fillRef>
-          <a:effectRef idx="0">
-            <a:schemeClr val="accent1"/>
-          </a:effectRef>
-          <a:fontRef idx="minor">
-            <a:schemeClr val="lt1"/>
-          </a:fontRef>
-        </p:style>
-        <p:txBody>
-          <a:bodyPr lIns="0" tIns="0" rIns="0" bIns="0" rtlCol="0" anchor="ctr"/>
-          <a:lstStyle/>
-          <a:p>
-            <a:pPr algn="ctr"/>
-            <a:endParaRPr kumimoji="1" lang="ja-JP" altLang="en-US" sz="600" dirty="0">
-              <a:solidFill>
-                <a:schemeClr val="tx1"/>
-              </a:solidFill>
-              <a:latin typeface="UD デジタル 教科書体 NP-R" panose="020B0400000000000000" pitchFamily="18" charset="-128"/>
-              <a:ea typeface="UD デジタル 教科書体 NP-R" panose="020B0400000000000000" pitchFamily="18" charset="-128"/>
-            </a:endParaRPr>
-          </a:p>
-        </p:txBody>
-      </p:sp>
-      <p:sp>
-        <p:nvSpPr>
-          <p:cNvPr id="18" name="四角形: 角を丸くする 17">
-            <a:extLst>
-              <a:ext uri="{FF2B5EF4-FFF2-40B4-BE49-F238E27FC236}">
-                <a16:creationId xmlns:a16="http://schemas.microsoft.com/office/drawing/2014/main" id="{44B6410A-4EAF-C2B7-3C90-53653C8DE213}"/>
-              </a:ext>
-            </a:extLst>
-          </p:cNvPr>
-          <p:cNvSpPr/>
-          <p:nvPr/>
-        </p:nvSpPr>
-        <p:spPr>
-          <a:xfrm>
-            <a:off x="216692" y="1408325"/>
-            <a:ext cx="2662238" cy="302565"/>
-          </a:xfrm>
-          <a:prstGeom prst="roundRect">
-            <a:avLst>
-              <a:gd name="adj" fmla="val 17073"/>
-            </a:avLst>
-          </a:prstGeom>
-          <a:noFill/>
-          <a:ln w="6350">
-            <a:solidFill>
-              <a:schemeClr val="tx1"/>
-            </a:solidFill>
-          </a:ln>
-          <a:effectLst/>
-        </p:spPr>
-        <p:style>
-          <a:lnRef idx="2">
-            <a:schemeClr val="accent1">
-              <a:shade val="15000"/>
-            </a:schemeClr>
-          </a:lnRef>
-          <a:fillRef idx="1">
-            <a:schemeClr val="accent1"/>
-          </a:fillRef>
-          <a:effectRef idx="0">
-            <a:schemeClr val="accent1"/>
-          </a:effectRef>
-          <a:fontRef idx="minor">
-            <a:schemeClr val="lt1"/>
-          </a:fontRef>
-        </p:style>
-        <p:txBody>
-          <a:bodyPr rtlCol="0" anchor="ctr"/>
-          <a:lstStyle/>
-          <a:p>
-            <a:pPr algn="ctr"/>
-            <a:r>
-              <a:rPr kumimoji="1" lang="en-US" altLang="ja-JP" sz="600" dirty="0">
-                <a:solidFill>
-                  <a:schemeClr val="tx1"/>
-                </a:solidFill>
-                <a:latin typeface="UD デジタル 教科書体 NP-R" panose="02020400000000000000" pitchFamily="18" charset="-128"/>
-                <a:ea typeface="UD デジタル 教科書体 NP-R" panose="02020400000000000000" pitchFamily="18" charset="-128"/>
-              </a:rPr>
-              <a:t>[</a:t>
-            </a:r>
-            <a:r>
-              <a:rPr kumimoji="1" lang="ja-JP" altLang="en-US" sz="600" dirty="0">
-                <a:solidFill>
-                  <a:schemeClr val="tx1"/>
-                </a:solidFill>
-                <a:latin typeface="UD デジタル 教科書体 NP-R" panose="02020400000000000000" pitchFamily="18" charset="-128"/>
-                <a:ea typeface="UD デジタル 教科書体 NP-R" panose="02020400000000000000" pitchFamily="18" charset="-128"/>
-              </a:rPr>
-              <a:t>返礼品に関するお問い合わせ</a:t>
-            </a:r>
-            <a:r>
-              <a:rPr kumimoji="1" lang="en-US" altLang="ja-JP" sz="600" dirty="0">
-                <a:solidFill>
-                  <a:schemeClr val="tx1"/>
-                </a:solidFill>
-                <a:latin typeface="UD デジタル 教科書体 NP-R" panose="02020400000000000000" pitchFamily="18" charset="-128"/>
-                <a:ea typeface="UD デジタル 教科書体 NP-R" panose="02020400000000000000" pitchFamily="18" charset="-128"/>
-              </a:rPr>
-              <a:t>]</a:t>
-            </a:r>
-          </a:p>
-          <a:p>
-            <a:pPr algn="ctr"/>
-            <a:r>
-              <a:rPr kumimoji="1" lang="ja-JP" altLang="en-US" sz="600" dirty="0">
-                <a:solidFill>
-                  <a:schemeClr val="tx1"/>
-                </a:solidFill>
-                <a:latin typeface="UD デジタル 教科書体 NP-R" panose="02020400000000000000" pitchFamily="18" charset="-128"/>
-                <a:ea typeface="UD デジタル 教科書体 NP-R" panose="02020400000000000000" pitchFamily="18" charset="-128"/>
-              </a:rPr>
-              <a:t>秋田大学総務企画部広報課</a:t>
-            </a:r>
-          </a:p>
-          <a:p>
-            <a:pPr algn="ctr"/>
-            <a:r>
-              <a:rPr kumimoji="1" lang="ja-JP" altLang="en-US" sz="600" dirty="0">
-                <a:solidFill>
-                  <a:schemeClr val="tx1"/>
-                </a:solidFill>
-                <a:latin typeface="UD デジタル 教科書体 NP-R" panose="02020400000000000000" pitchFamily="18" charset="-128"/>
-                <a:ea typeface="UD デジタル 教科書体 NP-R" panose="02020400000000000000" pitchFamily="18" charset="-128"/>
-              </a:rPr>
-              <a:t>電話：</a:t>
-            </a:r>
-            <a:r>
-              <a:rPr kumimoji="1" lang="en-US" altLang="ja-JP" sz="600" dirty="0">
-                <a:solidFill>
-                  <a:schemeClr val="tx1"/>
-                </a:solidFill>
-                <a:latin typeface="UD デジタル 教科書体 NP-R" panose="02020400000000000000" pitchFamily="18" charset="-128"/>
-                <a:ea typeface="UD デジタル 教科書体 NP-R" panose="02020400000000000000" pitchFamily="18" charset="-128"/>
-              </a:rPr>
-              <a:t>018-889-3266</a:t>
-            </a:r>
-            <a:r>
-              <a:rPr kumimoji="1" lang="ja-JP" altLang="en-US" sz="600" dirty="0">
-                <a:solidFill>
-                  <a:schemeClr val="tx1"/>
-                </a:solidFill>
-                <a:latin typeface="UD デジタル 教科書体 NP-R" panose="02020400000000000000" pitchFamily="18" charset="-128"/>
-                <a:ea typeface="UD デジタル 教科書体 NP-R" panose="02020400000000000000" pitchFamily="18" charset="-128"/>
-              </a:rPr>
-              <a:t>　</a:t>
-            </a:r>
-            <a:r>
-              <a:rPr kumimoji="1" lang="en-US" altLang="ja-JP" sz="600" dirty="0">
-                <a:solidFill>
-                  <a:schemeClr val="tx1"/>
-                </a:solidFill>
-                <a:latin typeface="UD デジタル 教科書体 NP-R" panose="02020400000000000000" pitchFamily="18" charset="-128"/>
-                <a:ea typeface="UD デジタル 教科書体 NP-R" panose="02020400000000000000" pitchFamily="18" charset="-128"/>
-              </a:rPr>
-              <a:t>e-mail</a:t>
-            </a:r>
-            <a:r>
-              <a:rPr kumimoji="1" lang="ja-JP" altLang="en-US" sz="600" dirty="0">
-                <a:solidFill>
-                  <a:schemeClr val="tx1"/>
-                </a:solidFill>
-                <a:latin typeface="UD デジタル 教科書体 NP-R" panose="02020400000000000000" pitchFamily="18" charset="-128"/>
-                <a:ea typeface="UD デジタル 教科書体 NP-R" panose="02020400000000000000" pitchFamily="18" charset="-128"/>
-              </a:rPr>
-              <a:t>：</a:t>
-            </a:r>
-            <a:r>
-              <a:rPr kumimoji="1" lang="en-US" altLang="ja-JP" sz="600" dirty="0">
-                <a:solidFill>
-                  <a:schemeClr val="tx1"/>
-                </a:solidFill>
-                <a:latin typeface="UD デジタル 教科書体 NP-R" panose="02020400000000000000" pitchFamily="18" charset="-128"/>
-                <a:ea typeface="UD デジタル 教科書体 NP-R" panose="02020400000000000000" pitchFamily="18" charset="-128"/>
-              </a:rPr>
-              <a:t>kikin@jimu.akita-u.ac.jp</a:t>
-            </a:r>
-          </a:p>
-        </p:txBody>
-      </p:sp>
-      <p:sp>
-        <p:nvSpPr>
-          <p:cNvPr id="19" name="四角形: 角を丸くする 18">
-            <a:extLst>
-              <a:ext uri="{FF2B5EF4-FFF2-40B4-BE49-F238E27FC236}">
-                <a16:creationId xmlns:a16="http://schemas.microsoft.com/office/drawing/2014/main" id="{28CE2EAB-21EF-E1A0-BF75-9518E545E6AA}"/>
-              </a:ext>
-            </a:extLst>
-          </p:cNvPr>
-          <p:cNvSpPr/>
-          <p:nvPr/>
-        </p:nvSpPr>
-        <p:spPr>
-          <a:xfrm>
-            <a:off x="269861" y="1779606"/>
-            <a:ext cx="2720550" cy="131546"/>
-          </a:xfrm>
-          <a:prstGeom prst="roundRect">
-            <a:avLst>
-              <a:gd name="adj" fmla="val 17073"/>
-            </a:avLst>
-          </a:prstGeom>
-          <a:noFill/>
-          <a:ln w="6350">
-            <a:noFill/>
-          </a:ln>
-          <a:effectLst/>
-        </p:spPr>
-        <p:style>
-          <a:lnRef idx="2">
-            <a:schemeClr val="accent1">
-              <a:shade val="15000"/>
-            </a:schemeClr>
-          </a:lnRef>
-          <a:fillRef idx="1">
-            <a:schemeClr val="accent1"/>
-          </a:fillRef>
-          <a:effectRef idx="0">
-            <a:schemeClr val="accent1"/>
-          </a:effectRef>
-          <a:fontRef idx="minor">
-            <a:schemeClr val="lt1"/>
-          </a:fontRef>
-        </p:style>
-        <p:txBody>
-          <a:bodyPr rtlCol="0" anchor="ctr"/>
-          <a:lstStyle/>
-          <a:p>
-            <a:pPr algn="ctr"/>
-            <a:r>
-              <a:rPr kumimoji="1" lang="ja-JP" altLang="en-US" sz="600" dirty="0">
-                <a:solidFill>
-                  <a:schemeClr val="tx1"/>
-                </a:solidFill>
-                <a:latin typeface="UD デジタル 教科書体 NP-R" panose="02020400000000000000" pitchFamily="18" charset="-128"/>
-                <a:ea typeface="UD デジタル 教科書体 NP-R" panose="02020400000000000000" pitchFamily="18" charset="-128"/>
-              </a:rPr>
-              <a:t>「名刺代わりに」は、秋田大学発ベンチャー、</a:t>
-            </a:r>
-            <a:r>
-              <a:rPr kumimoji="1" lang="en-US" altLang="ja-JP" sz="600" dirty="0">
-                <a:solidFill>
-                  <a:schemeClr val="tx1"/>
-                </a:solidFill>
-                <a:latin typeface="UD デジタル 教科書体 NP-R" panose="02020400000000000000" pitchFamily="18" charset="-128"/>
-                <a:ea typeface="UD デジタル 教科書体 NP-R" panose="02020400000000000000" pitchFamily="18" charset="-128"/>
-              </a:rPr>
-              <a:t>AUIC</a:t>
-            </a:r>
-            <a:r>
-              <a:rPr kumimoji="1" lang="ja-JP" altLang="en-US" sz="600" dirty="0">
-                <a:solidFill>
-                  <a:schemeClr val="tx1"/>
-                </a:solidFill>
-                <a:latin typeface="UD デジタル 教科書体 NP-R" panose="02020400000000000000" pitchFamily="18" charset="-128"/>
-                <a:ea typeface="UD デジタル 教科書体 NP-R" panose="02020400000000000000" pitchFamily="18" charset="-128"/>
-              </a:rPr>
-              <a:t>が提供しています。</a:t>
-            </a:r>
-            <a:endParaRPr kumimoji="1" lang="en-US" altLang="ja-JP" sz="600" dirty="0">
-              <a:solidFill>
-                <a:schemeClr val="tx1"/>
-              </a:solidFill>
-              <a:latin typeface="UD デジタル 教科書体 NP-R" panose="02020400000000000000" pitchFamily="18" charset="-128"/>
-              <a:ea typeface="UD デジタル 教科書体 NP-R" panose="02020400000000000000" pitchFamily="18" charset="-128"/>
-            </a:endParaRPr>
-          </a:p>
-        </p:txBody>
-      </p:sp>
-      <p:sp>
-        <p:nvSpPr>
-          <p:cNvPr id="25" name="四角形: 角を丸くする 24">
-            <a:extLst>
-              <a:ext uri="{FF2B5EF4-FFF2-40B4-BE49-F238E27FC236}">
-                <a16:creationId xmlns:a16="http://schemas.microsoft.com/office/drawing/2014/main" id="{727A6FE6-8304-E105-F4CC-BA0CC23DCBE0}"/>
-              </a:ext>
-            </a:extLst>
-          </p:cNvPr>
-          <p:cNvSpPr/>
-          <p:nvPr/>
-        </p:nvSpPr>
-        <p:spPr>
-          <a:xfrm>
-            <a:off x="158380" y="287429"/>
-            <a:ext cx="2720550" cy="164630"/>
-          </a:xfrm>
-          <a:prstGeom prst="roundRect">
-            <a:avLst>
-              <a:gd name="adj" fmla="val 17073"/>
-            </a:avLst>
-          </a:prstGeom>
-          <a:noFill/>
-          <a:ln w="6350">
-            <a:noFill/>
-          </a:ln>
-          <a:effectLst/>
-        </p:spPr>
-        <p:style>
-          <a:lnRef idx="2">
-            <a:schemeClr val="accent1">
-              <a:shade val="15000"/>
-            </a:schemeClr>
-          </a:lnRef>
-          <a:fillRef idx="1">
-            <a:schemeClr val="accent1"/>
-          </a:fillRef>
-          <a:effectRef idx="0">
-            <a:schemeClr val="accent1"/>
-          </a:effectRef>
-          <a:fontRef idx="minor">
-            <a:schemeClr val="lt1"/>
-          </a:fontRef>
-        </p:style>
-        <p:txBody>
-          <a:bodyPr rtlCol="0" anchor="ctr"/>
-          <a:lstStyle/>
-          <a:p>
-            <a:pPr algn="ctr"/>
-            <a:r>
-              <a:rPr kumimoji="1" lang="ja-JP" altLang="en-US" sz="600" dirty="0">
-                <a:solidFill>
-                  <a:schemeClr val="tx1"/>
-                </a:solidFill>
-                <a:latin typeface="UD デジタル 教科書体 NP-R" panose="02020400000000000000" pitchFamily="18" charset="-128"/>
-                <a:ea typeface="UD デジタル 教科書体 NP-R" panose="02020400000000000000" pitchFamily="18" charset="-128"/>
-              </a:rPr>
-              <a:t>［使用期限：</a:t>
-            </a:r>
-            <a:r>
-              <a:rPr kumimoji="1" lang="en-US" altLang="ja-JP" sz="600" dirty="0">
-                <a:solidFill>
-                  <a:schemeClr val="tx1"/>
-                </a:solidFill>
-                <a:latin typeface="UD デジタル 教科書体 NP-R" panose="02020400000000000000" pitchFamily="18" charset="-128"/>
-                <a:ea typeface="UD デジタル 教科書体 NP-R" panose="02020400000000000000" pitchFamily="18" charset="-128"/>
-              </a:rPr>
-              <a:t>2026</a:t>
-            </a:r>
-            <a:r>
-              <a:rPr kumimoji="1" lang="ja-JP" altLang="en-US" sz="600" dirty="0">
-                <a:solidFill>
-                  <a:schemeClr val="tx1"/>
-                </a:solidFill>
-                <a:latin typeface="UD デジタル 教科書体 NP-R" panose="02020400000000000000" pitchFamily="18" charset="-128"/>
-                <a:ea typeface="UD デジタル 教科書体 NP-R" panose="02020400000000000000" pitchFamily="18" charset="-128"/>
-              </a:rPr>
-              <a:t> 年 </a:t>
-            </a:r>
-            <a:r>
-              <a:rPr kumimoji="1" lang="en-US" altLang="ja-JP" sz="600" dirty="0">
-                <a:solidFill>
-                  <a:schemeClr val="tx1"/>
-                </a:solidFill>
-                <a:latin typeface="UD デジタル 教科書体 NP-R" panose="02020400000000000000" pitchFamily="18" charset="-128"/>
-                <a:ea typeface="UD デジタル 教科書体 NP-R" panose="02020400000000000000" pitchFamily="18" charset="-128"/>
-              </a:rPr>
-              <a:t>9</a:t>
-            </a:r>
-            <a:r>
-              <a:rPr kumimoji="1" lang="ja-JP" altLang="en-US" sz="600" dirty="0">
-                <a:solidFill>
-                  <a:schemeClr val="tx1"/>
-                </a:solidFill>
-                <a:latin typeface="UD デジタル 教科書体 NP-R" panose="02020400000000000000" pitchFamily="18" charset="-128"/>
-                <a:ea typeface="UD デジタル 教科書体 NP-R" panose="02020400000000000000" pitchFamily="18" charset="-128"/>
-              </a:rPr>
-              <a:t> 月 </a:t>
-            </a:r>
-            <a:r>
-              <a:rPr kumimoji="1" lang="en-US" altLang="ja-JP" sz="600" dirty="0">
-                <a:solidFill>
-                  <a:schemeClr val="tx1"/>
-                </a:solidFill>
-                <a:latin typeface="UD デジタル 教科書体 NP-R" panose="02020400000000000000" pitchFamily="18" charset="-128"/>
-                <a:ea typeface="UD デジタル 教科書体 NP-R" panose="02020400000000000000" pitchFamily="18" charset="-128"/>
-              </a:rPr>
-              <a:t>30</a:t>
-            </a:r>
-            <a:r>
-              <a:rPr kumimoji="1" lang="ja-JP" altLang="en-US" sz="600" dirty="0">
-                <a:solidFill>
-                  <a:schemeClr val="tx1"/>
-                </a:solidFill>
-                <a:latin typeface="UD デジタル 教科書体 NP-R" panose="02020400000000000000" pitchFamily="18" charset="-128"/>
-                <a:ea typeface="UD デジタル 教科書体 NP-R" panose="02020400000000000000" pitchFamily="18" charset="-128"/>
-              </a:rPr>
-              <a:t> 日 </a:t>
-            </a:r>
-            <a:r>
-              <a:rPr kumimoji="1" lang="en-US" altLang="ja-JP" sz="600" dirty="0">
-                <a:solidFill>
-                  <a:schemeClr val="tx1"/>
-                </a:solidFill>
-                <a:latin typeface="UD デジタル 教科書体 NP-R" panose="02020400000000000000" pitchFamily="18" charset="-128"/>
-                <a:ea typeface="UD デジタル 教科書体 NP-R" panose="02020400000000000000" pitchFamily="18" charset="-128"/>
-              </a:rPr>
-              <a:t>23</a:t>
-            </a:r>
-            <a:r>
-              <a:rPr kumimoji="1" lang="ja-JP" altLang="en-US" sz="600" dirty="0">
-                <a:solidFill>
-                  <a:schemeClr val="tx1"/>
-                </a:solidFill>
-                <a:latin typeface="UD デジタル 教科書体 NP-R" panose="02020400000000000000" pitchFamily="18" charset="-128"/>
-                <a:ea typeface="UD デジタル 教科書体 NP-R" panose="02020400000000000000" pitchFamily="18" charset="-128"/>
-              </a:rPr>
-              <a:t>：</a:t>
-            </a:r>
-            <a:r>
-              <a:rPr kumimoji="1" lang="en-US" altLang="ja-JP" sz="600" dirty="0">
-                <a:solidFill>
-                  <a:schemeClr val="tx1"/>
-                </a:solidFill>
-                <a:latin typeface="UD デジタル 教科書体 NP-R" panose="02020400000000000000" pitchFamily="18" charset="-128"/>
-                <a:ea typeface="UD デジタル 教科書体 NP-R" panose="02020400000000000000" pitchFamily="18" charset="-128"/>
-              </a:rPr>
-              <a:t>59</a:t>
-            </a:r>
-            <a:r>
-              <a:rPr kumimoji="1" lang="ja-JP" altLang="en-US" sz="600" dirty="0">
-                <a:solidFill>
-                  <a:schemeClr val="tx1"/>
-                </a:solidFill>
-                <a:latin typeface="UD デジタル 教科書体 NP-R" panose="02020400000000000000" pitchFamily="18" charset="-128"/>
-                <a:ea typeface="UD デジタル 教科書体 NP-R" panose="02020400000000000000" pitchFamily="18" charset="-128"/>
-              </a:rPr>
-              <a:t>まで］</a:t>
-            </a:r>
-          </a:p>
-        </p:txBody>
-      </p:sp>
-      <p:sp>
-        <p:nvSpPr>
-          <p:cNvPr id="26" name="四角形: 角を丸くする 25">
-            <a:extLst>
-              <a:ext uri="{FF2B5EF4-FFF2-40B4-BE49-F238E27FC236}">
-                <a16:creationId xmlns:a16="http://schemas.microsoft.com/office/drawing/2014/main" id="{501FA509-A0BD-AC34-663F-24EDF71C7E51}"/>
-              </a:ext>
-            </a:extLst>
-          </p:cNvPr>
-          <p:cNvSpPr/>
-          <p:nvPr/>
-        </p:nvSpPr>
-        <p:spPr>
-          <a:xfrm>
-            <a:off x="1060000" y="571575"/>
-            <a:ext cx="1429461" cy="215018"/>
-          </a:xfrm>
-          <a:prstGeom prst="roundRect">
-            <a:avLst>
-              <a:gd name="adj" fmla="val 6665"/>
-            </a:avLst>
-          </a:prstGeom>
-          <a:solidFill>
-            <a:schemeClr val="bg1"/>
-          </a:solidFill>
-          <a:ln>
-            <a:noFill/>
-          </a:ln>
-        </p:spPr>
-        <p:style>
-          <a:lnRef idx="2">
-            <a:schemeClr val="accent1">
-              <a:shade val="15000"/>
-            </a:schemeClr>
-          </a:lnRef>
-          <a:fillRef idx="1">
-            <a:schemeClr val="accent1"/>
-          </a:fillRef>
-          <a:effectRef idx="0">
-            <a:schemeClr val="accent1"/>
-          </a:effectRef>
-          <a:fontRef idx="minor">
-            <a:schemeClr val="lt1"/>
-          </a:fontRef>
-        </p:style>
-        <p:txBody>
-          <a:bodyPr lIns="0" tIns="0" rIns="0" bIns="0" rtlCol="0" anchor="ctr"/>
-          <a:lstStyle/>
-          <a:p>
-            <a:pPr algn="ctr"/>
-            <a:r>
-              <a:rPr lang="en-US" altLang="ja-JP" dirty="0">
-                <a:solidFill>
-                  <a:schemeClr val="tx1"/>
-                </a:solidFill>
-                <a:latin typeface="UD デジタル 教科書体 NP-R" panose="02020400000000000000" pitchFamily="18" charset="-128"/>
-                <a:ea typeface="UD デジタル 教科書体 NP-R" panose="02020400000000000000" pitchFamily="18" charset="-128"/>
-              </a:rPr>
-              <a:t>12345678</a:t>
-            </a:r>
-            <a:endParaRPr kumimoji="1" lang="ja-JP" altLang="en-US" sz="800" dirty="0">
-              <a:solidFill>
-                <a:schemeClr val="tx1"/>
-              </a:solidFill>
-              <a:latin typeface="UD デジタル 教科書体 NP-R" panose="02020400000000000000" pitchFamily="18" charset="-128"/>
-              <a:ea typeface="UD デジタル 教科書体 NP-R" panose="02020400000000000000" pitchFamily="18" charset="-128"/>
-            </a:endParaRPr>
-          </a:p>
-        </p:txBody>
-      </p:sp>
-      <p:pic>
-        <p:nvPicPr>
-          <p:cNvPr id="3" name="図 2">
-            <a:extLst>
-              <a:ext uri="{FF2B5EF4-FFF2-40B4-BE49-F238E27FC236}">
-                <a16:creationId xmlns:a16="http://schemas.microsoft.com/office/drawing/2014/main" id="{1574CC00-E4C4-66A6-082F-C1484247BFC2}"/>
-              </a:ext>
-            </a:extLst>
-          </p:cNvPr>
-          <p:cNvPicPr>
-            <a:picLocks noChangeAspect="1"/>
-          </p:cNvPicPr>
-          <p:nvPr/>
-        </p:nvPicPr>
-        <p:blipFill>
-          <a:blip r:embed="rId3">
-            <a:extLst>
-              <a:ext uri="{28A0092B-C50C-407E-A947-70E740481C1C}">
-                <a14:useLocalDpi xmlns:a14="http://schemas.microsoft.com/office/drawing/2010/main" val="0"/>
-              </a:ext>
-            </a:extLst>
-          </a:blip>
-          <a:stretch>
-            <a:fillRect/>
-          </a:stretch>
-        </p:blipFill>
-        <p:spPr>
-          <a:xfrm>
-            <a:off x="296732" y="1793811"/>
-            <a:ext cx="97255" cy="97255"/>
-          </a:xfrm>
-          <a:prstGeom prst="rect">
-            <a:avLst/>
-          </a:prstGeom>
-        </p:spPr>
-      </p:pic>
-    </p:spTree>
-    <p:extLst>
-      <p:ext uri="{BB962C8B-B14F-4D97-AF65-F5344CB8AC3E}">
-        <p14:creationId xmlns:p14="http://schemas.microsoft.com/office/powerpoint/2010/main" val="2072779482"/>
-      </p:ext>
-    </p:extLst>
-  </p:cSld>
-  <p:clrMapOvr>
-    <a:masterClrMapping/>
-  </p:clrMapOvr>
-</p:sld>
-</file>
-
-<file path=ppt/slides/slide3.xml><?xml version="1.0" encoding="utf-8"?>
-<p:sld xmlns:a="http://schemas.openxmlformats.org/drawingml/2006/main" xmlns:r="http://schemas.openxmlformats.org/officeDocument/2006/relationships" xmlns:p="http://schemas.openxmlformats.org/presentationml/2006/main">
-  <p:cSld>
-    <p:spTree>
-      <p:nvGrpSpPr>
-        <p:cNvPr id="1" name="">
-          <a:extLst>
-            <a:ext uri="{FF2B5EF4-FFF2-40B4-BE49-F238E27FC236}">
-              <a16:creationId xmlns:a16="http://schemas.microsoft.com/office/drawing/2014/main" id="{798C7E02-1C64-E337-C6E4-2EBD0F114A38}"/>
-            </a:ext>
-          </a:extLst>
-        </p:cNvPr>
-        <p:cNvGrpSpPr/>
-        <p:nvPr/>
-      </p:nvGrpSpPr>
-      <p:grpSpPr>
-        <a:xfrm>
-          <a:off x="0" y="0"/>
-          <a:ext cx="0" cy="0"/>
-          <a:chOff x="0" y="0"/>
-          <a:chExt cx="0" cy="0"/>
-        </a:xfrm>
-      </p:grpSpPr>
-      <p:grpSp>
-        <p:nvGrpSpPr>
-          <p:cNvPr id="8" name="グループ化 7">
-            <a:extLst>
-              <a:ext uri="{FF2B5EF4-FFF2-40B4-BE49-F238E27FC236}">
-                <a16:creationId xmlns:a16="http://schemas.microsoft.com/office/drawing/2014/main" id="{BA6C0786-4367-6430-D180-D12D386B1BCB}"/>
-              </a:ext>
-            </a:extLst>
-          </p:cNvPr>
-          <p:cNvGrpSpPr/>
-          <p:nvPr/>
-        </p:nvGrpSpPr>
-        <p:grpSpPr>
-          <a:xfrm>
-            <a:off x="-2" y="-1"/>
-            <a:ext cx="3095626" cy="1944689"/>
-            <a:chOff x="-2" y="-1"/>
-            <a:chExt cx="3095626" cy="1944689"/>
-          </a:xfrm>
-        </p:grpSpPr>
-        <p:sp>
-          <p:nvSpPr>
-            <p:cNvPr id="2" name="四角形: 角を丸くする 1">
-              <a:extLst>
-                <a:ext uri="{FF2B5EF4-FFF2-40B4-BE49-F238E27FC236}">
-                  <a16:creationId xmlns:a16="http://schemas.microsoft.com/office/drawing/2014/main" id="{1D9419C8-BB72-E58B-C398-CE8E359F874D}"/>
-                </a:ext>
-              </a:extLst>
-            </p:cNvPr>
-            <p:cNvSpPr/>
-            <p:nvPr/>
-          </p:nvSpPr>
-          <p:spPr>
-            <a:xfrm>
-              <a:off x="-2" y="-1"/>
-              <a:ext cx="3095625" cy="1944687"/>
-            </a:xfrm>
-            <a:prstGeom prst="roundRect">
-              <a:avLst>
-                <a:gd name="adj" fmla="val 0"/>
-              </a:avLst>
-            </a:prstGeom>
-            <a:solidFill>
-              <a:schemeClr val="bg1"/>
-            </a:solidFill>
-            <a:ln>
-              <a:noFill/>
-            </a:ln>
-          </p:spPr>
-          <p:style>
-            <a:lnRef idx="2">
-              <a:schemeClr val="accent1">
-                <a:shade val="15000"/>
-              </a:schemeClr>
-            </a:lnRef>
-            <a:fillRef idx="1">
-              <a:schemeClr val="accent1"/>
-            </a:fillRef>
-            <a:effectRef idx="0">
-              <a:schemeClr val="accent1"/>
-            </a:effectRef>
-            <a:fontRef idx="minor">
-              <a:schemeClr val="lt1"/>
-            </a:fontRef>
-          </p:style>
-          <p:txBody>
-            <a:bodyPr lIns="0" tIns="0" rIns="0" bIns="0" rtlCol="0" anchor="ctr"/>
-            <a:lstStyle/>
-            <a:p>
-              <a:pPr algn="ctr"/>
-              <a:endParaRPr kumimoji="1" lang="ja-JP" altLang="en-US" sz="600" dirty="0">
-                <a:solidFill>
-                  <a:schemeClr val="tx1"/>
-                </a:solidFill>
-                <a:latin typeface="UD デジタル 教科書体 NP-R" panose="020B0400000000000000" pitchFamily="18" charset="-128"/>
-                <a:ea typeface="UD デジタル 教科書体 NP-R" panose="020B0400000000000000" pitchFamily="18" charset="-128"/>
-              </a:endParaRPr>
-            </a:p>
-          </p:txBody>
-        </p:sp>
-        <p:sp>
-          <p:nvSpPr>
-            <p:cNvPr id="5" name="四角形: 角を丸くする 4">
-              <a:extLst>
-                <a:ext uri="{FF2B5EF4-FFF2-40B4-BE49-F238E27FC236}">
-                  <a16:creationId xmlns:a16="http://schemas.microsoft.com/office/drawing/2014/main" id="{316C341E-C01A-7285-1C3A-F666EBE28AAC}"/>
-                </a:ext>
-              </a:extLst>
-            </p:cNvPr>
-            <p:cNvSpPr/>
-            <p:nvPr/>
-          </p:nvSpPr>
-          <p:spPr>
-            <a:xfrm>
-              <a:off x="-1" y="5074"/>
-              <a:ext cx="3095625" cy="1939614"/>
-            </a:xfrm>
-            <a:prstGeom prst="roundRect">
-              <a:avLst>
-                <a:gd name="adj" fmla="val 13559"/>
-              </a:avLst>
-            </a:prstGeom>
-            <a:noFill/>
-            <a:ln w="6350">
-              <a:noFill/>
-            </a:ln>
-            <a:effectLst/>
-          </p:spPr>
-          <p:style>
-            <a:lnRef idx="2">
-              <a:schemeClr val="accent1">
-                <a:shade val="15000"/>
-              </a:schemeClr>
-            </a:lnRef>
-            <a:fillRef idx="1">
-              <a:schemeClr val="accent1"/>
-            </a:fillRef>
-            <a:effectRef idx="0">
-              <a:schemeClr val="accent1"/>
-            </a:effectRef>
-            <a:fontRef idx="minor">
-              <a:schemeClr val="lt1"/>
-            </a:fontRef>
-          </p:style>
-          <p:txBody>
-            <a:bodyPr wrap="square" lIns="72000" tIns="36000" rIns="72000" bIns="0" rtlCol="0" anchor="b">
-              <a:noAutofit/>
-            </a:bodyPr>
-            <a:lstStyle/>
-            <a:p>
-              <a:pPr algn="ctr"/>
-              <a:endParaRPr kumimoji="1" lang="ja-JP" altLang="en-US" sz="600" dirty="0">
-                <a:solidFill>
-                  <a:schemeClr val="tx1"/>
-                </a:solidFill>
-                <a:latin typeface="UD デジタル 教科書体 NP-R" panose="02020400000000000000" pitchFamily="18" charset="-128"/>
-                <a:ea typeface="UD デジタル 教科書体 NP-R" panose="02020400000000000000" pitchFamily="18" charset="-128"/>
-              </a:endParaRPr>
-            </a:p>
-          </p:txBody>
-        </p:sp>
-        <p:grpSp>
-          <p:nvGrpSpPr>
-            <p:cNvPr id="3" name="グループ化 2">
-              <a:extLst>
-                <a:ext uri="{FF2B5EF4-FFF2-40B4-BE49-F238E27FC236}">
-                  <a16:creationId xmlns:a16="http://schemas.microsoft.com/office/drawing/2014/main" id="{0299C835-E619-0E9B-19CF-24FBAE73DDC9}"/>
-                </a:ext>
-              </a:extLst>
-            </p:cNvPr>
-            <p:cNvGrpSpPr/>
-            <p:nvPr/>
-          </p:nvGrpSpPr>
-          <p:grpSpPr>
-            <a:xfrm>
-              <a:off x="26424" y="35311"/>
-              <a:ext cx="1781026" cy="1777008"/>
-              <a:chOff x="4761" y="0"/>
-              <a:chExt cx="1944000" cy="1944687"/>
-            </a:xfrm>
-          </p:grpSpPr>
-          <p:sp>
-            <p:nvSpPr>
-              <p:cNvPr id="7" name="四角形: 角を丸くする 6">
-                <a:extLst>
-                  <a:ext uri="{FF2B5EF4-FFF2-40B4-BE49-F238E27FC236}">
-                    <a16:creationId xmlns:a16="http://schemas.microsoft.com/office/drawing/2014/main" id="{14F4DF1B-C8D8-5256-B230-71FFF4EBBC2D}"/>
-                  </a:ext>
-                </a:extLst>
-              </p:cNvPr>
-              <p:cNvSpPr/>
-              <p:nvPr/>
-            </p:nvSpPr>
-            <p:spPr>
-              <a:xfrm>
-                <a:off x="4761" y="0"/>
-                <a:ext cx="1944000" cy="1944687"/>
-              </a:xfrm>
-              <a:prstGeom prst="roundRect">
-                <a:avLst>
-                  <a:gd name="adj" fmla="val 8828"/>
-                </a:avLst>
-              </a:prstGeom>
-              <a:blipFill>
-                <a:blip r:embed="rId2"/>
-                <a:stretch>
-                  <a:fillRect/>
-                </a:stretch>
-              </a:blipFill>
-              <a:ln w="171450">
-                <a:noFill/>
-              </a:ln>
-              <a:effectLst>
-                <a:glow>
-                  <a:schemeClr val="bg1"/>
-                </a:glow>
-                <a:outerShdw dist="12700" sx="1000" sy="1000" algn="ctr" rotWithShape="0">
-                  <a:srgbClr val="000000"/>
-                </a:outerShdw>
-                <a:softEdge rad="127000"/>
-              </a:effectLst>
-            </p:spPr>
-            <p:style>
-              <a:lnRef idx="2">
-                <a:schemeClr val="accent1">
-                  <a:shade val="15000"/>
-                </a:schemeClr>
-              </a:lnRef>
-              <a:fillRef idx="1">
-                <a:schemeClr val="accent1"/>
-              </a:fillRef>
-              <a:effectRef idx="0">
-                <a:schemeClr val="accent1"/>
-              </a:effectRef>
-              <a:fontRef idx="minor">
-                <a:schemeClr val="lt1"/>
-              </a:fontRef>
-            </p:style>
-            <p:txBody>
-              <a:bodyPr rtlCol="0" anchor="ctr"/>
-              <a:lstStyle/>
-              <a:p>
-                <a:pPr algn="ctr"/>
-                <a:endParaRPr lang="ja-JP" altLang="en-US"/>
-              </a:p>
-            </p:txBody>
-          </p:sp>
-          <p:grpSp>
-            <p:nvGrpSpPr>
-              <p:cNvPr id="22" name="グループ化 21">
-                <a:extLst>
-                  <a:ext uri="{FF2B5EF4-FFF2-40B4-BE49-F238E27FC236}">
-                    <a16:creationId xmlns:a16="http://schemas.microsoft.com/office/drawing/2014/main" id="{04696F74-A331-2B37-5140-891CE89AD9A8}"/>
-                  </a:ext>
-                </a:extLst>
-              </p:cNvPr>
-              <p:cNvGrpSpPr/>
-              <p:nvPr/>
-            </p:nvGrpSpPr>
-            <p:grpSpPr>
-              <a:xfrm>
-                <a:off x="311866" y="138682"/>
-                <a:ext cx="1329789" cy="1662236"/>
-                <a:chOff x="324896" y="199586"/>
-                <a:chExt cx="1294896" cy="1618620"/>
-              </a:xfrm>
-            </p:grpSpPr>
-            <p:sp>
-              <p:nvSpPr>
-                <p:cNvPr id="14" name="四角形: 角を丸くする 13">
-                  <a:extLst>
-                    <a:ext uri="{FF2B5EF4-FFF2-40B4-BE49-F238E27FC236}">
-                      <a16:creationId xmlns:a16="http://schemas.microsoft.com/office/drawing/2014/main" id="{02CEC957-440E-84FB-7EB0-44AE3051DD0B}"/>
-                    </a:ext>
-                  </a:extLst>
-                </p:cNvPr>
-                <p:cNvSpPr/>
-                <p:nvPr/>
-              </p:nvSpPr>
-              <p:spPr>
-                <a:xfrm>
-                  <a:off x="324896" y="199586"/>
-                  <a:ext cx="1294896" cy="1618620"/>
-                </a:xfrm>
-                <a:prstGeom prst="roundRect">
-                  <a:avLst>
-                    <a:gd name="adj" fmla="val 17073"/>
-                  </a:avLst>
-                </a:prstGeom>
-                <a:blipFill>
-                  <a:blip r:embed="rId3"/>
-                  <a:stretch>
-                    <a:fillRect/>
-                  </a:stretch>
-                </a:blipFill>
-                <a:ln>
-                  <a:noFill/>
-                </a:ln>
-              </p:spPr>
-              <p:style>
-                <a:lnRef idx="2">
-                  <a:schemeClr val="accent1">
-                    <a:shade val="15000"/>
-                  </a:schemeClr>
-                </a:lnRef>
-                <a:fillRef idx="1">
-                  <a:schemeClr val="accent1"/>
-                </a:fillRef>
-                <a:effectRef idx="0">
-                  <a:schemeClr val="accent1"/>
-                </a:effectRef>
-                <a:fontRef idx="minor">
-                  <a:schemeClr val="lt1"/>
-                </a:fontRef>
-              </p:style>
-              <p:txBody>
-                <a:bodyPr rtlCol="0" anchor="ctr"/>
-                <a:lstStyle/>
-                <a:p>
-                  <a:pPr algn="ctr"/>
-                  <a:endParaRPr kumimoji="1" lang="ja-JP" altLang="en-US"/>
-                </a:p>
-              </p:txBody>
-            </p:sp>
-            <p:pic>
-              <p:nvPicPr>
-                <p:cNvPr id="21" name="図 20" descr="ロゴ が含まれている画像&#10;&#10;AI 生成コンテンツは誤りを含む可能性があります。">
-                  <a:extLst>
-                    <a:ext uri="{FF2B5EF4-FFF2-40B4-BE49-F238E27FC236}">
-                      <a16:creationId xmlns:a16="http://schemas.microsoft.com/office/drawing/2014/main" id="{5CE70F7B-CAB9-CEC5-7EC1-DB47F811DB4B}"/>
-                    </a:ext>
-                  </a:extLst>
-                </p:cNvPr>
-                <p:cNvPicPr>
-                  <a:picLocks noChangeAspect="1"/>
-                </p:cNvPicPr>
-                <p:nvPr/>
-              </p:nvPicPr>
-              <p:blipFill>
-                <a:blip r:embed="rId4">
-                  <a:extLst>
-                    <a:ext uri="{28A0092B-C50C-407E-A947-70E740481C1C}">
-                      <a14:useLocalDpi xmlns:a14="http://schemas.microsoft.com/office/drawing/2010/main" val="0"/>
-                    </a:ext>
-                  </a:extLst>
-                </a:blip>
-                <a:srcRect l="2225" t="9650" r="4370" b="12728"/>
-                <a:stretch>
-                  <a:fillRect/>
-                </a:stretch>
-              </p:blipFill>
-              <p:spPr>
-                <a:xfrm>
-                  <a:off x="471089" y="268171"/>
-                  <a:ext cx="1002507" cy="282809"/>
-                </a:xfrm>
-                <a:prstGeom prst="rect">
-                  <a:avLst/>
-                </a:prstGeom>
-              </p:spPr>
-            </p:pic>
-          </p:grpSp>
-        </p:grpSp>
-        <p:sp>
-          <p:nvSpPr>
-            <p:cNvPr id="31" name="四角形: 角を丸くする 30">
-              <a:extLst>
-                <a:ext uri="{FF2B5EF4-FFF2-40B4-BE49-F238E27FC236}">
-                  <a16:creationId xmlns:a16="http://schemas.microsoft.com/office/drawing/2014/main" id="{7AB0A86A-BA7D-4AE4-6112-6AB89727FAD0}"/>
-                </a:ext>
-              </a:extLst>
-            </p:cNvPr>
-            <p:cNvSpPr/>
-            <p:nvPr/>
-          </p:nvSpPr>
-          <p:spPr>
-            <a:xfrm>
-              <a:off x="1844455" y="255162"/>
-              <a:ext cx="1153343" cy="214457"/>
-            </a:xfrm>
-            <a:prstGeom prst="roundRect">
-              <a:avLst>
-                <a:gd name="adj" fmla="val 6665"/>
-              </a:avLst>
-            </a:prstGeom>
-            <a:noFill/>
-            <a:ln>
-              <a:noFill/>
-            </a:ln>
-          </p:spPr>
-          <p:style>
-            <a:lnRef idx="2">
-              <a:schemeClr val="accent1">
-                <a:shade val="15000"/>
-              </a:schemeClr>
-            </a:lnRef>
-            <a:fillRef idx="1">
-              <a:schemeClr val="accent1"/>
-            </a:fillRef>
-            <a:effectRef idx="0">
-              <a:schemeClr val="accent1"/>
-            </a:effectRef>
-            <a:fontRef idx="minor">
-              <a:schemeClr val="lt1"/>
-            </a:fontRef>
-          </p:style>
-          <p:txBody>
-            <a:bodyPr lIns="0" tIns="0" rIns="0" bIns="0" rtlCol="0" anchor="ctr"/>
-            <a:lstStyle/>
-            <a:p>
-              <a:pPr algn="ctr"/>
-              <a:r>
-                <a:rPr kumimoji="1" lang="zh-TW" altLang="en-US" dirty="0">
-                  <a:solidFill>
-                    <a:schemeClr val="tx1"/>
-                  </a:solidFill>
-                  <a:latin typeface="UD デジタル 教科書体 NP-R" panose="02020400000000000000" pitchFamily="18" charset="-128"/>
-                  <a:ea typeface="UD デジタル 教科書体 NP-R" panose="02020400000000000000" pitchFamily="18" charset="-128"/>
-                </a:rPr>
-                <a:t>「学長煎餅」</a:t>
-              </a:r>
-              <a:endParaRPr kumimoji="1" lang="ja-JP" altLang="en-US" sz="800" dirty="0">
-                <a:solidFill>
-                  <a:schemeClr val="tx1"/>
-                </a:solidFill>
-                <a:latin typeface="UD デジタル 教科書体 NP-R" panose="02020400000000000000" pitchFamily="18" charset="-128"/>
-                <a:ea typeface="UD デジタル 教科書体 NP-R" panose="02020400000000000000" pitchFamily="18" charset="-128"/>
-              </a:endParaRPr>
-            </a:p>
-          </p:txBody>
-        </p:sp>
-        <p:sp>
-          <p:nvSpPr>
-            <p:cNvPr id="4" name="四角形: 角を丸くする 3">
-              <a:extLst>
-                <a:ext uri="{FF2B5EF4-FFF2-40B4-BE49-F238E27FC236}">
-                  <a16:creationId xmlns:a16="http://schemas.microsoft.com/office/drawing/2014/main" id="{ABF84064-9FFE-A3EC-898C-56EEEE684D62}"/>
-                </a:ext>
-              </a:extLst>
-            </p:cNvPr>
-            <p:cNvSpPr/>
-            <p:nvPr/>
-          </p:nvSpPr>
-          <p:spPr>
-            <a:xfrm>
-              <a:off x="215106" y="1793322"/>
-              <a:ext cx="2654348" cy="120703"/>
-            </a:xfrm>
-            <a:prstGeom prst="roundRect">
-              <a:avLst>
-                <a:gd name="adj" fmla="val 6665"/>
-              </a:avLst>
-            </a:prstGeom>
-            <a:noFill/>
-            <a:ln>
-              <a:noFill/>
-            </a:ln>
-          </p:spPr>
-          <p:style>
-            <a:lnRef idx="2">
-              <a:schemeClr val="accent1">
-                <a:shade val="15000"/>
-              </a:schemeClr>
-            </a:lnRef>
-            <a:fillRef idx="1">
-              <a:schemeClr val="accent1"/>
-            </a:fillRef>
-            <a:effectRef idx="0">
-              <a:schemeClr val="accent1"/>
-            </a:effectRef>
-            <a:fontRef idx="minor">
-              <a:schemeClr val="lt1"/>
-            </a:fontRef>
-          </p:style>
-          <p:txBody>
-            <a:bodyPr lIns="0" tIns="0" rIns="0" bIns="0" rtlCol="0" anchor="ctr"/>
-            <a:lstStyle/>
-            <a:p>
-              <a:r>
-                <a:rPr kumimoji="1" lang="ja-JP" altLang="en-US" sz="600" dirty="0">
-                  <a:solidFill>
-                    <a:schemeClr val="tx1"/>
-                  </a:solidFill>
-                  <a:latin typeface="UD デジタル 教科書体 NP-R" panose="020B0400000000000000" pitchFamily="18" charset="-128"/>
-                  <a:ea typeface="UD デジタル 教科書体 NP-R" panose="020B0400000000000000" pitchFamily="18" charset="-128"/>
-                </a:rPr>
-                <a:t>とけない、われない、かさばらない！　カードで送る新習慣＠名刺代わりに</a:t>
-              </a:r>
-            </a:p>
-          </p:txBody>
-        </p:sp>
-        <p:sp>
-          <p:nvSpPr>
-            <p:cNvPr id="10" name="四角形: 角を丸くする 9">
-              <a:extLst>
-                <a:ext uri="{FF2B5EF4-FFF2-40B4-BE49-F238E27FC236}">
-                  <a16:creationId xmlns:a16="http://schemas.microsoft.com/office/drawing/2014/main" id="{7310735D-090A-8E81-988A-CAB629D05BD6}"/>
-                </a:ext>
-              </a:extLst>
-            </p:cNvPr>
-            <p:cNvSpPr/>
-            <p:nvPr/>
-          </p:nvSpPr>
-          <p:spPr>
-            <a:xfrm>
-              <a:off x="1927110" y="71103"/>
-              <a:ext cx="988031" cy="181522"/>
-            </a:xfrm>
-            <a:prstGeom prst="roundRect">
-              <a:avLst>
-                <a:gd name="adj" fmla="val 6665"/>
-              </a:avLst>
-            </a:prstGeom>
-            <a:noFill/>
-            <a:ln>
-              <a:noFill/>
-            </a:ln>
-          </p:spPr>
-          <p:style>
-            <a:lnRef idx="2">
-              <a:schemeClr val="accent1">
-                <a:shade val="15000"/>
-              </a:schemeClr>
-            </a:lnRef>
-            <a:fillRef idx="1">
-              <a:schemeClr val="accent1"/>
-            </a:fillRef>
-            <a:effectRef idx="0">
-              <a:schemeClr val="accent1"/>
-            </a:effectRef>
-            <a:fontRef idx="minor">
-              <a:schemeClr val="lt1"/>
-            </a:fontRef>
-          </p:style>
-          <p:txBody>
-            <a:bodyPr lIns="0" tIns="0" rIns="0" bIns="0" rtlCol="0" anchor="ctr"/>
-            <a:lstStyle/>
-            <a:p>
-              <a:pPr algn="ctr"/>
-              <a:r>
-                <a:rPr kumimoji="1" lang="ja-JP" altLang="en-US" sz="800" dirty="0">
-                  <a:solidFill>
-                    <a:schemeClr val="tx1"/>
-                  </a:solidFill>
-                  <a:latin typeface="UD デジタル 教科書体 NP-R" panose="02020400000000000000" pitchFamily="18" charset="-128"/>
-                  <a:ea typeface="UD デジタル 教科書体 NP-R" panose="02020400000000000000" pitchFamily="18" charset="-128"/>
-                </a:rPr>
-                <a:t>秋田大学オリジナル</a:t>
-              </a:r>
-              <a:endParaRPr kumimoji="1" lang="en-US" altLang="ja-JP" sz="800" dirty="0">
-                <a:solidFill>
-                  <a:schemeClr val="tx1"/>
-                </a:solidFill>
-                <a:latin typeface="UD デジタル 教科書体 NP-R" panose="02020400000000000000" pitchFamily="18" charset="-128"/>
-                <a:ea typeface="UD デジタル 教科書体 NP-R" panose="02020400000000000000" pitchFamily="18" charset="-128"/>
-              </a:endParaRPr>
-            </a:p>
-          </p:txBody>
-        </p:sp>
-      </p:grpSp>
-    </p:spTree>
-    <p:extLst>
-      <p:ext uri="{BB962C8B-B14F-4D97-AF65-F5344CB8AC3E}">
-        <p14:creationId xmlns:p14="http://schemas.microsoft.com/office/powerpoint/2010/main" val="919064164"/>
-      </p:ext>
-    </p:extLst>
-  </p:cSld>
-  <p:clrMapOvr>
-    <a:masterClrMapping/>
-  </p:clrMapOvr>
-</p:sld>
-</file>
-
-<file path=ppt/slides/slide4.xml><?xml version="1.0" encoding="utf-8"?>
-<p:sld xmlns:a="http://schemas.openxmlformats.org/drawingml/2006/main" xmlns:r="http://schemas.openxmlformats.org/officeDocument/2006/relationships" xmlns:p="http://schemas.openxmlformats.org/presentationml/2006/main">
-  <p:cSld>
-    <p:spTree>
-      <p:nvGrpSpPr>
-        <p:cNvPr id="1" name="">
-          <a:extLst>
-            <a:ext uri="{FF2B5EF4-FFF2-40B4-BE49-F238E27FC236}">
-              <a16:creationId xmlns:a16="http://schemas.microsoft.com/office/drawing/2014/main" id="{5C5B5512-A93A-6B0A-EE8B-B56E0F433497}"/>
-            </a:ext>
-          </a:extLst>
-        </p:cNvPr>
-        <p:cNvGrpSpPr/>
-        <p:nvPr/>
-      </p:nvGrpSpPr>
-      <p:grpSpPr>
-        <a:xfrm>
-          <a:off x="0" y="0"/>
-          <a:ext cx="0" cy="0"/>
-          <a:chOff x="0" y="0"/>
-          <a:chExt cx="0" cy="0"/>
-        </a:xfrm>
-      </p:grpSpPr>
-      <p:grpSp>
-        <p:nvGrpSpPr>
-          <p:cNvPr id="8" name="グループ化 7">
-            <a:extLst>
-              <a:ext uri="{FF2B5EF4-FFF2-40B4-BE49-F238E27FC236}">
-                <a16:creationId xmlns:a16="http://schemas.microsoft.com/office/drawing/2014/main" id="{ADF00FFF-5672-D4A7-D620-7CE98888221C}"/>
-              </a:ext>
-            </a:extLst>
-          </p:cNvPr>
-          <p:cNvGrpSpPr/>
-          <p:nvPr/>
-        </p:nvGrpSpPr>
-        <p:grpSpPr>
-          <a:xfrm>
-            <a:off x="-2" y="-1"/>
-            <a:ext cx="3095626" cy="1944689"/>
-            <a:chOff x="-2" y="-1"/>
-            <a:chExt cx="3095626" cy="1944689"/>
-          </a:xfrm>
-        </p:grpSpPr>
-        <p:sp>
-          <p:nvSpPr>
-            <p:cNvPr id="2" name="四角形: 角を丸くする 1">
-              <a:extLst>
-                <a:ext uri="{FF2B5EF4-FFF2-40B4-BE49-F238E27FC236}">
-                  <a16:creationId xmlns:a16="http://schemas.microsoft.com/office/drawing/2014/main" id="{877936A4-1A8C-BB39-81CA-EEB8495154E2}"/>
-                </a:ext>
-              </a:extLst>
-            </p:cNvPr>
-            <p:cNvSpPr/>
-            <p:nvPr/>
-          </p:nvSpPr>
-          <p:spPr>
-            <a:xfrm>
-              <a:off x="-2" y="-1"/>
-              <a:ext cx="3095625" cy="1944687"/>
-            </a:xfrm>
-            <a:prstGeom prst="roundRect">
-              <a:avLst>
-                <a:gd name="adj" fmla="val 0"/>
-              </a:avLst>
-            </a:prstGeom>
-            <a:solidFill>
-              <a:schemeClr val="bg1"/>
-            </a:solidFill>
-            <a:ln>
-              <a:noFill/>
-            </a:ln>
-          </p:spPr>
-          <p:style>
-            <a:lnRef idx="2">
-              <a:schemeClr val="accent1">
-                <a:shade val="15000"/>
-              </a:schemeClr>
-            </a:lnRef>
-            <a:fillRef idx="1">
-              <a:schemeClr val="accent1"/>
-            </a:fillRef>
-            <a:effectRef idx="0">
-              <a:schemeClr val="accent1"/>
-            </a:effectRef>
-            <a:fontRef idx="minor">
-              <a:schemeClr val="lt1"/>
-            </a:fontRef>
-          </p:style>
-          <p:txBody>
-            <a:bodyPr lIns="0" tIns="0" rIns="0" bIns="0" rtlCol="0" anchor="ctr"/>
-            <a:lstStyle/>
-            <a:p>
-              <a:pPr algn="ctr"/>
-              <a:endParaRPr kumimoji="1" lang="ja-JP" altLang="en-US" sz="600" dirty="0">
-                <a:solidFill>
-                  <a:schemeClr val="tx1"/>
-                </a:solidFill>
-                <a:latin typeface="UD デジタル 教科書体 NP-R" panose="020B0400000000000000" pitchFamily="18" charset="-128"/>
-                <a:ea typeface="UD デジタル 教科書体 NP-R" panose="020B0400000000000000" pitchFamily="18" charset="-128"/>
-              </a:endParaRPr>
-            </a:p>
-          </p:txBody>
-        </p:sp>
-        <p:sp>
-          <p:nvSpPr>
-            <p:cNvPr id="5" name="四角形: 角を丸くする 4">
-              <a:extLst>
-                <a:ext uri="{FF2B5EF4-FFF2-40B4-BE49-F238E27FC236}">
-                  <a16:creationId xmlns:a16="http://schemas.microsoft.com/office/drawing/2014/main" id="{72E56F5D-4736-8892-9F2C-FD45ACB90B4E}"/>
-                </a:ext>
-              </a:extLst>
-            </p:cNvPr>
-            <p:cNvSpPr/>
-            <p:nvPr/>
-          </p:nvSpPr>
-          <p:spPr>
-            <a:xfrm>
-              <a:off x="-1" y="5074"/>
-              <a:ext cx="3095625" cy="1939614"/>
-            </a:xfrm>
-            <a:prstGeom prst="roundRect">
-              <a:avLst>
-                <a:gd name="adj" fmla="val 13559"/>
-              </a:avLst>
-            </a:prstGeom>
-            <a:noFill/>
-            <a:ln w="6350">
-              <a:noFill/>
-            </a:ln>
-            <a:effectLst/>
-          </p:spPr>
-          <p:style>
-            <a:lnRef idx="2">
-              <a:schemeClr val="accent1">
-                <a:shade val="15000"/>
-              </a:schemeClr>
-            </a:lnRef>
-            <a:fillRef idx="1">
-              <a:schemeClr val="accent1"/>
-            </a:fillRef>
-            <a:effectRef idx="0">
-              <a:schemeClr val="accent1"/>
-            </a:effectRef>
-            <a:fontRef idx="minor">
-              <a:schemeClr val="lt1"/>
-            </a:fontRef>
-          </p:style>
-          <p:txBody>
-            <a:bodyPr wrap="square" lIns="72000" tIns="36000" rIns="72000" bIns="0" rtlCol="0" anchor="b">
-              <a:noAutofit/>
-            </a:bodyPr>
-            <a:lstStyle/>
-            <a:p>
-              <a:pPr algn="ctr"/>
-              <a:endParaRPr kumimoji="1" lang="ja-JP" altLang="en-US" sz="600" dirty="0">
-                <a:solidFill>
-                  <a:schemeClr val="tx1"/>
-                </a:solidFill>
-                <a:latin typeface="UD デジタル 教科書体 NP-R" panose="02020400000000000000" pitchFamily="18" charset="-128"/>
-                <a:ea typeface="UD デジタル 教科書体 NP-R" panose="02020400000000000000" pitchFamily="18" charset="-128"/>
-              </a:endParaRPr>
-            </a:p>
-          </p:txBody>
-        </p:sp>
-        <p:grpSp>
-          <p:nvGrpSpPr>
-            <p:cNvPr id="3" name="グループ化 2">
-              <a:extLst>
-                <a:ext uri="{FF2B5EF4-FFF2-40B4-BE49-F238E27FC236}">
-                  <a16:creationId xmlns:a16="http://schemas.microsoft.com/office/drawing/2014/main" id="{B76D47E6-5009-D327-0A66-FE2FA6E462DB}"/>
-                </a:ext>
-              </a:extLst>
-            </p:cNvPr>
-            <p:cNvGrpSpPr/>
-            <p:nvPr/>
-          </p:nvGrpSpPr>
-          <p:grpSpPr>
-            <a:xfrm>
-              <a:off x="26424" y="35311"/>
-              <a:ext cx="1781026" cy="1777008"/>
-              <a:chOff x="4761" y="0"/>
-              <a:chExt cx="1944000" cy="1944687"/>
-            </a:xfrm>
-          </p:grpSpPr>
-          <p:sp>
-            <p:nvSpPr>
-              <p:cNvPr id="7" name="四角形: 角を丸くする 6">
-                <a:extLst>
-                  <a:ext uri="{FF2B5EF4-FFF2-40B4-BE49-F238E27FC236}">
-                    <a16:creationId xmlns:a16="http://schemas.microsoft.com/office/drawing/2014/main" id="{495F4327-D759-E9F8-ECE5-8BFDEE1172AD}"/>
-                  </a:ext>
-                </a:extLst>
-              </p:cNvPr>
-              <p:cNvSpPr/>
-              <p:nvPr/>
-            </p:nvSpPr>
-            <p:spPr>
-              <a:xfrm>
-                <a:off x="4761" y="0"/>
-                <a:ext cx="1944000" cy="1944687"/>
-              </a:xfrm>
-              <a:prstGeom prst="roundRect">
-                <a:avLst>
-                  <a:gd name="adj" fmla="val 8828"/>
-                </a:avLst>
-              </a:prstGeom>
-              <a:blipFill>
-                <a:blip r:embed="rId2"/>
-                <a:stretch>
-                  <a:fillRect/>
-                </a:stretch>
-              </a:blipFill>
-              <a:ln w="171450">
-                <a:noFill/>
-              </a:ln>
-              <a:effectLst>
-                <a:glow>
-                  <a:schemeClr val="bg1"/>
-                </a:glow>
-                <a:outerShdw dist="12700" sx="1000" sy="1000" algn="ctr" rotWithShape="0">
-                  <a:srgbClr val="000000"/>
-                </a:outerShdw>
-                <a:softEdge rad="127000"/>
-              </a:effectLst>
-            </p:spPr>
-            <p:style>
-              <a:lnRef idx="2">
-                <a:schemeClr val="accent1">
-                  <a:shade val="15000"/>
-                </a:schemeClr>
-              </a:lnRef>
-              <a:fillRef idx="1">
-                <a:schemeClr val="accent1"/>
-              </a:fillRef>
-              <a:effectRef idx="0">
-                <a:schemeClr val="accent1"/>
-              </a:effectRef>
-              <a:fontRef idx="minor">
-                <a:schemeClr val="lt1"/>
-              </a:fontRef>
-            </p:style>
-            <p:txBody>
-              <a:bodyPr rtlCol="0" anchor="ctr"/>
-              <a:lstStyle/>
-              <a:p>
-                <a:pPr algn="ctr"/>
-                <a:endParaRPr lang="ja-JP" altLang="en-US"/>
-              </a:p>
-            </p:txBody>
-          </p:sp>
-          <p:grpSp>
-            <p:nvGrpSpPr>
-              <p:cNvPr id="22" name="グループ化 21">
-                <a:extLst>
-                  <a:ext uri="{FF2B5EF4-FFF2-40B4-BE49-F238E27FC236}">
-                    <a16:creationId xmlns:a16="http://schemas.microsoft.com/office/drawing/2014/main" id="{7B78C10D-215F-9FBA-C926-D463E81B77A8}"/>
-                  </a:ext>
-                </a:extLst>
-              </p:cNvPr>
-              <p:cNvGrpSpPr/>
-              <p:nvPr/>
-            </p:nvGrpSpPr>
-            <p:grpSpPr>
-              <a:xfrm>
-                <a:off x="311866" y="138682"/>
-                <a:ext cx="1329789" cy="1662236"/>
-                <a:chOff x="324896" y="199586"/>
-                <a:chExt cx="1294896" cy="1618620"/>
-              </a:xfrm>
-            </p:grpSpPr>
-            <p:sp>
-              <p:nvSpPr>
-                <p:cNvPr id="14" name="四角形: 角を丸くする 13">
-                  <a:extLst>
-                    <a:ext uri="{FF2B5EF4-FFF2-40B4-BE49-F238E27FC236}">
-                      <a16:creationId xmlns:a16="http://schemas.microsoft.com/office/drawing/2014/main" id="{7BE49C65-35FB-CCB8-3EF8-A7682257E5D4}"/>
-                    </a:ext>
-                  </a:extLst>
-                </p:cNvPr>
-                <p:cNvSpPr/>
-                <p:nvPr/>
-              </p:nvSpPr>
-              <p:spPr>
-                <a:xfrm>
-                  <a:off x="324896" y="199586"/>
-                  <a:ext cx="1294896" cy="1618620"/>
-                </a:xfrm>
-                <a:prstGeom prst="roundRect">
-                  <a:avLst>
-                    <a:gd name="adj" fmla="val 17073"/>
-                  </a:avLst>
-                </a:prstGeom>
-                <a:blipFill>
-                  <a:blip r:embed="rId3"/>
-                  <a:stretch>
-                    <a:fillRect/>
-                  </a:stretch>
-                </a:blipFill>
-                <a:ln>
-                  <a:noFill/>
-                </a:ln>
-              </p:spPr>
-              <p:style>
-                <a:lnRef idx="2">
-                  <a:schemeClr val="accent1">
-                    <a:shade val="15000"/>
-                  </a:schemeClr>
-                </a:lnRef>
-                <a:fillRef idx="1">
-                  <a:schemeClr val="accent1"/>
-                </a:fillRef>
-                <a:effectRef idx="0">
-                  <a:schemeClr val="accent1"/>
-                </a:effectRef>
-                <a:fontRef idx="minor">
-                  <a:schemeClr val="lt1"/>
-                </a:fontRef>
-              </p:style>
-              <p:txBody>
-                <a:bodyPr rtlCol="0" anchor="ctr"/>
-                <a:lstStyle/>
-                <a:p>
-                  <a:pPr algn="ctr"/>
-                  <a:endParaRPr kumimoji="1" lang="ja-JP" altLang="en-US"/>
-                </a:p>
-              </p:txBody>
-            </p:sp>
-            <p:pic>
-              <p:nvPicPr>
-                <p:cNvPr id="21" name="図 20" descr="ロゴ が含まれている画像&#10;&#10;AI 生成コンテンツは誤りを含む可能性があります。">
-                  <a:extLst>
-                    <a:ext uri="{FF2B5EF4-FFF2-40B4-BE49-F238E27FC236}">
-                      <a16:creationId xmlns:a16="http://schemas.microsoft.com/office/drawing/2014/main" id="{BF4EF96B-A979-DBDB-838B-690F07AFC21C}"/>
-                    </a:ext>
-                  </a:extLst>
-                </p:cNvPr>
-                <p:cNvPicPr>
-                  <a:picLocks noChangeAspect="1"/>
-                </p:cNvPicPr>
-                <p:nvPr/>
-              </p:nvPicPr>
-              <p:blipFill>
-                <a:blip r:embed="rId4">
-                  <a:extLst>
-                    <a:ext uri="{28A0092B-C50C-407E-A947-70E740481C1C}">
-                      <a14:useLocalDpi xmlns:a14="http://schemas.microsoft.com/office/drawing/2010/main" val="0"/>
-                    </a:ext>
-                  </a:extLst>
-                </a:blip>
-                <a:srcRect l="2225" t="9650" r="4370" b="12728"/>
-                <a:stretch>
-                  <a:fillRect/>
-                </a:stretch>
-              </p:blipFill>
-              <p:spPr>
-                <a:xfrm>
-                  <a:off x="471089" y="268171"/>
-                  <a:ext cx="1002507" cy="282809"/>
-                </a:xfrm>
-                <a:prstGeom prst="rect">
-                  <a:avLst/>
-                </a:prstGeom>
-              </p:spPr>
-            </p:pic>
-          </p:grpSp>
-        </p:grpSp>
-        <p:sp>
-          <p:nvSpPr>
-            <p:cNvPr id="31" name="四角形: 角を丸くする 30">
-              <a:extLst>
-                <a:ext uri="{FF2B5EF4-FFF2-40B4-BE49-F238E27FC236}">
-                  <a16:creationId xmlns:a16="http://schemas.microsoft.com/office/drawing/2014/main" id="{8AE70B54-09DF-0940-4AD7-13021B06A3DA}"/>
-                </a:ext>
-              </a:extLst>
-            </p:cNvPr>
-            <p:cNvSpPr/>
-            <p:nvPr/>
-          </p:nvSpPr>
-          <p:spPr>
-            <a:xfrm>
-              <a:off x="1859247" y="88439"/>
-              <a:ext cx="1153343" cy="438956"/>
-            </a:xfrm>
-            <a:prstGeom prst="roundRect">
-              <a:avLst>
-                <a:gd name="adj" fmla="val 6665"/>
-              </a:avLst>
-            </a:prstGeom>
-            <a:noFill/>
-            <a:ln>
-              <a:noFill/>
-            </a:ln>
-          </p:spPr>
-          <p:style>
-            <a:lnRef idx="2">
-              <a:schemeClr val="accent1">
-                <a:shade val="15000"/>
-              </a:schemeClr>
-            </a:lnRef>
-            <a:fillRef idx="1">
-              <a:schemeClr val="accent1"/>
-            </a:fillRef>
-            <a:effectRef idx="0">
-              <a:schemeClr val="accent1"/>
-            </a:effectRef>
-            <a:fontRef idx="minor">
-              <a:schemeClr val="lt1"/>
-            </a:fontRef>
-          </p:style>
-          <p:txBody>
-            <a:bodyPr lIns="0" tIns="0" rIns="0" bIns="0" rtlCol="0" anchor="ctr"/>
-            <a:lstStyle/>
-            <a:p>
-              <a:pPr algn="ctr"/>
-              <a:r>
-                <a:rPr kumimoji="1" lang="ja-JP" altLang="en-US" sz="1600" dirty="0">
-                  <a:solidFill>
-                    <a:schemeClr val="tx1"/>
-                  </a:solidFill>
-                  <a:latin typeface="UD デジタル 教科書体 NP-R" panose="02020400000000000000" pitchFamily="18" charset="-128"/>
-                  <a:ea typeface="UD デジタル 教科書体 NP-R" panose="02020400000000000000" pitchFamily="18" charset="-128"/>
-                </a:rPr>
-                <a:t>ありがとう</a:t>
-              </a:r>
-              <a:endParaRPr kumimoji="1" lang="ja-JP" altLang="en-US" sz="700" dirty="0">
-                <a:solidFill>
-                  <a:schemeClr val="tx1"/>
-                </a:solidFill>
-                <a:latin typeface="UD デジタル 教科書体 NP-R" panose="02020400000000000000" pitchFamily="18" charset="-128"/>
-                <a:ea typeface="UD デジタル 教科書体 NP-R" panose="02020400000000000000" pitchFamily="18" charset="-128"/>
-              </a:endParaRPr>
-            </a:p>
-          </p:txBody>
-        </p:sp>
-        <p:sp>
-          <p:nvSpPr>
-            <p:cNvPr id="4" name="四角形: 角を丸くする 3">
-              <a:extLst>
-                <a:ext uri="{FF2B5EF4-FFF2-40B4-BE49-F238E27FC236}">
-                  <a16:creationId xmlns:a16="http://schemas.microsoft.com/office/drawing/2014/main" id="{857DE5B7-BD2A-0FE2-72E4-3593114B38A0}"/>
-                </a:ext>
-              </a:extLst>
-            </p:cNvPr>
-            <p:cNvSpPr/>
-            <p:nvPr/>
-          </p:nvSpPr>
-          <p:spPr>
-            <a:xfrm>
-              <a:off x="215106" y="1793322"/>
-              <a:ext cx="2654348" cy="120703"/>
-            </a:xfrm>
-            <a:prstGeom prst="roundRect">
-              <a:avLst>
-                <a:gd name="adj" fmla="val 6665"/>
-              </a:avLst>
-            </a:prstGeom>
-            <a:noFill/>
-            <a:ln>
-              <a:noFill/>
-            </a:ln>
-          </p:spPr>
-          <p:style>
-            <a:lnRef idx="2">
-              <a:schemeClr val="accent1">
-                <a:shade val="15000"/>
-              </a:schemeClr>
-            </a:lnRef>
-            <a:fillRef idx="1">
-              <a:schemeClr val="accent1"/>
-            </a:fillRef>
-            <a:effectRef idx="0">
-              <a:schemeClr val="accent1"/>
-            </a:effectRef>
-            <a:fontRef idx="minor">
-              <a:schemeClr val="lt1"/>
-            </a:fontRef>
-          </p:style>
-          <p:txBody>
-            <a:bodyPr lIns="0" tIns="0" rIns="0" bIns="0" rtlCol="0" anchor="ctr"/>
-            <a:lstStyle/>
-            <a:p>
-              <a:r>
-                <a:rPr kumimoji="1" lang="ja-JP" altLang="en-US" sz="600" dirty="0">
-                  <a:solidFill>
-                    <a:schemeClr val="tx1"/>
-                  </a:solidFill>
-                  <a:latin typeface="UD デジタル 教科書体 NP-R" panose="020B0400000000000000" pitchFamily="18" charset="-128"/>
-                  <a:ea typeface="UD デジタル 教科書体 NP-R" panose="020B0400000000000000" pitchFamily="18" charset="-128"/>
-                </a:rPr>
-                <a:t>とけない、われない、かさばらない！　カードで送る新習慣＠名刺代わりに</a:t>
-              </a:r>
-            </a:p>
-          </p:txBody>
-        </p:sp>
-      </p:grpSp>
-    </p:spTree>
-    <p:extLst>
-      <p:ext uri="{BB962C8B-B14F-4D97-AF65-F5344CB8AC3E}">
-        <p14:creationId xmlns:p14="http://schemas.microsoft.com/office/powerpoint/2010/main" val="2671339504"/>
-      </p:ext>
-    </p:extLst>
-  </p:cSld>
-  <p:clrMapOvr>
-    <a:masterClrMapping/>
-  </p:clrMapOvr>
-</p:sld>
-</file>
-
-<file path=ppt/slides/slide5.xml><?xml version="1.0" encoding="utf-8"?>
-<p:sld xmlns:a="http://schemas.openxmlformats.org/drawingml/2006/main" xmlns:r="http://schemas.openxmlformats.org/officeDocument/2006/relationships" xmlns:p="http://schemas.openxmlformats.org/presentationml/2006/main">
-  <p:cSld>
-    <p:spTree>
-      <p:nvGrpSpPr>
-        <p:cNvPr id="1" name="">
-          <a:extLst>
-            <a:ext uri="{FF2B5EF4-FFF2-40B4-BE49-F238E27FC236}">
-              <a16:creationId xmlns:a16="http://schemas.microsoft.com/office/drawing/2014/main" id="{C0355DED-CAFD-3E98-07AB-448B244006B7}"/>
-            </a:ext>
-          </a:extLst>
-        </p:cNvPr>
-        <p:cNvGrpSpPr/>
-        <p:nvPr/>
-      </p:nvGrpSpPr>
-      <p:grpSpPr>
-        <a:xfrm>
-          <a:off x="0" y="0"/>
-          <a:ext cx="0" cy="0"/>
-          <a:chOff x="0" y="0"/>
-          <a:chExt cx="0" cy="0"/>
-        </a:xfrm>
-      </p:grpSpPr>
-      <p:grpSp>
-        <p:nvGrpSpPr>
-          <p:cNvPr id="4" name="グループ化 3">
-            <a:extLst>
-              <a:ext uri="{FF2B5EF4-FFF2-40B4-BE49-F238E27FC236}">
-                <a16:creationId xmlns:a16="http://schemas.microsoft.com/office/drawing/2014/main" id="{FDB7CA2F-1E3D-07DC-48B5-6FDB8A46CF35}"/>
-              </a:ext>
-            </a:extLst>
-          </p:cNvPr>
-          <p:cNvGrpSpPr/>
-          <p:nvPr/>
-        </p:nvGrpSpPr>
-        <p:grpSpPr>
-          <a:xfrm>
-            <a:off x="-1" y="-5087"/>
-            <a:ext cx="3095625" cy="1949775"/>
-            <a:chOff x="-1" y="-5087"/>
-            <a:chExt cx="3095625" cy="1949775"/>
-          </a:xfrm>
-        </p:grpSpPr>
-        <p:sp>
-          <p:nvSpPr>
-            <p:cNvPr id="6" name="四角形: 角を丸くする 5">
-              <a:extLst>
-                <a:ext uri="{FF2B5EF4-FFF2-40B4-BE49-F238E27FC236}">
-                  <a16:creationId xmlns:a16="http://schemas.microsoft.com/office/drawing/2014/main" id="{22EDC73F-1956-395D-55F3-2AA471C22835}"/>
-                </a:ext>
-              </a:extLst>
-            </p:cNvPr>
-            <p:cNvSpPr/>
-            <p:nvPr/>
-          </p:nvSpPr>
-          <p:spPr>
-            <a:xfrm>
-              <a:off x="-1" y="-5087"/>
-              <a:ext cx="3095625" cy="1949774"/>
-            </a:xfrm>
-            <a:prstGeom prst="roundRect">
-              <a:avLst>
-                <a:gd name="adj" fmla="val 0"/>
-              </a:avLst>
-            </a:prstGeom>
-            <a:solidFill>
-              <a:schemeClr val="bg1"/>
-            </a:solidFill>
-            <a:ln>
-              <a:noFill/>
-            </a:ln>
-          </p:spPr>
-          <p:style>
-            <a:lnRef idx="2">
-              <a:schemeClr val="accent1">
-                <a:shade val="15000"/>
-              </a:schemeClr>
-            </a:lnRef>
-            <a:fillRef idx="1">
-              <a:schemeClr val="accent1"/>
-            </a:fillRef>
-            <a:effectRef idx="0">
-              <a:schemeClr val="accent1"/>
-            </a:effectRef>
-            <a:fontRef idx="minor">
-              <a:schemeClr val="lt1"/>
-            </a:fontRef>
-          </p:style>
-          <p:txBody>
-            <a:bodyPr lIns="0" tIns="0" rIns="0" bIns="0" rtlCol="0" anchor="ctr"/>
-            <a:lstStyle/>
-            <a:p>
-              <a:pPr algn="ctr"/>
-              <a:endParaRPr kumimoji="1" lang="ja-JP" altLang="en-US" sz="600" dirty="0">
-                <a:solidFill>
-                  <a:schemeClr val="tx1"/>
-                </a:solidFill>
-                <a:latin typeface="UD デジタル 教科書体 NP-R" panose="020B0400000000000000" pitchFamily="18" charset="-128"/>
-                <a:ea typeface="UD デジタル 教科書体 NP-R" panose="020B0400000000000000" pitchFamily="18" charset="-128"/>
-              </a:endParaRPr>
-            </a:p>
-          </p:txBody>
-        </p:sp>
-        <p:sp>
-          <p:nvSpPr>
-            <p:cNvPr id="27" name="四角形: 角を丸くする 26">
-              <a:extLst>
-                <a:ext uri="{FF2B5EF4-FFF2-40B4-BE49-F238E27FC236}">
-                  <a16:creationId xmlns:a16="http://schemas.microsoft.com/office/drawing/2014/main" id="{4AF81FA0-9EF1-F3E5-8CFE-68209C71F9F5}"/>
-                </a:ext>
-              </a:extLst>
-            </p:cNvPr>
-            <p:cNvSpPr/>
-            <p:nvPr/>
-          </p:nvSpPr>
-          <p:spPr>
-            <a:xfrm>
-              <a:off x="-1" y="0"/>
-              <a:ext cx="3095625" cy="1944688"/>
-            </a:xfrm>
-            <a:prstGeom prst="roundRect">
-              <a:avLst>
-                <a:gd name="adj" fmla="val 13559"/>
-              </a:avLst>
-            </a:prstGeom>
-            <a:noFill/>
-            <a:ln w="6350">
-              <a:noFill/>
-            </a:ln>
-            <a:effectLst/>
-          </p:spPr>
-          <p:style>
-            <a:lnRef idx="2">
-              <a:schemeClr val="accent1">
-                <a:shade val="15000"/>
-              </a:schemeClr>
-            </a:lnRef>
-            <a:fillRef idx="1">
-              <a:schemeClr val="accent1"/>
-            </a:fillRef>
-            <a:effectRef idx="0">
-              <a:schemeClr val="accent1"/>
-            </a:effectRef>
-            <a:fontRef idx="minor">
-              <a:schemeClr val="lt1"/>
-            </a:fontRef>
-          </p:style>
-          <p:txBody>
-            <a:bodyPr wrap="square" lIns="72000" tIns="36000" rIns="72000" bIns="0" rtlCol="0" anchor="b">
-              <a:noAutofit/>
-            </a:bodyPr>
-            <a:lstStyle/>
-            <a:p>
-              <a:pPr algn="ctr"/>
-              <a:endParaRPr kumimoji="1" lang="ja-JP" altLang="en-US" sz="600" dirty="0">
-                <a:solidFill>
-                  <a:schemeClr val="tx1"/>
-                </a:solidFill>
-                <a:latin typeface="UD デジタル 教科書体 NP-R" panose="02020400000000000000" pitchFamily="18" charset="-128"/>
-                <a:ea typeface="UD デジタル 教科書体 NP-R" panose="02020400000000000000" pitchFamily="18" charset="-128"/>
-              </a:endParaRPr>
-            </a:p>
-          </p:txBody>
-        </p:sp>
-        <p:sp>
-          <p:nvSpPr>
-            <p:cNvPr id="9" name="四角形: 角を丸くする 8">
-              <a:extLst>
-                <a:ext uri="{FF2B5EF4-FFF2-40B4-BE49-F238E27FC236}">
-                  <a16:creationId xmlns:a16="http://schemas.microsoft.com/office/drawing/2014/main" id="{A163BE45-48CE-105B-903F-D6923EA3AC7F}"/>
-                </a:ext>
-              </a:extLst>
-            </p:cNvPr>
-            <p:cNvSpPr/>
-            <p:nvPr/>
-          </p:nvSpPr>
-          <p:spPr>
-            <a:xfrm>
-              <a:off x="52384" y="86414"/>
-              <a:ext cx="2990852" cy="1165609"/>
-            </a:xfrm>
-            <a:prstGeom prst="roundRect">
-              <a:avLst>
-                <a:gd name="adj" fmla="val 14805"/>
-              </a:avLst>
-            </a:prstGeom>
-            <a:blipFill dpi="0" rotWithShape="1">
-              <a:blip r:embed="rId2"/>
-              <a:srcRect/>
-              <a:stretch>
-                <a:fillRect/>
-              </a:stretch>
-            </a:blipFill>
-            <a:ln w="171450">
-              <a:noFill/>
-            </a:ln>
-            <a:effectLst>
-              <a:glow>
-                <a:schemeClr val="bg1"/>
-              </a:glow>
-              <a:outerShdw dist="12700" sx="1000" sy="1000" algn="ctr" rotWithShape="0">
-                <a:srgbClr val="000000"/>
-              </a:outerShdw>
-              <a:softEdge rad="63500"/>
-            </a:effectLst>
-          </p:spPr>
-          <p:style>
-            <a:lnRef idx="2">
-              <a:schemeClr val="accent1">
-                <a:shade val="15000"/>
-              </a:schemeClr>
-            </a:lnRef>
-            <a:fillRef idx="1">
-              <a:schemeClr val="accent1"/>
-            </a:fillRef>
-            <a:effectRef idx="0">
-              <a:schemeClr val="accent1"/>
-            </a:effectRef>
-            <a:fontRef idx="minor">
-              <a:schemeClr val="lt1"/>
-            </a:fontRef>
-          </p:style>
-          <p:txBody>
-            <a:bodyPr rtlCol="0" anchor="ctr"/>
-            <a:lstStyle/>
-            <a:p>
-              <a:pPr algn="ctr"/>
-              <a:endParaRPr lang="ja-JP" altLang="en-US"/>
-            </a:p>
-          </p:txBody>
-        </p:sp>
-        <p:sp>
-          <p:nvSpPr>
-            <p:cNvPr id="16" name="四角形: 角を丸くする 15">
-              <a:extLst>
-                <a:ext uri="{FF2B5EF4-FFF2-40B4-BE49-F238E27FC236}">
-                  <a16:creationId xmlns:a16="http://schemas.microsoft.com/office/drawing/2014/main" id="{C4C601C7-22A4-EC5B-C791-20C5366C1341}"/>
-                </a:ext>
-              </a:extLst>
-            </p:cNvPr>
-            <p:cNvSpPr/>
-            <p:nvPr/>
-          </p:nvSpPr>
-          <p:spPr>
-            <a:xfrm>
-              <a:off x="234235" y="250086"/>
-              <a:ext cx="2627152" cy="843154"/>
-            </a:xfrm>
-            <a:prstGeom prst="roundRect">
-              <a:avLst>
-                <a:gd name="adj" fmla="val 13559"/>
-              </a:avLst>
-            </a:prstGeom>
-            <a:solidFill>
-              <a:schemeClr val="bg1"/>
-            </a:solidFill>
-            <a:ln w="6350">
-              <a:noFill/>
-            </a:ln>
-            <a:effectLst/>
-          </p:spPr>
-          <p:style>
-            <a:lnRef idx="2">
-              <a:schemeClr val="accent1">
-                <a:shade val="15000"/>
-              </a:schemeClr>
-            </a:lnRef>
-            <a:fillRef idx="1">
-              <a:schemeClr val="accent1"/>
-            </a:fillRef>
-            <a:effectRef idx="0">
-              <a:schemeClr val="accent1"/>
-            </a:effectRef>
-            <a:fontRef idx="minor">
-              <a:schemeClr val="lt1"/>
-            </a:fontRef>
-          </p:style>
-          <p:txBody>
-            <a:bodyPr wrap="square" lIns="72000" tIns="36000" rIns="72000" bIns="0" rtlCol="0" anchor="b">
-              <a:noAutofit/>
-            </a:bodyPr>
-            <a:lstStyle/>
-            <a:p>
-              <a:pPr algn="ctr"/>
-              <a:r>
-                <a:rPr kumimoji="1" lang="ja-JP" altLang="en-US" sz="500" dirty="0">
-                  <a:solidFill>
-                    <a:schemeClr val="tx1"/>
-                  </a:solidFill>
-                  <a:latin typeface="UD デジタル 教科書体 NP-R" panose="02020400000000000000" pitchFamily="18" charset="-128"/>
-                  <a:ea typeface="UD デジタル 教科書体 NP-R" panose="02020400000000000000" pitchFamily="18" charset="-128"/>
-                </a:rPr>
-                <a:t>本カードを破損・紛失された場合、または使用期限を過ぎた場合は、返礼品を</a:t>
-              </a:r>
-              <a:endParaRPr kumimoji="1" lang="en-US" altLang="ja-JP" sz="500" dirty="0">
-                <a:solidFill>
-                  <a:schemeClr val="tx1"/>
-                </a:solidFill>
-                <a:latin typeface="UD デジタル 教科書体 NP-R" panose="02020400000000000000" pitchFamily="18" charset="-128"/>
-                <a:ea typeface="UD デジタル 教科書体 NP-R" panose="02020400000000000000" pitchFamily="18" charset="-128"/>
-              </a:endParaRPr>
-            </a:p>
-            <a:p>
-              <a:pPr algn="ctr"/>
-              <a:r>
-                <a:rPr kumimoji="1" lang="ja-JP" altLang="en-US" sz="500" dirty="0">
-                  <a:solidFill>
-                    <a:schemeClr val="tx1"/>
-                  </a:solidFill>
-                  <a:latin typeface="UD デジタル 教科書体 NP-R" panose="02020400000000000000" pitchFamily="18" charset="-128"/>
-                  <a:ea typeface="UD デジタル 教科書体 NP-R" panose="02020400000000000000" pitchFamily="18" charset="-128"/>
-                </a:rPr>
-                <a:t>  ご提供できかねますので、あらかじめご了承くださいますようお願いいたします。</a:t>
-              </a:r>
-            </a:p>
-          </p:txBody>
-        </p:sp>
-        <p:sp>
-          <p:nvSpPr>
-            <p:cNvPr id="5" name="四角形: 角を丸くする 4">
-              <a:extLst>
-                <a:ext uri="{FF2B5EF4-FFF2-40B4-BE49-F238E27FC236}">
-                  <a16:creationId xmlns:a16="http://schemas.microsoft.com/office/drawing/2014/main" id="{66BDA754-8E4B-C983-C8B8-FB4DF5267F46}"/>
-                </a:ext>
-              </a:extLst>
-            </p:cNvPr>
-            <p:cNvSpPr/>
-            <p:nvPr/>
-          </p:nvSpPr>
-          <p:spPr>
-            <a:xfrm>
-              <a:off x="299236" y="559911"/>
-              <a:ext cx="564212" cy="211760"/>
-            </a:xfrm>
-            <a:prstGeom prst="roundRect">
-              <a:avLst>
-                <a:gd name="adj" fmla="val 6665"/>
-              </a:avLst>
-            </a:prstGeom>
-            <a:solidFill>
-              <a:schemeClr val="bg1"/>
-            </a:solidFill>
-            <a:ln>
-              <a:noFill/>
-            </a:ln>
-          </p:spPr>
-          <p:style>
-            <a:lnRef idx="2">
-              <a:schemeClr val="accent1">
-                <a:shade val="15000"/>
-              </a:schemeClr>
-            </a:lnRef>
-            <a:fillRef idx="1">
-              <a:schemeClr val="accent1"/>
-            </a:fillRef>
-            <a:effectRef idx="0">
-              <a:schemeClr val="accent1"/>
-            </a:effectRef>
-            <a:fontRef idx="minor">
-              <a:schemeClr val="lt1"/>
-            </a:fontRef>
-          </p:style>
-          <p:txBody>
-            <a:bodyPr lIns="0" tIns="0" rIns="0" bIns="0" rtlCol="0" anchor="ctr"/>
-            <a:lstStyle/>
-            <a:p>
-              <a:pPr algn="ctr"/>
-              <a:r>
-                <a:rPr kumimoji="1" lang="en-US" altLang="ja-JP" sz="800" dirty="0">
-                  <a:solidFill>
-                    <a:schemeClr val="tx1"/>
-                  </a:solidFill>
-                  <a:latin typeface="UD デジタル 教科書体 NP-R" panose="02020400000000000000" pitchFamily="18" charset="-128"/>
-                  <a:ea typeface="UD デジタル 教科書体 NP-R" panose="02020400000000000000" pitchFamily="18" charset="-128"/>
-                </a:rPr>
-                <a:t>PINCODE</a:t>
-              </a:r>
-            </a:p>
-          </p:txBody>
-        </p:sp>
-        <p:sp>
-          <p:nvSpPr>
-            <p:cNvPr id="18" name="四角形: 角を丸くする 17">
-              <a:extLst>
-                <a:ext uri="{FF2B5EF4-FFF2-40B4-BE49-F238E27FC236}">
-                  <a16:creationId xmlns:a16="http://schemas.microsoft.com/office/drawing/2014/main" id="{5D1182F7-303E-2D75-32F3-E4AA5BB7ACCF}"/>
-                </a:ext>
-              </a:extLst>
-            </p:cNvPr>
-            <p:cNvSpPr/>
-            <p:nvPr/>
-          </p:nvSpPr>
-          <p:spPr>
-            <a:xfrm>
-              <a:off x="216692" y="1346585"/>
-              <a:ext cx="2662238" cy="302565"/>
-            </a:xfrm>
-            <a:prstGeom prst="roundRect">
-              <a:avLst>
-                <a:gd name="adj" fmla="val 17073"/>
-              </a:avLst>
-            </a:prstGeom>
-            <a:noFill/>
-            <a:ln w="6350">
-              <a:solidFill>
-                <a:schemeClr val="tx1"/>
-              </a:solidFill>
-            </a:ln>
-            <a:effectLst/>
-          </p:spPr>
-          <p:style>
-            <a:lnRef idx="2">
-              <a:schemeClr val="accent1">
-                <a:shade val="15000"/>
-              </a:schemeClr>
-            </a:lnRef>
-            <a:fillRef idx="1">
-              <a:schemeClr val="accent1"/>
-            </a:fillRef>
-            <a:effectRef idx="0">
-              <a:schemeClr val="accent1"/>
-            </a:effectRef>
-            <a:fontRef idx="minor">
-              <a:schemeClr val="lt1"/>
-            </a:fontRef>
-          </p:style>
-          <p:txBody>
-            <a:bodyPr rtlCol="0" anchor="ctr"/>
-            <a:lstStyle/>
-            <a:p>
-              <a:pPr algn="ctr"/>
-              <a:r>
-                <a:rPr kumimoji="1" lang="en-US" altLang="ja-JP" sz="600" dirty="0">
-                  <a:solidFill>
-                    <a:schemeClr val="tx1"/>
-                  </a:solidFill>
-                  <a:latin typeface="UD デジタル 教科書体 NP-R" panose="02020400000000000000" pitchFamily="18" charset="-128"/>
-                  <a:ea typeface="UD デジタル 教科書体 NP-R" panose="02020400000000000000" pitchFamily="18" charset="-128"/>
-                </a:rPr>
-                <a:t>[</a:t>
-              </a:r>
-              <a:r>
-                <a:rPr kumimoji="1" lang="ja-JP" altLang="en-US" sz="600" dirty="0">
-                  <a:solidFill>
-                    <a:schemeClr val="tx1"/>
-                  </a:solidFill>
-                  <a:latin typeface="UD デジタル 教科書体 NP-R" panose="02020400000000000000" pitchFamily="18" charset="-128"/>
-                  <a:ea typeface="UD デジタル 教科書体 NP-R" panose="02020400000000000000" pitchFamily="18" charset="-128"/>
-                </a:rPr>
-                <a:t>返礼品に関するお問い合わせ</a:t>
-              </a:r>
-              <a:r>
-                <a:rPr kumimoji="1" lang="en-US" altLang="ja-JP" sz="600" dirty="0">
-                  <a:solidFill>
-                    <a:schemeClr val="tx1"/>
-                  </a:solidFill>
-                  <a:latin typeface="UD デジタル 教科書体 NP-R" panose="02020400000000000000" pitchFamily="18" charset="-128"/>
-                  <a:ea typeface="UD デジタル 教科書体 NP-R" panose="02020400000000000000" pitchFamily="18" charset="-128"/>
-                </a:rPr>
-                <a:t>]</a:t>
-              </a:r>
-            </a:p>
-            <a:p>
-              <a:pPr algn="ctr"/>
-              <a:r>
-                <a:rPr kumimoji="1" lang="ja-JP" altLang="en-US" sz="600" dirty="0">
-                  <a:solidFill>
-                    <a:schemeClr val="tx1"/>
-                  </a:solidFill>
-                  <a:latin typeface="UD デジタル 教科書体 NP-R" panose="02020400000000000000" pitchFamily="18" charset="-128"/>
-                  <a:ea typeface="UD デジタル 教科書体 NP-R" panose="02020400000000000000" pitchFamily="18" charset="-128"/>
-                </a:rPr>
-                <a:t>秋田大学総務企画部広報課</a:t>
-              </a:r>
-            </a:p>
-            <a:p>
-              <a:pPr algn="ctr"/>
-              <a:r>
-                <a:rPr kumimoji="1" lang="ja-JP" altLang="en-US" sz="600" dirty="0">
-                  <a:solidFill>
-                    <a:schemeClr val="tx1"/>
-                  </a:solidFill>
-                  <a:latin typeface="UD デジタル 教科書体 NP-R" panose="02020400000000000000" pitchFamily="18" charset="-128"/>
-                  <a:ea typeface="UD デジタル 教科書体 NP-R" panose="02020400000000000000" pitchFamily="18" charset="-128"/>
-                </a:rPr>
-                <a:t>電話：</a:t>
-              </a:r>
-              <a:r>
-                <a:rPr kumimoji="1" lang="en-US" altLang="ja-JP" sz="600" dirty="0">
-                  <a:solidFill>
-                    <a:schemeClr val="tx1"/>
-                  </a:solidFill>
-                  <a:latin typeface="UD デジタル 教科書体 NP-R" panose="02020400000000000000" pitchFamily="18" charset="-128"/>
-                  <a:ea typeface="UD デジタル 教科書体 NP-R" panose="02020400000000000000" pitchFamily="18" charset="-128"/>
-                </a:rPr>
-                <a:t>018-889-3266</a:t>
-              </a:r>
-              <a:r>
-                <a:rPr kumimoji="1" lang="ja-JP" altLang="en-US" sz="600" dirty="0">
-                  <a:solidFill>
-                    <a:schemeClr val="tx1"/>
-                  </a:solidFill>
-                  <a:latin typeface="UD デジタル 教科書体 NP-R" panose="02020400000000000000" pitchFamily="18" charset="-128"/>
-                  <a:ea typeface="UD デジタル 教科書体 NP-R" panose="02020400000000000000" pitchFamily="18" charset="-128"/>
-                </a:rPr>
-                <a:t>　</a:t>
-              </a:r>
-              <a:r>
-                <a:rPr kumimoji="1" lang="en-US" altLang="ja-JP" sz="600" dirty="0">
-                  <a:solidFill>
-                    <a:schemeClr val="tx1"/>
-                  </a:solidFill>
-                  <a:latin typeface="UD デジタル 教科書体 NP-R" panose="02020400000000000000" pitchFamily="18" charset="-128"/>
-                  <a:ea typeface="UD デジタル 教科書体 NP-R" panose="02020400000000000000" pitchFamily="18" charset="-128"/>
-                </a:rPr>
-                <a:t>e-mail</a:t>
-              </a:r>
-              <a:r>
-                <a:rPr kumimoji="1" lang="ja-JP" altLang="en-US" sz="600" dirty="0">
-                  <a:solidFill>
-                    <a:schemeClr val="tx1"/>
-                  </a:solidFill>
-                  <a:latin typeface="UD デジタル 教科書体 NP-R" panose="02020400000000000000" pitchFamily="18" charset="-128"/>
-                  <a:ea typeface="UD デジタル 教科書体 NP-R" panose="02020400000000000000" pitchFamily="18" charset="-128"/>
-                </a:rPr>
-                <a:t>：</a:t>
-              </a:r>
-              <a:r>
-                <a:rPr kumimoji="1" lang="en-US" altLang="ja-JP" sz="600" dirty="0">
-                  <a:solidFill>
-                    <a:schemeClr val="tx1"/>
-                  </a:solidFill>
-                  <a:latin typeface="UD デジタル 教科書体 NP-R" panose="02020400000000000000" pitchFamily="18" charset="-128"/>
-                  <a:ea typeface="UD デジタル 教科書体 NP-R" panose="02020400000000000000" pitchFamily="18" charset="-128"/>
-                </a:rPr>
-                <a:t>kikin@jimu.akita-u.ac.jp</a:t>
-              </a:r>
-            </a:p>
-          </p:txBody>
-        </p:sp>
-        <p:sp>
-          <p:nvSpPr>
-            <p:cNvPr id="19" name="四角形: 角を丸くする 18">
-              <a:extLst>
-                <a:ext uri="{FF2B5EF4-FFF2-40B4-BE49-F238E27FC236}">
-                  <a16:creationId xmlns:a16="http://schemas.microsoft.com/office/drawing/2014/main" id="{9F47755B-7939-1D7F-B1DE-9EB07E6A7B1F}"/>
-                </a:ext>
-              </a:extLst>
-            </p:cNvPr>
-            <p:cNvSpPr/>
-            <p:nvPr/>
-          </p:nvSpPr>
-          <p:spPr>
-            <a:xfrm>
-              <a:off x="264474" y="1746083"/>
-              <a:ext cx="2720550" cy="131546"/>
-            </a:xfrm>
-            <a:prstGeom prst="roundRect">
-              <a:avLst>
-                <a:gd name="adj" fmla="val 17073"/>
-              </a:avLst>
-            </a:prstGeom>
-            <a:noFill/>
-            <a:ln w="6350">
-              <a:noFill/>
-            </a:ln>
-            <a:effectLst/>
-          </p:spPr>
-          <p:style>
-            <a:lnRef idx="2">
-              <a:schemeClr val="accent1">
-                <a:shade val="15000"/>
-              </a:schemeClr>
-            </a:lnRef>
-            <a:fillRef idx="1">
-              <a:schemeClr val="accent1"/>
-            </a:fillRef>
-            <a:effectRef idx="0">
-              <a:schemeClr val="accent1"/>
-            </a:effectRef>
-            <a:fontRef idx="minor">
-              <a:schemeClr val="lt1"/>
-            </a:fontRef>
-          </p:style>
-          <p:txBody>
-            <a:bodyPr rtlCol="0" anchor="ctr"/>
-            <a:lstStyle/>
-            <a:p>
-              <a:pPr algn="ctr"/>
-              <a:r>
-                <a:rPr kumimoji="1" lang="ja-JP" altLang="en-US" sz="600" dirty="0">
-                  <a:solidFill>
-                    <a:schemeClr val="tx1"/>
-                  </a:solidFill>
-                  <a:latin typeface="UD デジタル 教科書体 NP-R" panose="02020400000000000000" pitchFamily="18" charset="-128"/>
-                  <a:ea typeface="UD デジタル 教科書体 NP-R" panose="02020400000000000000" pitchFamily="18" charset="-128"/>
-                </a:rPr>
-                <a:t>「名刺代わりに」は、秋田大学発ベンチャー、</a:t>
-              </a:r>
-              <a:r>
-                <a:rPr kumimoji="1" lang="en-US" altLang="ja-JP" sz="600" dirty="0">
-                  <a:solidFill>
-                    <a:schemeClr val="tx1"/>
-                  </a:solidFill>
-                  <a:latin typeface="UD デジタル 教科書体 NP-R" panose="02020400000000000000" pitchFamily="18" charset="-128"/>
-                  <a:ea typeface="UD デジタル 教科書体 NP-R" panose="02020400000000000000" pitchFamily="18" charset="-128"/>
-                </a:rPr>
-                <a:t>AUIC</a:t>
-              </a:r>
-              <a:r>
-                <a:rPr kumimoji="1" lang="ja-JP" altLang="en-US" sz="600" dirty="0">
-                  <a:solidFill>
-                    <a:schemeClr val="tx1"/>
-                  </a:solidFill>
-                  <a:latin typeface="UD デジタル 教科書体 NP-R" panose="02020400000000000000" pitchFamily="18" charset="-128"/>
-                  <a:ea typeface="UD デジタル 教科書体 NP-R" panose="02020400000000000000" pitchFamily="18" charset="-128"/>
-                </a:rPr>
-                <a:t>が提供しています。</a:t>
-              </a:r>
-              <a:endParaRPr kumimoji="1" lang="en-US" altLang="ja-JP" sz="600" dirty="0">
-                <a:solidFill>
-                  <a:schemeClr val="tx1"/>
-                </a:solidFill>
-                <a:latin typeface="UD デジタル 教科書体 NP-R" panose="02020400000000000000" pitchFamily="18" charset="-128"/>
-                <a:ea typeface="UD デジタル 教科書体 NP-R" panose="02020400000000000000" pitchFamily="18" charset="-128"/>
-              </a:endParaRPr>
-            </a:p>
-          </p:txBody>
-        </p:sp>
-        <p:sp>
-          <p:nvSpPr>
-            <p:cNvPr id="25" name="四角形: 角を丸くする 24">
-              <a:extLst>
-                <a:ext uri="{FF2B5EF4-FFF2-40B4-BE49-F238E27FC236}">
-                  <a16:creationId xmlns:a16="http://schemas.microsoft.com/office/drawing/2014/main" id="{31545E15-01E3-2BA2-128E-1410CA07FD7B}"/>
-                </a:ext>
-              </a:extLst>
-            </p:cNvPr>
-            <p:cNvSpPr/>
-            <p:nvPr/>
-          </p:nvSpPr>
-          <p:spPr>
-            <a:xfrm>
-              <a:off x="187535" y="287429"/>
-              <a:ext cx="2720550" cy="164630"/>
-            </a:xfrm>
-            <a:prstGeom prst="roundRect">
-              <a:avLst>
-                <a:gd name="adj" fmla="val 17073"/>
-              </a:avLst>
-            </a:prstGeom>
-            <a:noFill/>
-            <a:ln w="6350">
-              <a:noFill/>
-            </a:ln>
-            <a:effectLst/>
-          </p:spPr>
-          <p:style>
-            <a:lnRef idx="2">
-              <a:schemeClr val="accent1">
-                <a:shade val="15000"/>
-              </a:schemeClr>
-            </a:lnRef>
-            <a:fillRef idx="1">
-              <a:schemeClr val="accent1"/>
-            </a:fillRef>
-            <a:effectRef idx="0">
-              <a:schemeClr val="accent1"/>
-            </a:effectRef>
-            <a:fontRef idx="minor">
-              <a:schemeClr val="lt1"/>
-            </a:fontRef>
-          </p:style>
-          <p:txBody>
-            <a:bodyPr rtlCol="0" anchor="ctr"/>
-            <a:lstStyle/>
-            <a:p>
-              <a:pPr algn="ctr"/>
-              <a:r>
-                <a:rPr kumimoji="1" lang="ja-JP" altLang="en-US" sz="600" dirty="0">
-                  <a:solidFill>
-                    <a:schemeClr val="tx1"/>
-                  </a:solidFill>
-                  <a:latin typeface="UD デジタル 教科書体 NP-R" panose="02020400000000000000" pitchFamily="18" charset="-128"/>
-                  <a:ea typeface="UD デジタル 教科書体 NP-R" panose="02020400000000000000" pitchFamily="18" charset="-128"/>
-                </a:rPr>
-                <a:t>［使用期限：</a:t>
-              </a:r>
-              <a:r>
-                <a:rPr kumimoji="1" lang="en-US" altLang="ja-JP" sz="600" dirty="0">
-                  <a:solidFill>
-                    <a:schemeClr val="tx1"/>
-                  </a:solidFill>
-                  <a:latin typeface="UD デジタル 教科書体 NP-R" panose="02020400000000000000" pitchFamily="18" charset="-128"/>
-                  <a:ea typeface="UD デジタル 教科書体 NP-R" panose="02020400000000000000" pitchFamily="18" charset="-128"/>
-                </a:rPr>
-                <a:t>2026</a:t>
-              </a:r>
-              <a:r>
-                <a:rPr kumimoji="1" lang="ja-JP" altLang="en-US" sz="600" dirty="0">
-                  <a:solidFill>
-                    <a:schemeClr val="tx1"/>
-                  </a:solidFill>
-                  <a:latin typeface="UD デジタル 教科書体 NP-R" panose="02020400000000000000" pitchFamily="18" charset="-128"/>
-                  <a:ea typeface="UD デジタル 教科書体 NP-R" panose="02020400000000000000" pitchFamily="18" charset="-128"/>
-                </a:rPr>
-                <a:t> 年 </a:t>
-              </a:r>
-              <a:r>
-                <a:rPr kumimoji="1" lang="en-US" altLang="ja-JP" sz="600" dirty="0">
-                  <a:solidFill>
-                    <a:schemeClr val="tx1"/>
-                  </a:solidFill>
-                  <a:latin typeface="UD デジタル 教科書体 NP-R" panose="02020400000000000000" pitchFamily="18" charset="-128"/>
-                  <a:ea typeface="UD デジタル 教科書体 NP-R" panose="02020400000000000000" pitchFamily="18" charset="-128"/>
-                </a:rPr>
-                <a:t>9</a:t>
-              </a:r>
-              <a:r>
-                <a:rPr kumimoji="1" lang="ja-JP" altLang="en-US" sz="600" dirty="0">
-                  <a:solidFill>
-                    <a:schemeClr val="tx1"/>
-                  </a:solidFill>
-                  <a:latin typeface="UD デジタル 教科書体 NP-R" panose="02020400000000000000" pitchFamily="18" charset="-128"/>
-                  <a:ea typeface="UD デジタル 教科書体 NP-R" panose="02020400000000000000" pitchFamily="18" charset="-128"/>
-                </a:rPr>
-                <a:t> 月 </a:t>
-              </a:r>
-              <a:r>
-                <a:rPr kumimoji="1" lang="en-US" altLang="ja-JP" sz="600" dirty="0">
-                  <a:solidFill>
-                    <a:schemeClr val="tx1"/>
-                  </a:solidFill>
-                  <a:latin typeface="UD デジタル 教科書体 NP-R" panose="02020400000000000000" pitchFamily="18" charset="-128"/>
-                  <a:ea typeface="UD デジタル 教科書体 NP-R" panose="02020400000000000000" pitchFamily="18" charset="-128"/>
-                </a:rPr>
-                <a:t>30</a:t>
-              </a:r>
-              <a:r>
-                <a:rPr kumimoji="1" lang="ja-JP" altLang="en-US" sz="600" dirty="0">
-                  <a:solidFill>
-                    <a:schemeClr val="tx1"/>
-                  </a:solidFill>
-                  <a:latin typeface="UD デジタル 教科書体 NP-R" panose="02020400000000000000" pitchFamily="18" charset="-128"/>
-                  <a:ea typeface="UD デジタル 教科書体 NP-R" panose="02020400000000000000" pitchFamily="18" charset="-128"/>
-                </a:rPr>
-                <a:t> 日 </a:t>
-              </a:r>
-              <a:r>
-                <a:rPr kumimoji="1" lang="en-US" altLang="ja-JP" sz="600" dirty="0">
-                  <a:solidFill>
-                    <a:schemeClr val="tx1"/>
-                  </a:solidFill>
-                  <a:latin typeface="UD デジタル 教科書体 NP-R" panose="02020400000000000000" pitchFamily="18" charset="-128"/>
-                  <a:ea typeface="UD デジタル 教科書体 NP-R" panose="02020400000000000000" pitchFamily="18" charset="-128"/>
-                </a:rPr>
-                <a:t>23</a:t>
-              </a:r>
-              <a:r>
-                <a:rPr kumimoji="1" lang="ja-JP" altLang="en-US" sz="600" dirty="0">
-                  <a:solidFill>
-                    <a:schemeClr val="tx1"/>
-                  </a:solidFill>
-                  <a:latin typeface="UD デジタル 教科書体 NP-R" panose="02020400000000000000" pitchFamily="18" charset="-128"/>
-                  <a:ea typeface="UD デジタル 教科書体 NP-R" panose="02020400000000000000" pitchFamily="18" charset="-128"/>
-                </a:rPr>
-                <a:t>：</a:t>
-              </a:r>
-              <a:r>
-                <a:rPr kumimoji="1" lang="en-US" altLang="ja-JP" sz="600" dirty="0">
-                  <a:solidFill>
-                    <a:schemeClr val="tx1"/>
-                  </a:solidFill>
-                  <a:latin typeface="UD デジタル 教科書体 NP-R" panose="02020400000000000000" pitchFamily="18" charset="-128"/>
-                  <a:ea typeface="UD デジタル 教科書体 NP-R" panose="02020400000000000000" pitchFamily="18" charset="-128"/>
-                </a:rPr>
-                <a:t>59</a:t>
-              </a:r>
-              <a:r>
-                <a:rPr kumimoji="1" lang="ja-JP" altLang="en-US" sz="600" dirty="0">
-                  <a:solidFill>
-                    <a:schemeClr val="tx1"/>
-                  </a:solidFill>
-                  <a:latin typeface="UD デジタル 教科書体 NP-R" panose="02020400000000000000" pitchFamily="18" charset="-128"/>
-                  <a:ea typeface="UD デジタル 教科書体 NP-R" panose="02020400000000000000" pitchFamily="18" charset="-128"/>
-                </a:rPr>
-                <a:t>まで］</a:t>
-              </a:r>
-            </a:p>
-          </p:txBody>
-        </p:sp>
-        <p:pic>
-          <p:nvPicPr>
-            <p:cNvPr id="3" name="図 2">
-              <a:extLst>
-                <a:ext uri="{FF2B5EF4-FFF2-40B4-BE49-F238E27FC236}">
-                  <a16:creationId xmlns:a16="http://schemas.microsoft.com/office/drawing/2014/main" id="{C6E09740-961F-C902-DB45-733296A0B582}"/>
-                </a:ext>
-              </a:extLst>
-            </p:cNvPr>
-            <p:cNvPicPr>
-              <a:picLocks noChangeAspect="1"/>
-            </p:cNvPicPr>
-            <p:nvPr/>
-          </p:nvPicPr>
-          <p:blipFill>
-            <a:blip r:embed="rId3">
-              <a:extLst>
-                <a:ext uri="{28A0092B-C50C-407E-A947-70E740481C1C}">
-                  <a14:useLocalDpi xmlns:a14="http://schemas.microsoft.com/office/drawing/2010/main" val="0"/>
-                </a:ext>
-              </a:extLst>
-            </a:blip>
-            <a:stretch>
-              <a:fillRect/>
-            </a:stretch>
-          </p:blipFill>
-          <p:spPr>
-            <a:xfrm>
-              <a:off x="267649" y="1749035"/>
-              <a:ext cx="111515" cy="111515"/>
-            </a:xfrm>
-            <a:prstGeom prst="rect">
-              <a:avLst/>
-            </a:prstGeom>
-          </p:spPr>
-        </p:pic>
-      </p:grpSp>
-    </p:spTree>
-    <p:extLst>
-      <p:ext uri="{BB962C8B-B14F-4D97-AF65-F5344CB8AC3E}">
-        <p14:creationId xmlns:p14="http://schemas.microsoft.com/office/powerpoint/2010/main" val="1179832683"/>
-      </p:ext>
-    </p:extLst>
-  </p:cSld>
-  <p:clrMapOvr>
-    <a:masterClrMapping/>
-  </p:clrMapOvr>
-</p:sld>
-</file>
-
-<file path=ppt/slides/slide6.xml><?xml version="1.0" encoding="utf-8"?>
+<file path=ppt/slides/slide7.xml><?xml version="1.0" encoding="utf-8"?>
 <p:sld xmlns:a="http://schemas.openxmlformats.org/drawingml/2006/main" xmlns:r="http://schemas.openxmlformats.org/officeDocument/2006/relationships" xmlns:p="http://schemas.openxmlformats.org/presentationml/2006/main">
   <p:cSld>
     <p:spTree>
@@ -9259,7 +9940,7 @@
 </p:sld>
 </file>
 
-<file path=ppt/slides/slide7.xml><?xml version="1.0" encoding="utf-8"?>
+<file path=ppt/slides/slide8.xml><?xml version="1.0" encoding="utf-8"?>
 <p:sld xmlns:a="http://schemas.openxmlformats.org/drawingml/2006/main" xmlns:r="http://schemas.openxmlformats.org/officeDocument/2006/relationships" xmlns:p="http://schemas.openxmlformats.org/presentationml/2006/main">
   <p:cSld>
     <p:spTree>
@@ -9872,7 +10553,7 @@
 </p:sld>
 </file>
 
-<file path=ppt/slides/slide8.xml><?xml version="1.0" encoding="utf-8"?>
+<file path=ppt/slides/slide9.xml><?xml version="1.0" encoding="utf-8"?>
 <p:sld xmlns:a="http://schemas.openxmlformats.org/drawingml/2006/main" xmlns:r="http://schemas.openxmlformats.org/officeDocument/2006/relationships" xmlns:p="http://schemas.openxmlformats.org/presentationml/2006/main">
   <p:cSld>
     <p:spTree>
@@ -10553,687 +11234,6 @@
 </p:sld>
 </file>
 
-<file path=ppt/slides/slide9.xml><?xml version="1.0" encoding="utf-8"?>
-<p:sld xmlns:a="http://schemas.openxmlformats.org/drawingml/2006/main" xmlns:r="http://schemas.openxmlformats.org/officeDocument/2006/relationships" xmlns:p="http://schemas.openxmlformats.org/presentationml/2006/main">
-  <p:cSld>
-    <p:spTree>
-      <p:nvGrpSpPr>
-        <p:cNvPr id="1" name="">
-          <a:extLst>
-            <a:ext uri="{FF2B5EF4-FFF2-40B4-BE49-F238E27FC236}">
-              <a16:creationId xmlns:a16="http://schemas.microsoft.com/office/drawing/2014/main" id="{48D32B67-2104-CC64-72AB-009C219D795A}"/>
-            </a:ext>
-          </a:extLst>
-        </p:cNvPr>
-        <p:cNvGrpSpPr/>
-        <p:nvPr/>
-      </p:nvGrpSpPr>
-      <p:grpSpPr>
-        <a:xfrm>
-          <a:off x="0" y="0"/>
-          <a:ext cx="0" cy="0"/>
-          <a:chOff x="0" y="0"/>
-          <a:chExt cx="0" cy="0"/>
-        </a:xfrm>
-      </p:grpSpPr>
-      <p:grpSp>
-        <p:nvGrpSpPr>
-          <p:cNvPr id="8" name="グループ化 7">
-            <a:extLst>
-              <a:ext uri="{FF2B5EF4-FFF2-40B4-BE49-F238E27FC236}">
-                <a16:creationId xmlns:a16="http://schemas.microsoft.com/office/drawing/2014/main" id="{E584D19E-A33E-1AE0-40C5-71F555C91F12}"/>
-              </a:ext>
-            </a:extLst>
-          </p:cNvPr>
-          <p:cNvGrpSpPr/>
-          <p:nvPr/>
-        </p:nvGrpSpPr>
-        <p:grpSpPr>
-          <a:xfrm>
-            <a:off x="-2" y="-1"/>
-            <a:ext cx="3095626" cy="1944689"/>
-            <a:chOff x="-2" y="-1"/>
-            <a:chExt cx="3095626" cy="1944689"/>
-          </a:xfrm>
-        </p:grpSpPr>
-        <p:sp>
-          <p:nvSpPr>
-            <p:cNvPr id="2" name="四角形: 角を丸くする 1">
-              <a:extLst>
-                <a:ext uri="{FF2B5EF4-FFF2-40B4-BE49-F238E27FC236}">
-                  <a16:creationId xmlns:a16="http://schemas.microsoft.com/office/drawing/2014/main" id="{C4394BD5-4065-C5AE-FDE1-C7D7A1D2311D}"/>
-                </a:ext>
-              </a:extLst>
-            </p:cNvPr>
-            <p:cNvSpPr/>
-            <p:nvPr/>
-          </p:nvSpPr>
-          <p:spPr>
-            <a:xfrm>
-              <a:off x="-2" y="-1"/>
-              <a:ext cx="3095625" cy="1944687"/>
-            </a:xfrm>
-            <a:prstGeom prst="roundRect">
-              <a:avLst>
-                <a:gd name="adj" fmla="val 0"/>
-              </a:avLst>
-            </a:prstGeom>
-            <a:solidFill>
-              <a:schemeClr val="bg1"/>
-            </a:solidFill>
-            <a:ln>
-              <a:noFill/>
-            </a:ln>
-          </p:spPr>
-          <p:style>
-            <a:lnRef idx="2">
-              <a:schemeClr val="accent1">
-                <a:shade val="15000"/>
-              </a:schemeClr>
-            </a:lnRef>
-            <a:fillRef idx="1">
-              <a:schemeClr val="accent1"/>
-            </a:fillRef>
-            <a:effectRef idx="0">
-              <a:schemeClr val="accent1"/>
-            </a:effectRef>
-            <a:fontRef idx="minor">
-              <a:schemeClr val="lt1"/>
-            </a:fontRef>
-          </p:style>
-          <p:txBody>
-            <a:bodyPr lIns="0" tIns="0" rIns="0" bIns="0" rtlCol="0" anchor="ctr"/>
-            <a:lstStyle/>
-            <a:p>
-              <a:pPr algn="ctr"/>
-              <a:endParaRPr kumimoji="1" lang="ja-JP" altLang="en-US" sz="600" dirty="0">
-                <a:solidFill>
-                  <a:schemeClr val="tx1"/>
-                </a:solidFill>
-                <a:latin typeface="UD デジタル 教科書体 NP-R" panose="020B0400000000000000" pitchFamily="18" charset="-128"/>
-                <a:ea typeface="UD デジタル 教科書体 NP-R" panose="020B0400000000000000" pitchFamily="18" charset="-128"/>
-              </a:endParaRPr>
-            </a:p>
-          </p:txBody>
-        </p:sp>
-        <p:sp>
-          <p:nvSpPr>
-            <p:cNvPr id="5" name="四角形: 角を丸くする 4">
-              <a:extLst>
-                <a:ext uri="{FF2B5EF4-FFF2-40B4-BE49-F238E27FC236}">
-                  <a16:creationId xmlns:a16="http://schemas.microsoft.com/office/drawing/2014/main" id="{C773B568-B3D6-FAF7-4278-03B65AA83324}"/>
-                </a:ext>
-              </a:extLst>
-            </p:cNvPr>
-            <p:cNvSpPr/>
-            <p:nvPr/>
-          </p:nvSpPr>
-          <p:spPr>
-            <a:xfrm>
-              <a:off x="-1" y="5074"/>
-              <a:ext cx="3095625" cy="1939614"/>
-            </a:xfrm>
-            <a:prstGeom prst="roundRect">
-              <a:avLst>
-                <a:gd name="adj" fmla="val 13559"/>
-              </a:avLst>
-            </a:prstGeom>
-            <a:noFill/>
-            <a:ln w="6350">
-              <a:noFill/>
-            </a:ln>
-            <a:effectLst/>
-          </p:spPr>
-          <p:style>
-            <a:lnRef idx="2">
-              <a:schemeClr val="accent1">
-                <a:shade val="15000"/>
-              </a:schemeClr>
-            </a:lnRef>
-            <a:fillRef idx="1">
-              <a:schemeClr val="accent1"/>
-            </a:fillRef>
-            <a:effectRef idx="0">
-              <a:schemeClr val="accent1"/>
-            </a:effectRef>
-            <a:fontRef idx="minor">
-              <a:schemeClr val="lt1"/>
-            </a:fontRef>
-          </p:style>
-          <p:txBody>
-            <a:bodyPr wrap="square" lIns="72000" tIns="36000" rIns="72000" bIns="0" rtlCol="0" anchor="b">
-              <a:noAutofit/>
-            </a:bodyPr>
-            <a:lstStyle/>
-            <a:p>
-              <a:pPr algn="ctr"/>
-              <a:endParaRPr kumimoji="1" lang="ja-JP" altLang="en-US" sz="600" dirty="0">
-                <a:solidFill>
-                  <a:schemeClr val="tx1"/>
-                </a:solidFill>
-                <a:latin typeface="UD デジタル 教科書体 NP-R" panose="02020400000000000000" pitchFamily="18" charset="-128"/>
-                <a:ea typeface="UD デジタル 教科書体 NP-R" panose="02020400000000000000" pitchFamily="18" charset="-128"/>
-              </a:endParaRPr>
-            </a:p>
-          </p:txBody>
-        </p:sp>
-        <p:grpSp>
-          <p:nvGrpSpPr>
-            <p:cNvPr id="3" name="グループ化 2">
-              <a:extLst>
-                <a:ext uri="{FF2B5EF4-FFF2-40B4-BE49-F238E27FC236}">
-                  <a16:creationId xmlns:a16="http://schemas.microsoft.com/office/drawing/2014/main" id="{8F57D301-21E5-5B8B-1793-663A0E25C55C}"/>
-                </a:ext>
-              </a:extLst>
-            </p:cNvPr>
-            <p:cNvGrpSpPr/>
-            <p:nvPr/>
-          </p:nvGrpSpPr>
-          <p:grpSpPr>
-            <a:xfrm>
-              <a:off x="26424" y="35311"/>
-              <a:ext cx="1781026" cy="1777008"/>
-              <a:chOff x="4761" y="0"/>
-              <a:chExt cx="1944000" cy="1944687"/>
-            </a:xfrm>
-          </p:grpSpPr>
-          <p:sp>
-            <p:nvSpPr>
-              <p:cNvPr id="7" name="四角形: 角を丸くする 6">
-                <a:extLst>
-                  <a:ext uri="{FF2B5EF4-FFF2-40B4-BE49-F238E27FC236}">
-                    <a16:creationId xmlns:a16="http://schemas.microsoft.com/office/drawing/2014/main" id="{A356266D-B8E0-24F8-A58A-17BEA7001497}"/>
-                  </a:ext>
-                </a:extLst>
-              </p:cNvPr>
-              <p:cNvSpPr/>
-              <p:nvPr/>
-            </p:nvSpPr>
-            <p:spPr>
-              <a:xfrm>
-                <a:off x="4761" y="0"/>
-                <a:ext cx="1944000" cy="1944687"/>
-              </a:xfrm>
-              <a:prstGeom prst="roundRect">
-                <a:avLst>
-                  <a:gd name="adj" fmla="val 8828"/>
-                </a:avLst>
-              </a:prstGeom>
-              <a:blipFill>
-                <a:blip r:embed="rId2"/>
-                <a:stretch>
-                  <a:fillRect/>
-                </a:stretch>
-              </a:blipFill>
-              <a:ln w="171450">
-                <a:noFill/>
-              </a:ln>
-              <a:effectLst>
-                <a:glow>
-                  <a:schemeClr val="bg1"/>
-                </a:glow>
-                <a:outerShdw dist="12700" sx="1000" sy="1000" algn="ctr" rotWithShape="0">
-                  <a:srgbClr val="000000"/>
-                </a:outerShdw>
-                <a:softEdge rad="127000"/>
-              </a:effectLst>
-            </p:spPr>
-            <p:style>
-              <a:lnRef idx="2">
-                <a:schemeClr val="accent1">
-                  <a:shade val="15000"/>
-                </a:schemeClr>
-              </a:lnRef>
-              <a:fillRef idx="1">
-                <a:schemeClr val="accent1"/>
-              </a:fillRef>
-              <a:effectRef idx="0">
-                <a:schemeClr val="accent1"/>
-              </a:effectRef>
-              <a:fontRef idx="minor">
-                <a:schemeClr val="lt1"/>
-              </a:fontRef>
-            </p:style>
-            <p:txBody>
-              <a:bodyPr rtlCol="0" anchor="ctr"/>
-              <a:lstStyle/>
-              <a:p>
-                <a:pPr algn="ctr"/>
-                <a:endParaRPr lang="ja-JP" altLang="en-US"/>
-              </a:p>
-            </p:txBody>
-          </p:sp>
-          <p:grpSp>
-            <p:nvGrpSpPr>
-              <p:cNvPr id="22" name="グループ化 21">
-                <a:extLst>
-                  <a:ext uri="{FF2B5EF4-FFF2-40B4-BE49-F238E27FC236}">
-                    <a16:creationId xmlns:a16="http://schemas.microsoft.com/office/drawing/2014/main" id="{4432C75C-BC64-373F-4D11-ADDFA62EC4C7}"/>
-                  </a:ext>
-                </a:extLst>
-              </p:cNvPr>
-              <p:cNvGrpSpPr/>
-              <p:nvPr/>
-            </p:nvGrpSpPr>
-            <p:grpSpPr>
-              <a:xfrm>
-                <a:off x="311866" y="138682"/>
-                <a:ext cx="1329789" cy="1662236"/>
-                <a:chOff x="324896" y="199586"/>
-                <a:chExt cx="1294896" cy="1618620"/>
-              </a:xfrm>
-            </p:grpSpPr>
-            <p:sp>
-              <p:nvSpPr>
-                <p:cNvPr id="14" name="四角形: 角を丸くする 13">
-                  <a:extLst>
-                    <a:ext uri="{FF2B5EF4-FFF2-40B4-BE49-F238E27FC236}">
-                      <a16:creationId xmlns:a16="http://schemas.microsoft.com/office/drawing/2014/main" id="{882CCC63-3482-E9D7-914E-7C5251392B33}"/>
-                    </a:ext>
-                  </a:extLst>
-                </p:cNvPr>
-                <p:cNvSpPr/>
-                <p:nvPr/>
-              </p:nvSpPr>
-              <p:spPr>
-                <a:xfrm>
-                  <a:off x="324896" y="199586"/>
-                  <a:ext cx="1294896" cy="1618620"/>
-                </a:xfrm>
-                <a:prstGeom prst="roundRect">
-                  <a:avLst>
-                    <a:gd name="adj" fmla="val 17073"/>
-                  </a:avLst>
-                </a:prstGeom>
-                <a:blipFill>
-                  <a:blip r:embed="rId3"/>
-                  <a:stretch>
-                    <a:fillRect/>
-                  </a:stretch>
-                </a:blipFill>
-                <a:ln>
-                  <a:noFill/>
-                </a:ln>
-              </p:spPr>
-              <p:style>
-                <a:lnRef idx="2">
-                  <a:schemeClr val="accent1">
-                    <a:shade val="15000"/>
-                  </a:schemeClr>
-                </a:lnRef>
-                <a:fillRef idx="1">
-                  <a:schemeClr val="accent1"/>
-                </a:fillRef>
-                <a:effectRef idx="0">
-                  <a:schemeClr val="accent1"/>
-                </a:effectRef>
-                <a:fontRef idx="minor">
-                  <a:schemeClr val="lt1"/>
-                </a:fontRef>
-              </p:style>
-              <p:txBody>
-                <a:bodyPr rtlCol="0" anchor="ctr"/>
-                <a:lstStyle/>
-                <a:p>
-                  <a:pPr algn="ctr"/>
-                  <a:endParaRPr kumimoji="1" lang="ja-JP" altLang="en-US"/>
-                </a:p>
-              </p:txBody>
-            </p:sp>
-            <p:pic>
-              <p:nvPicPr>
-                <p:cNvPr id="21" name="図 20" descr="ロゴ が含まれている画像&#10;&#10;AI 生成コンテンツは誤りを含む可能性があります。">
-                  <a:extLst>
-                    <a:ext uri="{FF2B5EF4-FFF2-40B4-BE49-F238E27FC236}">
-                      <a16:creationId xmlns:a16="http://schemas.microsoft.com/office/drawing/2014/main" id="{B796058B-89F0-9799-1E85-0E33B69AE4CD}"/>
-                    </a:ext>
-                  </a:extLst>
-                </p:cNvPr>
-                <p:cNvPicPr>
-                  <a:picLocks noChangeAspect="1"/>
-                </p:cNvPicPr>
-                <p:nvPr/>
-              </p:nvPicPr>
-              <p:blipFill>
-                <a:blip r:embed="rId4">
-                  <a:extLst>
-                    <a:ext uri="{28A0092B-C50C-407E-A947-70E740481C1C}">
-                      <a14:useLocalDpi xmlns:a14="http://schemas.microsoft.com/office/drawing/2010/main" val="0"/>
-                    </a:ext>
-                  </a:extLst>
-                </a:blip>
-                <a:srcRect l="2225" t="9650" r="4370" b="12728"/>
-                <a:stretch>
-                  <a:fillRect/>
-                </a:stretch>
-              </p:blipFill>
-              <p:spPr>
-                <a:xfrm>
-                  <a:off x="471089" y="268171"/>
-                  <a:ext cx="1002507" cy="282809"/>
-                </a:xfrm>
-                <a:prstGeom prst="rect">
-                  <a:avLst/>
-                </a:prstGeom>
-              </p:spPr>
-            </p:pic>
-          </p:grpSp>
-        </p:grpSp>
-        <p:sp>
-          <p:nvSpPr>
-            <p:cNvPr id="31" name="四角形: 角を丸くする 30">
-              <a:extLst>
-                <a:ext uri="{FF2B5EF4-FFF2-40B4-BE49-F238E27FC236}">
-                  <a16:creationId xmlns:a16="http://schemas.microsoft.com/office/drawing/2014/main" id="{8C970144-9609-3024-3E60-C1066BBC7D64}"/>
-                </a:ext>
-              </a:extLst>
-            </p:cNvPr>
-            <p:cNvSpPr/>
-            <p:nvPr/>
-          </p:nvSpPr>
-          <p:spPr>
-            <a:xfrm>
-              <a:off x="1844455" y="255162"/>
-              <a:ext cx="1153343" cy="214457"/>
-            </a:xfrm>
-            <a:prstGeom prst="roundRect">
-              <a:avLst>
-                <a:gd name="adj" fmla="val 6665"/>
-              </a:avLst>
-            </a:prstGeom>
-            <a:noFill/>
-            <a:ln>
-              <a:noFill/>
-            </a:ln>
-          </p:spPr>
-          <p:style>
-            <a:lnRef idx="2">
-              <a:schemeClr val="accent1">
-                <a:shade val="15000"/>
-              </a:schemeClr>
-            </a:lnRef>
-            <a:fillRef idx="1">
-              <a:schemeClr val="accent1"/>
-            </a:fillRef>
-            <a:effectRef idx="0">
-              <a:schemeClr val="accent1"/>
-            </a:effectRef>
-            <a:fontRef idx="minor">
-              <a:schemeClr val="lt1"/>
-            </a:fontRef>
-          </p:style>
-          <p:txBody>
-            <a:bodyPr lIns="0" tIns="0" rIns="0" bIns="0" rtlCol="0" anchor="ctr"/>
-            <a:lstStyle/>
-            <a:p>
-              <a:pPr algn="ctr"/>
-              <a:r>
-                <a:rPr kumimoji="1" lang="ja-JP" altLang="en-US" dirty="0">
-                  <a:solidFill>
-                    <a:schemeClr val="tx1"/>
-                  </a:solidFill>
-                  <a:latin typeface="UD デジタル 教科書体 NP-R" panose="02020400000000000000" pitchFamily="18" charset="-128"/>
-                  <a:ea typeface="UD デジタル 教科書体 NP-R" panose="02020400000000000000" pitchFamily="18" charset="-128"/>
-                </a:rPr>
-                <a:t>ありがとう</a:t>
-              </a:r>
-              <a:endParaRPr kumimoji="1" lang="ja-JP" altLang="en-US" sz="800" dirty="0">
-                <a:solidFill>
-                  <a:schemeClr val="tx1"/>
-                </a:solidFill>
-                <a:latin typeface="UD デジタル 教科書体 NP-R" panose="02020400000000000000" pitchFamily="18" charset="-128"/>
-                <a:ea typeface="UD デジタル 教科書体 NP-R" panose="02020400000000000000" pitchFamily="18" charset="-128"/>
-              </a:endParaRPr>
-            </a:p>
-          </p:txBody>
-        </p:sp>
-        <p:sp>
-          <p:nvSpPr>
-            <p:cNvPr id="4" name="四角形: 角を丸くする 3">
-              <a:extLst>
-                <a:ext uri="{FF2B5EF4-FFF2-40B4-BE49-F238E27FC236}">
-                  <a16:creationId xmlns:a16="http://schemas.microsoft.com/office/drawing/2014/main" id="{FEC586F6-793A-4C54-DA10-3B4A26BF0719}"/>
-                </a:ext>
-              </a:extLst>
-            </p:cNvPr>
-            <p:cNvSpPr/>
-            <p:nvPr/>
-          </p:nvSpPr>
-          <p:spPr>
-            <a:xfrm>
-              <a:off x="215106" y="1793322"/>
-              <a:ext cx="2654348" cy="120703"/>
-            </a:xfrm>
-            <a:prstGeom prst="roundRect">
-              <a:avLst>
-                <a:gd name="adj" fmla="val 6665"/>
-              </a:avLst>
-            </a:prstGeom>
-            <a:noFill/>
-            <a:ln>
-              <a:noFill/>
-            </a:ln>
-          </p:spPr>
-          <p:style>
-            <a:lnRef idx="2">
-              <a:schemeClr val="accent1">
-                <a:shade val="15000"/>
-              </a:schemeClr>
-            </a:lnRef>
-            <a:fillRef idx="1">
-              <a:schemeClr val="accent1"/>
-            </a:fillRef>
-            <a:effectRef idx="0">
-              <a:schemeClr val="accent1"/>
-            </a:effectRef>
-            <a:fontRef idx="minor">
-              <a:schemeClr val="lt1"/>
-            </a:fontRef>
-          </p:style>
-          <p:txBody>
-            <a:bodyPr lIns="0" tIns="0" rIns="0" bIns="0" rtlCol="0" anchor="ctr"/>
-            <a:lstStyle/>
-            <a:p>
-              <a:r>
-                <a:rPr kumimoji="1" lang="ja-JP" altLang="en-US" sz="600" dirty="0">
-                  <a:solidFill>
-                    <a:schemeClr val="tx1"/>
-                  </a:solidFill>
-                  <a:latin typeface="UD デジタル 教科書体 NP-R" panose="020B0400000000000000" pitchFamily="18" charset="-128"/>
-                  <a:ea typeface="UD デジタル 教科書体 NP-R" panose="020B0400000000000000" pitchFamily="18" charset="-128"/>
-                </a:rPr>
-                <a:t>とけない、われない、かさばらない！　カードで送る新習慣＠名刺代わりに</a:t>
-              </a:r>
-            </a:p>
-          </p:txBody>
-        </p:sp>
-        <p:sp>
-          <p:nvSpPr>
-            <p:cNvPr id="10" name="四角形: 角を丸くする 9">
-              <a:extLst>
-                <a:ext uri="{FF2B5EF4-FFF2-40B4-BE49-F238E27FC236}">
-                  <a16:creationId xmlns:a16="http://schemas.microsoft.com/office/drawing/2014/main" id="{EFD014A6-A756-149E-E1CF-B1652474A8DD}"/>
-                </a:ext>
-              </a:extLst>
-            </p:cNvPr>
-            <p:cNvSpPr/>
-            <p:nvPr/>
-          </p:nvSpPr>
-          <p:spPr>
-            <a:xfrm>
-              <a:off x="1927110" y="71103"/>
-              <a:ext cx="988031" cy="181522"/>
-            </a:xfrm>
-            <a:prstGeom prst="roundRect">
-              <a:avLst>
-                <a:gd name="adj" fmla="val 6665"/>
-              </a:avLst>
-            </a:prstGeom>
-            <a:noFill/>
-            <a:ln>
-              <a:noFill/>
-            </a:ln>
-          </p:spPr>
-          <p:style>
-            <a:lnRef idx="2">
-              <a:schemeClr val="accent1">
-                <a:shade val="15000"/>
-              </a:schemeClr>
-            </a:lnRef>
-            <a:fillRef idx="1">
-              <a:schemeClr val="accent1"/>
-            </a:fillRef>
-            <a:effectRef idx="0">
-              <a:schemeClr val="accent1"/>
-            </a:effectRef>
-            <a:fontRef idx="minor">
-              <a:schemeClr val="lt1"/>
-            </a:fontRef>
-          </p:style>
-          <p:txBody>
-            <a:bodyPr lIns="0" tIns="0" rIns="0" bIns="0" rtlCol="0" anchor="ctr"/>
-            <a:lstStyle/>
-            <a:p>
-              <a:pPr algn="ctr"/>
-              <a:r>
-                <a:rPr kumimoji="1" lang="ja-JP" altLang="en-US" sz="800" dirty="0">
-                  <a:solidFill>
-                    <a:schemeClr val="tx1"/>
-                  </a:solidFill>
-                  <a:latin typeface="UD デジタル 教科書体 NP-R" panose="02020400000000000000" pitchFamily="18" charset="-128"/>
-                  <a:ea typeface="UD デジタル 教科書体 NP-R" panose="02020400000000000000" pitchFamily="18" charset="-128"/>
-                </a:rPr>
-                <a:t>秋田大学</a:t>
-              </a:r>
-              <a:endParaRPr kumimoji="1" lang="en-US" altLang="ja-JP" sz="800" dirty="0">
-                <a:solidFill>
-                  <a:schemeClr val="tx1"/>
-                </a:solidFill>
-                <a:latin typeface="UD デジタル 教科書体 NP-R" panose="02020400000000000000" pitchFamily="18" charset="-128"/>
-                <a:ea typeface="UD デジタル 教科書体 NP-R" panose="02020400000000000000" pitchFamily="18" charset="-128"/>
-              </a:endParaRPr>
-            </a:p>
-          </p:txBody>
-        </p:sp>
-      </p:grpSp>
-      <p:grpSp>
-        <p:nvGrpSpPr>
-          <p:cNvPr id="12" name="グループ化 11">
-            <a:extLst>
-              <a:ext uri="{FF2B5EF4-FFF2-40B4-BE49-F238E27FC236}">
-                <a16:creationId xmlns:a16="http://schemas.microsoft.com/office/drawing/2014/main" id="{9C509106-D2CD-8961-4B07-A4C723F46777}"/>
-              </a:ext>
-            </a:extLst>
-          </p:cNvPr>
-          <p:cNvGrpSpPr/>
-          <p:nvPr/>
-        </p:nvGrpSpPr>
-        <p:grpSpPr>
-          <a:xfrm>
-            <a:off x="1807449" y="499856"/>
-            <a:ext cx="1240551" cy="1240551"/>
-            <a:chOff x="1007265" y="2577396"/>
-            <a:chExt cx="962823" cy="928507"/>
-          </a:xfrm>
-        </p:grpSpPr>
-        <p:sp>
-          <p:nvSpPr>
-            <p:cNvPr id="13" name="四角形: 角を丸くする 12">
-              <a:extLst>
-                <a:ext uri="{FF2B5EF4-FFF2-40B4-BE49-F238E27FC236}">
-                  <a16:creationId xmlns:a16="http://schemas.microsoft.com/office/drawing/2014/main" id="{C4A5E4F1-7C7C-6FA2-8A74-53EEB19C1658}"/>
-                </a:ext>
-              </a:extLst>
-            </p:cNvPr>
-            <p:cNvSpPr/>
-            <p:nvPr/>
-          </p:nvSpPr>
-          <p:spPr>
-            <a:xfrm>
-              <a:off x="1007265" y="2577396"/>
-              <a:ext cx="962823" cy="928507"/>
-            </a:xfrm>
-            <a:prstGeom prst="roundRect">
-              <a:avLst>
-                <a:gd name="adj" fmla="val 6665"/>
-              </a:avLst>
-            </a:prstGeom>
-            <a:solidFill>
-              <a:schemeClr val="bg1"/>
-            </a:solidFill>
-            <a:ln>
-              <a:noFill/>
-            </a:ln>
-          </p:spPr>
-          <p:style>
-            <a:lnRef idx="2">
-              <a:schemeClr val="accent1">
-                <a:shade val="15000"/>
-              </a:schemeClr>
-            </a:lnRef>
-            <a:fillRef idx="1">
-              <a:schemeClr val="accent1"/>
-            </a:fillRef>
-            <a:effectRef idx="0">
-              <a:schemeClr val="accent1"/>
-            </a:effectRef>
-            <a:fontRef idx="minor">
-              <a:schemeClr val="lt1"/>
-            </a:fontRef>
-          </p:style>
-          <p:txBody>
-            <a:bodyPr rtlCol="0" anchor="ctr"/>
-            <a:lstStyle/>
-            <a:p>
-              <a:pPr algn="ctr"/>
-              <a:endParaRPr kumimoji="1" lang="ja-JP" altLang="en-US"/>
-            </a:p>
-          </p:txBody>
-        </p:sp>
-        <p:pic>
-          <p:nvPicPr>
-            <p:cNvPr id="15" name="図 14" descr="QR コード&#10;&#10;AI 生成コンテンツは誤りを含む可能性があります。">
-              <a:extLst>
-                <a:ext uri="{FF2B5EF4-FFF2-40B4-BE49-F238E27FC236}">
-                  <a16:creationId xmlns:a16="http://schemas.microsoft.com/office/drawing/2014/main" id="{D7E6DFBA-8BD9-FD59-E499-1D11269B7EA2}"/>
-                </a:ext>
-              </a:extLst>
-            </p:cNvPr>
-            <p:cNvPicPr>
-              <a:picLocks noChangeAspect="1"/>
-            </p:cNvPicPr>
-            <p:nvPr/>
-          </p:nvPicPr>
-          <p:blipFill>
-            <a:blip r:embed="rId5"/>
-            <a:stretch>
-              <a:fillRect/>
-            </a:stretch>
-          </p:blipFill>
-          <p:spPr>
-            <a:xfrm>
-              <a:off x="1042659" y="2598008"/>
-              <a:ext cx="883492" cy="878787"/>
-            </a:xfrm>
-            <a:prstGeom prst="rect">
-              <a:avLst/>
-            </a:prstGeom>
-          </p:spPr>
-        </p:pic>
-      </p:grpSp>
-    </p:spTree>
-    <p:extLst>
-      <p:ext uri="{BB962C8B-B14F-4D97-AF65-F5344CB8AC3E}">
-        <p14:creationId xmlns:p14="http://schemas.microsoft.com/office/powerpoint/2010/main" val="171924987"/>
-      </p:ext>
-    </p:extLst>
-  </p:cSld>
-  <p:clrMapOvr>
-    <a:masterClrMapping/>
-  </p:clrMapOvr>
-</p:sld>
-</file>
-
 <file path=ppt/theme/theme1.xml><?xml version="1.0" encoding="utf-8"?>
 <a:theme xmlns:a="http://schemas.openxmlformats.org/drawingml/2006/main" name="Office テーマ">
   <a:themeElements>
